--- a/CoworkPlaybook/Cowork_教育訓練簡報_零售通路版.pptx
+++ b/CoworkPlaybook/Cowork_教育訓練簡報_零售通路版.pptx
@@ -4540,12 +4540,20 @@
           </a:effectLst>
         </p:spPr>
       </p:sp>
-      <p:sp>
-        <p:nvSpPr>
-          <p:cNvPr id="6" name="Text 4"/>
-          <p:cNvSpPr/>
-          <p:nvPr/>
-        </p:nvSpPr>
+      <p:pic>
+        <p:nvPicPr>
+          <p:cNvPr id="6" name="Image 0" descr="C:\temp\CoworkLab\v2\_working\screenshots\ret2_01_kickoff.png">    </p:cNvPr>
+          <p:cNvPicPr>
+            <a:picLocks noChangeAspect="1"/>
+          </p:cNvPicPr>
+          <p:nvPr/>
+        </p:nvPicPr>
+        <p:blipFill>
+          <a:blip r:embed="rId1"/>
+          <a:stretch>
+            <a:fillRect/>
+          </a:stretch>
+        </p:blipFill>
         <p:spPr>
           <a:xfrm>
             <a:off x="640080" y="1828800"/>
@@ -4554,34 +4562,11 @@
           <a:prstGeom prst="rect">
             <a:avLst/>
           </a:prstGeom>
-          <a:noFill/>
-          <a:ln/>
-        </p:spPr>
-        <p:txBody>
-          <a:bodyPr wrap="square" rtlCol="0" anchor="ctr"/>
-          <a:lstStyle/>
-          <a:p>
-            <a:pPr algn="ctr" indent="0" marL="0">
-              <a:buNone/>
-            </a:pPr>
-            <a:r>
-              <a:rPr lang="en-US" sz="1500" dirty="0">
-                <a:solidFill>
-                  <a:srgbClr val="5B6079"/>
-                </a:solidFill>
-                <a:latin typeface="Microsoft JhengHei" pitchFamily="34" charset="0"/>
-                <a:ea typeface="Microsoft JhengHei" pitchFamily="34" charset="-122"/>
-                <a:cs typeface="Microsoft JhengHei" pitchFamily="34" charset="-120"/>
-              </a:rPr>
-              <a:t>實機截圖待補</a:t>
-            </a:r>
-            <a:endParaRPr lang="en-US" sz="1500" dirty="0"/>
-          </a:p>
-        </p:txBody>
-      </p:sp>
-      <p:sp>
-        <p:nvSpPr>
-          <p:cNvPr id="7" name="Text 5"/>
+        </p:spPr>
+      </p:pic>
+      <p:sp>
+        <p:nvSpPr>
+          <p:cNvPr id="7" name="Text 4"/>
           <p:cNvSpPr/>
           <p:nvPr/>
         </p:nvSpPr>
@@ -4620,7 +4605,7 @@
       </p:sp>
       <p:sp>
         <p:nvSpPr>
-          <p:cNvPr id="8" name="Shape 6"/>
+          <p:cNvPr id="8" name="Shape 5"/>
           <p:cNvSpPr/>
           <p:nvPr/>
         </p:nvSpPr>
@@ -4650,12 +4635,20 @@
           </a:effectLst>
         </p:spPr>
       </p:sp>
-      <p:sp>
-        <p:nvSpPr>
-          <p:cNvPr id="9" name="Text 7"/>
-          <p:cNvSpPr/>
-          <p:nvPr/>
-        </p:nvSpPr>
+      <p:pic>
+        <p:nvPicPr>
+          <p:cNvPr id="9" name="Image 1" descr="C:\temp\CoworkLab\v2\_working\screenshots\ret2_04_download.png">    </p:cNvPr>
+          <p:cNvPicPr>
+            <a:picLocks noChangeAspect="1"/>
+          </p:cNvPicPr>
+          <p:nvPr/>
+        </p:nvPicPr>
+        <p:blipFill>
+          <a:blip r:embed="rId2"/>
+          <a:stretch>
+            <a:fillRect/>
+          </a:stretch>
+        </p:blipFill>
         <p:spPr>
           <a:xfrm>
             <a:off x="6217920" y="1828800"/>
@@ -4664,34 +4657,11 @@
           <a:prstGeom prst="rect">
             <a:avLst/>
           </a:prstGeom>
-          <a:noFill/>
-          <a:ln/>
-        </p:spPr>
-        <p:txBody>
-          <a:bodyPr wrap="square" rtlCol="0" anchor="ctr"/>
-          <a:lstStyle/>
-          <a:p>
-            <a:pPr algn="ctr" indent="0" marL="0">
-              <a:buNone/>
-            </a:pPr>
-            <a:r>
-              <a:rPr lang="en-US" sz="1500" dirty="0">
-                <a:solidFill>
-                  <a:srgbClr val="5B6079"/>
-                </a:solidFill>
-                <a:latin typeface="Microsoft JhengHei" pitchFamily="34" charset="0"/>
-                <a:ea typeface="Microsoft JhengHei" pitchFamily="34" charset="-122"/>
-                <a:cs typeface="Microsoft JhengHei" pitchFamily="34" charset="-120"/>
-              </a:rPr>
-              <a:t>實機截圖待補</a:t>
-            </a:r>
-            <a:endParaRPr lang="en-US" sz="1500" dirty="0"/>
-          </a:p>
-        </p:txBody>
-      </p:sp>
-      <p:sp>
-        <p:nvSpPr>
-          <p:cNvPr id="10" name="Text 8"/>
+        </p:spPr>
+      </p:pic>
+      <p:sp>
+        <p:nvSpPr>
+          <p:cNvPr id="10" name="Text 6"/>
           <p:cNvSpPr/>
           <p:nvPr/>
         </p:nvSpPr>
@@ -4730,7 +4700,7 @@
       </p:sp>
       <p:sp>
         <p:nvSpPr>
-          <p:cNvPr id="11" name="Shape 9"/>
+          <p:cNvPr id="11" name="Shape 7"/>
           <p:cNvSpPr/>
           <p:nvPr/>
         </p:nvSpPr>
@@ -4755,7 +4725,7 @@
       </p:sp>
       <p:sp>
         <p:nvSpPr>
-          <p:cNvPr id="12" name="Shape 10"/>
+          <p:cNvPr id="12" name="Shape 8"/>
           <p:cNvSpPr/>
           <p:nvPr/>
         </p:nvSpPr>
@@ -4775,7 +4745,7 @@
       </p:sp>
       <p:sp>
         <p:nvSpPr>
-          <p:cNvPr id="13" name="Text 11"/>
+          <p:cNvPr id="13" name="Text 9"/>
           <p:cNvSpPr/>
           <p:nvPr/>
         </p:nvSpPr>
@@ -4814,133 +4784,7 @@
       </p:sp>
       <p:pic>
         <p:nvPicPr>
-          <p:cNvPr id="14" name="Image 0" descr="preencoded.png">    </p:cNvPr>
-          <p:cNvPicPr>
-            <a:picLocks noChangeAspect="1"/>
-          </p:cNvPicPr>
-          <p:nvPr/>
-        </p:nvPicPr>
-        <p:blipFill>
-          <a:blip r:embed="rId1"/>
-          <a:stretch>
-            <a:fillRect/>
-          </a:stretch>
-        </p:blipFill>
-        <p:spPr>
-          <a:xfrm>
-            <a:off x="2834640" y="5221224"/>
-            <a:ext cx="182880" cy="182880"/>
-          </a:xfrm>
-          <a:prstGeom prst="rect">
-            <a:avLst/>
-          </a:prstGeom>
-        </p:spPr>
-      </p:pic>
-      <p:sp>
-        <p:nvSpPr>
-          <p:cNvPr id="15" name="Text 12"/>
-          <p:cNvSpPr/>
-          <p:nvPr/>
-        </p:nvSpPr>
-        <p:spPr>
-          <a:xfrm>
-            <a:off x="3108960" y="5166360"/>
-            <a:ext cx="8168335" cy="310896"/>
-          </a:xfrm>
-          <a:prstGeom prst="rect">
-            <a:avLst/>
-          </a:prstGeom>
-          <a:noFill/>
-          <a:ln/>
-        </p:spPr>
-        <p:txBody>
-          <a:bodyPr wrap="square" rtlCol="0" anchor="ctr"/>
-          <a:lstStyle/>
-          <a:p>
-            <a:pPr indent="0" marL="0">
-              <a:buNone/>
-            </a:pPr>
-            <a:r>
-              <a:rPr lang="en-US" sz="1300" dirty="0">
-                <a:solidFill>
-                  <a:srgbClr val="1E2235"/>
-                </a:solidFill>
-                <a:latin typeface="Microsoft JhengHei" pitchFamily="34" charset="0"/>
-                <a:ea typeface="Microsoft JhengHei" pitchFamily="34" charset="-122"/>
-                <a:cs typeface="Microsoft JhengHei" pitchFamily="34" charset="-120"/>
-              </a:rPr>
-              <a:t>四份交付物都已產出，且格式正確（Word 企劃書、Excel 試算表、PDF 單張 SOP、Email 草稿）</a:t>
-            </a:r>
-            <a:endParaRPr lang="en-US" sz="1300" dirty="0"/>
-          </a:p>
-        </p:txBody>
-      </p:sp>
-      <p:pic>
-        <p:nvPicPr>
-          <p:cNvPr id="16" name="Image 1" descr="preencoded.png">    </p:cNvPr>
-          <p:cNvPicPr>
-            <a:picLocks noChangeAspect="1"/>
-          </p:cNvPicPr>
-          <p:nvPr/>
-        </p:nvPicPr>
-        <p:blipFill>
-          <a:blip r:embed="rId2"/>
-          <a:stretch>
-            <a:fillRect/>
-          </a:stretch>
-        </p:blipFill>
-        <p:spPr>
-          <a:xfrm>
-            <a:off x="2834640" y="5559552"/>
-            <a:ext cx="182880" cy="182880"/>
-          </a:xfrm>
-          <a:prstGeom prst="rect">
-            <a:avLst/>
-          </a:prstGeom>
-        </p:spPr>
-      </p:pic>
-      <p:sp>
-        <p:nvSpPr>
-          <p:cNvPr id="17" name="Text 13"/>
-          <p:cNvSpPr/>
-          <p:nvPr/>
-        </p:nvSpPr>
-        <p:spPr>
-          <a:xfrm>
-            <a:off x="3108960" y="5504688"/>
-            <a:ext cx="8168335" cy="310896"/>
-          </a:xfrm>
-          <a:prstGeom prst="rect">
-            <a:avLst/>
-          </a:prstGeom>
-          <a:noFill/>
-          <a:ln/>
-        </p:spPr>
-        <p:txBody>
-          <a:bodyPr wrap="square" rtlCol="0" anchor="ctr"/>
-          <a:lstStyle/>
-          <a:p>
-            <a:pPr indent="0" marL="0">
-              <a:buNone/>
-            </a:pPr>
-            <a:r>
-              <a:rPr lang="en-US" sz="1300" dirty="0">
-                <a:solidFill>
-                  <a:srgbClr val="1E2235"/>
-                </a:solidFill>
-                <a:latin typeface="Microsoft JhengHei" pitchFamily="34" charset="0"/>
-                <a:ea typeface="Microsoft JhengHei" pitchFamily="34" charset="-122"/>
-                <a:cs typeface="Microsoft JhengHei" pitchFamily="34" charset="-120"/>
-              </a:rPr>
-              <a:t>Excel 試算表的整體毛利率確實守住 32%，且逐品項折後售價未低於成本 1.25 倍</a:t>
-            </a:r>
-            <a:endParaRPr lang="en-US" sz="1300" dirty="0"/>
-          </a:p>
-        </p:txBody>
-      </p:sp>
-      <p:pic>
-        <p:nvPicPr>
-          <p:cNvPr id="18" name="Image 2" descr="preencoded.png">    </p:cNvPr>
+          <p:cNvPr id="14" name="Image 2" descr="preencoded.png">    </p:cNvPr>
           <p:cNvPicPr>
             <a:picLocks noChangeAspect="1"/>
           </p:cNvPicPr>
@@ -4954,6 +4798,132 @@
         </p:blipFill>
         <p:spPr>
           <a:xfrm>
+            <a:off x="2834640" y="5221224"/>
+            <a:ext cx="182880" cy="182880"/>
+          </a:xfrm>
+          <a:prstGeom prst="rect">
+            <a:avLst/>
+          </a:prstGeom>
+        </p:spPr>
+      </p:pic>
+      <p:sp>
+        <p:nvSpPr>
+          <p:cNvPr id="15" name="Text 10"/>
+          <p:cNvSpPr/>
+          <p:nvPr/>
+        </p:nvSpPr>
+        <p:spPr>
+          <a:xfrm>
+            <a:off x="3108960" y="5166360"/>
+            <a:ext cx="8168335" cy="310896"/>
+          </a:xfrm>
+          <a:prstGeom prst="rect">
+            <a:avLst/>
+          </a:prstGeom>
+          <a:noFill/>
+          <a:ln/>
+        </p:spPr>
+        <p:txBody>
+          <a:bodyPr wrap="square" rtlCol="0" anchor="ctr"/>
+          <a:lstStyle/>
+          <a:p>
+            <a:pPr indent="0" marL="0">
+              <a:buNone/>
+            </a:pPr>
+            <a:r>
+              <a:rPr lang="en-US" sz="1300" dirty="0">
+                <a:solidFill>
+                  <a:srgbClr val="1E2235"/>
+                </a:solidFill>
+                <a:latin typeface="Microsoft JhengHei" pitchFamily="34" charset="0"/>
+                <a:ea typeface="Microsoft JhengHei" pitchFamily="34" charset="-122"/>
+                <a:cs typeface="Microsoft JhengHei" pitchFamily="34" charset="-120"/>
+              </a:rPr>
+              <a:t>四份交付物都已產出，且格式正確（Word 企劃書、Excel 試算表、PDF 單張 SOP、Email 草稿）</a:t>
+            </a:r>
+            <a:endParaRPr lang="en-US" sz="1300" dirty="0"/>
+          </a:p>
+        </p:txBody>
+      </p:sp>
+      <p:pic>
+        <p:nvPicPr>
+          <p:cNvPr id="16" name="Image 3" descr="preencoded.png">    </p:cNvPr>
+          <p:cNvPicPr>
+            <a:picLocks noChangeAspect="1"/>
+          </p:cNvPicPr>
+          <p:nvPr/>
+        </p:nvPicPr>
+        <p:blipFill>
+          <a:blip r:embed="rId4"/>
+          <a:stretch>
+            <a:fillRect/>
+          </a:stretch>
+        </p:blipFill>
+        <p:spPr>
+          <a:xfrm>
+            <a:off x="2834640" y="5559552"/>
+            <a:ext cx="182880" cy="182880"/>
+          </a:xfrm>
+          <a:prstGeom prst="rect">
+            <a:avLst/>
+          </a:prstGeom>
+        </p:spPr>
+      </p:pic>
+      <p:sp>
+        <p:nvSpPr>
+          <p:cNvPr id="17" name="Text 11"/>
+          <p:cNvSpPr/>
+          <p:nvPr/>
+        </p:nvSpPr>
+        <p:spPr>
+          <a:xfrm>
+            <a:off x="3108960" y="5504688"/>
+            <a:ext cx="8168335" cy="310896"/>
+          </a:xfrm>
+          <a:prstGeom prst="rect">
+            <a:avLst/>
+          </a:prstGeom>
+          <a:noFill/>
+          <a:ln/>
+        </p:spPr>
+        <p:txBody>
+          <a:bodyPr wrap="square" rtlCol="0" anchor="ctr"/>
+          <a:lstStyle/>
+          <a:p>
+            <a:pPr indent="0" marL="0">
+              <a:buNone/>
+            </a:pPr>
+            <a:r>
+              <a:rPr lang="en-US" sz="1300" dirty="0">
+                <a:solidFill>
+                  <a:srgbClr val="1E2235"/>
+                </a:solidFill>
+                <a:latin typeface="Microsoft JhengHei" pitchFamily="34" charset="0"/>
+                <a:ea typeface="Microsoft JhengHei" pitchFamily="34" charset="-122"/>
+                <a:cs typeface="Microsoft JhengHei" pitchFamily="34" charset="-120"/>
+              </a:rPr>
+              <a:t>Excel 試算表的整體毛利率確實守住 32%，且逐品項折後售價未低於成本 1.25 倍</a:t>
+            </a:r>
+            <a:endParaRPr lang="en-US" sz="1300" dirty="0"/>
+          </a:p>
+        </p:txBody>
+      </p:sp>
+      <p:pic>
+        <p:nvPicPr>
+          <p:cNvPr id="18" name="Image 4" descr="preencoded.png">    </p:cNvPr>
+          <p:cNvPicPr>
+            <a:picLocks noChangeAspect="1"/>
+          </p:cNvPicPr>
+          <p:nvPr/>
+        </p:nvPicPr>
+        <p:blipFill>
+          <a:blip r:embed="rId5"/>
+          <a:stretch>
+            <a:fillRect/>
+          </a:stretch>
+        </p:blipFill>
+        <p:spPr>
+          <a:xfrm>
             <a:off x="2834640" y="5897880"/>
             <a:ext cx="182880" cy="182880"/>
           </a:xfrm>
@@ -4964,7 +4934,7 @@
       </p:pic>
       <p:sp>
         <p:nvSpPr>
-          <p:cNvPr id="19" name="Text 14"/>
+          <p:cNvPr id="19" name="Text 12"/>
           <p:cNvSpPr/>
           <p:nvPr/>
         </p:nvSpPr>
@@ -5003,7 +4973,7 @@
       </p:sp>
       <p:sp>
         <p:nvSpPr>
-          <p:cNvPr id="20" name="Text 15"/>
+          <p:cNvPr id="20" name="Text 13"/>
           <p:cNvSpPr/>
           <p:nvPr/>
         </p:nvSpPr>
@@ -5042,7 +5012,7 @@
       </p:sp>
       <p:sp>
         <p:nvSpPr>
-          <p:cNvPr id="21" name="Text 16"/>
+          <p:cNvPr id="21" name="Text 14"/>
           <p:cNvSpPr/>
           <p:nvPr/>
         </p:nvSpPr>
@@ -10643,7 +10613,7 @@
                 <a:ea typeface="Microsoft JhengHei" pitchFamily="34" charset="-122"/>
                 <a:cs typeface="Microsoft JhengHei" pitchFamily="34" charset="-120"/>
               </a:rPr>
-              <a:t>周明翰的兩份到期日相近合約被合併為一場會議，符合合併規則</a:t>
+              <a:t>黃柏翰的兩份到期日相近合約被合併為一場會議，符合合併規則</a:t>
             </a:r>
             <a:endParaRPr lang="en-US" sz="1300" dirty="0"/>
           </a:p>
@@ -23253,12 +23223,20 @@
           </a:effectLst>
         </p:spPr>
       </p:sp>
-      <p:sp>
-        <p:nvSpPr>
-          <p:cNvPr id="6" name="Text 4"/>
-          <p:cNvSpPr/>
-          <p:nvPr/>
-        </p:nvSpPr>
+      <p:pic>
+        <p:nvPicPr>
+          <p:cNvPr id="6" name="Image 0" descr="C:\temp\CoworkLab\v2\_working\screenshots\ret1_01_input.png">    </p:cNvPr>
+          <p:cNvPicPr>
+            <a:picLocks noChangeAspect="1"/>
+          </p:cNvPicPr>
+          <p:nvPr/>
+        </p:nvPicPr>
+        <p:blipFill>
+          <a:blip r:embed="rId1"/>
+          <a:stretch>
+            <a:fillRect/>
+          </a:stretch>
+        </p:blipFill>
         <p:spPr>
           <a:xfrm>
             <a:off x="640080" y="1828800"/>
@@ -23267,34 +23245,11 @@
           <a:prstGeom prst="rect">
             <a:avLst/>
           </a:prstGeom>
-          <a:noFill/>
-          <a:ln/>
-        </p:spPr>
-        <p:txBody>
-          <a:bodyPr wrap="square" rtlCol="0" anchor="ctr"/>
-          <a:lstStyle/>
-          <a:p>
-            <a:pPr algn="ctr" indent="0" marL="0">
-              <a:buNone/>
-            </a:pPr>
-            <a:r>
-              <a:rPr lang="en-US" sz="1500" dirty="0">
-                <a:solidFill>
-                  <a:srgbClr val="5B6079"/>
-                </a:solidFill>
-                <a:latin typeface="Microsoft JhengHei" pitchFamily="34" charset="0"/>
-                <a:ea typeface="Microsoft JhengHei" pitchFamily="34" charset="-122"/>
-                <a:cs typeface="Microsoft JhengHei" pitchFamily="34" charset="-120"/>
-              </a:rPr>
-              <a:t>實機截圖待補</a:t>
-            </a:r>
-            <a:endParaRPr lang="en-US" sz="1500" dirty="0"/>
-          </a:p>
-        </p:txBody>
-      </p:sp>
-      <p:sp>
-        <p:nvSpPr>
-          <p:cNvPr id="7" name="Text 5"/>
+        </p:spPr>
+      </p:pic>
+      <p:sp>
+        <p:nvSpPr>
+          <p:cNvPr id="7" name="Text 4"/>
           <p:cNvSpPr/>
           <p:nvPr/>
         </p:nvSpPr>
@@ -23333,7 +23288,7 @@
       </p:sp>
       <p:sp>
         <p:nvSpPr>
-          <p:cNvPr id="8" name="Shape 6"/>
+          <p:cNvPr id="8" name="Shape 5"/>
           <p:cNvSpPr/>
           <p:nvPr/>
         </p:nvSpPr>
@@ -23363,12 +23318,20 @@
           </a:effectLst>
         </p:spPr>
       </p:sp>
-      <p:sp>
-        <p:nvSpPr>
-          <p:cNvPr id="9" name="Text 7"/>
-          <p:cNvSpPr/>
-          <p:nvPr/>
-        </p:nvSpPr>
+      <p:pic>
+        <p:nvPicPr>
+          <p:cNvPr id="9" name="Image 1" descr="C:\temp\CoworkLab\v2\_working\screenshots\ret1_04_approval.png">    </p:cNvPr>
+          <p:cNvPicPr>
+            <a:picLocks noChangeAspect="1"/>
+          </p:cNvPicPr>
+          <p:nvPr/>
+        </p:nvPicPr>
+        <p:blipFill>
+          <a:blip r:embed="rId2"/>
+          <a:stretch>
+            <a:fillRect/>
+          </a:stretch>
+        </p:blipFill>
         <p:spPr>
           <a:xfrm>
             <a:off x="6217920" y="1828800"/>
@@ -23377,34 +23340,11 @@
           <a:prstGeom prst="rect">
             <a:avLst/>
           </a:prstGeom>
-          <a:noFill/>
-          <a:ln/>
-        </p:spPr>
-        <p:txBody>
-          <a:bodyPr wrap="square" rtlCol="0" anchor="ctr"/>
-          <a:lstStyle/>
-          <a:p>
-            <a:pPr algn="ctr" indent="0" marL="0">
-              <a:buNone/>
-            </a:pPr>
-            <a:r>
-              <a:rPr lang="en-US" sz="1500" dirty="0">
-                <a:solidFill>
-                  <a:srgbClr val="5B6079"/>
-                </a:solidFill>
-                <a:latin typeface="Microsoft JhengHei" pitchFamily="34" charset="0"/>
-                <a:ea typeface="Microsoft JhengHei" pitchFamily="34" charset="-122"/>
-                <a:cs typeface="Microsoft JhengHei" pitchFamily="34" charset="-120"/>
-              </a:rPr>
-              <a:t>實機截圖待補</a:t>
-            </a:r>
-            <a:endParaRPr lang="en-US" sz="1500" dirty="0"/>
-          </a:p>
-        </p:txBody>
-      </p:sp>
-      <p:sp>
-        <p:nvSpPr>
-          <p:cNvPr id="10" name="Text 8"/>
+        </p:spPr>
+      </p:pic>
+      <p:sp>
+        <p:nvSpPr>
+          <p:cNvPr id="10" name="Text 6"/>
           <p:cNvSpPr/>
           <p:nvPr/>
         </p:nvSpPr>
@@ -23443,7 +23383,7 @@
       </p:sp>
       <p:sp>
         <p:nvSpPr>
-          <p:cNvPr id="11" name="Shape 9"/>
+          <p:cNvPr id="11" name="Shape 7"/>
           <p:cNvSpPr/>
           <p:nvPr/>
         </p:nvSpPr>
@@ -23468,7 +23408,7 @@
       </p:sp>
       <p:sp>
         <p:nvSpPr>
-          <p:cNvPr id="12" name="Shape 10"/>
+          <p:cNvPr id="12" name="Shape 8"/>
           <p:cNvSpPr/>
           <p:nvPr/>
         </p:nvSpPr>
@@ -23488,7 +23428,7 @@
       </p:sp>
       <p:sp>
         <p:nvSpPr>
-          <p:cNvPr id="13" name="Text 11"/>
+          <p:cNvPr id="13" name="Text 9"/>
           <p:cNvSpPr/>
           <p:nvPr/>
         </p:nvSpPr>
@@ -23527,133 +23467,7 @@
       </p:sp>
       <p:pic>
         <p:nvPicPr>
-          <p:cNvPr id="14" name="Image 0" descr="preencoded.png">    </p:cNvPr>
-          <p:cNvPicPr>
-            <a:picLocks noChangeAspect="1"/>
-          </p:cNvPicPr>
-          <p:nvPr/>
-        </p:nvPicPr>
-        <p:blipFill>
-          <a:blip r:embed="rId1"/>
-          <a:stretch>
-            <a:fillRect/>
-          </a:stretch>
-        </p:blipFill>
-        <p:spPr>
-          <a:xfrm>
-            <a:off x="2834640" y="5221224"/>
-            <a:ext cx="182880" cy="182880"/>
-          </a:xfrm>
-          <a:prstGeom prst="rect">
-            <a:avLst/>
-          </a:prstGeom>
-        </p:spPr>
-      </p:pic>
-      <p:sp>
-        <p:nvSpPr>
-          <p:cNvPr id="15" name="Text 12"/>
-          <p:cNvSpPr/>
-          <p:nvPr/>
-        </p:nvSpPr>
-        <p:spPr>
-          <a:xfrm>
-            <a:off x="3108960" y="5166360"/>
-            <a:ext cx="8168335" cy="310896"/>
-          </a:xfrm>
-          <a:prstGeom prst="rect">
-            <a:avLst/>
-          </a:prstGeom>
-          <a:noFill/>
-          <a:ln/>
-        </p:spPr>
-        <p:txBody>
-          <a:bodyPr wrap="square" rtlCol="0" anchor="ctr"/>
-          <a:lstStyle/>
-          <a:p>
-            <a:pPr indent="0" marL="0">
-              <a:buNone/>
-            </a:pPr>
-            <a:r>
-              <a:rPr lang="en-US" sz="1300" dirty="0">
-                <a:solidFill>
-                  <a:srgbClr val="1E2235"/>
-                </a:solidFill>
-                <a:latin typeface="Microsoft JhengHei" pitchFamily="34" charset="0"/>
-                <a:ea typeface="Microsoft JhengHei" pitchFamily="34" charset="-122"/>
-                <a:cs typeface="Microsoft JhengHei" pitchFamily="34" charset="-120"/>
-              </a:rPr>
-              <a:t>達成率、客單價、退貨率的計算與原始數據一致，桃園中壢店被正確標為嚴重落後</a:t>
-            </a:r>
-            <a:endParaRPr lang="en-US" sz="1300" dirty="0"/>
-          </a:p>
-        </p:txBody>
-      </p:sp>
-      <p:pic>
-        <p:nvPicPr>
-          <p:cNvPr id="16" name="Image 1" descr="preencoded.png">    </p:cNvPr>
-          <p:cNvPicPr>
-            <a:picLocks noChangeAspect="1"/>
-          </p:cNvPicPr>
-          <p:nvPr/>
-        </p:nvPicPr>
-        <p:blipFill>
-          <a:blip r:embed="rId2"/>
-          <a:stretch>
-            <a:fillRect/>
-          </a:stretch>
-        </p:blipFill>
-        <p:spPr>
-          <a:xfrm>
-            <a:off x="2834640" y="5559552"/>
-            <a:ext cx="182880" cy="182880"/>
-          </a:xfrm>
-          <a:prstGeom prst="rect">
-            <a:avLst/>
-          </a:prstGeom>
-        </p:spPr>
-      </p:pic>
-      <p:sp>
-        <p:nvSpPr>
-          <p:cNvPr id="17" name="Text 13"/>
-          <p:cNvSpPr/>
-          <p:nvPr/>
-        </p:nvSpPr>
-        <p:spPr>
-          <a:xfrm>
-            <a:off x="3108960" y="5504688"/>
-            <a:ext cx="8168335" cy="310896"/>
-          </a:xfrm>
-          <a:prstGeom prst="rect">
-            <a:avLst/>
-          </a:prstGeom>
-          <a:noFill/>
-          <a:ln/>
-        </p:spPr>
-        <p:txBody>
-          <a:bodyPr wrap="square" rtlCol="0" anchor="ctr"/>
-          <a:lstStyle/>
-          <a:p>
-            <a:pPr indent="0" marL="0">
-              <a:buNone/>
-            </a:pPr>
-            <a:r>
-              <a:rPr lang="en-US" sz="1300" dirty="0">
-                <a:solidFill>
-                  <a:srgbClr val="1E2235"/>
-                </a:solidFill>
-                <a:latin typeface="Microsoft JhengHei" pitchFamily="34" charset="0"/>
-                <a:ea typeface="Microsoft JhengHei" pitchFamily="34" charset="-122"/>
-                <a:cs typeface="Microsoft JhengHei" pitchFamily="34" charset="-120"/>
-              </a:rPr>
-              <a:t>高雄左營店被標示為客流結構異動，而不是被當成業績亮眼的門市</a:t>
-            </a:r>
-            <a:endParaRPr lang="en-US" sz="1300" dirty="0"/>
-          </a:p>
-        </p:txBody>
-      </p:sp>
-      <p:pic>
-        <p:nvPicPr>
-          <p:cNvPr id="18" name="Image 2" descr="preencoded.png">    </p:cNvPr>
+          <p:cNvPr id="14" name="Image 2" descr="preencoded.png">    </p:cNvPr>
           <p:cNvPicPr>
             <a:picLocks noChangeAspect="1"/>
           </p:cNvPicPr>
@@ -23667,6 +23481,132 @@
         </p:blipFill>
         <p:spPr>
           <a:xfrm>
+            <a:off x="2834640" y="5221224"/>
+            <a:ext cx="182880" cy="182880"/>
+          </a:xfrm>
+          <a:prstGeom prst="rect">
+            <a:avLst/>
+          </a:prstGeom>
+        </p:spPr>
+      </p:pic>
+      <p:sp>
+        <p:nvSpPr>
+          <p:cNvPr id="15" name="Text 10"/>
+          <p:cNvSpPr/>
+          <p:nvPr/>
+        </p:nvSpPr>
+        <p:spPr>
+          <a:xfrm>
+            <a:off x="3108960" y="5166360"/>
+            <a:ext cx="8168335" cy="310896"/>
+          </a:xfrm>
+          <a:prstGeom prst="rect">
+            <a:avLst/>
+          </a:prstGeom>
+          <a:noFill/>
+          <a:ln/>
+        </p:spPr>
+        <p:txBody>
+          <a:bodyPr wrap="square" rtlCol="0" anchor="ctr"/>
+          <a:lstStyle/>
+          <a:p>
+            <a:pPr indent="0" marL="0">
+              <a:buNone/>
+            </a:pPr>
+            <a:r>
+              <a:rPr lang="en-US" sz="1300" dirty="0">
+                <a:solidFill>
+                  <a:srgbClr val="1E2235"/>
+                </a:solidFill>
+                <a:latin typeface="Microsoft JhengHei" pitchFamily="34" charset="0"/>
+                <a:ea typeface="Microsoft JhengHei" pitchFamily="34" charset="-122"/>
+                <a:cs typeface="Microsoft JhengHei" pitchFamily="34" charset="-120"/>
+              </a:rPr>
+              <a:t>達成率、客單價、退貨率的計算與原始數據一致，桃園中壢店被正確標為嚴重落後</a:t>
+            </a:r>
+            <a:endParaRPr lang="en-US" sz="1300" dirty="0"/>
+          </a:p>
+        </p:txBody>
+      </p:sp>
+      <p:pic>
+        <p:nvPicPr>
+          <p:cNvPr id="16" name="Image 3" descr="preencoded.png">    </p:cNvPr>
+          <p:cNvPicPr>
+            <a:picLocks noChangeAspect="1"/>
+          </p:cNvPicPr>
+          <p:nvPr/>
+        </p:nvPicPr>
+        <p:blipFill>
+          <a:blip r:embed="rId4"/>
+          <a:stretch>
+            <a:fillRect/>
+          </a:stretch>
+        </p:blipFill>
+        <p:spPr>
+          <a:xfrm>
+            <a:off x="2834640" y="5559552"/>
+            <a:ext cx="182880" cy="182880"/>
+          </a:xfrm>
+          <a:prstGeom prst="rect">
+            <a:avLst/>
+          </a:prstGeom>
+        </p:spPr>
+      </p:pic>
+      <p:sp>
+        <p:nvSpPr>
+          <p:cNvPr id="17" name="Text 11"/>
+          <p:cNvSpPr/>
+          <p:nvPr/>
+        </p:nvSpPr>
+        <p:spPr>
+          <a:xfrm>
+            <a:off x="3108960" y="5504688"/>
+            <a:ext cx="8168335" cy="310896"/>
+          </a:xfrm>
+          <a:prstGeom prst="rect">
+            <a:avLst/>
+          </a:prstGeom>
+          <a:noFill/>
+          <a:ln/>
+        </p:spPr>
+        <p:txBody>
+          <a:bodyPr wrap="square" rtlCol="0" anchor="ctr"/>
+          <a:lstStyle/>
+          <a:p>
+            <a:pPr indent="0" marL="0">
+              <a:buNone/>
+            </a:pPr>
+            <a:r>
+              <a:rPr lang="en-US" sz="1300" dirty="0">
+                <a:solidFill>
+                  <a:srgbClr val="1E2235"/>
+                </a:solidFill>
+                <a:latin typeface="Microsoft JhengHei" pitchFamily="34" charset="0"/>
+                <a:ea typeface="Microsoft JhengHei" pitchFamily="34" charset="-122"/>
+                <a:cs typeface="Microsoft JhengHei" pitchFamily="34" charset="-120"/>
+              </a:rPr>
+              <a:t>高雄左營店未被含糊帶過：不論標為臨界觀察或客流結構異動，都要說明來客成長與客單價偏離的具體數字</a:t>
+            </a:r>
+            <a:endParaRPr lang="en-US" sz="1300" dirty="0"/>
+          </a:p>
+        </p:txBody>
+      </p:sp>
+      <p:pic>
+        <p:nvPicPr>
+          <p:cNvPr id="18" name="Image 4" descr="preencoded.png">    </p:cNvPr>
+          <p:cNvPicPr>
+            <a:picLocks noChangeAspect="1"/>
+          </p:cNvPicPr>
+          <p:nvPr/>
+        </p:nvPicPr>
+        <p:blipFill>
+          <a:blip r:embed="rId5"/>
+          <a:stretch>
+            <a:fillRect/>
+          </a:stretch>
+        </p:blipFill>
+        <p:spPr>
+          <a:xfrm>
             <a:off x="2834640" y="5897880"/>
             <a:ext cx="182880" cy="182880"/>
           </a:xfrm>
@@ -23677,7 +23617,7 @@
       </p:pic>
       <p:sp>
         <p:nvSpPr>
-          <p:cNvPr id="19" name="Text 14"/>
+          <p:cNvPr id="19" name="Text 12"/>
           <p:cNvSpPr/>
           <p:nvPr/>
         </p:nvSpPr>
@@ -23716,7 +23656,7 @@
       </p:sp>
       <p:sp>
         <p:nvSpPr>
-          <p:cNvPr id="20" name="Text 15"/>
+          <p:cNvPr id="20" name="Text 13"/>
           <p:cNvSpPr/>
           <p:nvPr/>
         </p:nvSpPr>
@@ -23755,7 +23695,7 @@
       </p:sp>
       <p:sp>
         <p:nvSpPr>
-          <p:cNvPr id="21" name="Text 16"/>
+          <p:cNvPr id="21" name="Text 14"/>
           <p:cNvSpPr/>
           <p:nvPr/>
         </p:nvSpPr>

--- a/CoworkPlaybook/Cowork_教育訓練簡報_零售通路版.pptx
+++ b/CoworkPlaybook/Cowork_教育訓練簡報_零售通路版.pptx
@@ -3381,7 +3381,7 @@
                 <a:ea typeface="Microsoft JhengHei" pitchFamily="34" charset="-122"/>
                 <a:cs typeface="Microsoft JhengHei" pitchFamily="34" charset="-120"/>
               </a:rPr>
-              <a:t>⏱ 約 15–20 分鐘 · 難度 ★★☆</a:t>
+              <a:t>⏱ 約 20–30 分鐘 · 難度 ★★☆</a:t>
             </a:r>
             <a:endParaRPr lang="en-US" sz="1300" dirty="0"/>
           </a:p>
@@ -6413,12 +6413,20 @@
           </a:effectLst>
         </p:spPr>
       </p:sp>
-      <p:sp>
-        <p:nvSpPr>
-          <p:cNvPr id="6" name="Text 4"/>
-          <p:cNvSpPr/>
-          <p:nvPr/>
-        </p:nvSpPr>
+      <p:pic>
+        <p:nvPicPr>
+          <p:cNvPr id="6" name="Image 0" descr="C:\temp\CoworkLab\v2\_working\screenshots\ret3_01_triage.png">    </p:cNvPr>
+          <p:cNvPicPr>
+            <a:picLocks noChangeAspect="1"/>
+          </p:cNvPicPr>
+          <p:nvPr/>
+        </p:nvPicPr>
+        <p:blipFill>
+          <a:blip r:embed="rId1"/>
+          <a:stretch>
+            <a:fillRect/>
+          </a:stretch>
+        </p:blipFill>
         <p:spPr>
           <a:xfrm>
             <a:off x="640080" y="1828800"/>
@@ -6427,34 +6435,11 @@
           <a:prstGeom prst="rect">
             <a:avLst/>
           </a:prstGeom>
-          <a:noFill/>
-          <a:ln/>
-        </p:spPr>
-        <p:txBody>
-          <a:bodyPr wrap="square" rtlCol="0" anchor="ctr"/>
-          <a:lstStyle/>
-          <a:p>
-            <a:pPr algn="ctr" indent="0" marL="0">
-              <a:buNone/>
-            </a:pPr>
-            <a:r>
-              <a:rPr lang="en-US" sz="1500" dirty="0">
-                <a:solidFill>
-                  <a:srgbClr val="5B6079"/>
-                </a:solidFill>
-                <a:latin typeface="Microsoft JhengHei" pitchFamily="34" charset="0"/>
-                <a:ea typeface="Microsoft JhengHei" pitchFamily="34" charset="-122"/>
-                <a:cs typeface="Microsoft JhengHei" pitchFamily="34" charset="-120"/>
-              </a:rPr>
-              <a:t>實機截圖待補</a:t>
-            </a:r>
-            <a:endParaRPr lang="en-US" sz="1500" dirty="0"/>
-          </a:p>
-        </p:txBody>
-      </p:sp>
-      <p:sp>
-        <p:nvSpPr>
-          <p:cNvPr id="7" name="Text 5"/>
+        </p:spPr>
+      </p:pic>
+      <p:sp>
+        <p:nvSpPr>
+          <p:cNvPr id="7" name="Text 4"/>
           <p:cNvSpPr/>
           <p:nvPr/>
         </p:nvSpPr>
@@ -6493,7 +6478,7 @@
       </p:sp>
       <p:sp>
         <p:nvSpPr>
-          <p:cNvPr id="8" name="Shape 6"/>
+          <p:cNvPr id="8" name="Shape 5"/>
           <p:cNvSpPr/>
           <p:nvPr/>
         </p:nvSpPr>
@@ -6523,12 +6508,20 @@
           </a:effectLst>
         </p:spPr>
       </p:sp>
-      <p:sp>
-        <p:nvSpPr>
-          <p:cNvPr id="9" name="Text 7"/>
-          <p:cNvSpPr/>
-          <p:nvPr/>
-        </p:nvSpPr>
+      <p:pic>
+        <p:nvPicPr>
+          <p:cNvPr id="9" name="Image 1" descr="C:\temp\CoworkLab\v2\_working\screenshots\ret3_04_automations.png">    </p:cNvPr>
+          <p:cNvPicPr>
+            <a:picLocks noChangeAspect="1"/>
+          </p:cNvPicPr>
+          <p:nvPr/>
+        </p:nvPicPr>
+        <p:blipFill>
+          <a:blip r:embed="rId2"/>
+          <a:stretch>
+            <a:fillRect/>
+          </a:stretch>
+        </p:blipFill>
         <p:spPr>
           <a:xfrm>
             <a:off x="6217920" y="1828800"/>
@@ -6537,34 +6530,11 @@
           <a:prstGeom prst="rect">
             <a:avLst/>
           </a:prstGeom>
-          <a:noFill/>
-          <a:ln/>
-        </p:spPr>
-        <p:txBody>
-          <a:bodyPr wrap="square" rtlCol="0" anchor="ctr"/>
-          <a:lstStyle/>
-          <a:p>
-            <a:pPr algn="ctr" indent="0" marL="0">
-              <a:buNone/>
-            </a:pPr>
-            <a:r>
-              <a:rPr lang="en-US" sz="1500" dirty="0">
-                <a:solidFill>
-                  <a:srgbClr val="5B6079"/>
-                </a:solidFill>
-                <a:latin typeface="Microsoft JhengHei" pitchFamily="34" charset="0"/>
-                <a:ea typeface="Microsoft JhengHei" pitchFamily="34" charset="-122"/>
-                <a:cs typeface="Microsoft JhengHei" pitchFamily="34" charset="-120"/>
-              </a:rPr>
-              <a:t>實機截圖待補</a:t>
-            </a:r>
-            <a:endParaRPr lang="en-US" sz="1500" dirty="0"/>
-          </a:p>
-        </p:txBody>
-      </p:sp>
-      <p:sp>
-        <p:nvSpPr>
-          <p:cNvPr id="10" name="Text 8"/>
+        </p:spPr>
+      </p:pic>
+      <p:sp>
+        <p:nvSpPr>
+          <p:cNvPr id="10" name="Text 6"/>
           <p:cNvSpPr/>
           <p:nvPr/>
         </p:nvSpPr>
@@ -6603,7 +6573,7 @@
       </p:sp>
       <p:sp>
         <p:nvSpPr>
-          <p:cNvPr id="11" name="Shape 9"/>
+          <p:cNvPr id="11" name="Shape 7"/>
           <p:cNvSpPr/>
           <p:nvPr/>
         </p:nvSpPr>
@@ -6628,7 +6598,7 @@
       </p:sp>
       <p:sp>
         <p:nvSpPr>
-          <p:cNvPr id="12" name="Shape 10"/>
+          <p:cNvPr id="12" name="Shape 8"/>
           <p:cNvSpPr/>
           <p:nvPr/>
         </p:nvSpPr>
@@ -6648,7 +6618,7 @@
       </p:sp>
       <p:sp>
         <p:nvSpPr>
-          <p:cNvPr id="13" name="Text 11"/>
+          <p:cNvPr id="13" name="Text 9"/>
           <p:cNvSpPr/>
           <p:nvPr/>
         </p:nvSpPr>
@@ -6687,133 +6657,7 @@
       </p:sp>
       <p:pic>
         <p:nvPicPr>
-          <p:cNvPr id="14" name="Image 0" descr="preencoded.png">    </p:cNvPr>
-          <p:cNvPicPr>
-            <a:picLocks noChangeAspect="1"/>
-          </p:cNvPicPr>
-          <p:nvPr/>
-        </p:nvPicPr>
-        <p:blipFill>
-          <a:blip r:embed="rId1"/>
-          <a:stretch>
-            <a:fillRect/>
-          </a:stretch>
-        </p:blipFill>
-        <p:spPr>
-          <a:xfrm>
-            <a:off x="2834640" y="5221224"/>
-            <a:ext cx="182880" cy="182880"/>
-          </a:xfrm>
-          <a:prstGeom prst="rect">
-            <a:avLst/>
-          </a:prstGeom>
-        </p:spPr>
-      </p:pic>
-      <p:sp>
-        <p:nvSpPr>
-          <p:cNvPr id="15" name="Text 12"/>
-          <p:cNvSpPr/>
-          <p:nvPr/>
-        </p:nvSpPr>
-        <p:spPr>
-          <a:xfrm>
-            <a:off x="3108960" y="5166360"/>
-            <a:ext cx="8168335" cy="310896"/>
-          </a:xfrm>
-          <a:prstGeom prst="rect">
-            <a:avLst/>
-          </a:prstGeom>
-          <a:noFill/>
-          <a:ln/>
-        </p:spPr>
-        <p:txBody>
-          <a:bodyPr wrap="square" rtlCol="0" anchor="ctr"/>
-          <a:lstStyle/>
-          <a:p>
-            <a:pPr indent="0" marL="0">
-              <a:buNone/>
-            </a:pPr>
-            <a:r>
-              <a:rPr lang="en-US" sz="1300" dirty="0">
-                <a:solidFill>
-                  <a:srgbClr val="1E2235"/>
-                </a:solidFill>
-                <a:latin typeface="Microsoft JhengHei" pitchFamily="34" charset="0"/>
-                <a:ea typeface="Microsoft JhengHei" pitchFamily="34" charset="-122"/>
-                <a:cs typeface="Microsoft JhengHei" pitchFamily="34" charset="-120"/>
-              </a:rPr>
-              <a:t>第一封（瑕疵且逾 48 小時未回覆）被正確判定為 A 級並要求主管覆核</a:t>
-            </a:r>
-            <a:endParaRPr lang="en-US" sz="1300" dirty="0"/>
-          </a:p>
-        </p:txBody>
-      </p:sp>
-      <p:pic>
-        <p:nvPicPr>
-          <p:cNvPr id="16" name="Image 1" descr="preencoded.png">    </p:cNvPr>
-          <p:cNvPicPr>
-            <a:picLocks noChangeAspect="1"/>
-          </p:cNvPicPr>
-          <p:nvPr/>
-        </p:nvPicPr>
-        <p:blipFill>
-          <a:blip r:embed="rId2"/>
-          <a:stretch>
-            <a:fillRect/>
-          </a:stretch>
-        </p:blipFill>
-        <p:spPr>
-          <a:xfrm>
-            <a:off x="2834640" y="5559552"/>
-            <a:ext cx="182880" cy="182880"/>
-          </a:xfrm>
-          <a:prstGeom prst="rect">
-            <a:avLst/>
-          </a:prstGeom>
-        </p:spPr>
-      </p:pic>
-      <p:sp>
-        <p:nvSpPr>
-          <p:cNvPr id="17" name="Text 13"/>
-          <p:cNvSpPr/>
-          <p:nvPr/>
-        </p:nvSpPr>
-        <p:spPr>
-          <a:xfrm>
-            <a:off x="3108960" y="5504688"/>
-            <a:ext cx="8168335" cy="310896"/>
-          </a:xfrm>
-          <a:prstGeom prst="rect">
-            <a:avLst/>
-          </a:prstGeom>
-          <a:noFill/>
-          <a:ln/>
-        </p:spPr>
-        <p:txBody>
-          <a:bodyPr wrap="square" rtlCol="0" anchor="ctr"/>
-          <a:lstStyle/>
-          <a:p>
-            <a:pPr indent="0" marL="0">
-              <a:buNone/>
-            </a:pPr>
-            <a:r>
-              <a:rPr lang="en-US" sz="1300" dirty="0">
-                <a:solidFill>
-                  <a:srgbClr val="1E2235"/>
-                </a:solidFill>
-                <a:latin typeface="Microsoft JhengHei" pitchFamily="34" charset="0"/>
-                <a:ea typeface="Microsoft JhengHei" pitchFamily="34" charset="-122"/>
-                <a:cs typeface="Microsoft JhengHei" pitchFamily="34" charset="-120"/>
-              </a:rPr>
-              <a:t>第二封正確引用 P-04，說明到貨逾期可取消並全額退款，不受鑑賞期限制</a:t>
-            </a:r>
-            <a:endParaRPr lang="en-US" sz="1300" dirty="0"/>
-          </a:p>
-        </p:txBody>
-      </p:sp>
-      <p:pic>
-        <p:nvPicPr>
-          <p:cNvPr id="18" name="Image 2" descr="preencoded.png">    </p:cNvPr>
+          <p:cNvPr id="14" name="Image 2" descr="preencoded.png">    </p:cNvPr>
           <p:cNvPicPr>
             <a:picLocks noChangeAspect="1"/>
           </p:cNvPicPr>
@@ -6827,6 +6671,132 @@
         </p:blipFill>
         <p:spPr>
           <a:xfrm>
+            <a:off x="2834640" y="5221224"/>
+            <a:ext cx="182880" cy="182880"/>
+          </a:xfrm>
+          <a:prstGeom prst="rect">
+            <a:avLst/>
+          </a:prstGeom>
+        </p:spPr>
+      </p:pic>
+      <p:sp>
+        <p:nvSpPr>
+          <p:cNvPr id="15" name="Text 10"/>
+          <p:cNvSpPr/>
+          <p:nvPr/>
+        </p:nvSpPr>
+        <p:spPr>
+          <a:xfrm>
+            <a:off x="3108960" y="5166360"/>
+            <a:ext cx="8168335" cy="310896"/>
+          </a:xfrm>
+          <a:prstGeom prst="rect">
+            <a:avLst/>
+          </a:prstGeom>
+          <a:noFill/>
+          <a:ln/>
+        </p:spPr>
+        <p:txBody>
+          <a:bodyPr wrap="square" rtlCol="0" anchor="ctr"/>
+          <a:lstStyle/>
+          <a:p>
+            <a:pPr indent="0" marL="0">
+              <a:buNone/>
+            </a:pPr>
+            <a:r>
+              <a:rPr lang="en-US" sz="1300" dirty="0">
+                <a:solidFill>
+                  <a:srgbClr val="1E2235"/>
+                </a:solidFill>
+                <a:latin typeface="Microsoft JhengHei" pitchFamily="34" charset="0"/>
+                <a:ea typeface="Microsoft JhengHei" pitchFamily="34" charset="-122"/>
+                <a:cs typeface="Microsoft JhengHei" pitchFamily="34" charset="-120"/>
+              </a:rPr>
+              <a:t>第一封（瑕疵且逾 48 小時未回覆）被正確判定為 A 級並要求主管覆核</a:t>
+            </a:r>
+            <a:endParaRPr lang="en-US" sz="1300" dirty="0"/>
+          </a:p>
+        </p:txBody>
+      </p:sp>
+      <p:pic>
+        <p:nvPicPr>
+          <p:cNvPr id="16" name="Image 3" descr="preencoded.png">    </p:cNvPr>
+          <p:cNvPicPr>
+            <a:picLocks noChangeAspect="1"/>
+          </p:cNvPicPr>
+          <p:nvPr/>
+        </p:nvPicPr>
+        <p:blipFill>
+          <a:blip r:embed="rId4"/>
+          <a:stretch>
+            <a:fillRect/>
+          </a:stretch>
+        </p:blipFill>
+        <p:spPr>
+          <a:xfrm>
+            <a:off x="2834640" y="5559552"/>
+            <a:ext cx="182880" cy="182880"/>
+          </a:xfrm>
+          <a:prstGeom prst="rect">
+            <a:avLst/>
+          </a:prstGeom>
+        </p:spPr>
+      </p:pic>
+      <p:sp>
+        <p:nvSpPr>
+          <p:cNvPr id="17" name="Text 11"/>
+          <p:cNvSpPr/>
+          <p:nvPr/>
+        </p:nvSpPr>
+        <p:spPr>
+          <a:xfrm>
+            <a:off x="3108960" y="5504688"/>
+            <a:ext cx="8168335" cy="310896"/>
+          </a:xfrm>
+          <a:prstGeom prst="rect">
+            <a:avLst/>
+          </a:prstGeom>
+          <a:noFill/>
+          <a:ln/>
+        </p:spPr>
+        <p:txBody>
+          <a:bodyPr wrap="square" rtlCol="0" anchor="ctr"/>
+          <a:lstStyle/>
+          <a:p>
+            <a:pPr indent="0" marL="0">
+              <a:buNone/>
+            </a:pPr>
+            <a:r>
+              <a:rPr lang="en-US" sz="1300" dirty="0">
+                <a:solidFill>
+                  <a:srgbClr val="1E2235"/>
+                </a:solidFill>
+                <a:latin typeface="Microsoft JhengHei" pitchFamily="34" charset="0"/>
+                <a:ea typeface="Microsoft JhengHei" pitchFamily="34" charset="-122"/>
+                <a:cs typeface="Microsoft JhengHei" pitchFamily="34" charset="-120"/>
+              </a:rPr>
+              <a:t>第二封正確引用 P-04，說明到貨逾期可取消並全額退款，不受鑑賞期限制</a:t>
+            </a:r>
+            <a:endParaRPr lang="en-US" sz="1300" dirty="0"/>
+          </a:p>
+        </p:txBody>
+      </p:sp>
+      <p:pic>
+        <p:nvPicPr>
+          <p:cNvPr id="18" name="Image 4" descr="preencoded.png">    </p:cNvPr>
+          <p:cNvPicPr>
+            <a:picLocks noChangeAspect="1"/>
+          </p:cNvPicPr>
+          <p:nvPr/>
+        </p:nvPicPr>
+        <p:blipFill>
+          <a:blip r:embed="rId5"/>
+          <a:stretch>
+            <a:fillRect/>
+          </a:stretch>
+        </p:blipFill>
+        <p:spPr>
+          <a:xfrm>
             <a:off x="2834640" y="5897880"/>
             <a:ext cx="182880" cy="182880"/>
           </a:xfrm>
@@ -6837,7 +6807,7 @@
       </p:pic>
       <p:sp>
         <p:nvSpPr>
-          <p:cNvPr id="19" name="Text 14"/>
+          <p:cNvPr id="19" name="Text 12"/>
           <p:cNvSpPr/>
           <p:nvPr/>
         </p:nvSpPr>
@@ -6876,7 +6846,7 @@
       </p:sp>
       <p:sp>
         <p:nvSpPr>
-          <p:cNvPr id="20" name="Text 15"/>
+          <p:cNvPr id="20" name="Text 13"/>
           <p:cNvSpPr/>
           <p:nvPr/>
         </p:nvSpPr>
@@ -6915,7 +6885,7 @@
       </p:sp>
       <p:sp>
         <p:nvSpPr>
-          <p:cNvPr id="21" name="Text 16"/>
+          <p:cNvPr id="21" name="Text 14"/>
           <p:cNvSpPr/>
           <p:nvPr/>
         </p:nvSpPr>
@@ -7218,7 +7188,7 @@
                 <a:ea typeface="Microsoft JhengHei" pitchFamily="34" charset="-122"/>
                 <a:cs typeface="Microsoft JhengHei" pitchFamily="34" charset="-120"/>
               </a:rPr>
-              <a:t>⏱ 約 18–22 分鐘 · 難度 ★★★</a:t>
+              <a:t>⏱ 約 40–90 分鐘 · 難度 ★★★</a:t>
             </a:r>
             <a:endParaRPr lang="en-US" sz="1300" dirty="0"/>
           </a:p>
@@ -8255,12 +8225,20 @@
           </a:effectLst>
         </p:spPr>
       </p:sp>
-      <p:sp>
-        <p:nvSpPr>
-          <p:cNvPr id="6" name="Text 4"/>
-          <p:cNvSpPr/>
-          <p:nvPr/>
-        </p:nvSpPr>
+      <p:pic>
+        <p:nvPicPr>
+          <p:cNvPr id="6" name="Image 0" descr="C:\temp\CoworkLab\v2\_working\screenshots\ret4_01_research.png">    </p:cNvPr>
+          <p:cNvPicPr>
+            <a:picLocks noChangeAspect="1"/>
+          </p:cNvPicPr>
+          <p:nvPr/>
+        </p:nvPicPr>
+        <p:blipFill>
+          <a:blip r:embed="rId1"/>
+          <a:stretch>
+            <a:fillRect/>
+          </a:stretch>
+        </p:blipFill>
         <p:spPr>
           <a:xfrm>
             <a:off x="640080" y="1828800"/>
@@ -8269,34 +8247,11 @@
           <a:prstGeom prst="rect">
             <a:avLst/>
           </a:prstGeom>
-          <a:noFill/>
-          <a:ln/>
-        </p:spPr>
-        <p:txBody>
-          <a:bodyPr wrap="square" rtlCol="0" anchor="ctr"/>
-          <a:lstStyle/>
-          <a:p>
-            <a:pPr algn="ctr" indent="0" marL="0">
-              <a:buNone/>
-            </a:pPr>
-            <a:r>
-              <a:rPr lang="en-US" sz="1500" dirty="0">
-                <a:solidFill>
-                  <a:srgbClr val="5B6079"/>
-                </a:solidFill>
-                <a:latin typeface="Microsoft JhengHei" pitchFamily="34" charset="0"/>
-                <a:ea typeface="Microsoft JhengHei" pitchFamily="34" charset="-122"/>
-                <a:cs typeface="Microsoft JhengHei" pitchFamily="34" charset="-120"/>
-              </a:rPr>
-              <a:t>實機截圖待補</a:t>
-            </a:r>
-            <a:endParaRPr lang="en-US" sz="1500" dirty="0"/>
-          </a:p>
-        </p:txBody>
-      </p:sp>
-      <p:sp>
-        <p:nvSpPr>
-          <p:cNvPr id="7" name="Text 5"/>
+        </p:spPr>
+      </p:pic>
+      <p:sp>
+        <p:nvSpPr>
+          <p:cNvPr id="7" name="Text 4"/>
           <p:cNvSpPr/>
           <p:nvPr/>
         </p:nvSpPr>
@@ -8335,7 +8290,7 @@
       </p:sp>
       <p:sp>
         <p:nvSpPr>
-          <p:cNvPr id="8" name="Shape 6"/>
+          <p:cNvPr id="8" name="Shape 5"/>
           <p:cNvSpPr/>
           <p:nvPr/>
         </p:nvSpPr>
@@ -8365,12 +8320,20 @@
           </a:effectLst>
         </p:spPr>
       </p:sp>
-      <p:sp>
-        <p:nvSpPr>
-          <p:cNvPr id="9" name="Text 7"/>
-          <p:cNvSpPr/>
-          <p:nvPr/>
-        </p:nvSpPr>
+      <p:pic>
+        <p:nvPicPr>
+          <p:cNvPr id="9" name="Image 1" descr="C:\temp\CoworkLab\v2\_working\screenshots\ret4_04_selfcheck.png">    </p:cNvPr>
+          <p:cNvPicPr>
+            <a:picLocks noChangeAspect="1"/>
+          </p:cNvPicPr>
+          <p:nvPr/>
+        </p:nvPicPr>
+        <p:blipFill>
+          <a:blip r:embed="rId2"/>
+          <a:stretch>
+            <a:fillRect/>
+          </a:stretch>
+        </p:blipFill>
         <p:spPr>
           <a:xfrm>
             <a:off x="6217920" y="1828800"/>
@@ -8379,34 +8342,11 @@
           <a:prstGeom prst="rect">
             <a:avLst/>
           </a:prstGeom>
-          <a:noFill/>
-          <a:ln/>
-        </p:spPr>
-        <p:txBody>
-          <a:bodyPr wrap="square" rtlCol="0" anchor="ctr"/>
-          <a:lstStyle/>
-          <a:p>
-            <a:pPr algn="ctr" indent="0" marL="0">
-              <a:buNone/>
-            </a:pPr>
-            <a:r>
-              <a:rPr lang="en-US" sz="1500" dirty="0">
-                <a:solidFill>
-                  <a:srgbClr val="5B6079"/>
-                </a:solidFill>
-                <a:latin typeface="Microsoft JhengHei" pitchFamily="34" charset="0"/>
-                <a:ea typeface="Microsoft JhengHei" pitchFamily="34" charset="-122"/>
-                <a:cs typeface="Microsoft JhengHei" pitchFamily="34" charset="-120"/>
-              </a:rPr>
-              <a:t>實機截圖待補</a:t>
-            </a:r>
-            <a:endParaRPr lang="en-US" sz="1500" dirty="0"/>
-          </a:p>
-        </p:txBody>
-      </p:sp>
-      <p:sp>
-        <p:nvSpPr>
-          <p:cNvPr id="10" name="Text 8"/>
+        </p:spPr>
+      </p:pic>
+      <p:sp>
+        <p:nvSpPr>
+          <p:cNvPr id="10" name="Text 6"/>
           <p:cNvSpPr/>
           <p:nvPr/>
         </p:nvSpPr>
@@ -8445,7 +8385,7 @@
       </p:sp>
       <p:sp>
         <p:nvSpPr>
-          <p:cNvPr id="11" name="Shape 9"/>
+          <p:cNvPr id="11" name="Shape 7"/>
           <p:cNvSpPr/>
           <p:nvPr/>
         </p:nvSpPr>
@@ -8470,7 +8410,7 @@
       </p:sp>
       <p:sp>
         <p:nvSpPr>
-          <p:cNvPr id="12" name="Shape 10"/>
+          <p:cNvPr id="12" name="Shape 8"/>
           <p:cNvSpPr/>
           <p:nvPr/>
         </p:nvSpPr>
@@ -8490,7 +8430,7 @@
       </p:sp>
       <p:sp>
         <p:nvSpPr>
-          <p:cNvPr id="13" name="Text 11"/>
+          <p:cNvPr id="13" name="Text 9"/>
           <p:cNvSpPr/>
           <p:nvPr/>
         </p:nvSpPr>
@@ -8529,133 +8469,7 @@
       </p:sp>
       <p:pic>
         <p:nvPicPr>
-          <p:cNvPr id="14" name="Image 0" descr="preencoded.png">    </p:cNvPr>
-          <p:cNvPicPr>
-            <a:picLocks noChangeAspect="1"/>
-          </p:cNvPicPr>
-          <p:nvPr/>
-        </p:nvPicPr>
-        <p:blipFill>
-          <a:blip r:embed="rId1"/>
-          <a:stretch>
-            <a:fillRect/>
-          </a:stretch>
-        </p:blipFill>
-        <p:spPr>
-          <a:xfrm>
-            <a:off x="2834640" y="5221224"/>
-            <a:ext cx="182880" cy="182880"/>
-          </a:xfrm>
-          <a:prstGeom prst="rect">
-            <a:avLst/>
-          </a:prstGeom>
-        </p:spPr>
-      </p:pic>
-      <p:sp>
-        <p:nvSpPr>
-          <p:cNvPr id="15" name="Text 12"/>
-          <p:cNvSpPr/>
-          <p:nvPr/>
-        </p:nvSpPr>
-        <p:spPr>
-          <a:xfrm>
-            <a:off x="3108960" y="5166360"/>
-            <a:ext cx="8168335" cy="310896"/>
-          </a:xfrm>
-          <a:prstGeom prst="rect">
-            <a:avLst/>
-          </a:prstGeom>
-          <a:noFill/>
-          <a:ln/>
-        </p:spPr>
-        <p:txBody>
-          <a:bodyPr wrap="square" rtlCol="0" anchor="ctr"/>
-          <a:lstStyle/>
-          <a:p>
-            <a:pPr indent="0" marL="0">
-              <a:buNone/>
-            </a:pPr>
-            <a:r>
-              <a:rPr lang="en-US" sz="1300" dirty="0">
-                <a:solidFill>
-                  <a:srgbClr val="1E2235"/>
-                </a:solidFill>
-                <a:latin typeface="Microsoft JhengHei" pitchFamily="34" charset="0"/>
-                <a:ea typeface="Microsoft JhengHei" pitchFamily="34" charset="-122"/>
-                <a:cs typeface="Microsoft JhengHei" pitchFamily="34" charset="-120"/>
-              </a:rPr>
-              <a:t>每一條外部情報都附有可點擊來源連結，查不到的誠實標示「查無可靠公開來源」</a:t>
-            </a:r>
-            <a:endParaRPr lang="en-US" sz="1300" dirty="0"/>
-          </a:p>
-        </p:txBody>
-      </p:sp>
-      <p:pic>
-        <p:nvPicPr>
-          <p:cNvPr id="16" name="Image 1" descr="preencoded.png">    </p:cNvPr>
-          <p:cNvPicPr>
-            <a:picLocks noChangeAspect="1"/>
-          </p:cNvPicPr>
-          <p:nvPr/>
-        </p:nvPicPr>
-        <p:blipFill>
-          <a:blip r:embed="rId2"/>
-          <a:stretch>
-            <a:fillRect/>
-          </a:stretch>
-        </p:blipFill>
-        <p:spPr>
-          <a:xfrm>
-            <a:off x="2834640" y="5559552"/>
-            <a:ext cx="182880" cy="182880"/>
-          </a:xfrm>
-          <a:prstGeom prst="rect">
-            <a:avLst/>
-          </a:prstGeom>
-        </p:spPr>
-      </p:pic>
-      <p:sp>
-        <p:nvSpPr>
-          <p:cNvPr id="17" name="Text 13"/>
-          <p:cNvSpPr/>
-          <p:nvPr/>
-        </p:nvSpPr>
-        <p:spPr>
-          <a:xfrm>
-            <a:off x="3108960" y="5504688"/>
-            <a:ext cx="8168335" cy="310896"/>
-          </a:xfrm>
-          <a:prstGeom prst="rect">
-            <a:avLst/>
-          </a:prstGeom>
-          <a:noFill/>
-          <a:ln/>
-        </p:spPr>
-        <p:txBody>
-          <a:bodyPr wrap="square" rtlCol="0" anchor="ctr"/>
-          <a:lstStyle/>
-          <a:p>
-            <a:pPr indent="0" marL="0">
-              <a:buNone/>
-            </a:pPr>
-            <a:r>
-              <a:rPr lang="en-US" sz="1300" dirty="0">
-                <a:solidFill>
-                  <a:srgbClr val="1E2235"/>
-                </a:solidFill>
-                <a:latin typeface="Microsoft JhengHei" pitchFamily="34" charset="0"/>
-                <a:ea typeface="Microsoft JhengHei" pitchFamily="34" charset="-122"/>
-                <a:cs typeface="Microsoft JhengHei" pitchFamily="34" charset="-120"/>
-              </a:rPr>
-              <a:t>隨機抽查的來源連結真的可以打開，且內容支持它所寫的結論</a:t>
-            </a:r>
-            <a:endParaRPr lang="en-US" sz="1300" dirty="0"/>
-          </a:p>
-        </p:txBody>
-      </p:sp>
-      <p:pic>
-        <p:nvPicPr>
-          <p:cNvPr id="18" name="Image 2" descr="preencoded.png">    </p:cNvPr>
+          <p:cNvPr id="14" name="Image 2" descr="preencoded.png">    </p:cNvPr>
           <p:cNvPicPr>
             <a:picLocks noChangeAspect="1"/>
           </p:cNvPicPr>
@@ -8669,6 +8483,132 @@
         </p:blipFill>
         <p:spPr>
           <a:xfrm>
+            <a:off x="2834640" y="5221224"/>
+            <a:ext cx="182880" cy="182880"/>
+          </a:xfrm>
+          <a:prstGeom prst="rect">
+            <a:avLst/>
+          </a:prstGeom>
+        </p:spPr>
+      </p:pic>
+      <p:sp>
+        <p:nvSpPr>
+          <p:cNvPr id="15" name="Text 10"/>
+          <p:cNvSpPr/>
+          <p:nvPr/>
+        </p:nvSpPr>
+        <p:spPr>
+          <a:xfrm>
+            <a:off x="3108960" y="5166360"/>
+            <a:ext cx="8168335" cy="310896"/>
+          </a:xfrm>
+          <a:prstGeom prst="rect">
+            <a:avLst/>
+          </a:prstGeom>
+          <a:noFill/>
+          <a:ln/>
+        </p:spPr>
+        <p:txBody>
+          <a:bodyPr wrap="square" rtlCol="0" anchor="ctr"/>
+          <a:lstStyle/>
+          <a:p>
+            <a:pPr indent="0" marL="0">
+              <a:buNone/>
+            </a:pPr>
+            <a:r>
+              <a:rPr lang="en-US" sz="1300" dirty="0">
+                <a:solidFill>
+                  <a:srgbClr val="1E2235"/>
+                </a:solidFill>
+                <a:latin typeface="Microsoft JhengHei" pitchFamily="34" charset="0"/>
+                <a:ea typeface="Microsoft JhengHei" pitchFamily="34" charset="-122"/>
+                <a:cs typeface="Microsoft JhengHei" pitchFamily="34" charset="-120"/>
+              </a:rPr>
+              <a:t>每一條外部情報都附有可點擊來源連結，查不到的誠實標示「查無可靠公開來源」</a:t>
+            </a:r>
+            <a:endParaRPr lang="en-US" sz="1300" dirty="0"/>
+          </a:p>
+        </p:txBody>
+      </p:sp>
+      <p:pic>
+        <p:nvPicPr>
+          <p:cNvPr id="16" name="Image 3" descr="preencoded.png">    </p:cNvPr>
+          <p:cNvPicPr>
+            <a:picLocks noChangeAspect="1"/>
+          </p:cNvPicPr>
+          <p:nvPr/>
+        </p:nvPicPr>
+        <p:blipFill>
+          <a:blip r:embed="rId4"/>
+          <a:stretch>
+            <a:fillRect/>
+          </a:stretch>
+        </p:blipFill>
+        <p:spPr>
+          <a:xfrm>
+            <a:off x="2834640" y="5559552"/>
+            <a:ext cx="182880" cy="182880"/>
+          </a:xfrm>
+          <a:prstGeom prst="rect">
+            <a:avLst/>
+          </a:prstGeom>
+        </p:spPr>
+      </p:pic>
+      <p:sp>
+        <p:nvSpPr>
+          <p:cNvPr id="17" name="Text 11"/>
+          <p:cNvSpPr/>
+          <p:nvPr/>
+        </p:nvSpPr>
+        <p:spPr>
+          <a:xfrm>
+            <a:off x="3108960" y="5504688"/>
+            <a:ext cx="8168335" cy="310896"/>
+          </a:xfrm>
+          <a:prstGeom prst="rect">
+            <a:avLst/>
+          </a:prstGeom>
+          <a:noFill/>
+          <a:ln/>
+        </p:spPr>
+        <p:txBody>
+          <a:bodyPr wrap="square" rtlCol="0" anchor="ctr"/>
+          <a:lstStyle/>
+          <a:p>
+            <a:pPr indent="0" marL="0">
+              <a:buNone/>
+            </a:pPr>
+            <a:r>
+              <a:rPr lang="en-US" sz="1300" dirty="0">
+                <a:solidFill>
+                  <a:srgbClr val="1E2235"/>
+                </a:solidFill>
+                <a:latin typeface="Microsoft JhengHei" pitchFamily="34" charset="0"/>
+                <a:ea typeface="Microsoft JhengHei" pitchFamily="34" charset="-122"/>
+                <a:cs typeface="Microsoft JhengHei" pitchFamily="34" charset="-120"/>
+              </a:rPr>
+              <a:t>隨機抽查的來源連結真的可以打開，且內容支持它所寫的結論</a:t>
+            </a:r>
+            <a:endParaRPr lang="en-US" sz="1300" dirty="0"/>
+          </a:p>
+        </p:txBody>
+      </p:sp>
+      <p:pic>
+        <p:nvPicPr>
+          <p:cNvPr id="18" name="Image 4" descr="preencoded.png">    </p:cNvPr>
+          <p:cNvPicPr>
+            <a:picLocks noChangeAspect="1"/>
+          </p:cNvPicPr>
+          <p:nvPr/>
+        </p:nvPicPr>
+        <p:blipFill>
+          <a:blip r:embed="rId5"/>
+          <a:stretch>
+            <a:fillRect/>
+          </a:stretch>
+        </p:blipFill>
+        <p:spPr>
+          <a:xfrm>
             <a:off x="2834640" y="5897880"/>
             <a:ext cx="182880" cy="182880"/>
           </a:xfrm>
@@ -8679,7 +8619,7 @@
       </p:pic>
       <p:sp>
         <p:nvSpPr>
-          <p:cNvPr id="19" name="Text 14"/>
+          <p:cNvPr id="19" name="Text 12"/>
           <p:cNvSpPr/>
           <p:nvPr/>
         </p:nvSpPr>
@@ -8718,7 +8658,7 @@
       </p:sp>
       <p:sp>
         <p:nvSpPr>
-          <p:cNvPr id="20" name="Text 15"/>
+          <p:cNvPr id="20" name="Text 13"/>
           <p:cNvSpPr/>
           <p:nvPr/>
         </p:nvSpPr>
@@ -8757,7 +8697,7 @@
       </p:sp>
       <p:sp>
         <p:nvSpPr>
-          <p:cNvPr id="21" name="Text 16"/>
+          <p:cNvPr id="21" name="Text 14"/>
           <p:cNvSpPr/>
           <p:nvPr/>
         </p:nvSpPr>
@@ -10158,12 +10098,20 @@
           </a:effectLst>
         </p:spPr>
       </p:sp>
-      <p:sp>
-        <p:nvSpPr>
-          <p:cNvPr id="6" name="Text 4"/>
-          <p:cNvSpPr/>
-          <p:nvPr/>
-        </p:nvSpPr>
+      <p:pic>
+        <p:nvPicPr>
+          <p:cNvPr id="6" name="Image 0" descr="C:\temp\CoworkLab\v2\_working\screenshots\ret5_01_sweep.png">    </p:cNvPr>
+          <p:cNvPicPr>
+            <a:picLocks noChangeAspect="1"/>
+          </p:cNvPicPr>
+          <p:nvPr/>
+        </p:nvPicPr>
+        <p:blipFill>
+          <a:blip r:embed="rId1"/>
+          <a:stretch>
+            <a:fillRect/>
+          </a:stretch>
+        </p:blipFill>
         <p:spPr>
           <a:xfrm>
             <a:off x="640080" y="1828800"/>
@@ -10172,34 +10120,11 @@
           <a:prstGeom prst="rect">
             <a:avLst/>
           </a:prstGeom>
-          <a:noFill/>
-          <a:ln/>
-        </p:spPr>
-        <p:txBody>
-          <a:bodyPr wrap="square" rtlCol="0" anchor="ctr"/>
-          <a:lstStyle/>
-          <a:p>
-            <a:pPr algn="ctr" indent="0" marL="0">
-              <a:buNone/>
-            </a:pPr>
-            <a:r>
-              <a:rPr lang="en-US" sz="1500" dirty="0">
-                <a:solidFill>
-                  <a:srgbClr val="5B6079"/>
-                </a:solidFill>
-                <a:latin typeface="Microsoft JhengHei" pitchFamily="34" charset="0"/>
-                <a:ea typeface="Microsoft JhengHei" pitchFamily="34" charset="-122"/>
-                <a:cs typeface="Microsoft JhengHei" pitchFamily="34" charset="-120"/>
-              </a:rPr>
-              <a:t>實機截圖待補</a:t>
-            </a:r>
-            <a:endParaRPr lang="en-US" sz="1500" dirty="0"/>
-          </a:p>
-        </p:txBody>
-      </p:sp>
-      <p:sp>
-        <p:nvSpPr>
-          <p:cNvPr id="7" name="Text 5"/>
+        </p:spPr>
+      </p:pic>
+      <p:sp>
+        <p:nvSpPr>
+          <p:cNvPr id="7" name="Text 4"/>
           <p:cNvSpPr/>
           <p:nvPr/>
         </p:nvSpPr>
@@ -10238,7 +10163,7 @@
       </p:sp>
       <p:sp>
         <p:nvSpPr>
-          <p:cNvPr id="8" name="Shape 6"/>
+          <p:cNvPr id="8" name="Shape 5"/>
           <p:cNvSpPr/>
           <p:nvPr/>
         </p:nvSpPr>
@@ -10268,12 +10193,20 @@
           </a:effectLst>
         </p:spPr>
       </p:sp>
-      <p:sp>
-        <p:nvSpPr>
-          <p:cNvPr id="9" name="Text 7"/>
-          <p:cNvSpPr/>
-          <p:nvPr/>
-        </p:nvSpPr>
+      <p:pic>
+        <p:nvPicPr>
+          <p:cNvPr id="9" name="Image 1" descr="C:\temp\CoworkLab\v2\_working\screenshots\ret5_04_verify.png">    </p:cNvPr>
+          <p:cNvPicPr>
+            <a:picLocks noChangeAspect="1"/>
+          </p:cNvPicPr>
+          <p:nvPr/>
+        </p:nvPicPr>
+        <p:blipFill>
+          <a:blip r:embed="rId2"/>
+          <a:stretch>
+            <a:fillRect/>
+          </a:stretch>
+        </p:blipFill>
         <p:spPr>
           <a:xfrm>
             <a:off x="6217920" y="1828800"/>
@@ -10282,34 +10215,11 @@
           <a:prstGeom prst="rect">
             <a:avLst/>
           </a:prstGeom>
-          <a:noFill/>
-          <a:ln/>
-        </p:spPr>
-        <p:txBody>
-          <a:bodyPr wrap="square" rtlCol="0" anchor="ctr"/>
-          <a:lstStyle/>
-          <a:p>
-            <a:pPr algn="ctr" indent="0" marL="0">
-              <a:buNone/>
-            </a:pPr>
-            <a:r>
-              <a:rPr lang="en-US" sz="1500" dirty="0">
-                <a:solidFill>
-                  <a:srgbClr val="5B6079"/>
-                </a:solidFill>
-                <a:latin typeface="Microsoft JhengHei" pitchFamily="34" charset="0"/>
-                <a:ea typeface="Microsoft JhengHei" pitchFamily="34" charset="-122"/>
-                <a:cs typeface="Microsoft JhengHei" pitchFamily="34" charset="-120"/>
-              </a:rPr>
-              <a:t>實機截圖待補</a:t>
-            </a:r>
-            <a:endParaRPr lang="en-US" sz="1500" dirty="0"/>
-          </a:p>
-        </p:txBody>
-      </p:sp>
-      <p:sp>
-        <p:nvSpPr>
-          <p:cNvPr id="10" name="Text 8"/>
+        </p:spPr>
+      </p:pic>
+      <p:sp>
+        <p:nvSpPr>
+          <p:cNvPr id="10" name="Text 6"/>
           <p:cNvSpPr/>
           <p:nvPr/>
         </p:nvSpPr>
@@ -10348,7 +10258,7 @@
       </p:sp>
       <p:sp>
         <p:nvSpPr>
-          <p:cNvPr id="11" name="Shape 9"/>
+          <p:cNvPr id="11" name="Shape 7"/>
           <p:cNvSpPr/>
           <p:nvPr/>
         </p:nvSpPr>
@@ -10373,7 +10283,7 @@
       </p:sp>
       <p:sp>
         <p:nvSpPr>
-          <p:cNvPr id="12" name="Shape 10"/>
+          <p:cNvPr id="12" name="Shape 8"/>
           <p:cNvSpPr/>
           <p:nvPr/>
         </p:nvSpPr>
@@ -10393,7 +10303,7 @@
       </p:sp>
       <p:sp>
         <p:nvSpPr>
-          <p:cNvPr id="13" name="Text 11"/>
+          <p:cNvPr id="13" name="Text 9"/>
           <p:cNvSpPr/>
           <p:nvPr/>
         </p:nvSpPr>
@@ -10432,133 +10342,7 @@
       </p:sp>
       <p:pic>
         <p:nvPicPr>
-          <p:cNvPr id="14" name="Image 0" descr="preencoded.png">    </p:cNvPr>
-          <p:cNvPicPr>
-            <a:picLocks noChangeAspect="1"/>
-          </p:cNvPicPr>
-          <p:nvPr/>
-        </p:nvPicPr>
-        <p:blipFill>
-          <a:blip r:embed="rId1"/>
-          <a:stretch>
-            <a:fillRect/>
-          </a:stretch>
-        </p:blipFill>
-        <p:spPr>
-          <a:xfrm>
-            <a:off x="2834640" y="5221224"/>
-            <a:ext cx="182880" cy="182880"/>
-          </a:xfrm>
-          <a:prstGeom prst="rect">
-            <a:avLst/>
-          </a:prstGeom>
-        </p:spPr>
-      </p:pic>
-      <p:sp>
-        <p:nvSpPr>
-          <p:cNvPr id="15" name="Text 12"/>
-          <p:cNvSpPr/>
-          <p:nvPr/>
-        </p:nvSpPr>
-        <p:spPr>
-          <a:xfrm>
-            <a:off x="3108960" y="5166360"/>
-            <a:ext cx="8168335" cy="310896"/>
-          </a:xfrm>
-          <a:prstGeom prst="rect">
-            <a:avLst/>
-          </a:prstGeom>
-          <a:noFill/>
-          <a:ln/>
-        </p:spPr>
-        <p:txBody>
-          <a:bodyPr wrap="square" rtlCol="0" anchor="ctr"/>
-          <a:lstStyle/>
-          <a:p>
-            <a:pPr indent="0" marL="0">
-              <a:buNone/>
-            </a:pPr>
-            <a:r>
-              <a:rPr lang="en-US" sz="1300" dirty="0">
-                <a:solidFill>
-                  <a:srgbClr val="1E2235"/>
-                </a:solidFill>
-                <a:latin typeface="Microsoft JhengHei" pitchFamily="34" charset="0"/>
-                <a:ea typeface="Microsoft JhengHei" pitchFamily="34" charset="-122"/>
-                <a:cs typeface="Microsoft JhengHei" pitchFamily="34" charset="-120"/>
-              </a:rPr>
-              <a:t>香語生活（9/18）與綿境紡織（9/30）被正確標示為「應啟動日已過期」</a:t>
-            </a:r>
-            <a:endParaRPr lang="en-US" sz="1300" dirty="0"/>
-          </a:p>
-        </p:txBody>
-      </p:sp>
-      <p:pic>
-        <p:nvPicPr>
-          <p:cNvPr id="16" name="Image 1" descr="preencoded.png">    </p:cNvPr>
-          <p:cNvPicPr>
-            <a:picLocks noChangeAspect="1"/>
-          </p:cNvPicPr>
-          <p:nvPr/>
-        </p:nvPicPr>
-        <p:blipFill>
-          <a:blip r:embed="rId2"/>
-          <a:stretch>
-            <a:fillRect/>
-          </a:stretch>
-        </p:blipFill>
-        <p:spPr>
-          <a:xfrm>
-            <a:off x="2834640" y="5559552"/>
-            <a:ext cx="182880" cy="182880"/>
-          </a:xfrm>
-          <a:prstGeom prst="rect">
-            <a:avLst/>
-          </a:prstGeom>
-        </p:spPr>
-      </p:pic>
-      <p:sp>
-        <p:nvSpPr>
-          <p:cNvPr id="17" name="Text 13"/>
-          <p:cNvSpPr/>
-          <p:nvPr/>
-        </p:nvSpPr>
-        <p:spPr>
-          <a:xfrm>
-            <a:off x="3108960" y="5504688"/>
-            <a:ext cx="8168335" cy="310896"/>
-          </a:xfrm>
-          <a:prstGeom prst="rect">
-            <a:avLst/>
-          </a:prstGeom>
-          <a:noFill/>
-          <a:ln/>
-        </p:spPr>
-        <p:txBody>
-          <a:bodyPr wrap="square" rtlCol="0" anchor="ctr"/>
-          <a:lstStyle/>
-          <a:p>
-            <a:pPr indent="0" marL="0">
-              <a:buNone/>
-            </a:pPr>
-            <a:r>
-              <a:rPr lang="en-US" sz="1300" dirty="0">
-                <a:solidFill>
-                  <a:srgbClr val="1E2235"/>
-                </a:solidFill>
-                <a:latin typeface="Microsoft JhengHei" pitchFamily="34" charset="0"/>
-                <a:ea typeface="Microsoft JhengHei" pitchFamily="34" charset="-122"/>
-                <a:cs typeface="Microsoft JhengHei" pitchFamily="34" charset="-120"/>
-              </a:rPr>
-              <a:t>提前啟動天數依年度採購額正確分級（90／60／30 天），未一律套用同一個天數</a:t>
-            </a:r>
-            <a:endParaRPr lang="en-US" sz="1300" dirty="0"/>
-          </a:p>
-        </p:txBody>
-      </p:sp>
-      <p:pic>
-        <p:nvPicPr>
-          <p:cNvPr id="18" name="Image 2" descr="preencoded.png">    </p:cNvPr>
+          <p:cNvPr id="14" name="Image 2" descr="preencoded.png">    </p:cNvPr>
           <p:cNvPicPr>
             <a:picLocks noChangeAspect="1"/>
           </p:cNvPicPr>
@@ -10572,6 +10356,132 @@
         </p:blipFill>
         <p:spPr>
           <a:xfrm>
+            <a:off x="2834640" y="5221224"/>
+            <a:ext cx="182880" cy="182880"/>
+          </a:xfrm>
+          <a:prstGeom prst="rect">
+            <a:avLst/>
+          </a:prstGeom>
+        </p:spPr>
+      </p:pic>
+      <p:sp>
+        <p:nvSpPr>
+          <p:cNvPr id="15" name="Text 10"/>
+          <p:cNvSpPr/>
+          <p:nvPr/>
+        </p:nvSpPr>
+        <p:spPr>
+          <a:xfrm>
+            <a:off x="3108960" y="5166360"/>
+            <a:ext cx="8168335" cy="310896"/>
+          </a:xfrm>
+          <a:prstGeom prst="rect">
+            <a:avLst/>
+          </a:prstGeom>
+          <a:noFill/>
+          <a:ln/>
+        </p:spPr>
+        <p:txBody>
+          <a:bodyPr wrap="square" rtlCol="0" anchor="ctr"/>
+          <a:lstStyle/>
+          <a:p>
+            <a:pPr indent="0" marL="0">
+              <a:buNone/>
+            </a:pPr>
+            <a:r>
+              <a:rPr lang="en-US" sz="1300" dirty="0">
+                <a:solidFill>
+                  <a:srgbClr val="1E2235"/>
+                </a:solidFill>
+                <a:latin typeface="Microsoft JhengHei" pitchFamily="34" charset="0"/>
+                <a:ea typeface="Microsoft JhengHei" pitchFamily="34" charset="-122"/>
+                <a:cs typeface="Microsoft JhengHei" pitchFamily="34" charset="-120"/>
+              </a:rPr>
+              <a:t>香語生活（9/18）與綿境紡織（9/30）被正確標示為「應啟動日已過期」</a:t>
+            </a:r>
+            <a:endParaRPr lang="en-US" sz="1300" dirty="0"/>
+          </a:p>
+        </p:txBody>
+      </p:sp>
+      <p:pic>
+        <p:nvPicPr>
+          <p:cNvPr id="16" name="Image 3" descr="preencoded.png">    </p:cNvPr>
+          <p:cNvPicPr>
+            <a:picLocks noChangeAspect="1"/>
+          </p:cNvPicPr>
+          <p:nvPr/>
+        </p:nvPicPr>
+        <p:blipFill>
+          <a:blip r:embed="rId4"/>
+          <a:stretch>
+            <a:fillRect/>
+          </a:stretch>
+        </p:blipFill>
+        <p:spPr>
+          <a:xfrm>
+            <a:off x="2834640" y="5559552"/>
+            <a:ext cx="182880" cy="182880"/>
+          </a:xfrm>
+          <a:prstGeom prst="rect">
+            <a:avLst/>
+          </a:prstGeom>
+        </p:spPr>
+      </p:pic>
+      <p:sp>
+        <p:nvSpPr>
+          <p:cNvPr id="17" name="Text 11"/>
+          <p:cNvSpPr/>
+          <p:nvPr/>
+        </p:nvSpPr>
+        <p:spPr>
+          <a:xfrm>
+            <a:off x="3108960" y="5504688"/>
+            <a:ext cx="8168335" cy="310896"/>
+          </a:xfrm>
+          <a:prstGeom prst="rect">
+            <a:avLst/>
+          </a:prstGeom>
+          <a:noFill/>
+          <a:ln/>
+        </p:spPr>
+        <p:txBody>
+          <a:bodyPr wrap="square" rtlCol="0" anchor="ctr"/>
+          <a:lstStyle/>
+          <a:p>
+            <a:pPr indent="0" marL="0">
+              <a:buNone/>
+            </a:pPr>
+            <a:r>
+              <a:rPr lang="en-US" sz="1300" dirty="0">
+                <a:solidFill>
+                  <a:srgbClr val="1E2235"/>
+                </a:solidFill>
+                <a:latin typeface="Microsoft JhengHei" pitchFamily="34" charset="0"/>
+                <a:ea typeface="Microsoft JhengHei" pitchFamily="34" charset="-122"/>
+                <a:cs typeface="Microsoft JhengHei" pitchFamily="34" charset="-120"/>
+              </a:rPr>
+              <a:t>提前啟動天數依年度採購額正確分級（90／60／30 天），未一律套用同一個天數</a:t>
+            </a:r>
+            <a:endParaRPr lang="en-US" sz="1300" dirty="0"/>
+          </a:p>
+        </p:txBody>
+      </p:sp>
+      <p:pic>
+        <p:nvPicPr>
+          <p:cNvPr id="18" name="Image 4" descr="preencoded.png">    </p:cNvPr>
+          <p:cNvPicPr>
+            <a:picLocks noChangeAspect="1"/>
+          </p:cNvPicPr>
+          <p:nvPr/>
+        </p:nvPicPr>
+        <p:blipFill>
+          <a:blip r:embed="rId5"/>
+          <a:stretch>
+            <a:fillRect/>
+          </a:stretch>
+        </p:blipFill>
+        <p:spPr>
+          <a:xfrm>
             <a:off x="2834640" y="5897880"/>
             <a:ext cx="182880" cy="182880"/>
           </a:xfrm>
@@ -10582,7 +10492,7 @@
       </p:pic>
       <p:sp>
         <p:nvSpPr>
-          <p:cNvPr id="19" name="Text 14"/>
+          <p:cNvPr id="19" name="Text 12"/>
           <p:cNvSpPr/>
           <p:nvPr/>
         </p:nvSpPr>
@@ -10621,7 +10531,7 @@
       </p:sp>
       <p:sp>
         <p:nvSpPr>
-          <p:cNvPr id="20" name="Text 15"/>
+          <p:cNvPr id="20" name="Text 13"/>
           <p:cNvSpPr/>
           <p:nvPr/>
         </p:nvSpPr>
@@ -10660,7 +10570,7 @@
       </p:sp>
       <p:sp>
         <p:nvSpPr>
-          <p:cNvPr id="21" name="Text 16"/>
+          <p:cNvPr id="21" name="Text 14"/>
           <p:cNvSpPr/>
           <p:nvPr/>
         </p:nvSpPr>
@@ -12086,12 +11996,20 @@
           </a:effectLst>
         </p:spPr>
       </p:sp>
-      <p:sp>
-        <p:nvSpPr>
-          <p:cNvPr id="6" name="Text 4"/>
-          <p:cNvSpPr/>
-          <p:nvPr/>
-        </p:nvSpPr>
+      <p:pic>
+        <p:nvPicPr>
+          <p:cNvPr id="6" name="Image 0" descr="C:\temp\CoworkLab\v2\_working\screenshots\ret6_01_create.png">    </p:cNvPr>
+          <p:cNvPicPr>
+            <a:picLocks noChangeAspect="1"/>
+          </p:cNvPicPr>
+          <p:nvPr/>
+        </p:nvPicPr>
+        <p:blipFill>
+          <a:blip r:embed="rId1"/>
+          <a:stretch>
+            <a:fillRect/>
+          </a:stretch>
+        </p:blipFill>
         <p:spPr>
           <a:xfrm>
             <a:off x="640080" y="1828800"/>
@@ -12100,34 +12018,11 @@
           <a:prstGeom prst="rect">
             <a:avLst/>
           </a:prstGeom>
-          <a:noFill/>
-          <a:ln/>
-        </p:spPr>
-        <p:txBody>
-          <a:bodyPr wrap="square" rtlCol="0" anchor="ctr"/>
-          <a:lstStyle/>
-          <a:p>
-            <a:pPr algn="ctr" indent="0" marL="0">
-              <a:buNone/>
-            </a:pPr>
-            <a:r>
-              <a:rPr lang="en-US" sz="1500" dirty="0">
-                <a:solidFill>
-                  <a:srgbClr val="5B6079"/>
-                </a:solidFill>
-                <a:latin typeface="Microsoft JhengHei" pitchFamily="34" charset="0"/>
-                <a:ea typeface="Microsoft JhengHei" pitchFamily="34" charset="-122"/>
-                <a:cs typeface="Microsoft JhengHei" pitchFamily="34" charset="-120"/>
-              </a:rPr>
-              <a:t>實機截圖待補</a:t>
-            </a:r>
-            <a:endParaRPr lang="en-US" sz="1500" dirty="0"/>
-          </a:p>
-        </p:txBody>
-      </p:sp>
-      <p:sp>
-        <p:nvSpPr>
-          <p:cNvPr id="7" name="Text 5"/>
+        </p:spPr>
+      </p:pic>
+      <p:sp>
+        <p:nvSpPr>
+          <p:cNvPr id="7" name="Text 4"/>
           <p:cNvSpPr/>
           <p:nvPr/>
         </p:nvSpPr>
@@ -12166,7 +12061,7 @@
       </p:sp>
       <p:sp>
         <p:nvSpPr>
-          <p:cNvPr id="8" name="Shape 6"/>
+          <p:cNvPr id="8" name="Shape 5"/>
           <p:cNvSpPr/>
           <p:nvPr/>
         </p:nvSpPr>
@@ -12196,12 +12091,20 @@
           </a:effectLst>
         </p:spPr>
       </p:sp>
-      <p:sp>
-        <p:nvSpPr>
-          <p:cNvPr id="9" name="Text 7"/>
-          <p:cNvSpPr/>
-          <p:nvPr/>
-        </p:nvSpPr>
+      <p:pic>
+        <p:nvPicPr>
+          <p:cNvPr id="9" name="Image 1" descr="C:\temp\CoworkLab\v2\_working\screenshots\ret6_05_share.png">    </p:cNvPr>
+          <p:cNvPicPr>
+            <a:picLocks noChangeAspect="1"/>
+          </p:cNvPicPr>
+          <p:nvPr/>
+        </p:nvPicPr>
+        <p:blipFill>
+          <a:blip r:embed="rId2"/>
+          <a:stretch>
+            <a:fillRect/>
+          </a:stretch>
+        </p:blipFill>
         <p:spPr>
           <a:xfrm>
             <a:off x="6217920" y="1828800"/>
@@ -12210,34 +12113,11 @@
           <a:prstGeom prst="rect">
             <a:avLst/>
           </a:prstGeom>
-          <a:noFill/>
-          <a:ln/>
-        </p:spPr>
-        <p:txBody>
-          <a:bodyPr wrap="square" rtlCol="0" anchor="ctr"/>
-          <a:lstStyle/>
-          <a:p>
-            <a:pPr algn="ctr" indent="0" marL="0">
-              <a:buNone/>
-            </a:pPr>
-            <a:r>
-              <a:rPr lang="en-US" sz="1500" dirty="0">
-                <a:solidFill>
-                  <a:srgbClr val="5B6079"/>
-                </a:solidFill>
-                <a:latin typeface="Microsoft JhengHei" pitchFamily="34" charset="0"/>
-                <a:ea typeface="Microsoft JhengHei" pitchFamily="34" charset="-122"/>
-                <a:cs typeface="Microsoft JhengHei" pitchFamily="34" charset="-120"/>
-              </a:rPr>
-              <a:t>實機截圖待補</a:t>
-            </a:r>
-            <a:endParaRPr lang="en-US" sz="1500" dirty="0"/>
-          </a:p>
-        </p:txBody>
-      </p:sp>
-      <p:sp>
-        <p:nvSpPr>
-          <p:cNvPr id="10" name="Text 8"/>
+        </p:spPr>
+      </p:pic>
+      <p:sp>
+        <p:nvSpPr>
+          <p:cNvPr id="10" name="Text 6"/>
           <p:cNvSpPr/>
           <p:nvPr/>
         </p:nvSpPr>
@@ -12276,7 +12156,7 @@
       </p:sp>
       <p:sp>
         <p:nvSpPr>
-          <p:cNvPr id="11" name="Shape 9"/>
+          <p:cNvPr id="11" name="Shape 7"/>
           <p:cNvSpPr/>
           <p:nvPr/>
         </p:nvSpPr>
@@ -12301,7 +12181,7 @@
       </p:sp>
       <p:sp>
         <p:nvSpPr>
-          <p:cNvPr id="12" name="Shape 10"/>
+          <p:cNvPr id="12" name="Shape 8"/>
           <p:cNvSpPr/>
           <p:nvPr/>
         </p:nvSpPr>
@@ -12321,7 +12201,7 @@
       </p:sp>
       <p:sp>
         <p:nvSpPr>
-          <p:cNvPr id="13" name="Text 11"/>
+          <p:cNvPr id="13" name="Text 9"/>
           <p:cNvSpPr/>
           <p:nvPr/>
         </p:nvSpPr>
@@ -12360,133 +12240,7 @@
       </p:sp>
       <p:pic>
         <p:nvPicPr>
-          <p:cNvPr id="14" name="Image 0" descr="preencoded.png">    </p:cNvPr>
-          <p:cNvPicPr>
-            <a:picLocks noChangeAspect="1"/>
-          </p:cNvPicPr>
-          <p:nvPr/>
-        </p:nvPicPr>
-        <p:blipFill>
-          <a:blip r:embed="rId1"/>
-          <a:stretch>
-            <a:fillRect/>
-          </a:stretch>
-        </p:blipFill>
-        <p:spPr>
-          <a:xfrm>
-            <a:off x="2834640" y="5221224"/>
-            <a:ext cx="182880" cy="182880"/>
-          </a:xfrm>
-          <a:prstGeom prst="rect">
-            <a:avLst/>
-          </a:prstGeom>
-        </p:spPr>
-      </p:pic>
-      <p:sp>
-        <p:nvSpPr>
-          <p:cNvPr id="15" name="Text 12"/>
-          <p:cNvSpPr/>
-          <p:nvPr/>
-        </p:nvSpPr>
-        <p:spPr>
-          <a:xfrm>
-            <a:off x="3108960" y="5166360"/>
-            <a:ext cx="8168335" cy="310896"/>
-          </a:xfrm>
-          <a:prstGeom prst="rect">
-            <a:avLst/>
-          </a:prstGeom>
-          <a:noFill/>
-          <a:ln/>
-        </p:spPr>
-        <p:txBody>
-          <a:bodyPr wrap="square" rtlCol="0" anchor="ctr"/>
-          <a:lstStyle/>
-          <a:p>
-            <a:pPr indent="0" marL="0">
-              <a:buNone/>
-            </a:pPr>
-            <a:r>
-              <a:rPr lang="en-US" sz="1300" dirty="0">
-                <a:solidFill>
-                  <a:srgbClr val="1E2235"/>
-                </a:solidFill>
-                <a:latin typeface="Microsoft JhengHei" pitchFamily="34" charset="0"/>
-                <a:ea typeface="Microsoft JhengHei" pitchFamily="34" charset="-122"/>
-                <a:cs typeface="Microsoft JhengHei" pitchFamily="34" charset="-120"/>
-              </a:rPr>
-              <a:t>技能描述包含明確觸發語句，能在新工作階段被自動載入使用</a:t>
-            </a:r>
-            <a:endParaRPr lang="en-US" sz="1300" dirty="0"/>
-          </a:p>
-        </p:txBody>
-      </p:sp>
-      <p:pic>
-        <p:nvPicPr>
-          <p:cNvPr id="16" name="Image 1" descr="preencoded.png">    </p:cNvPr>
-          <p:cNvPicPr>
-            <a:picLocks noChangeAspect="1"/>
-          </p:cNvPicPr>
-          <p:nvPr/>
-        </p:nvPicPr>
-        <p:blipFill>
-          <a:blip r:embed="rId2"/>
-          <a:stretch>
-            <a:fillRect/>
-          </a:stretch>
-        </p:blipFill>
-        <p:spPr>
-          <a:xfrm>
-            <a:off x="2834640" y="5559552"/>
-            <a:ext cx="182880" cy="182880"/>
-          </a:xfrm>
-          <a:prstGeom prst="rect">
-            <a:avLst/>
-          </a:prstGeom>
-        </p:spPr>
-      </p:pic>
-      <p:sp>
-        <p:nvSpPr>
-          <p:cNvPr id="17" name="Text 13"/>
-          <p:cNvSpPr/>
-          <p:nvPr/>
-        </p:nvSpPr>
-        <p:spPr>
-          <a:xfrm>
-            <a:off x="3108960" y="5504688"/>
-            <a:ext cx="8168335" cy="310896"/>
-          </a:xfrm>
-          <a:prstGeom prst="rect">
-            <a:avLst/>
-          </a:prstGeom>
-          <a:noFill/>
-          <a:ln/>
-        </p:spPr>
-        <p:txBody>
-          <a:bodyPr wrap="square" rtlCol="0" anchor="ctr"/>
-          <a:lstStyle/>
-          <a:p>
-            <a:pPr indent="0" marL="0">
-              <a:buNone/>
-            </a:pPr>
-            <a:r>
-              <a:rPr lang="en-US" sz="1300" dirty="0">
-                <a:solidFill>
-                  <a:srgbClr val="1E2235"/>
-                </a:solidFill>
-                <a:latin typeface="Microsoft JhengHei" pitchFamily="34" charset="0"/>
-                <a:ea typeface="Microsoft JhengHei" pitchFamily="34" charset="-122"/>
-                <a:cs typeface="Microsoft JhengHei" pitchFamily="34" charset="-120"/>
-              </a:rPr>
-              <a:t>新工作階段中只給數據、不重述規則，仍能正確套用四級分級門檻</a:t>
-            </a:r>
-            <a:endParaRPr lang="en-US" sz="1300" dirty="0"/>
-          </a:p>
-        </p:txBody>
-      </p:sp>
-      <p:pic>
-        <p:nvPicPr>
-          <p:cNvPr id="18" name="Image 2" descr="preencoded.png">    </p:cNvPr>
+          <p:cNvPr id="14" name="Image 2" descr="preencoded.png">    </p:cNvPr>
           <p:cNvPicPr>
             <a:picLocks noChangeAspect="1"/>
           </p:cNvPicPr>
@@ -12500,6 +12254,132 @@
         </p:blipFill>
         <p:spPr>
           <a:xfrm>
+            <a:off x="2834640" y="5221224"/>
+            <a:ext cx="182880" cy="182880"/>
+          </a:xfrm>
+          <a:prstGeom prst="rect">
+            <a:avLst/>
+          </a:prstGeom>
+        </p:spPr>
+      </p:pic>
+      <p:sp>
+        <p:nvSpPr>
+          <p:cNvPr id="15" name="Text 10"/>
+          <p:cNvSpPr/>
+          <p:nvPr/>
+        </p:nvSpPr>
+        <p:spPr>
+          <a:xfrm>
+            <a:off x="3108960" y="5166360"/>
+            <a:ext cx="8168335" cy="310896"/>
+          </a:xfrm>
+          <a:prstGeom prst="rect">
+            <a:avLst/>
+          </a:prstGeom>
+          <a:noFill/>
+          <a:ln/>
+        </p:spPr>
+        <p:txBody>
+          <a:bodyPr wrap="square" rtlCol="0" anchor="ctr"/>
+          <a:lstStyle/>
+          <a:p>
+            <a:pPr indent="0" marL="0">
+              <a:buNone/>
+            </a:pPr>
+            <a:r>
+              <a:rPr lang="en-US" sz="1300" dirty="0">
+                <a:solidFill>
+                  <a:srgbClr val="1E2235"/>
+                </a:solidFill>
+                <a:latin typeface="Microsoft JhengHei" pitchFamily="34" charset="0"/>
+                <a:ea typeface="Microsoft JhengHei" pitchFamily="34" charset="-122"/>
+                <a:cs typeface="Microsoft JhengHei" pitchFamily="34" charset="-120"/>
+              </a:rPr>
+              <a:t>技能描述包含明確觸發語句，能在新工作階段被自動載入使用</a:t>
+            </a:r>
+            <a:endParaRPr lang="en-US" sz="1300" dirty="0"/>
+          </a:p>
+        </p:txBody>
+      </p:sp>
+      <p:pic>
+        <p:nvPicPr>
+          <p:cNvPr id="16" name="Image 3" descr="preencoded.png">    </p:cNvPr>
+          <p:cNvPicPr>
+            <a:picLocks noChangeAspect="1"/>
+          </p:cNvPicPr>
+          <p:nvPr/>
+        </p:nvPicPr>
+        <p:blipFill>
+          <a:blip r:embed="rId4"/>
+          <a:stretch>
+            <a:fillRect/>
+          </a:stretch>
+        </p:blipFill>
+        <p:spPr>
+          <a:xfrm>
+            <a:off x="2834640" y="5559552"/>
+            <a:ext cx="182880" cy="182880"/>
+          </a:xfrm>
+          <a:prstGeom prst="rect">
+            <a:avLst/>
+          </a:prstGeom>
+        </p:spPr>
+      </p:pic>
+      <p:sp>
+        <p:nvSpPr>
+          <p:cNvPr id="17" name="Text 11"/>
+          <p:cNvSpPr/>
+          <p:nvPr/>
+        </p:nvSpPr>
+        <p:spPr>
+          <a:xfrm>
+            <a:off x="3108960" y="5504688"/>
+            <a:ext cx="8168335" cy="310896"/>
+          </a:xfrm>
+          <a:prstGeom prst="rect">
+            <a:avLst/>
+          </a:prstGeom>
+          <a:noFill/>
+          <a:ln/>
+        </p:spPr>
+        <p:txBody>
+          <a:bodyPr wrap="square" rtlCol="0" anchor="ctr"/>
+          <a:lstStyle/>
+          <a:p>
+            <a:pPr indent="0" marL="0">
+              <a:buNone/>
+            </a:pPr>
+            <a:r>
+              <a:rPr lang="en-US" sz="1300" dirty="0">
+                <a:solidFill>
+                  <a:srgbClr val="1E2235"/>
+                </a:solidFill>
+                <a:latin typeface="Microsoft JhengHei" pitchFamily="34" charset="0"/>
+                <a:ea typeface="Microsoft JhengHei" pitchFamily="34" charset="-122"/>
+                <a:cs typeface="Microsoft JhengHei" pitchFamily="34" charset="-120"/>
+              </a:rPr>
+              <a:t>新工作階段中只給數據、不重述規則，仍能正確套用四級分級門檻</a:t>
+            </a:r>
+            <a:endParaRPr lang="en-US" sz="1300" dirty="0"/>
+          </a:p>
+        </p:txBody>
+      </p:sp>
+      <p:pic>
+        <p:nvPicPr>
+          <p:cNvPr id="18" name="Image 4" descr="preencoded.png">    </p:cNvPr>
+          <p:cNvPicPr>
+            <a:picLocks noChangeAspect="1"/>
+          </p:cNvPicPr>
+          <p:nvPr/>
+        </p:nvPicPr>
+        <p:blipFill>
+          <a:blip r:embed="rId5"/>
+          <a:stretch>
+            <a:fillRect/>
+          </a:stretch>
+        </p:blipFill>
+        <p:spPr>
+          <a:xfrm>
             <a:off x="2834640" y="5897880"/>
             <a:ext cx="182880" cy="182880"/>
           </a:xfrm>
@@ -12510,7 +12390,7 @@
       </p:pic>
       <p:sp>
         <p:nvSpPr>
-          <p:cNvPr id="19" name="Text 14"/>
+          <p:cNvPr id="19" name="Text 12"/>
           <p:cNvSpPr/>
           <p:nvPr/>
         </p:nvSpPr>
@@ -12549,7 +12429,7 @@
       </p:sp>
       <p:sp>
         <p:nvSpPr>
-          <p:cNvPr id="20" name="Text 15"/>
+          <p:cNvPr id="20" name="Text 13"/>
           <p:cNvSpPr/>
           <p:nvPr/>
         </p:nvSpPr>
@@ -12588,7 +12468,7 @@
       </p:sp>
       <p:sp>
         <p:nvSpPr>
-          <p:cNvPr id="21" name="Text 16"/>
+          <p:cNvPr id="21" name="Text 14"/>
           <p:cNvSpPr/>
           <p:nvPr/>
         </p:nvSpPr>
@@ -20670,7 +20550,7 @@
                 <a:ea typeface="Microsoft JhengHei" pitchFamily="34" charset="-122"/>
                 <a:cs typeface="Microsoft JhengHei" pitchFamily="34" charset="-120"/>
               </a:rPr>
-              <a:t>約 15–20 分鐘</a:t>
+              <a:t>約 20–30 分鐘</a:t>
             </a:r>
             <a:endParaRPr lang="en-US" sz="1100" dirty="0"/>
           </a:p>
@@ -21214,7 +21094,7 @@
                 <a:ea typeface="Microsoft JhengHei" pitchFamily="34" charset="-122"/>
                 <a:cs typeface="Microsoft JhengHei" pitchFamily="34" charset="-120"/>
               </a:rPr>
-              <a:t>約 18–22 分鐘</a:t>
+              <a:t>約 40–90 分鐘</a:t>
             </a:r>
             <a:endParaRPr lang="en-US" sz="1100" dirty="0"/>
           </a:p>

--- a/CoworkPlaybook/Cowork_教育訓練簡報_零售通路版.pptx
+++ b/CoworkPlaybook/Cowork_教育訓練簡報_零售通路版.pptx
@@ -12295,7 +12295,7 @@
                 <a:ea typeface="Microsoft JhengHei" pitchFamily="34" charset="-122"/>
                 <a:cs typeface="Microsoft JhengHei" pitchFamily="34" charset="-120"/>
               </a:rPr>
-              <a:t>技能描述包含明確觸發語句，能在新工作階段被自動載入使用</a:t>
+              <a:t>技能描述包含明確觸發語句，且有「Do NOT use for」排除條款避免與既有技能搶觸發</a:t>
             </a:r>
             <a:endParaRPr lang="en-US" sz="1300" dirty="0"/>
           </a:p>
@@ -12358,7 +12358,7 @@
                 <a:ea typeface="Microsoft JhengHei" pitchFamily="34" charset="-122"/>
                 <a:cs typeface="Microsoft JhengHei" pitchFamily="34" charset="-120"/>
               </a:rPr>
-              <a:t>新工作階段中只給數據、不重述規則，仍能正確套用四級分級門檻</a:t>
+              <a:t>「複製檔案」核准卡已按下核准，技能確實發布到 OneDrive 的 skills 資料夾</a:t>
             </a:r>
             <a:endParaRPr lang="en-US" sz="1300" dirty="0"/>
           </a:p>
@@ -12421,7 +12421,7 @@
                 <a:ea typeface="Microsoft JhengHei" pitchFamily="34" charset="-122"/>
                 <a:cs typeface="Microsoft JhengHei" pitchFamily="34" charset="-120"/>
               </a:rPr>
-              <a:t>桃園中壢店（達成率 71.4%、缺貨 12 次）被標為嚴重落後並列入下週優先處理</a:t>
+              <a:t>新工作階段中只給數據、不重述規則，仍能正確套用四級分級門檻</a:t>
             </a:r>
             <a:endParaRPr lang="en-US" sz="1300" dirty="0"/>
           </a:p>

--- a/CoworkPlaybook/Cowork_教育訓練簡報_零售通路版.pptx
+++ b/CoworkPlaybook/Cowork_教育訓練簡報_零售通路版.pptx
@@ -11176,7 +11176,7 @@
         </p:nvSpPr>
         <p:spPr>
           <a:xfrm>
-            <a:off x="4526280" y="3310128"/>
+            <a:off x="4526280" y="3090672"/>
             <a:ext cx="457200" cy="457200"/>
           </a:xfrm>
           <a:prstGeom prst="ellipse">
@@ -11203,7 +11203,7 @@
         </p:nvSpPr>
         <p:spPr>
           <a:xfrm>
-            <a:off x="4526280" y="3310128"/>
+            <a:off x="4526280" y="3090672"/>
             <a:ext cx="457200" cy="457200"/>
           </a:xfrm>
           <a:prstGeom prst="rect">
@@ -11242,7 +11242,7 @@
         </p:nvSpPr>
         <p:spPr>
           <a:xfrm>
-            <a:off x="5166360" y="3291840"/>
+            <a:off x="5166360" y="3072384"/>
             <a:ext cx="6492240" cy="365760"/>
           </a:xfrm>
           <a:prstGeom prst="rect">
@@ -11281,7 +11281,7 @@
         </p:nvSpPr>
         <p:spPr>
           <a:xfrm>
-            <a:off x="5166360" y="3657600"/>
+            <a:off x="5166360" y="3438144"/>
             <a:ext cx="6492240" cy="502920"/>
           </a:xfrm>
           <a:prstGeom prst="rect">
@@ -11323,7 +11323,7 @@
         </p:nvSpPr>
         <p:spPr>
           <a:xfrm>
-            <a:off x="4526280" y="4334256"/>
+            <a:off x="4526280" y="3895344"/>
             <a:ext cx="457200" cy="457200"/>
           </a:xfrm>
           <a:prstGeom prst="ellipse">
@@ -11350,7 +11350,7 @@
         </p:nvSpPr>
         <p:spPr>
           <a:xfrm>
-            <a:off x="4526280" y="4334256"/>
+            <a:off x="4526280" y="3895344"/>
             <a:ext cx="457200" cy="457200"/>
           </a:xfrm>
           <a:prstGeom prst="rect">
@@ -11389,7 +11389,7 @@
         </p:nvSpPr>
         <p:spPr>
           <a:xfrm>
-            <a:off x="5166360" y="4315968"/>
+            <a:off x="5166360" y="3877056"/>
             <a:ext cx="6492240" cy="365760"/>
           </a:xfrm>
           <a:prstGeom prst="rect">
@@ -11428,7 +11428,7 @@
         </p:nvSpPr>
         <p:spPr>
           <a:xfrm>
-            <a:off x="5166360" y="4681728"/>
+            <a:off x="5166360" y="4242816"/>
             <a:ext cx="6492240" cy="502920"/>
           </a:xfrm>
           <a:prstGeom prst="rect">
@@ -11470,7 +11470,7 @@
         </p:nvSpPr>
         <p:spPr>
           <a:xfrm>
-            <a:off x="4526280" y="5358384"/>
+            <a:off x="4526280" y="4700016"/>
             <a:ext cx="457200" cy="457200"/>
           </a:xfrm>
           <a:prstGeom prst="ellipse">
@@ -11497,7 +11497,7 @@
         </p:nvSpPr>
         <p:spPr>
           <a:xfrm>
-            <a:off x="4526280" y="5358384"/>
+            <a:off x="4526280" y="4700016"/>
             <a:ext cx="457200" cy="457200"/>
           </a:xfrm>
           <a:prstGeom prst="rect">
@@ -11536,7 +11536,7 @@
         </p:nvSpPr>
         <p:spPr>
           <a:xfrm>
-            <a:off x="5166360" y="5340096"/>
+            <a:off x="5166360" y="4681728"/>
             <a:ext cx="6492240" cy="365760"/>
           </a:xfrm>
           <a:prstGeom prst="rect">
@@ -11575,7 +11575,7 @@
         </p:nvSpPr>
         <p:spPr>
           <a:xfrm>
-            <a:off x="5166360" y="5705856"/>
+            <a:off x="5166360" y="5047488"/>
             <a:ext cx="6492240" cy="502920"/>
           </a:xfrm>
           <a:prstGeom prst="rect">
@@ -11617,7 +11617,7 @@
         </p:nvSpPr>
         <p:spPr>
           <a:xfrm>
-            <a:off x="4526280" y="6382512"/>
+            <a:off x="4526280" y="5504688"/>
             <a:ext cx="457200" cy="457200"/>
           </a:xfrm>
           <a:prstGeom prst="ellipse">
@@ -11644,7 +11644,7 @@
         </p:nvSpPr>
         <p:spPr>
           <a:xfrm>
-            <a:off x="4526280" y="6382512"/>
+            <a:off x="4526280" y="5504688"/>
             <a:ext cx="457200" cy="457200"/>
           </a:xfrm>
           <a:prstGeom prst="rect">
@@ -11683,7 +11683,7 @@
         </p:nvSpPr>
         <p:spPr>
           <a:xfrm>
-            <a:off x="5166360" y="6364224"/>
+            <a:off x="5166360" y="5486400"/>
             <a:ext cx="6492240" cy="365760"/>
           </a:xfrm>
           <a:prstGeom prst="rect">
@@ -11722,7 +11722,7 @@
         </p:nvSpPr>
         <p:spPr>
           <a:xfrm>
-            <a:off x="5166360" y="6729984"/>
+            <a:off x="5166360" y="5852160"/>
             <a:ext cx="6492240" cy="502920"/>
           </a:xfrm>
           <a:prstGeom prst="rect">
@@ -14964,7 +14964,7 @@
                 <a:ea typeface="Microsoft JhengHei" pitchFamily="34" charset="-122"/>
                 <a:cs typeface="Microsoft JhengHei" pitchFamily="34" charset="-120"/>
               </a:rPr>
-              <a:t>不能存取本機檔案、刪除 OneDrive/SharePoint 檔案或讀取加密檔；附件 &lt;200MB，自訂技能未驗證需審閱。</a:t>
+              <a:t>不能存取本機檔案、刪除 OneDrive/SharePoint 檔案或讀取加密檔；附件 &lt;200MB；自訂技能與第三方 plugin 未經 Microsoft 驗證，需自行審閱。官方明列不適用於「免人工審查即需保證正確」的用途。</a:t>
             </a:r>
             <a:endParaRPr lang="en-US" sz="1300" dirty="0"/>
           </a:p>
@@ -15159,7 +15159,7 @@
                 <a:ea typeface="Microsoft JhengHei" pitchFamily="34" charset="-122"/>
                 <a:cs typeface="Microsoft JhengHei" pitchFamily="34" charset="-120"/>
               </a:rPr>
-              <a:t>開始前請確認：M365 Copilot 授權、已啟用用量計費（Cowork 現已正式開放）、租戶已啟用 Anthropic 子處理者；可在 Web/桌面/行動/Outlook/Teams 使用（本機瀏覽器工作僅限網頁版＋最新版 Edge）。</a:t>
+              <a:t>開始前請確認：每位使用者一張 M365 Copilot 授權、管理員已啟用用量計費（Copilot Credits，未啟用則無法存取）、租戶位於 Anthropic 支援地區；可在 Web/桌面/行動/Outlook/Teams 使用（本機瀏覽器工作僅限網頁版＋Edge 150 以上，且預設停用需管理員開啟）。</a:t>
             </a:r>
             <a:endParaRPr lang="en-US" sz="1500" dirty="0"/>
           </a:p>
@@ -15490,7 +15490,7 @@
                 <a:ea typeface="Microsoft JhengHei" pitchFamily="34" charset="-122"/>
                 <a:cs typeface="Microsoft JhengHei" pitchFamily="34" charset="-120"/>
               </a:rPr>
-              <a:t>模型選擇器支援 Auto、Claude Opus/Sonnet、Sonnet+Opus 顧問配對、Fable 5 preview、GPT 5.5</a:t>
+              <a:t>模型選擇器：Auto（預設）、GPT 5.5 Frontier、GPT 5.6 Sol／Terra、Opus 5、Sonnet 5、Fable 5（預覽・預設關閉）</a:t>
             </a:r>
             <a:endParaRPr lang="en-US" sz="1400" dirty="0"/>
           </a:p>
@@ -15553,7 +15553,7 @@
                 <a:ea typeface="Microsoft JhengHei" pitchFamily="34" charset="-122"/>
                 <a:cs typeface="Microsoft JhengHei" pitchFamily="34" charset="-120"/>
               </a:rPr>
-              <a:t>想要自動觸發？到「排程」頁設定事件驅動任務（收到指定信件／被 @提及時自動執行）</a:t>
+              <a:t>想要自動觸發？到「Automations」頁設定排程提示（上限 5 個）或事件觸發任務（收信／被 @提及）</a:t>
             </a:r>
             <a:endParaRPr lang="en-US" sz="1400" dirty="0"/>
           </a:p>
@@ -16666,8 +16666,8 @@
         </p:nvSpPr>
         <p:spPr>
           <a:xfrm>
-            <a:off x="640080" y="1828800"/>
-            <a:ext cx="2743200" cy="786384"/>
+            <a:off x="640080" y="1737360"/>
+            <a:ext cx="2743200" cy="457200"/>
           </a:xfrm>
           <a:prstGeom prst="rect">
             <a:avLst/>
@@ -16686,8 +16686,8 @@
         </p:nvSpPr>
         <p:spPr>
           <a:xfrm>
-            <a:off x="3383280" y="1828800"/>
-            <a:ext cx="4023360" cy="786384"/>
+            <a:off x="3383280" y="1737360"/>
+            <a:ext cx="4023360" cy="457200"/>
           </a:xfrm>
           <a:prstGeom prst="rect">
             <a:avLst/>
@@ -16706,8 +16706,8 @@
         </p:nvSpPr>
         <p:spPr>
           <a:xfrm>
-            <a:off x="7406640" y="1828800"/>
-            <a:ext cx="4142232" cy="786384"/>
+            <a:off x="7406640" y="1737360"/>
+            <a:ext cx="4142232" cy="457200"/>
           </a:xfrm>
           <a:prstGeom prst="rect">
             <a:avLst/>
@@ -16726,8 +16726,8 @@
         </p:nvSpPr>
         <p:spPr>
           <a:xfrm>
-            <a:off x="640080" y="1828800"/>
-            <a:ext cx="2743200" cy="786384"/>
+            <a:off x="640080" y="1737360"/>
+            <a:ext cx="2743200" cy="457200"/>
           </a:xfrm>
           <a:prstGeom prst="rect">
             <a:avLst/>
@@ -16754,8 +16754,8 @@
         </p:nvSpPr>
         <p:spPr>
           <a:xfrm>
-            <a:off x="3383280" y="1828800"/>
-            <a:ext cx="4023360" cy="786384"/>
+            <a:off x="3383280" y="1737360"/>
+            <a:ext cx="4023360" cy="457200"/>
           </a:xfrm>
           <a:prstGeom prst="rect">
             <a:avLst/>
@@ -16771,7 +16771,7 @@
               <a:buNone/>
             </a:pPr>
             <a:r>
-              <a:rPr lang="en-US" sz="1500" b="1" dirty="0">
+              <a:rPr lang="en-US" sz="1400" b="1" dirty="0">
                 <a:solidFill>
                   <a:srgbClr val="FFFFFF"/>
                 </a:solidFill>
@@ -16781,7 +16781,7 @@
               </a:rPr>
               <a:t>一般 Copilot Chat</a:t>
             </a:r>
-            <a:endParaRPr lang="en-US" sz="1500" dirty="0"/>
+            <a:endParaRPr lang="en-US" sz="1400" dirty="0"/>
           </a:p>
         </p:txBody>
       </p:sp>
@@ -16793,8 +16793,8 @@
         </p:nvSpPr>
         <p:spPr>
           <a:xfrm>
-            <a:off x="7406640" y="1828800"/>
-            <a:ext cx="4142232" cy="786384"/>
+            <a:off x="7406640" y="1737360"/>
+            <a:ext cx="4142232" cy="457200"/>
           </a:xfrm>
           <a:prstGeom prst="rect">
             <a:avLst/>
@@ -16810,7 +16810,7 @@
               <a:buNone/>
             </a:pPr>
             <a:r>
-              <a:rPr lang="en-US" sz="1500" b="1" dirty="0">
+              <a:rPr lang="en-US" sz="1400" b="1" dirty="0">
                 <a:solidFill>
                   <a:srgbClr val="FFFFFF"/>
                 </a:solidFill>
@@ -16820,7 +16820,7 @@
               </a:rPr>
               <a:t>Copilot Cowork</a:t>
             </a:r>
-            <a:endParaRPr lang="en-US" sz="1500" dirty="0"/>
+            <a:endParaRPr lang="en-US" sz="1400" dirty="0"/>
           </a:p>
         </p:txBody>
       </p:sp>
@@ -16832,8 +16832,8 @@
         </p:nvSpPr>
         <p:spPr>
           <a:xfrm>
-            <a:off x="640080" y="2615184"/>
-            <a:ext cx="10908792" cy="786384"/>
+            <a:off x="640080" y="2194560"/>
+            <a:ext cx="10908792" cy="457200"/>
           </a:xfrm>
           <a:prstGeom prst="rect">
             <a:avLst/>
@@ -16852,8 +16852,8 @@
         </p:nvSpPr>
         <p:spPr>
           <a:xfrm>
-            <a:off x="822960" y="2615184"/>
-            <a:ext cx="2468880" cy="786384"/>
+            <a:off x="822960" y="2194560"/>
+            <a:ext cx="2468880" cy="457200"/>
           </a:xfrm>
           <a:prstGeom prst="rect">
             <a:avLst/>
@@ -16869,7 +16869,7 @@
               <a:buNone/>
             </a:pPr>
             <a:r>
-              <a:rPr lang="en-US" sz="1400" b="1" dirty="0">
+              <a:rPr lang="en-US" sz="1250" b="1" dirty="0">
                 <a:solidFill>
                   <a:srgbClr val="1E2235"/>
                 </a:solidFill>
@@ -16879,7 +16879,7 @@
               </a:rPr>
               <a:t>互動方式</a:t>
             </a:r>
-            <a:endParaRPr lang="en-US" sz="1400" dirty="0"/>
+            <a:endParaRPr lang="en-US" sz="1250" dirty="0"/>
           </a:p>
         </p:txBody>
       </p:sp>
@@ -16891,8 +16891,8 @@
         </p:nvSpPr>
         <p:spPr>
           <a:xfrm>
-            <a:off x="3566160" y="2615184"/>
-            <a:ext cx="3657600" cy="786384"/>
+            <a:off x="3566160" y="2194560"/>
+            <a:ext cx="3657600" cy="457200"/>
           </a:xfrm>
           <a:prstGeom prst="rect">
             <a:avLst/>
@@ -16908,7 +16908,7 @@
               <a:buNone/>
             </a:pPr>
             <a:r>
-              <a:rPr lang="en-US" sz="1400" dirty="0">
+              <a:rPr lang="en-US" sz="1250" dirty="0">
                 <a:solidFill>
                   <a:srgbClr val="5B6079"/>
                 </a:solidFill>
@@ -16918,7 +16918,7 @@
               </a:rPr>
               <a:t>快速單輪問答</a:t>
             </a:r>
-            <a:endParaRPr lang="en-US" sz="1400" dirty="0"/>
+            <a:endParaRPr lang="en-US" sz="1250" dirty="0"/>
           </a:p>
         </p:txBody>
       </p:sp>
@@ -16930,8 +16930,8 @@
         </p:nvSpPr>
         <p:spPr>
           <a:xfrm>
-            <a:off x="7589520" y="2615184"/>
-            <a:ext cx="3776472" cy="786384"/>
+            <a:off x="7589520" y="2194560"/>
+            <a:ext cx="3776472" cy="457200"/>
           </a:xfrm>
           <a:prstGeom prst="rect">
             <a:avLst/>
@@ -16947,7 +16947,7 @@
               <a:buNone/>
             </a:pPr>
             <a:r>
-              <a:rPr lang="en-US" sz="1400" dirty="0">
+              <a:rPr lang="en-US" sz="1250" dirty="0">
                 <a:solidFill>
                   <a:srgbClr val="1E2235"/>
                 </a:solidFill>
@@ -16957,7 +16957,7 @@
               </a:rPr>
               <a:t>交付目標，跨 App 自主多步執行</a:t>
             </a:r>
-            <a:endParaRPr lang="en-US" sz="1400" dirty="0"/>
+            <a:endParaRPr lang="en-US" sz="1250" dirty="0"/>
           </a:p>
         </p:txBody>
       </p:sp>
@@ -16969,8 +16969,8 @@
         </p:nvSpPr>
         <p:spPr>
           <a:xfrm>
-            <a:off x="640080" y="3401568"/>
-            <a:ext cx="10908792" cy="786384"/>
+            <a:off x="640080" y="2651760"/>
+            <a:ext cx="10908792" cy="457200"/>
           </a:xfrm>
           <a:prstGeom prst="rect">
             <a:avLst/>
@@ -16989,8 +16989,8 @@
         </p:nvSpPr>
         <p:spPr>
           <a:xfrm>
-            <a:off x="822960" y="3401568"/>
-            <a:ext cx="2468880" cy="786384"/>
+            <a:off x="822960" y="2651760"/>
+            <a:ext cx="2468880" cy="457200"/>
           </a:xfrm>
           <a:prstGeom prst="rect">
             <a:avLst/>
@@ -17006,7 +17006,7 @@
               <a:buNone/>
             </a:pPr>
             <a:r>
-              <a:rPr lang="en-US" sz="1400" b="1" dirty="0">
+              <a:rPr lang="en-US" sz="1250" b="1" dirty="0">
                 <a:solidFill>
                   <a:srgbClr val="1E2235"/>
                 </a:solidFill>
@@ -17014,9 +17014,9 @@
                 <a:ea typeface="Microsoft JhengHei" pitchFamily="34" charset="-122"/>
                 <a:cs typeface="Microsoft JhengHei" pitchFamily="34" charset="-120"/>
               </a:rPr>
-              <a:t>檔案處理</a:t>
-            </a:r>
-            <a:endParaRPr lang="en-US" sz="1400" dirty="0"/>
+              <a:t>速度</a:t>
+            </a:r>
+            <a:endParaRPr lang="en-US" sz="1250" dirty="0"/>
           </a:p>
         </p:txBody>
       </p:sp>
@@ -17028,8 +17028,8 @@
         </p:nvSpPr>
         <p:spPr>
           <a:xfrm>
-            <a:off x="3566160" y="3401568"/>
-            <a:ext cx="3657600" cy="786384"/>
+            <a:off x="3566160" y="2651760"/>
+            <a:ext cx="3657600" cy="457200"/>
           </a:xfrm>
           <a:prstGeom prst="rect">
             <a:avLst/>
@@ -17045,7 +17045,7 @@
               <a:buNone/>
             </a:pPr>
             <a:r>
-              <a:rPr lang="en-US" sz="1400" dirty="0">
+              <a:rPr lang="en-US" sz="1250" dirty="0">
                 <a:solidFill>
                   <a:srgbClr val="5B6079"/>
                 </a:solidFill>
@@ -17053,9 +17053,9 @@
                 <a:ea typeface="Microsoft JhengHei" pitchFamily="34" charset="-122"/>
                 <a:cs typeface="Microsoft JhengHei" pitchFamily="34" charset="-120"/>
               </a:rPr>
-              <a:t>貼上片段內容</a:t>
-            </a:r>
-            <a:endParaRPr lang="en-US" sz="1400" dirty="0"/>
+              <a:t>秒～分鐘</a:t>
+            </a:r>
+            <a:endParaRPr lang="en-US" sz="1250" dirty="0"/>
           </a:p>
         </p:txBody>
       </p:sp>
@@ -17067,8 +17067,8 @@
         </p:nvSpPr>
         <p:spPr>
           <a:xfrm>
-            <a:off x="7589520" y="3401568"/>
-            <a:ext cx="3776472" cy="786384"/>
+            <a:off x="7589520" y="2651760"/>
+            <a:ext cx="3776472" cy="457200"/>
           </a:xfrm>
           <a:prstGeom prst="rect">
             <a:avLst/>
@@ -17084,7 +17084,7 @@
               <a:buNone/>
             </a:pPr>
             <a:r>
-              <a:rPr lang="en-US" sz="1400" dirty="0">
+              <a:rPr lang="en-US" sz="1250" dirty="0">
                 <a:solidFill>
                   <a:srgbClr val="1E2235"/>
                 </a:solidFill>
@@ -17092,9 +17092,9 @@
                 <a:ea typeface="Microsoft JhengHei" pitchFamily="34" charset="-122"/>
                 <a:cs typeface="Microsoft JhengHei" pitchFamily="34" charset="-120"/>
               </a:rPr>
-              <a:t>讀取雲端附件、產出新檔案；不存取本機檔案</a:t>
-            </a:r>
-            <a:endParaRPr lang="en-US" sz="1400" dirty="0"/>
+              <a:t>分鐘～數小時（自主執行）</a:t>
+            </a:r>
+            <a:endParaRPr lang="en-US" sz="1250" dirty="0"/>
           </a:p>
         </p:txBody>
       </p:sp>
@@ -17106,8 +17106,8 @@
         </p:nvSpPr>
         <p:spPr>
           <a:xfrm>
-            <a:off x="640080" y="4187952"/>
-            <a:ext cx="10908792" cy="786384"/>
+            <a:off x="640080" y="3108960"/>
+            <a:ext cx="10908792" cy="457200"/>
           </a:xfrm>
           <a:prstGeom prst="rect">
             <a:avLst/>
@@ -17126,8 +17126,8 @@
         </p:nvSpPr>
         <p:spPr>
           <a:xfrm>
-            <a:off x="822960" y="4187952"/>
-            <a:ext cx="2468880" cy="786384"/>
+            <a:off x="822960" y="3108960"/>
+            <a:ext cx="2468880" cy="457200"/>
           </a:xfrm>
           <a:prstGeom prst="rect">
             <a:avLst/>
@@ -17143,7 +17143,7 @@
               <a:buNone/>
             </a:pPr>
             <a:r>
-              <a:rPr lang="en-US" sz="1400" b="1" dirty="0">
+              <a:rPr lang="en-US" sz="1250" b="1" dirty="0">
                 <a:solidFill>
                   <a:srgbClr val="1E2235"/>
                 </a:solidFill>
@@ -17151,9 +17151,9 @@
                 <a:ea typeface="Microsoft JhengHei" pitchFamily="34" charset="-122"/>
                 <a:cs typeface="Microsoft JhengHei" pitchFamily="34" charset="-120"/>
               </a:rPr>
-              <a:t>技能運用</a:t>
-            </a:r>
-            <a:endParaRPr lang="en-US" sz="1400" dirty="0"/>
+              <a:t>任務複雜度</a:t>
+            </a:r>
+            <a:endParaRPr lang="en-US" sz="1250" dirty="0"/>
           </a:p>
         </p:txBody>
       </p:sp>
@@ -17165,8 +17165,8 @@
         </p:nvSpPr>
         <p:spPr>
           <a:xfrm>
-            <a:off x="3566160" y="4187952"/>
-            <a:ext cx="3657600" cy="786384"/>
+            <a:off x="3566160" y="3108960"/>
+            <a:ext cx="3657600" cy="457200"/>
           </a:xfrm>
           <a:prstGeom prst="rect">
             <a:avLst/>
@@ -17182,7 +17182,7 @@
               <a:buNone/>
             </a:pPr>
             <a:r>
-              <a:rPr lang="en-US" sz="1400" dirty="0">
+              <a:rPr lang="en-US" sz="1250" dirty="0">
                 <a:solidFill>
                   <a:srgbClr val="5B6079"/>
                 </a:solidFill>
@@ -17190,9 +17190,9 @@
                 <a:ea typeface="Microsoft JhengHei" pitchFamily="34" charset="-122"/>
                 <a:cs typeface="Microsoft JhengHei" pitchFamily="34" charset="-120"/>
               </a:rPr>
-              <a:t>單一對話能力</a:t>
-            </a:r>
-            <a:endParaRPr lang="en-US" sz="1400" dirty="0"/>
+              <a:t>單步驟、單一工作階段</a:t>
+            </a:r>
+            <a:endParaRPr lang="en-US" sz="1250" dirty="0"/>
           </a:p>
         </p:txBody>
       </p:sp>
@@ -17204,8 +17204,8 @@
         </p:nvSpPr>
         <p:spPr>
           <a:xfrm>
-            <a:off x="7589520" y="4187952"/>
-            <a:ext cx="3776472" cy="786384"/>
+            <a:off x="7589520" y="3108960"/>
+            <a:ext cx="3776472" cy="457200"/>
           </a:xfrm>
           <a:prstGeom prst="rect">
             <a:avLst/>
@@ -17221,7 +17221,7 @@
               <a:buNone/>
             </a:pPr>
             <a:r>
-              <a:rPr lang="en-US" sz="1400" dirty="0">
+              <a:rPr lang="en-US" sz="1250" dirty="0">
                 <a:solidFill>
                   <a:srgbClr val="1E2235"/>
                 </a:solidFill>
@@ -17229,9 +17229,9 @@
                 <a:ea typeface="Microsoft JhengHei" pitchFamily="34" charset="-122"/>
                 <a:cs typeface="Microsoft JhengHei" pitchFamily="34" charset="-120"/>
               </a:rPr>
-              <a:t>自動載入 13 個內建技能與自訂技能</a:t>
-            </a:r>
-            <a:endParaRPr lang="en-US" sz="1400" dirty="0"/>
+              <a:t>跨任務與來源的多步驟工作流</a:t>
+            </a:r>
+            <a:endParaRPr lang="en-US" sz="1250" dirty="0"/>
           </a:p>
         </p:txBody>
       </p:sp>
@@ -17243,8 +17243,8 @@
         </p:nvSpPr>
         <p:spPr>
           <a:xfrm>
-            <a:off x="640080" y="4974336"/>
-            <a:ext cx="10908792" cy="786384"/>
+            <a:off x="640080" y="3566160"/>
+            <a:ext cx="10908792" cy="457200"/>
           </a:xfrm>
           <a:prstGeom prst="rect">
             <a:avLst/>
@@ -17263,8 +17263,8 @@
         </p:nvSpPr>
         <p:spPr>
           <a:xfrm>
-            <a:off x="822960" y="4974336"/>
-            <a:ext cx="2468880" cy="786384"/>
+            <a:off x="822960" y="3566160"/>
+            <a:ext cx="2468880" cy="457200"/>
           </a:xfrm>
           <a:prstGeom prst="rect">
             <a:avLst/>
@@ -17280,7 +17280,7 @@
               <a:buNone/>
             </a:pPr>
             <a:r>
-              <a:rPr lang="en-US" sz="1400" b="1" dirty="0">
+              <a:rPr lang="en-US" sz="1250" b="1" dirty="0">
                 <a:solidFill>
                   <a:srgbClr val="1E2235"/>
                 </a:solidFill>
@@ -17288,9 +17288,9 @@
                 <a:ea typeface="Microsoft JhengHei" pitchFamily="34" charset="-122"/>
                 <a:cs typeface="Microsoft JhengHei" pitchFamily="34" charset="-120"/>
               </a:rPr>
-              <a:t>產出</a:t>
-            </a:r>
-            <a:endParaRPr lang="en-US" sz="1400" dirty="0"/>
+              <a:t>檔案處理</a:t>
+            </a:r>
+            <a:endParaRPr lang="en-US" sz="1250" dirty="0"/>
           </a:p>
         </p:txBody>
       </p:sp>
@@ -17302,8 +17302,8 @@
         </p:nvSpPr>
         <p:spPr>
           <a:xfrm>
-            <a:off x="3566160" y="4974336"/>
-            <a:ext cx="3657600" cy="786384"/>
+            <a:off x="3566160" y="3566160"/>
+            <a:ext cx="3657600" cy="457200"/>
           </a:xfrm>
           <a:prstGeom prst="rect">
             <a:avLst/>
@@ -17319,7 +17319,7 @@
               <a:buNone/>
             </a:pPr>
             <a:r>
-              <a:rPr lang="en-US" sz="1400" dirty="0">
+              <a:rPr lang="en-US" sz="1250" dirty="0">
                 <a:solidFill>
                   <a:srgbClr val="5B6079"/>
                 </a:solidFill>
@@ -17327,9 +17327,9 @@
                 <a:ea typeface="Microsoft JhengHei" pitchFamily="34" charset="-122"/>
                 <a:cs typeface="Microsoft JhengHei" pitchFamily="34" charset="-120"/>
               </a:rPr>
-              <a:t>聊天視窗的文字</a:t>
-            </a:r>
-            <a:endParaRPr lang="en-US" sz="1400" dirty="0"/>
+              <a:t>貼上片段內容</a:t>
+            </a:r>
+            <a:endParaRPr lang="en-US" sz="1250" dirty="0"/>
           </a:p>
         </p:txBody>
       </p:sp>
@@ -17341,8 +17341,8 @@
         </p:nvSpPr>
         <p:spPr>
           <a:xfrm>
-            <a:off x="7589520" y="4974336"/>
-            <a:ext cx="3776472" cy="786384"/>
+            <a:off x="7589520" y="3566160"/>
+            <a:ext cx="3776472" cy="457200"/>
           </a:xfrm>
           <a:prstGeom prst="rect">
             <a:avLst/>
@@ -17358,7 +17358,7 @@
               <a:buNone/>
             </a:pPr>
             <a:r>
-              <a:rPr lang="en-US" sz="1400" dirty="0">
+              <a:rPr lang="en-US" sz="1250" dirty="0">
                 <a:solidFill>
                   <a:srgbClr val="1E2235"/>
                 </a:solidFill>
@@ -17366,9 +17366,9 @@
                 <a:ea typeface="Microsoft JhengHei" pitchFamily="34" charset="-122"/>
                 <a:cs typeface="Microsoft JhengHei" pitchFamily="34" charset="-120"/>
               </a:rPr>
-              <a:t>OneDrive 中真實的文件、試算表、簡報</a:t>
-            </a:r>
-            <a:endParaRPr lang="en-US" sz="1400" dirty="0"/>
+              <a:t>讀取雲端附件、產出新檔案；不存取本機檔案</a:t>
+            </a:r>
+            <a:endParaRPr lang="en-US" sz="1250" dirty="0"/>
           </a:p>
         </p:txBody>
       </p:sp>
@@ -17380,8 +17380,8 @@
         </p:nvSpPr>
         <p:spPr>
           <a:xfrm>
-            <a:off x="640080" y="5760720"/>
-            <a:ext cx="10908792" cy="786384"/>
+            <a:off x="640080" y="4023360"/>
+            <a:ext cx="10908792" cy="457200"/>
           </a:xfrm>
           <a:prstGeom prst="rect">
             <a:avLst/>
@@ -17400,8 +17400,8 @@
         </p:nvSpPr>
         <p:spPr>
           <a:xfrm>
-            <a:off x="822960" y="5760720"/>
-            <a:ext cx="2468880" cy="786384"/>
+            <a:off x="822960" y="4023360"/>
+            <a:ext cx="2468880" cy="457200"/>
           </a:xfrm>
           <a:prstGeom prst="rect">
             <a:avLst/>
@@ -17417,7 +17417,7 @@
               <a:buNone/>
             </a:pPr>
             <a:r>
-              <a:rPr lang="en-US" sz="1400" b="1" dirty="0">
+              <a:rPr lang="en-US" sz="1250" b="1" dirty="0">
                 <a:solidFill>
                   <a:srgbClr val="1E2235"/>
                 </a:solidFill>
@@ -17425,22 +17425,570 @@
                 <a:ea typeface="Microsoft JhengHei" pitchFamily="34" charset="-122"/>
                 <a:cs typeface="Microsoft JhengHei" pitchFamily="34" charset="-120"/>
               </a:rPr>
+              <a:t>技能運用</a:t>
+            </a:r>
+            <a:endParaRPr lang="en-US" sz="1250" dirty="0"/>
+          </a:p>
+        </p:txBody>
+      </p:sp>
+      <p:sp>
+        <p:nvSpPr>
+          <p:cNvPr id="29" name="Text 27"/>
+          <p:cNvSpPr/>
+          <p:nvPr/>
+        </p:nvSpPr>
+        <p:spPr>
+          <a:xfrm>
+            <a:off x="3566160" y="4023360"/>
+            <a:ext cx="3657600" cy="457200"/>
+          </a:xfrm>
+          <a:prstGeom prst="rect">
+            <a:avLst/>
+          </a:prstGeom>
+          <a:noFill/>
+          <a:ln/>
+        </p:spPr>
+        <p:txBody>
+          <a:bodyPr wrap="square" rtlCol="0" anchor="ctr"/>
+          <a:lstStyle/>
+          <a:p>
+            <a:pPr indent="0" marL="0">
+              <a:buNone/>
+            </a:pPr>
+            <a:r>
+              <a:rPr lang="en-US" sz="1250" dirty="0">
+                <a:solidFill>
+                  <a:srgbClr val="5B6079"/>
+                </a:solidFill>
+                <a:latin typeface="Microsoft JhengHei" pitchFamily="34" charset="0"/>
+                <a:ea typeface="Microsoft JhengHei" pitchFamily="34" charset="-122"/>
+                <a:cs typeface="Microsoft JhengHei" pitchFamily="34" charset="-120"/>
+              </a:rPr>
+              <a:t>單一對話能力</a:t>
+            </a:r>
+            <a:endParaRPr lang="en-US" sz="1250" dirty="0"/>
+          </a:p>
+        </p:txBody>
+      </p:sp>
+      <p:sp>
+        <p:nvSpPr>
+          <p:cNvPr id="30" name="Text 28"/>
+          <p:cNvSpPr/>
+          <p:nvPr/>
+        </p:nvSpPr>
+        <p:spPr>
+          <a:xfrm>
+            <a:off x="7589520" y="4023360"/>
+            <a:ext cx="3776472" cy="457200"/>
+          </a:xfrm>
+          <a:prstGeom prst="rect">
+            <a:avLst/>
+          </a:prstGeom>
+          <a:noFill/>
+          <a:ln/>
+        </p:spPr>
+        <p:txBody>
+          <a:bodyPr wrap="square" rtlCol="0" anchor="ctr"/>
+          <a:lstStyle/>
+          <a:p>
+            <a:pPr indent="0" marL="0">
+              <a:buNone/>
+            </a:pPr>
+            <a:r>
+              <a:rPr lang="en-US" sz="1250" dirty="0">
+                <a:solidFill>
+                  <a:srgbClr val="1E2235"/>
+                </a:solidFill>
+                <a:latin typeface="Microsoft JhengHei" pitchFamily="34" charset="0"/>
+                <a:ea typeface="Microsoft JhengHei" pitchFamily="34" charset="-122"/>
+                <a:cs typeface="Microsoft JhengHei" pitchFamily="34" charset="-120"/>
+              </a:rPr>
+              <a:t>自動載入 13 個內建技能與自訂技能</a:t>
+            </a:r>
+            <a:endParaRPr lang="en-US" sz="1250" dirty="0"/>
+          </a:p>
+        </p:txBody>
+      </p:sp>
+      <p:sp>
+        <p:nvSpPr>
+          <p:cNvPr id="31" name="Shape 29"/>
+          <p:cNvSpPr/>
+          <p:nvPr/>
+        </p:nvSpPr>
+        <p:spPr>
+          <a:xfrm>
+            <a:off x="640080" y="4480560"/>
+            <a:ext cx="10908792" cy="457200"/>
+          </a:xfrm>
+          <a:prstGeom prst="rect">
+            <a:avLst/>
+          </a:prstGeom>
+          <a:solidFill>
+            <a:srgbClr val="FFFFFF"/>
+          </a:solidFill>
+          <a:ln/>
+        </p:spPr>
+      </p:sp>
+      <p:sp>
+        <p:nvSpPr>
+          <p:cNvPr id="32" name="Text 30"/>
+          <p:cNvSpPr/>
+          <p:nvPr/>
+        </p:nvSpPr>
+        <p:spPr>
+          <a:xfrm>
+            <a:off x="822960" y="4480560"/>
+            <a:ext cx="2468880" cy="457200"/>
+          </a:xfrm>
+          <a:prstGeom prst="rect">
+            <a:avLst/>
+          </a:prstGeom>
+          <a:noFill/>
+          <a:ln/>
+        </p:spPr>
+        <p:txBody>
+          <a:bodyPr wrap="square" rtlCol="0" anchor="ctr"/>
+          <a:lstStyle/>
+          <a:p>
+            <a:pPr indent="0" marL="0">
+              <a:buNone/>
+            </a:pPr>
+            <a:r>
+              <a:rPr lang="en-US" sz="1250" b="1" dirty="0">
+                <a:solidFill>
+                  <a:srgbClr val="1E2235"/>
+                </a:solidFill>
+                <a:latin typeface="Microsoft JhengHei" pitchFamily="34" charset="0"/>
+                <a:ea typeface="Microsoft JhengHei" pitchFamily="34" charset="-122"/>
+                <a:cs typeface="Microsoft JhengHei" pitchFamily="34" charset="-120"/>
+              </a:rPr>
+              <a:t>產出</a:t>
+            </a:r>
+            <a:endParaRPr lang="en-US" sz="1250" dirty="0"/>
+          </a:p>
+        </p:txBody>
+      </p:sp>
+      <p:sp>
+        <p:nvSpPr>
+          <p:cNvPr id="33" name="Text 31"/>
+          <p:cNvSpPr/>
+          <p:nvPr/>
+        </p:nvSpPr>
+        <p:spPr>
+          <a:xfrm>
+            <a:off x="3566160" y="4480560"/>
+            <a:ext cx="3657600" cy="457200"/>
+          </a:xfrm>
+          <a:prstGeom prst="rect">
+            <a:avLst/>
+          </a:prstGeom>
+          <a:noFill/>
+          <a:ln/>
+        </p:spPr>
+        <p:txBody>
+          <a:bodyPr wrap="square" rtlCol="0" anchor="ctr"/>
+          <a:lstStyle/>
+          <a:p>
+            <a:pPr indent="0" marL="0">
+              <a:buNone/>
+            </a:pPr>
+            <a:r>
+              <a:rPr lang="en-US" sz="1250" dirty="0">
+                <a:solidFill>
+                  <a:srgbClr val="5B6079"/>
+                </a:solidFill>
+                <a:latin typeface="Microsoft JhengHei" pitchFamily="34" charset="0"/>
+                <a:ea typeface="Microsoft JhengHei" pitchFamily="34" charset="-122"/>
+                <a:cs typeface="Microsoft JhengHei" pitchFamily="34" charset="-120"/>
+              </a:rPr>
+              <a:t>聊天視窗的文字</a:t>
+            </a:r>
+            <a:endParaRPr lang="en-US" sz="1250" dirty="0"/>
+          </a:p>
+        </p:txBody>
+      </p:sp>
+      <p:sp>
+        <p:nvSpPr>
+          <p:cNvPr id="34" name="Text 32"/>
+          <p:cNvSpPr/>
+          <p:nvPr/>
+        </p:nvSpPr>
+        <p:spPr>
+          <a:xfrm>
+            <a:off x="7589520" y="4480560"/>
+            <a:ext cx="3776472" cy="457200"/>
+          </a:xfrm>
+          <a:prstGeom prst="rect">
+            <a:avLst/>
+          </a:prstGeom>
+          <a:noFill/>
+          <a:ln/>
+        </p:spPr>
+        <p:txBody>
+          <a:bodyPr wrap="square" rtlCol="0" anchor="ctr"/>
+          <a:lstStyle/>
+          <a:p>
+            <a:pPr indent="0" marL="0">
+              <a:buNone/>
+            </a:pPr>
+            <a:r>
+              <a:rPr lang="en-US" sz="1250" dirty="0">
+                <a:solidFill>
+                  <a:srgbClr val="1E2235"/>
+                </a:solidFill>
+                <a:latin typeface="Microsoft JhengHei" pitchFamily="34" charset="0"/>
+                <a:ea typeface="Microsoft JhengHei" pitchFamily="34" charset="-122"/>
+                <a:cs typeface="Microsoft JhengHei" pitchFamily="34" charset="-120"/>
+              </a:rPr>
+              <a:t>OneDrive 中真實的文件、試算表、簡報</a:t>
+            </a:r>
+            <a:endParaRPr lang="en-US" sz="1250" dirty="0"/>
+          </a:p>
+        </p:txBody>
+      </p:sp>
+      <p:sp>
+        <p:nvSpPr>
+          <p:cNvPr id="35" name="Shape 33"/>
+          <p:cNvSpPr/>
+          <p:nvPr/>
+        </p:nvSpPr>
+        <p:spPr>
+          <a:xfrm>
+            <a:off x="640080" y="4937760"/>
+            <a:ext cx="10908792" cy="457200"/>
+          </a:xfrm>
+          <a:prstGeom prst="rect">
+            <a:avLst/>
+          </a:prstGeom>
+          <a:solidFill>
+            <a:srgbClr val="F2F4FB"/>
+          </a:solidFill>
+          <a:ln/>
+        </p:spPr>
+      </p:sp>
+      <p:sp>
+        <p:nvSpPr>
+          <p:cNvPr id="36" name="Text 34"/>
+          <p:cNvSpPr/>
+          <p:nvPr/>
+        </p:nvSpPr>
+        <p:spPr>
+          <a:xfrm>
+            <a:off x="822960" y="4937760"/>
+            <a:ext cx="2468880" cy="457200"/>
+          </a:xfrm>
+          <a:prstGeom prst="rect">
+            <a:avLst/>
+          </a:prstGeom>
+          <a:noFill/>
+          <a:ln/>
+        </p:spPr>
+        <p:txBody>
+          <a:bodyPr wrap="square" rtlCol="0" anchor="ctr"/>
+          <a:lstStyle/>
+          <a:p>
+            <a:pPr indent="0" marL="0">
+              <a:buNone/>
+            </a:pPr>
+            <a:r>
+              <a:rPr lang="en-US" sz="1250" b="1" dirty="0">
+                <a:solidFill>
+                  <a:srgbClr val="1E2235"/>
+                </a:solidFill>
+                <a:latin typeface="Microsoft JhengHei" pitchFamily="34" charset="0"/>
+                <a:ea typeface="Microsoft JhengHei" pitchFamily="34" charset="-122"/>
+                <a:cs typeface="Microsoft JhengHei" pitchFamily="34" charset="-120"/>
+              </a:rPr>
+              <a:t>自動啟動</a:t>
+            </a:r>
+            <a:endParaRPr lang="en-US" sz="1250" dirty="0"/>
+          </a:p>
+        </p:txBody>
+      </p:sp>
+      <p:sp>
+        <p:nvSpPr>
+          <p:cNvPr id="37" name="Text 35"/>
+          <p:cNvSpPr/>
+          <p:nvPr/>
+        </p:nvSpPr>
+        <p:spPr>
+          <a:xfrm>
+            <a:off x="3566160" y="4937760"/>
+            <a:ext cx="3657600" cy="457200"/>
+          </a:xfrm>
+          <a:prstGeom prst="rect">
+            <a:avLst/>
+          </a:prstGeom>
+          <a:noFill/>
+          <a:ln/>
+        </p:spPr>
+        <p:txBody>
+          <a:bodyPr wrap="square" rtlCol="0" anchor="ctr"/>
+          <a:lstStyle/>
+          <a:p>
+            <a:pPr indent="0" marL="0">
+              <a:buNone/>
+            </a:pPr>
+            <a:r>
+              <a:rPr lang="en-US" sz="1250" dirty="0">
+                <a:solidFill>
+                  <a:srgbClr val="5B6079"/>
+                </a:solidFill>
+                <a:latin typeface="Microsoft JhengHei" pitchFamily="34" charset="0"/>
+                <a:ea typeface="Microsoft JhengHei" pitchFamily="34" charset="-122"/>
+                <a:cs typeface="Microsoft JhengHei" pitchFamily="34" charset="-120"/>
+              </a:rPr>
+              <a:t>每次都要你開啟並下指令</a:t>
+            </a:r>
+            <a:endParaRPr lang="en-US" sz="1250" dirty="0"/>
+          </a:p>
+        </p:txBody>
+      </p:sp>
+      <p:sp>
+        <p:nvSpPr>
+          <p:cNvPr id="38" name="Text 36"/>
+          <p:cNvSpPr/>
+          <p:nvPr/>
+        </p:nvSpPr>
+        <p:spPr>
+          <a:xfrm>
+            <a:off x="7589520" y="4937760"/>
+            <a:ext cx="3776472" cy="457200"/>
+          </a:xfrm>
+          <a:prstGeom prst="rect">
+            <a:avLst/>
+          </a:prstGeom>
+          <a:noFill/>
+          <a:ln/>
+        </p:spPr>
+        <p:txBody>
+          <a:bodyPr wrap="square" rtlCol="0" anchor="ctr"/>
+          <a:lstStyle/>
+          <a:p>
+            <a:pPr indent="0" marL="0">
+              <a:buNone/>
+            </a:pPr>
+            <a:r>
+              <a:rPr lang="en-US" sz="1250" dirty="0">
+                <a:solidFill>
+                  <a:srgbClr val="1E2235"/>
+                </a:solidFill>
+                <a:latin typeface="Microsoft JhengHei" pitchFamily="34" charset="0"/>
+                <a:ea typeface="Microsoft JhengHei" pitchFamily="34" charset="-122"/>
+                <a:cs typeface="Microsoft JhengHei" pitchFamily="34" charset="-120"/>
+              </a:rPr>
+              <a:t>排程提示／事件觸發：收信或被 @提及時自動執行</a:t>
+            </a:r>
+            <a:endParaRPr lang="en-US" sz="1250" dirty="0"/>
+          </a:p>
+        </p:txBody>
+      </p:sp>
+      <p:sp>
+        <p:nvSpPr>
+          <p:cNvPr id="39" name="Shape 37"/>
+          <p:cNvSpPr/>
+          <p:nvPr/>
+        </p:nvSpPr>
+        <p:spPr>
+          <a:xfrm>
+            <a:off x="640080" y="5394960"/>
+            <a:ext cx="10908792" cy="457200"/>
+          </a:xfrm>
+          <a:prstGeom prst="rect">
+            <a:avLst/>
+          </a:prstGeom>
+          <a:solidFill>
+            <a:srgbClr val="FFFFFF"/>
+          </a:solidFill>
+          <a:ln/>
+        </p:spPr>
+      </p:sp>
+      <p:sp>
+        <p:nvSpPr>
+          <p:cNvPr id="40" name="Text 38"/>
+          <p:cNvSpPr/>
+          <p:nvPr/>
+        </p:nvSpPr>
+        <p:spPr>
+          <a:xfrm>
+            <a:off x="822960" y="5394960"/>
+            <a:ext cx="2468880" cy="457200"/>
+          </a:xfrm>
+          <a:prstGeom prst="rect">
+            <a:avLst/>
+          </a:prstGeom>
+          <a:noFill/>
+          <a:ln/>
+        </p:spPr>
+        <p:txBody>
+          <a:bodyPr wrap="square" rtlCol="0" anchor="ctr"/>
+          <a:lstStyle/>
+          <a:p>
+            <a:pPr indent="0" marL="0">
+              <a:buNone/>
+            </a:pPr>
+            <a:r>
+              <a:rPr lang="en-US" sz="1250" b="1" dirty="0">
+                <a:solidFill>
+                  <a:srgbClr val="1E2235"/>
+                </a:solidFill>
+                <a:latin typeface="Microsoft JhengHei" pitchFamily="34" charset="0"/>
+                <a:ea typeface="Microsoft JhengHei" pitchFamily="34" charset="-122"/>
+                <a:cs typeface="Microsoft JhengHei" pitchFamily="34" charset="-120"/>
+              </a:rPr>
+              <a:t>外部系統</a:t>
+            </a:r>
+            <a:endParaRPr lang="en-US" sz="1250" dirty="0"/>
+          </a:p>
+        </p:txBody>
+      </p:sp>
+      <p:sp>
+        <p:nvSpPr>
+          <p:cNvPr id="41" name="Text 39"/>
+          <p:cNvSpPr/>
+          <p:nvPr/>
+        </p:nvSpPr>
+        <p:spPr>
+          <a:xfrm>
+            <a:off x="3566160" y="5394960"/>
+            <a:ext cx="3657600" cy="457200"/>
+          </a:xfrm>
+          <a:prstGeom prst="rect">
+            <a:avLst/>
+          </a:prstGeom>
+          <a:noFill/>
+          <a:ln/>
+        </p:spPr>
+        <p:txBody>
+          <a:bodyPr wrap="square" rtlCol="0" anchor="ctr"/>
+          <a:lstStyle/>
+          <a:p>
+            <a:pPr indent="0" marL="0">
+              <a:buNone/>
+            </a:pPr>
+            <a:r>
+              <a:rPr lang="en-US" sz="1250" dirty="0">
+                <a:solidFill>
+                  <a:srgbClr val="5B6079"/>
+                </a:solidFill>
+                <a:latin typeface="Microsoft JhengHei" pitchFamily="34" charset="0"/>
+                <a:ea typeface="Microsoft JhengHei" pitchFamily="34" charset="-122"/>
+                <a:cs typeface="Microsoft JhengHei" pitchFamily="34" charset="-120"/>
+              </a:rPr>
+              <a:t>接地於 M365 資料</a:t>
+            </a:r>
+            <a:endParaRPr lang="en-US" sz="1250" dirty="0"/>
+          </a:p>
+        </p:txBody>
+      </p:sp>
+      <p:sp>
+        <p:nvSpPr>
+          <p:cNvPr id="42" name="Text 40"/>
+          <p:cNvSpPr/>
+          <p:nvPr/>
+        </p:nvSpPr>
+        <p:spPr>
+          <a:xfrm>
+            <a:off x="7589520" y="5394960"/>
+            <a:ext cx="3776472" cy="457200"/>
+          </a:xfrm>
+          <a:prstGeom prst="rect">
+            <a:avLst/>
+          </a:prstGeom>
+          <a:noFill/>
+          <a:ln/>
+        </p:spPr>
+        <p:txBody>
+          <a:bodyPr wrap="square" rtlCol="0" anchor="ctr"/>
+          <a:lstStyle/>
+          <a:p>
+            <a:pPr indent="0" marL="0">
+              <a:buNone/>
+            </a:pPr>
+            <a:r>
+              <a:rPr lang="en-US" sz="1250" dirty="0">
+                <a:solidFill>
+                  <a:srgbClr val="1E2235"/>
+                </a:solidFill>
+                <a:latin typeface="Microsoft JhengHei" pitchFamily="34" charset="0"/>
+                <a:ea typeface="Microsoft JhengHei" pitchFamily="34" charset="-122"/>
+                <a:cs typeface="Microsoft JhengHei" pitchFamily="34" charset="-120"/>
+              </a:rPr>
+              <a:t>可透過 Plugins／MCP 連 D365、SAP、Fabric 等</a:t>
+            </a:r>
+            <a:endParaRPr lang="en-US" sz="1250" dirty="0"/>
+          </a:p>
+        </p:txBody>
+      </p:sp>
+      <p:sp>
+        <p:nvSpPr>
+          <p:cNvPr id="43" name="Shape 41"/>
+          <p:cNvSpPr/>
+          <p:nvPr/>
+        </p:nvSpPr>
+        <p:spPr>
+          <a:xfrm>
+            <a:off x="640080" y="5852160"/>
+            <a:ext cx="10908792" cy="457200"/>
+          </a:xfrm>
+          <a:prstGeom prst="rect">
+            <a:avLst/>
+          </a:prstGeom>
+          <a:solidFill>
+            <a:srgbClr val="F2F4FB"/>
+          </a:solidFill>
+          <a:ln/>
+        </p:spPr>
+      </p:sp>
+      <p:sp>
+        <p:nvSpPr>
+          <p:cNvPr id="44" name="Text 42"/>
+          <p:cNvSpPr/>
+          <p:nvPr/>
+        </p:nvSpPr>
+        <p:spPr>
+          <a:xfrm>
+            <a:off x="822960" y="5852160"/>
+            <a:ext cx="2468880" cy="457200"/>
+          </a:xfrm>
+          <a:prstGeom prst="rect">
+            <a:avLst/>
+          </a:prstGeom>
+          <a:noFill/>
+          <a:ln/>
+        </p:spPr>
+        <p:txBody>
+          <a:bodyPr wrap="square" rtlCol="0" anchor="ctr"/>
+          <a:lstStyle/>
+          <a:p>
+            <a:pPr indent="0" marL="0">
+              <a:buNone/>
+            </a:pPr>
+            <a:r>
+              <a:rPr lang="en-US" sz="1250" b="1" dirty="0">
+                <a:solidFill>
+                  <a:srgbClr val="1E2235"/>
+                </a:solidFill>
+                <a:latin typeface="Microsoft JhengHei" pitchFamily="34" charset="0"/>
+                <a:ea typeface="Microsoft JhengHei" pitchFamily="34" charset="-122"/>
+                <a:cs typeface="Microsoft JhengHei" pitchFamily="34" charset="-120"/>
+              </a:rPr>
               <a:t>把關</a:t>
             </a:r>
-            <a:endParaRPr lang="en-US" sz="1400" dirty="0"/>
-          </a:p>
-        </p:txBody>
-      </p:sp>
-      <p:sp>
-        <p:nvSpPr>
-          <p:cNvPr id="29" name="Text 27"/>
-          <p:cNvSpPr/>
-          <p:nvPr/>
-        </p:nvSpPr>
-        <p:spPr>
-          <a:xfrm>
-            <a:off x="3566160" y="5760720"/>
-            <a:ext cx="3657600" cy="786384"/>
+            <a:endParaRPr lang="en-US" sz="1250" dirty="0"/>
+          </a:p>
+        </p:txBody>
+      </p:sp>
+      <p:sp>
+        <p:nvSpPr>
+          <p:cNvPr id="45" name="Text 43"/>
+          <p:cNvSpPr/>
+          <p:nvPr/>
+        </p:nvSpPr>
+        <p:spPr>
+          <a:xfrm>
+            <a:off x="3566160" y="5852160"/>
+            <a:ext cx="3657600" cy="457200"/>
           </a:xfrm>
           <a:prstGeom prst="rect">
             <a:avLst/>
@@ -17456,7 +18004,7 @@
               <a:buNone/>
             </a:pPr>
             <a:r>
-              <a:rPr lang="en-US" sz="1400" dirty="0">
+              <a:rPr lang="en-US" sz="1250" dirty="0">
                 <a:solidFill>
                   <a:srgbClr val="5B6079"/>
                 </a:solidFill>
@@ -17466,20 +18014,20 @@
               </a:rPr>
               <a:t>你自行判斷</a:t>
             </a:r>
-            <a:endParaRPr lang="en-US" sz="1400" dirty="0"/>
-          </a:p>
-        </p:txBody>
-      </p:sp>
-      <p:sp>
-        <p:nvSpPr>
-          <p:cNvPr id="30" name="Text 28"/>
-          <p:cNvSpPr/>
-          <p:nvPr/>
-        </p:nvSpPr>
-        <p:spPr>
-          <a:xfrm>
-            <a:off x="7589520" y="5760720"/>
-            <a:ext cx="3776472" cy="786384"/>
+            <a:endParaRPr lang="en-US" sz="1250" dirty="0"/>
+          </a:p>
+        </p:txBody>
+      </p:sp>
+      <p:sp>
+        <p:nvSpPr>
+          <p:cNvPr id="46" name="Text 44"/>
+          <p:cNvSpPr/>
+          <p:nvPr/>
+        </p:nvSpPr>
+        <p:spPr>
+          <a:xfrm>
+            <a:off x="7589520" y="5852160"/>
+            <a:ext cx="3776472" cy="457200"/>
           </a:xfrm>
           <a:prstGeom prst="rect">
             <a:avLst/>
@@ -17495,7 +18043,7 @@
               <a:buNone/>
             </a:pPr>
             <a:r>
-              <a:rPr lang="en-US" sz="1400" dirty="0">
+              <a:rPr lang="en-US" sz="1250" dirty="0">
                 <a:solidFill>
                   <a:srgbClr val="1E2235"/>
                 </a:solidFill>
@@ -17505,13 +18053,13 @@
               </a:rPr>
               <a:t>中高風險動作顯示風險等級，核准後才執行</a:t>
             </a:r>
-            <a:endParaRPr lang="en-US" sz="1400" dirty="0"/>
-          </a:p>
-        </p:txBody>
-      </p:sp>
-      <p:sp>
-        <p:nvSpPr>
-          <p:cNvPr id="31" name="Text 29"/>
+            <a:endParaRPr lang="en-US" sz="1250" dirty="0"/>
+          </a:p>
+        </p:txBody>
+      </p:sp>
+      <p:sp>
+        <p:nvSpPr>
+          <p:cNvPr id="47" name="Text 45"/>
           <p:cNvSpPr/>
           <p:nvPr/>
         </p:nvSpPr>
@@ -17550,7 +18098,7 @@
       </p:sp>
       <p:sp>
         <p:nvSpPr>
-          <p:cNvPr id="32" name="Text 30"/>
+          <p:cNvPr id="48" name="Text 46"/>
           <p:cNvSpPr/>
           <p:nvPr/>
         </p:nvSpPr>
@@ -18029,7 +18577,7 @@
                 <a:ea typeface="Microsoft JhengHei" pitchFamily="34" charset="-122"/>
                 <a:cs typeface="Microsoft JhengHei" pitchFamily="34" charset="-120"/>
               </a:rPr>
-              <a:t>右側面板同時呈現「參考」輸入檔、「輸出」產出檔與「技能」，過程透明可追。</a:t>
+              <a:t>右側面板同時呈現進度、輸入檔、輸出檔、已載入技能、排程與已核准權限，過程透明可追。</a:t>
             </a:r>
             <a:endParaRPr lang="en-US" sz="1300" dirty="0"/>
           </a:p>
@@ -18188,7 +18736,7 @@
                 <a:ea typeface="Microsoft JhengHei" pitchFamily="34" charset="-122"/>
                 <a:cs typeface="Microsoft JhengHei" pitchFamily="34" charset="-120"/>
               </a:rPr>
-              <a:t>中高風險動作顯示 RISK-LEVEL；可核准、取消，或設定 per-recipient／per-domain／always 的 don’t ask again。</a:t>
+              <a:t>中高風險動作顯示 RISK-LEVEL；可核准、取消，或設定 per-recipient／per-domain／always 的 don’t ask again；多筆待審可「Approve All」。</a:t>
             </a:r>
             <a:endParaRPr lang="en-US" sz="1300" dirty="0"/>
           </a:p>
@@ -18347,7 +18895,7 @@
                 <a:ea typeface="Microsoft JhengHei" pitchFamily="34" charset="-122"/>
                 <a:cs typeface="Microsoft JhengHei" pitchFamily="34" charset="-120"/>
               </a:rPr>
-              <a:t>本機 Edge 瀏覽器（預覽・僅限網頁版）、Imagen 2 影像生成、模型選擇器新增 Sonnet+Opus 顧問配對、排程提示／事件驅動任務（信件或 @提及自動觸發）、Download-All zip（50 檔／500MB）。</a:t>
+              <a:t>本機 Edge 瀏覽器（預設停用，需管理員開啟＋Edge 150 以上）、ChatGPT Images 2.0 影像生成、品牌範本自動套用簡報、Plugins／MCP 連外部系統、排程與事件觸發任務。</a:t>
             </a:r>
             <a:endParaRPr lang="en-US" sz="1300" dirty="0"/>
           </a:p>

--- a/CoworkPlaybook/Cowork_教育訓練簡報_零售通路版.pptx
+++ b/CoworkPlaybook/Cowork_教育訓練簡報_零售通路版.pptx
@@ -28,9 +28,10 @@
     <p:sldId id="276" r:id="rId22"/>
     <p:sldId id="277" r:id="rId23"/>
     <p:sldId id="278" r:id="rId24"/>
+    <p:sldId id="279" r:id="rId25"/>
   </p:sldIdLst>
   <p:notesMasterIdLst>
-    <p:notesMasterId r:id="rId25"/>
+    <p:notesMasterId r:id="rId26"/>
   </p:notesMasterIdLst>
   <p:sldSz cx="12191695" cy="6858000"/>
   <p:notesSz cx="6858000" cy="12191695"/>
@@ -1868,6 +1869,94 @@
             <a:fld id="{F7021451-1387-4CA6-816F-3879F97B5CBC}" type="slidenum">
               <a:rPr lang="en-US"/>
               <a:t>23</a:t>
+            </a:fld>
+            <a:endParaRPr lang="en-US"/>
+          </a:p>
+        </p:txBody>
+      </p:sp>
+    </p:spTree>
+    <p:extLst>
+      <p:ext uri="{BB962C8B-B14F-4D97-AF65-F5344CB8AC3E}">
+        <p14:creationId xmlns:p14="http://schemas.microsoft.com/office/powerpoint/2010/main" val="1024086991"/>
+      </p:ext>
+    </p:extLst>
+  </p:cSld>
+  <p:clrMapOvr>
+    <a:masterClrMapping/>
+  </p:clrMapOvr>
+</p:notes>
+</file>
+
+<file path=ppt/notesSlides/notesSlide24.xml><?xml version="1.0" encoding="utf-8"?>
+<p:notes xmlns:a="http://schemas.openxmlformats.org/drawingml/2006/main" xmlns:r="http://schemas.openxmlformats.org/officeDocument/2006/relationships" xmlns:p="http://schemas.openxmlformats.org/presentationml/2006/main">
+  <p:cSld>
+    <p:spTree>
+      <p:nvGrpSpPr>
+        <p:cNvPr id="1" name=""/>
+        <p:cNvGrpSpPr/>
+        <p:nvPr/>
+      </p:nvGrpSpPr>
+      <p:grpSpPr>
+        <a:xfrm>
+          <a:off x="0" y="0"/>
+          <a:ext cx="0" cy="0"/>
+          <a:chOff x="0" y="0"/>
+          <a:chExt cx="0" cy="0"/>
+        </a:xfrm>
+      </p:grpSpPr>
+      <p:sp>
+        <p:nvSpPr>
+          <p:cNvPr id="2" name="Slide Image Placeholder 1"/>
+          <p:cNvSpPr>
+            <a:spLocks noGrp="1" noRot="1" noChangeAspect="1"/>
+          </p:cNvSpPr>
+          <p:nvPr>
+            <p:ph type="sldImg"/>
+          </p:nvPr>
+        </p:nvSpPr>
+        <p:spPr/>
+      </p:sp>
+      <p:sp>
+        <p:nvSpPr>
+          <p:cNvPr id="3" name="Notes Placeholder 2"/>
+          <p:cNvSpPr>
+            <a:spLocks noGrp="1"/>
+          </p:cNvSpPr>
+          <p:nvPr>
+            <p:ph type="body" idx="1"/>
+          </p:nvPr>
+        </p:nvSpPr>
+        <p:spPr/>
+        <p:txBody>
+          <a:bodyPr/>
+          <a:lstStyle/>
+          <a:p>
+            <a:r>
+              <a:rPr lang="en-US" dirty="0"/>
+              <a:t/>
+            </a:r>
+            <a:endParaRPr lang="en-US" dirty="0"/>
+          </a:p>
+        </p:txBody>
+      </p:sp>
+      <p:sp>
+        <p:nvSpPr>
+          <p:cNvPr id="4" name="Slide Number Placeholder 3"/>
+          <p:cNvSpPr>
+            <a:spLocks noGrp="1"/>
+          </p:cNvSpPr>
+          <p:nvPr>
+            <p:ph type="sldNum" sz="quarter" idx="10"/>
+          </p:nvPr>
+        </p:nvSpPr>
+        <p:spPr/>
+        <p:txBody>
+          <a:bodyPr/>
+          <a:lstStyle/>
+          <a:p>
+            <a:fld id="{F7021451-1387-4CA6-816F-3879F97B5CBC}" type="slidenum">
+              <a:rPr lang="en-US"/>
+              <a:t>24</a:t>
             </a:fld>
             <a:endParaRPr lang="en-US"/>
           </a:p>
@@ -3129,6 +3218,677 @@
     <p:bg>
       <p:bgPr>
         <a:solidFill>
+          <a:srgbClr val="F7F8FC"/>
+        </a:solidFill>
+      </p:bgPr>
+    </p:bg>
+    <p:spTree>
+      <p:nvGrpSpPr>
+        <p:cNvPr id="1" name=""/>
+        <p:cNvGrpSpPr/>
+        <p:nvPr/>
+      </p:nvGrpSpPr>
+      <p:grpSpPr>
+        <a:xfrm>
+          <a:off x="0" y="0"/>
+          <a:ext cx="0" cy="0"/>
+          <a:chOff x="0" y="0"/>
+          <a:chExt cx="0" cy="0"/>
+        </a:xfrm>
+      </p:grpSpPr>
+      <p:sp>
+        <p:nvSpPr>
+          <p:cNvPr id="2" name="Shape 0"/>
+          <p:cNvSpPr/>
+          <p:nvPr/>
+        </p:nvSpPr>
+        <p:spPr>
+          <a:xfrm>
+            <a:off x="640080" y="566928"/>
+            <a:ext cx="384048" cy="128016"/>
+          </a:xfrm>
+          <a:prstGeom prst="rect">
+            <a:avLst/>
+          </a:prstGeom>
+          <a:solidFill>
+            <a:srgbClr val="8A3A62"/>
+          </a:solidFill>
+          <a:ln/>
+        </p:spPr>
+      </p:sp>
+      <p:sp>
+        <p:nvSpPr>
+          <p:cNvPr id="3" name="Text 1"/>
+          <p:cNvSpPr/>
+          <p:nvPr/>
+        </p:nvSpPr>
+        <p:spPr>
+          <a:xfrm>
+            <a:off x="1143000" y="457200"/>
+            <a:ext cx="8229600" cy="310896"/>
+          </a:xfrm>
+          <a:prstGeom prst="rect">
+            <a:avLst/>
+          </a:prstGeom>
+          <a:noFill/>
+          <a:ln/>
+        </p:spPr>
+        <p:txBody>
+          <a:bodyPr wrap="square" rtlCol="0" anchor="ctr"/>
+          <a:lstStyle/>
+          <a:p>
+            <a:pPr indent="0" marL="0">
+              <a:buNone/>
+            </a:pPr>
+            <a:r>
+              <a:rPr lang="en-US" sz="1200" b="1" spc="200" kern="0" dirty="0">
+                <a:solidFill>
+                  <a:srgbClr val="8A3A62"/>
+                </a:solidFill>
+                <a:latin typeface="Microsoft JhengHei" pitchFamily="34" charset="0"/>
+                <a:ea typeface="Microsoft JhengHei" pitchFamily="34" charset="-122"/>
+                <a:cs typeface="Microsoft JhengHei" pitchFamily="34" charset="-120"/>
+              </a:rPr>
+              <a:t>情境 01 · 實機示範</a:t>
+            </a:r>
+            <a:endParaRPr lang="en-US" sz="1200" dirty="0"/>
+          </a:p>
+        </p:txBody>
+      </p:sp>
+      <p:sp>
+        <p:nvSpPr>
+          <p:cNvPr id="4" name="Text 2"/>
+          <p:cNvSpPr/>
+          <p:nvPr/>
+        </p:nvSpPr>
+        <p:spPr>
+          <a:xfrm>
+            <a:off x="640080" y="786384"/>
+            <a:ext cx="10972800" cy="640080"/>
+          </a:xfrm>
+          <a:prstGeom prst="rect">
+            <a:avLst/>
+          </a:prstGeom>
+          <a:noFill/>
+          <a:ln/>
+        </p:spPr>
+        <p:txBody>
+          <a:bodyPr wrap="square" rtlCol="0" anchor="ctr"/>
+          <a:lstStyle/>
+          <a:p>
+            <a:pPr indent="0" marL="0">
+              <a:buNone/>
+            </a:pPr>
+            <a:r>
+              <a:rPr lang="en-US" sz="3000" b="1" dirty="0">
+                <a:solidFill>
+                  <a:srgbClr val="1E2235"/>
+                </a:solidFill>
+                <a:latin typeface="Microsoft JhengHei" pitchFamily="34" charset="0"/>
+                <a:ea typeface="Microsoft JhengHei" pitchFamily="34" charset="-122"/>
+                <a:cs typeface="Microsoft JhengHei" pitchFamily="34" charset="-120"/>
+              </a:rPr>
+              <a:t>看 Cowork 怎麼做、產出什麼</a:t>
+            </a:r>
+            <a:endParaRPr lang="en-US" sz="3000" dirty="0"/>
+          </a:p>
+        </p:txBody>
+      </p:sp>
+      <p:sp>
+        <p:nvSpPr>
+          <p:cNvPr id="5" name="Shape 3"/>
+          <p:cNvSpPr/>
+          <p:nvPr/>
+        </p:nvSpPr>
+        <p:spPr>
+          <a:xfrm>
+            <a:off x="585216" y="1773936"/>
+            <a:ext cx="5184648" cy="3433186"/>
+          </a:xfrm>
+          <a:prstGeom prst="rect">
+            <a:avLst/>
+          </a:prstGeom>
+          <a:solidFill>
+            <a:srgbClr val="FFFFFF"/>
+          </a:solidFill>
+          <a:ln w="12700">
+            <a:solidFill>
+              <a:srgbClr val="E4E7F2"/>
+            </a:solidFill>
+            <a:prstDash val="solid"/>
+          </a:ln>
+          <a:effectLst>
+            <a:outerShdw sx="100000" sy="100000" kx="0" ky="0" algn="bl" rotWithShape="0" blurRad="114300" dist="38100" dir="5400000">
+              <a:srgbClr val="8A90B5">
+                <a:alpha val="22000"/>
+              </a:srgbClr>
+            </a:outerShdw>
+          </a:effectLst>
+        </p:spPr>
+      </p:sp>
+      <p:pic>
+        <p:nvPicPr>
+          <p:cNvPr id="6" name="Image 0" descr="C:\temp\CoworkLab\v2\_working\screenshots\ret1_01_input.png">    </p:cNvPr>
+          <p:cNvPicPr>
+            <a:picLocks noChangeAspect="1"/>
+          </p:cNvPicPr>
+          <p:nvPr/>
+        </p:nvPicPr>
+        <p:blipFill>
+          <a:blip r:embed="rId1"/>
+          <a:stretch>
+            <a:fillRect/>
+          </a:stretch>
+        </p:blipFill>
+        <p:spPr>
+          <a:xfrm>
+            <a:off x="640080" y="1828800"/>
+            <a:ext cx="5074920" cy="3323458"/>
+          </a:xfrm>
+          <a:prstGeom prst="rect">
+            <a:avLst/>
+          </a:prstGeom>
+        </p:spPr>
+      </p:pic>
+      <p:sp>
+        <p:nvSpPr>
+          <p:cNvPr id="7" name="Text 4"/>
+          <p:cNvSpPr/>
+          <p:nvPr/>
+        </p:nvSpPr>
+        <p:spPr>
+          <a:xfrm>
+            <a:off x="640080" y="5261986"/>
+            <a:ext cx="5074920" cy="320040"/>
+          </a:xfrm>
+          <a:prstGeom prst="rect">
+            <a:avLst/>
+          </a:prstGeom>
+          <a:noFill/>
+          <a:ln/>
+        </p:spPr>
+        <p:txBody>
+          <a:bodyPr wrap="square" rtlCol="0" anchor="ctr"/>
+          <a:lstStyle/>
+          <a:p>
+            <a:pPr algn="ctr" indent="0" marL="0">
+              <a:buNone/>
+            </a:pPr>
+            <a:r>
+              <a:rPr lang="en-US" sz="1350" b="1" dirty="0">
+                <a:solidFill>
+                  <a:srgbClr val="8A3A62"/>
+                </a:solidFill>
+                <a:latin typeface="Microsoft JhengHei" pitchFamily="34" charset="0"/>
+                <a:ea typeface="Microsoft JhengHei" pitchFamily="34" charset="-122"/>
+                <a:cs typeface="Microsoft JhengHei" pitchFamily="34" charset="-120"/>
+              </a:rPr>
+              <a:t>① 你的輸入與指令</a:t>
+            </a:r>
+            <a:endParaRPr lang="en-US" sz="1350" dirty="0"/>
+          </a:p>
+        </p:txBody>
+      </p:sp>
+      <p:sp>
+        <p:nvSpPr>
+          <p:cNvPr id="8" name="Shape 5"/>
+          <p:cNvSpPr/>
+          <p:nvPr/>
+        </p:nvSpPr>
+        <p:spPr>
+          <a:xfrm>
+            <a:off x="6163056" y="1773936"/>
+            <a:ext cx="5184648" cy="3433186"/>
+          </a:xfrm>
+          <a:prstGeom prst="rect">
+            <a:avLst/>
+          </a:prstGeom>
+          <a:solidFill>
+            <a:srgbClr val="FFFFFF"/>
+          </a:solidFill>
+          <a:ln w="12700">
+            <a:solidFill>
+              <a:srgbClr val="E4E7F2"/>
+            </a:solidFill>
+            <a:prstDash val="solid"/>
+          </a:ln>
+          <a:effectLst>
+            <a:outerShdw sx="100000" sy="100000" kx="0" ky="0" algn="bl" rotWithShape="0" blurRad="114300" dist="38100" dir="5400000">
+              <a:srgbClr val="8A90B5">
+                <a:alpha val="22000"/>
+              </a:srgbClr>
+            </a:outerShdw>
+          </a:effectLst>
+        </p:spPr>
+      </p:sp>
+      <p:pic>
+        <p:nvPicPr>
+          <p:cNvPr id="9" name="Image 1" descr="C:\temp\CoworkLab\v2\_working\screenshots\ret1_04_approval.png">    </p:cNvPr>
+          <p:cNvPicPr>
+            <a:picLocks noChangeAspect="1"/>
+          </p:cNvPicPr>
+          <p:nvPr/>
+        </p:nvPicPr>
+        <p:blipFill>
+          <a:blip r:embed="rId2"/>
+          <a:stretch>
+            <a:fillRect/>
+          </a:stretch>
+        </p:blipFill>
+        <p:spPr>
+          <a:xfrm>
+            <a:off x="6217920" y="1828800"/>
+            <a:ext cx="5074920" cy="3323458"/>
+          </a:xfrm>
+          <a:prstGeom prst="rect">
+            <a:avLst/>
+          </a:prstGeom>
+        </p:spPr>
+      </p:pic>
+      <p:sp>
+        <p:nvSpPr>
+          <p:cNvPr id="10" name="Text 6"/>
+          <p:cNvSpPr/>
+          <p:nvPr/>
+        </p:nvSpPr>
+        <p:spPr>
+          <a:xfrm>
+            <a:off x="6217920" y="5261986"/>
+            <a:ext cx="5074920" cy="320040"/>
+          </a:xfrm>
+          <a:prstGeom prst="rect">
+            <a:avLst/>
+          </a:prstGeom>
+          <a:noFill/>
+          <a:ln/>
+        </p:spPr>
+        <p:txBody>
+          <a:bodyPr wrap="square" rtlCol="0" anchor="ctr"/>
+          <a:lstStyle/>
+          <a:p>
+            <a:pPr algn="ctr" indent="0" marL="0">
+              <a:buNone/>
+            </a:pPr>
+            <a:r>
+              <a:rPr lang="en-US" sz="1350" b="1" dirty="0">
+                <a:solidFill>
+                  <a:srgbClr val="8A3A62"/>
+                </a:solidFill>
+                <a:latin typeface="Microsoft JhengHei" pitchFamily="34" charset="0"/>
+                <a:ea typeface="Microsoft JhengHei" pitchFamily="34" charset="-122"/>
+                <a:cs typeface="Microsoft JhengHei" pitchFamily="34" charset="-120"/>
+              </a:rPr>
+              <a:t>② 產出成果</a:t>
+            </a:r>
+            <a:endParaRPr lang="en-US" sz="1350" dirty="0"/>
+          </a:p>
+        </p:txBody>
+      </p:sp>
+      <p:sp>
+        <p:nvSpPr>
+          <p:cNvPr id="11" name="Shape 7"/>
+          <p:cNvSpPr/>
+          <p:nvPr/>
+        </p:nvSpPr>
+        <p:spPr>
+          <a:xfrm>
+            <a:off x="640080" y="5074920"/>
+            <a:ext cx="10911535" cy="1143000"/>
+          </a:xfrm>
+          <a:prstGeom prst="rect">
+            <a:avLst/>
+          </a:prstGeom>
+          <a:solidFill>
+            <a:srgbClr val="FFFFFF"/>
+          </a:solidFill>
+          <a:ln w="12700">
+            <a:solidFill>
+              <a:srgbClr val="E4E7F2"/>
+            </a:solidFill>
+            <a:prstDash val="solid"/>
+          </a:ln>
+        </p:spPr>
+      </p:sp>
+      <p:sp>
+        <p:nvSpPr>
+          <p:cNvPr id="12" name="Shape 8"/>
+          <p:cNvSpPr/>
+          <p:nvPr/>
+        </p:nvSpPr>
+        <p:spPr>
+          <a:xfrm>
+            <a:off x="640080" y="5074920"/>
+            <a:ext cx="91440" cy="1143000"/>
+          </a:xfrm>
+          <a:prstGeom prst="rect">
+            <a:avLst/>
+          </a:prstGeom>
+          <a:solidFill>
+            <a:srgbClr val="8A3A62"/>
+          </a:solidFill>
+          <a:ln/>
+        </p:spPr>
+      </p:sp>
+      <p:sp>
+        <p:nvSpPr>
+          <p:cNvPr id="13" name="Text 9"/>
+          <p:cNvSpPr/>
+          <p:nvPr/>
+        </p:nvSpPr>
+        <p:spPr>
+          <a:xfrm>
+            <a:off x="914400" y="5184648"/>
+            <a:ext cx="1828800" cy="320040"/>
+          </a:xfrm>
+          <a:prstGeom prst="rect">
+            <a:avLst/>
+          </a:prstGeom>
+          <a:noFill/>
+          <a:ln/>
+        </p:spPr>
+        <p:txBody>
+          <a:bodyPr wrap="square" rtlCol="0" anchor="ctr"/>
+          <a:lstStyle/>
+          <a:p>
+            <a:pPr indent="0" marL="0">
+              <a:buNone/>
+            </a:pPr>
+            <a:r>
+              <a:rPr lang="en-US" sz="1400" b="1" dirty="0">
+                <a:solidFill>
+                  <a:srgbClr val="1E2235"/>
+                </a:solidFill>
+                <a:latin typeface="Microsoft JhengHei" pitchFamily="34" charset="0"/>
+                <a:ea typeface="Microsoft JhengHei" pitchFamily="34" charset="-122"/>
+                <a:cs typeface="Microsoft JhengHei" pitchFamily="34" charset="-120"/>
+              </a:rPr>
+              <a:t>產出驗收</a:t>
+            </a:r>
+            <a:endParaRPr lang="en-US" sz="1400" dirty="0"/>
+          </a:p>
+        </p:txBody>
+      </p:sp>
+      <p:pic>
+        <p:nvPicPr>
+          <p:cNvPr id="14" name="Image 2" descr="preencoded.png">    </p:cNvPr>
+          <p:cNvPicPr>
+            <a:picLocks noChangeAspect="1"/>
+          </p:cNvPicPr>
+          <p:nvPr/>
+        </p:nvPicPr>
+        <p:blipFill>
+          <a:blip r:embed="rId3"/>
+          <a:stretch>
+            <a:fillRect/>
+          </a:stretch>
+        </p:blipFill>
+        <p:spPr>
+          <a:xfrm>
+            <a:off x="2834640" y="5221224"/>
+            <a:ext cx="182880" cy="182880"/>
+          </a:xfrm>
+          <a:prstGeom prst="rect">
+            <a:avLst/>
+          </a:prstGeom>
+        </p:spPr>
+      </p:pic>
+      <p:sp>
+        <p:nvSpPr>
+          <p:cNvPr id="15" name="Text 10"/>
+          <p:cNvSpPr/>
+          <p:nvPr/>
+        </p:nvSpPr>
+        <p:spPr>
+          <a:xfrm>
+            <a:off x="3108960" y="5166360"/>
+            <a:ext cx="8168335" cy="310896"/>
+          </a:xfrm>
+          <a:prstGeom prst="rect">
+            <a:avLst/>
+          </a:prstGeom>
+          <a:noFill/>
+          <a:ln/>
+        </p:spPr>
+        <p:txBody>
+          <a:bodyPr wrap="square" rtlCol="0" anchor="ctr"/>
+          <a:lstStyle/>
+          <a:p>
+            <a:pPr indent="0" marL="0">
+              <a:buNone/>
+            </a:pPr>
+            <a:r>
+              <a:rPr lang="en-US" sz="1300" dirty="0">
+                <a:solidFill>
+                  <a:srgbClr val="1E2235"/>
+                </a:solidFill>
+                <a:latin typeface="Microsoft JhengHei" pitchFamily="34" charset="0"/>
+                <a:ea typeface="Microsoft JhengHei" pitchFamily="34" charset="-122"/>
+                <a:cs typeface="Microsoft JhengHei" pitchFamily="34" charset="-120"/>
+              </a:rPr>
+              <a:t>〔計算〕達成率、客單價、退貨率的計算與原始數據一致，桃園中壢店被正確標為嚴重落後</a:t>
+            </a:r>
+            <a:endParaRPr lang="en-US" sz="1300" dirty="0"/>
+          </a:p>
+        </p:txBody>
+      </p:sp>
+      <p:pic>
+        <p:nvPicPr>
+          <p:cNvPr id="16" name="Image 3" descr="preencoded.png">    </p:cNvPr>
+          <p:cNvPicPr>
+            <a:picLocks noChangeAspect="1"/>
+          </p:cNvPicPr>
+          <p:nvPr/>
+        </p:nvPicPr>
+        <p:blipFill>
+          <a:blip r:embed="rId4"/>
+          <a:stretch>
+            <a:fillRect/>
+          </a:stretch>
+        </p:blipFill>
+        <p:spPr>
+          <a:xfrm>
+            <a:off x="2834640" y="5559552"/>
+            <a:ext cx="182880" cy="182880"/>
+          </a:xfrm>
+          <a:prstGeom prst="rect">
+            <a:avLst/>
+          </a:prstGeom>
+        </p:spPr>
+      </p:pic>
+      <p:sp>
+        <p:nvSpPr>
+          <p:cNvPr id="17" name="Text 11"/>
+          <p:cNvSpPr/>
+          <p:nvPr/>
+        </p:nvSpPr>
+        <p:spPr>
+          <a:xfrm>
+            <a:off x="3108960" y="5504688"/>
+            <a:ext cx="8168335" cy="310896"/>
+          </a:xfrm>
+          <a:prstGeom prst="rect">
+            <a:avLst/>
+          </a:prstGeom>
+          <a:noFill/>
+          <a:ln/>
+        </p:spPr>
+        <p:txBody>
+          <a:bodyPr wrap="square" rtlCol="0" anchor="ctr"/>
+          <a:lstStyle/>
+          <a:p>
+            <a:pPr indent="0" marL="0">
+              <a:buNone/>
+            </a:pPr>
+            <a:r>
+              <a:rPr lang="en-US" sz="1300" dirty="0">
+                <a:solidFill>
+                  <a:srgbClr val="1E2235"/>
+                </a:solidFill>
+                <a:latin typeface="Microsoft JhengHei" pitchFamily="34" charset="0"/>
+                <a:ea typeface="Microsoft JhengHei" pitchFamily="34" charset="-122"/>
+                <a:cs typeface="Microsoft JhengHei" pitchFamily="34" charset="-120"/>
+              </a:rPr>
+              <a:t>〔判讀〕高雄左營店未被含糊帶過：不論標為臨界觀察或客流結構異動，都要說明來客成長與客單價偏離的具體數字</a:t>
+            </a:r>
+            <a:endParaRPr lang="en-US" sz="1300" dirty="0"/>
+          </a:p>
+        </p:txBody>
+      </p:sp>
+      <p:pic>
+        <p:nvPicPr>
+          <p:cNvPr id="18" name="Image 4" descr="preencoded.png">    </p:cNvPr>
+          <p:cNvPicPr>
+            <a:picLocks noChangeAspect="1"/>
+          </p:cNvPicPr>
+          <p:nvPr/>
+        </p:nvPicPr>
+        <p:blipFill>
+          <a:blip r:embed="rId5"/>
+          <a:stretch>
+            <a:fillRect/>
+          </a:stretch>
+        </p:blipFill>
+        <p:spPr>
+          <a:xfrm>
+            <a:off x="2834640" y="5897880"/>
+            <a:ext cx="182880" cy="182880"/>
+          </a:xfrm>
+          <a:prstGeom prst="rect">
+            <a:avLst/>
+          </a:prstGeom>
+        </p:spPr>
+      </p:pic>
+      <p:sp>
+        <p:nvSpPr>
+          <p:cNvPr id="19" name="Text 12"/>
+          <p:cNvSpPr/>
+          <p:nvPr/>
+        </p:nvSpPr>
+        <p:spPr>
+          <a:xfrm>
+            <a:off x="3108960" y="5843016"/>
+            <a:ext cx="8168335" cy="310896"/>
+          </a:xfrm>
+          <a:prstGeom prst="rect">
+            <a:avLst/>
+          </a:prstGeom>
+          <a:noFill/>
+          <a:ln/>
+        </p:spPr>
+        <p:txBody>
+          <a:bodyPr wrap="square" rtlCol="0" anchor="ctr"/>
+          <a:lstStyle/>
+          <a:p>
+            <a:pPr indent="0" marL="0">
+              <a:buNone/>
+            </a:pPr>
+            <a:r>
+              <a:rPr lang="en-US" sz="1300" dirty="0">
+                <a:solidFill>
+                  <a:srgbClr val="1E2235"/>
+                </a:solidFill>
+                <a:latin typeface="Microsoft JhengHei" pitchFamily="34" charset="0"/>
+                <a:ea typeface="Microsoft JhengHei" pitchFamily="34" charset="-122"/>
+                <a:cs typeface="Microsoft JhengHei" pitchFamily="34" charset="-120"/>
+              </a:rPr>
+              <a:t>〔追蹤〕門市回報中的施工、設備、缺貨都被拉進當日追蹤事項並指定負責人</a:t>
+            </a:r>
+            <a:endParaRPr lang="en-US" sz="1300" dirty="0"/>
+          </a:p>
+        </p:txBody>
+      </p:sp>
+      <p:sp>
+        <p:nvSpPr>
+          <p:cNvPr id="20" name="Text 13"/>
+          <p:cNvSpPr/>
+          <p:nvPr/>
+        </p:nvSpPr>
+        <p:spPr>
+          <a:xfrm>
+            <a:off x="640080" y="6473952"/>
+            <a:ext cx="5486400" cy="274320"/>
+          </a:xfrm>
+          <a:prstGeom prst="rect">
+            <a:avLst/>
+          </a:prstGeom>
+          <a:noFill/>
+          <a:ln/>
+        </p:spPr>
+        <p:txBody>
+          <a:bodyPr wrap="square" rtlCol="0" anchor="ctr"/>
+          <a:lstStyle/>
+          <a:p>
+            <a:pPr algn="l" indent="0" marL="0">
+              <a:buNone/>
+            </a:pPr>
+            <a:r>
+              <a:rPr lang="en-US" sz="900" dirty="0">
+                <a:solidFill>
+                  <a:srgbClr val="5B6079"/>
+                </a:solidFill>
+                <a:latin typeface="Microsoft JhengHei" pitchFamily="34" charset="0"/>
+                <a:ea typeface="Microsoft JhengHei" pitchFamily="34" charset="-122"/>
+                <a:cs typeface="Microsoft JhengHei" pitchFamily="34" charset="-120"/>
+              </a:rPr>
+              <a:t>Microsoft 365 Copilot Cowork</a:t>
+            </a:r>
+            <a:endParaRPr lang="en-US" sz="900" dirty="0"/>
+          </a:p>
+        </p:txBody>
+      </p:sp>
+      <p:sp>
+        <p:nvSpPr>
+          <p:cNvPr id="21" name="Text 14"/>
+          <p:cNvSpPr/>
+          <p:nvPr/>
+        </p:nvSpPr>
+        <p:spPr>
+          <a:xfrm>
+            <a:off x="11002975" y="6473952"/>
+            <a:ext cx="548640" cy="274320"/>
+          </a:xfrm>
+          <a:prstGeom prst="rect">
+            <a:avLst/>
+          </a:prstGeom>
+          <a:noFill/>
+          <a:ln/>
+        </p:spPr>
+        <p:txBody>
+          <a:bodyPr wrap="square" rtlCol="0" anchor="ctr"/>
+          <a:lstStyle/>
+          <a:p>
+            <a:pPr algn="r" indent="0" marL="0">
+              <a:buNone/>
+            </a:pPr>
+            <a:r>
+              <a:rPr lang="en-US" sz="900" dirty="0">
+                <a:solidFill>
+                  <a:srgbClr val="5B6079"/>
+                </a:solidFill>
+                <a:latin typeface="Microsoft JhengHei" pitchFamily="34" charset="0"/>
+                <a:ea typeface="Microsoft JhengHei" pitchFamily="34" charset="-122"/>
+                <a:cs typeface="Microsoft JhengHei" pitchFamily="34" charset="-120"/>
+              </a:rPr>
+              <a:t>9</a:t>
+            </a:r>
+            <a:endParaRPr lang="en-US" sz="900" dirty="0"/>
+          </a:p>
+        </p:txBody>
+      </p:sp>
+    </p:spTree>
+  </p:cSld>
+  <p:clrMapOvr>
+    <a:masterClrMapping/>
+  </p:clrMapOvr>
+</p:sld>
+</file>
+
+<file path=ppt/slides/slide11.xml><?xml version="1.0" encoding="utf-8"?>
+<p:sld xmlns:a="http://schemas.openxmlformats.org/drawingml/2006/main" xmlns:r="http://schemas.openxmlformats.org/officeDocument/2006/relationships" xmlns:p="http://schemas.openxmlformats.org/presentationml/2006/main">
+  <p:cSld name="Slide 11">
+    <p:bg>
+      <p:bgPr>
+        <a:solidFill>
           <a:srgbClr val="0F1031"/>
         </a:solidFill>
       </p:bgPr>
@@ -3853,7 +4613,7 @@
                 <a:ea typeface="Microsoft JhengHei" pitchFamily="34" charset="-122"/>
                 <a:cs typeface="Microsoft JhengHei" pitchFamily="34" charset="-120"/>
               </a:rPr>
-              <a:t>這一步刻意不拆成四次對話。</a:t>
+              <a:t>把 RET2_檔期促銷需求單.md 與 RET2_商品與成本清單.xlsx 一起上傳，送出下面的提示詞。</a:t>
             </a:r>
             <a:endParaRPr lang="en-US" sz="1300" dirty="0"/>
           </a:p>
@@ -4000,7 +4760,7 @@
                 <a:ea typeface="Microsoft JhengHei" pitchFamily="34" charset="-122"/>
                 <a:cs typeface="Microsoft JhengHei" pitchFamily="34" charset="-120"/>
               </a:rPr>
-              <a:t>這一步請你刻意觀察右側工作區。</a:t>
+              <a:t>等待 Cowork 接力產出四份交付物時，刻意觀察右側工作區的技能欄與輸出資料夾。</a:t>
             </a:r>
             <a:endParaRPr lang="en-US" sz="1300" dirty="0"/>
           </a:p>
@@ -4147,7 +4907,7 @@
                 <a:ea typeface="Microsoft JhengHei" pitchFamily="34" charset="-122"/>
                 <a:cs typeface="Microsoft JhengHei" pitchFamily="34" charset="-120"/>
               </a:rPr>
-              <a:t>打開 Excel 試算表，先確認整體毛利率是否真的守在 32% 以上、有沒有品項折後售價跌破成本 1.25 倍…</a:t>
+              <a:t>收到四份交付物後，打開 Excel 試算表對照原始成本清單逐項驗算，再送出下面的提示詞。</a:t>
             </a:r>
             <a:endParaRPr lang="en-US" sz="1300" dirty="0"/>
           </a:p>
@@ -4294,7 +5054,7 @@
                 <a:ea typeface="Microsoft JhengHei" pitchFamily="34" charset="-122"/>
                 <a:cs typeface="Microsoft JhengHei" pitchFamily="34" charset="-120"/>
               </a:rPr>
-              <a:t>四份檔案確認無誤後，在側邊欄輸出區點「全部下載」，一次打包成 zip（單次最多 50 個檔案、500 MB）。</a:t>
+              <a:t>四份文件確認無誤後，在側邊欄輸出區點「全部下載」，再送出下面的提示詞讓供應商通知信存為草稿。</a:t>
             </a:r>
             <a:endParaRPr lang="en-US" sz="1300" dirty="0"/>
           </a:p>
@@ -4372,7 +5132,7 @@
                 <a:ea typeface="Microsoft JhengHei" pitchFamily="34" charset="-122"/>
                 <a:cs typeface="Microsoft JhengHei" pitchFamily="34" charset="-120"/>
               </a:rPr>
-              <a:t>9</a:t>
+              <a:t>10</a:t>
             </a:r>
             <a:endParaRPr lang="en-US" sz="900" dirty="0"/>
           </a:p>
@@ -4386,9 +5146,9 @@
 </p:sld>
 </file>
 
-<file path=ppt/slides/slide11.xml><?xml version="1.0" encoding="utf-8"?>
+<file path=ppt/slides/slide12.xml><?xml version="1.0" encoding="utf-8"?>
 <p:sld xmlns:a="http://schemas.openxmlformats.org/drawingml/2006/main" xmlns:r="http://schemas.openxmlformats.org/officeDocument/2006/relationships" xmlns:p="http://schemas.openxmlformats.org/presentationml/2006/main">
-  <p:cSld name="Slide 11">
+  <p:cSld name="Slide 12">
     <p:bg>
       <p:bgPr>
         <a:solidFill>
@@ -4839,7 +5599,7 @@
                 <a:ea typeface="Microsoft JhengHei" pitchFamily="34" charset="-122"/>
                 <a:cs typeface="Microsoft JhengHei" pitchFamily="34" charset="-120"/>
               </a:rPr>
-              <a:t>四份交付物都已產出，且格式正確（Word 企劃書、Excel 試算表、PDF 單張 SOP、Email 草稿）</a:t>
+              <a:t>〔產出〕四份交付物都已產出，且格式正確（Word 企劃書、Excel 試算表、PDF 單張 SOP、Email 草稿）</a:t>
             </a:r>
             <a:endParaRPr lang="en-US" sz="1300" dirty="0"/>
           </a:p>
@@ -4902,7 +5662,7 @@
                 <a:ea typeface="Microsoft JhengHei" pitchFamily="34" charset="-122"/>
                 <a:cs typeface="Microsoft JhengHei" pitchFamily="34" charset="-120"/>
               </a:rPr>
-              <a:t>Excel 試算表的整體毛利率確實守住 32%，且逐品項折後售價未低於成本 1.25 倍</a:t>
+              <a:t>〔計算〕Excel 試算表的整體毛利率確實守住 32%，且逐品項折後售價未低於成本 1.25 倍</a:t>
             </a:r>
             <a:endParaRPr lang="en-US" sz="1300" dirty="0"/>
           </a:p>
@@ -4965,7 +5725,7 @@
                 <a:ea typeface="Microsoft JhengHei" pitchFamily="34" charset="-122"/>
                 <a:cs typeface="Microsoft JhengHei" pitchFamily="34" charset="-120"/>
               </a:rPr>
-              <a:t>庫存低於 300 件的品項（鑄鐵燉鍋 190 件、床頭燈 280 件）未被列為主打品</a:t>
+              <a:t>〔判定〕庫存低於 300 件的品項（鑄鐵燉鍋 190 件、床頭燈 280 件）未被列為主打品</a:t>
             </a:r>
             <a:endParaRPr lang="en-US" sz="1300" dirty="0"/>
           </a:p>
@@ -5043,7 +5803,7 @@
                 <a:ea typeface="Microsoft JhengHei" pitchFamily="34" charset="-122"/>
                 <a:cs typeface="Microsoft JhengHei" pitchFamily="34" charset="-120"/>
               </a:rPr>
-              <a:t>10</a:t>
+              <a:t>11</a:t>
             </a:r>
             <a:endParaRPr lang="en-US" sz="900" dirty="0"/>
           </a:p>
@@ -5057,9 +5817,9 @@
 </p:sld>
 </file>
 
-<file path=ppt/slides/slide12.xml><?xml version="1.0" encoding="utf-8"?>
+<file path=ppt/slides/slide13.xml><?xml version="1.0" encoding="utf-8"?>
 <p:sld xmlns:a="http://schemas.openxmlformats.org/drawingml/2006/main" xmlns:r="http://schemas.openxmlformats.org/officeDocument/2006/relationships" xmlns:p="http://schemas.openxmlformats.org/presentationml/2006/main">
-  <p:cSld name="Slide 12">
+  <p:cSld name="Slide 13">
     <p:bg>
       <p:bgPr>
         <a:solidFill>
@@ -5540,7 +6300,7 @@
                 <a:ea typeface="Microsoft JhengHei" pitchFamily="34" charset="-122"/>
                 <a:cs typeface="Microsoft JhengHei" pitchFamily="34" charset="-120"/>
               </a:rPr>
-              <a:t>這個情境設定的不是排程，而是**事件觸發**：不是「每天早上跑一次」，而是「只要客服信箱收到符合條件的客訴信，就自動比對退換貨政策、判定案件等級、草擬回覆並等你核准」。你不用盯著信箱，也不用記得政策第幾條 —— 因為在你打開那封信之前，草稿已經準備好躺在那裡了。</a:t>
+              <a:t>這個情境設定的不是排程，而是事件觸發：不是「每天早上跑一次」，而是「只要客服信箱收到符合條件的客訴信，就自動比對退換貨政策、判定案件等級、草擬回覆並等你核准」。你不用盯著信箱，也不用記得政策第幾條 —— 因為在你打開那封信之前，草稿已經準備好躺在那裡了。</a:t>
             </a:r>
             <a:endParaRPr lang="en-US" sz="1600" dirty="0"/>
           </a:p>
@@ -5726,7 +6486,7 @@
                 <a:ea typeface="Microsoft JhengHei" pitchFamily="34" charset="-122"/>
                 <a:cs typeface="Microsoft JhengHei" pitchFamily="34" charset="-120"/>
               </a:rPr>
-              <a:t>事件觸發任務最怕的是「規則沒調好就上線」，所以第一步一定是手動驗證。</a:t>
+              <a:t>把 RET3_客訴來信範例.md 與 RET3_退換貨政策與處理原則.md 一起上傳，送出下面的提示詞。</a:t>
             </a:r>
             <a:endParaRPr lang="en-US" sz="1300" dirty="0"/>
           </a:p>
@@ -5873,7 +6633,7 @@
                 <a:ea typeface="Microsoft JhengHei" pitchFamily="34" charset="-122"/>
                 <a:cs typeface="Microsoft JhengHei" pitchFamily="34" charset="-120"/>
               </a:rPr>
-              <a:t>判定正確之後，再請它逐封草擬回覆。</a:t>
+              <a:t>確認判定表正確後，送出下面的提示詞，請 Cowork 逐封草擬回覆。</a:t>
             </a:r>
             <a:endParaRPr lang="en-US" sz="1300" dirty="0"/>
           </a:p>
@@ -6020,7 +6780,7 @@
                 <a:ea typeface="Microsoft JhengHei" pitchFamily="34" charset="-122"/>
                 <a:cs typeface="Microsoft JhengHei" pitchFamily="34" charset="-120"/>
               </a:rPr>
-              <a:t>規則驗證過了，才把它變成常駐的事件觸發任務。</a:t>
+              <a:t>三封草稿確認沒有超出政策承諾後，送出下面的提示詞，請 Cowork 設定事件觸發任務。</a:t>
             </a:r>
             <a:endParaRPr lang="en-US" sz="1300" dirty="0"/>
           </a:p>
@@ -6167,7 +6927,7 @@
                 <a:ea typeface="Microsoft JhengHei" pitchFamily="34" charset="-122"/>
                 <a:cs typeface="Microsoft JhengHei" pitchFamily="34" charset="-120"/>
               </a:rPr>
-              <a:t>事件觸發任務會和排程任務並列在「自動化」頁，各自顯示狀態（作用中／草稿／已暫停）與最近一次觸發時間…</a:t>
+              <a:t>任務設定完成後，在「自動化」頁確認狀態與執行紀錄，再送出下面的提示詞了解它的安全邊界。</a:t>
             </a:r>
             <a:endParaRPr lang="en-US" sz="1300" dirty="0"/>
           </a:p>
@@ -6245,7 +7005,7 @@
                 <a:ea typeface="Microsoft JhengHei" pitchFamily="34" charset="-122"/>
                 <a:cs typeface="Microsoft JhengHei" pitchFamily="34" charset="-120"/>
               </a:rPr>
-              <a:t>11</a:t>
+              <a:t>12</a:t>
             </a:r>
             <a:endParaRPr lang="en-US" sz="900" dirty="0"/>
           </a:p>
@@ -6259,9 +7019,9 @@
 </p:sld>
 </file>
 
-<file path=ppt/slides/slide13.xml><?xml version="1.0" encoding="utf-8"?>
+<file path=ppt/slides/slide14.xml><?xml version="1.0" encoding="utf-8"?>
 <p:sld xmlns:a="http://schemas.openxmlformats.org/drawingml/2006/main" xmlns:r="http://schemas.openxmlformats.org/officeDocument/2006/relationships" xmlns:p="http://schemas.openxmlformats.org/presentationml/2006/main">
-  <p:cSld name="Slide 13">
+  <p:cSld name="Slide 14">
     <p:bg>
       <p:bgPr>
         <a:solidFill>
@@ -6712,7 +7472,7 @@
                 <a:ea typeface="Microsoft JhengHei" pitchFamily="34" charset="-122"/>
                 <a:cs typeface="Microsoft JhengHei" pitchFamily="34" charset="-120"/>
               </a:rPr>
-              <a:t>第一封（瑕疵且逾 48 小時未回覆）被正確判定為 A 級並要求主管覆核</a:t>
+              <a:t>〔判定〕第一封（瑕疵且逾 48 小時未回覆）被正確判定為 A 級並要求主管覆核</a:t>
             </a:r>
             <a:endParaRPr lang="en-US" sz="1300" dirty="0"/>
           </a:p>
@@ -6775,7 +7535,7 @@
                 <a:ea typeface="Microsoft JhengHei" pitchFamily="34" charset="-122"/>
                 <a:cs typeface="Microsoft JhengHei" pitchFamily="34" charset="-120"/>
               </a:rPr>
-              <a:t>第二封正確引用 P-04，說明到貨逾期可取消並全額退款，不受鑑賞期限制</a:t>
+              <a:t>〔引用〕第二封正確引用 P-04，說明到貨逾期可取消並全額退款，不受鑑賞期限制</a:t>
             </a:r>
             <a:endParaRPr lang="en-US" sz="1300" dirty="0"/>
           </a:p>
@@ -6838,7 +7598,7 @@
                 <a:ea typeface="Microsoft JhengHei" pitchFamily="34" charset="-122"/>
                 <a:cs typeface="Microsoft JhengHei" pitchFamily="34" charset="-120"/>
               </a:rPr>
-              <a:t>第三封誠實說明門市（P-02）與網路通路（P-01）規定不同，未含糊帶過也未責怪客戶</a:t>
+              <a:t>〔說明〕第三封誠實說明門市（P-02）與網路通路（P-01）規定不同，未含糊帶過也未責怪客戶</a:t>
             </a:r>
             <a:endParaRPr lang="en-US" sz="1300" dirty="0"/>
           </a:p>
@@ -6916,7 +7676,7 @@
                 <a:ea typeface="Microsoft JhengHei" pitchFamily="34" charset="-122"/>
                 <a:cs typeface="Microsoft JhengHei" pitchFamily="34" charset="-120"/>
               </a:rPr>
-              <a:t>12</a:t>
+              <a:t>13</a:t>
             </a:r>
             <a:endParaRPr lang="en-US" sz="900" dirty="0"/>
           </a:p>
@@ -6930,9 +7690,9 @@
 </p:sld>
 </file>
 
-<file path=ppt/slides/slide14.xml><?xml version="1.0" encoding="utf-8"?>
+<file path=ppt/slides/slide15.xml><?xml version="1.0" encoding="utf-8"?>
 <p:sld xmlns:a="http://schemas.openxmlformats.org/drawingml/2006/main" xmlns:r="http://schemas.openxmlformats.org/officeDocument/2006/relationships" xmlns:p="http://schemas.openxmlformats.org/presentationml/2006/main">
-  <p:cSld name="Slide 14">
+  <p:cSld name="Slide 15">
     <p:bg>
       <p:bgPr>
         <a:solidFill>
@@ -7538,7 +8298,7 @@
                 <a:ea typeface="Microsoft JhengHei" pitchFamily="34" charset="-122"/>
                 <a:cs typeface="Microsoft JhengHei" pitchFamily="34" charset="-120"/>
               </a:rPr>
-              <a:t>這一步只做研究，先不要碰價格決策。</a:t>
+              <a:t>把 RET4_調價原則與情報需求.md 與 RET4_主力品項售價與毛利.xlsx 一起上傳，送出下面的提示詞。</a:t>
             </a:r>
             <a:endParaRPr lang="en-US" sz="1300" dirty="0"/>
           </a:p>
@@ -7685,7 +8445,7 @@
                 <a:ea typeface="Microsoft JhengHei" pitchFamily="34" charset="-122"/>
                 <a:cs typeface="Microsoft JhengHei" pitchFamily="34" charset="-120"/>
               </a:rPr>
-              <a:t>隨機點開三到五個來源連結，確認兩件事：連結真的存在（不是看起來像網址的字串），以及該來源真的支持它寫的那句結論…</a:t>
+              <a:t>收到研究報告後，隨機點開三到五個來源連結，確認連結真的可以打開，再送出下面的提示詞。</a:t>
             </a:r>
             <a:endParaRPr lang="en-US" sz="1300" dirty="0"/>
           </a:p>
@@ -7832,7 +8592,7 @@
                 <a:ea typeface="Microsoft JhengHei" pitchFamily="34" charset="-122"/>
                 <a:cs typeface="Microsoft JhengHei" pitchFamily="34" charset="-120"/>
               </a:rPr>
-              <a:t>這一步才是這個情境真正的差異點：不是「幫我整理市場情報」，而是「把情報換算成我能執行的決定」。</a:t>
+              <a:t>確認來源品質後，送出下面的提示詞，請 Cowork 把情報落到毛利表上。</a:t>
             </a:r>
             <a:endParaRPr lang="en-US" sz="1300" dirty="0"/>
           </a:p>
@@ -7979,7 +8739,7 @@
                 <a:ea typeface="Microsoft JhengHei" pitchFamily="34" charset="-122"/>
                 <a:cs typeface="Microsoft JhengHei" pitchFamily="34" charset="-120"/>
               </a:rPr>
-              <a:t>最後補一刀自我檢查。</a:t>
+              <a:t>收到 Excel 建議表後，送出下面的提示詞，讓 Cowork 自我查核並解釋「刻意不動價」的品項。</a:t>
             </a:r>
             <a:endParaRPr lang="en-US" sz="1300" dirty="0"/>
           </a:p>
@@ -8057,7 +8817,7 @@
                 <a:ea typeface="Microsoft JhengHei" pitchFamily="34" charset="-122"/>
                 <a:cs typeface="Microsoft JhengHei" pitchFamily="34" charset="-120"/>
               </a:rPr>
-              <a:t>13</a:t>
+              <a:t>14</a:t>
             </a:r>
             <a:endParaRPr lang="en-US" sz="900" dirty="0"/>
           </a:p>
@@ -8071,9 +8831,9 @@
 </p:sld>
 </file>
 
-<file path=ppt/slides/slide15.xml><?xml version="1.0" encoding="utf-8"?>
+<file path=ppt/slides/slide16.xml><?xml version="1.0" encoding="utf-8"?>
 <p:sld xmlns:a="http://schemas.openxmlformats.org/drawingml/2006/main" xmlns:r="http://schemas.openxmlformats.org/officeDocument/2006/relationships" xmlns:p="http://schemas.openxmlformats.org/presentationml/2006/main">
-  <p:cSld name="Slide 15">
+  <p:cSld name="Slide 16">
     <p:bg>
       <p:bgPr>
         <a:solidFill>
@@ -8524,7 +9284,7 @@
                 <a:ea typeface="Microsoft JhengHei" pitchFamily="34" charset="-122"/>
                 <a:cs typeface="Microsoft JhengHei" pitchFamily="34" charset="-120"/>
               </a:rPr>
-              <a:t>每一條外部情報都附有可點擊來源連結，查不到的誠實標示「查無可靠公開來源」</a:t>
+              <a:t>〔來源〕每一條外部情報都附有可點擊來源連結，查不到的誠實標示「查無可靠公開來源」</a:t>
             </a:r>
             <a:endParaRPr lang="en-US" sz="1300" dirty="0"/>
           </a:p>
@@ -8587,7 +9347,7 @@
                 <a:ea typeface="Microsoft JhengHei" pitchFamily="34" charset="-122"/>
                 <a:cs typeface="Microsoft JhengHei" pitchFamily="34" charset="-120"/>
               </a:rPr>
-              <a:t>隨機抽查的來源連結真的可以打開，且內容支持它所寫的結論</a:t>
+              <a:t>〔查核〕隨機抽查的來源連結真的可以打開，且內容支持它所寫的結論</a:t>
             </a:r>
             <a:endParaRPr lang="en-US" sz="1300" dirty="0"/>
           </a:p>
@@ -8650,7 +9410,7 @@
                 <a:ea typeface="Microsoft JhengHei" pitchFamily="34" charset="-122"/>
                 <a:cs typeface="Microsoft JhengHei" pitchFamily="34" charset="-120"/>
               </a:rPr>
-              <a:t>所有建議調整後的毛利率都不低於 38%，單次調降幅度都未超過 15%</a:t>
+              <a:t>〔計算〕所有建議調整後的毛利率都不低於 38%，單次調降幅度都未超過 15%</a:t>
             </a:r>
             <a:endParaRPr lang="en-US" sz="1300" dirty="0"/>
           </a:p>
@@ -8728,7 +9488,7 @@
                 <a:ea typeface="Microsoft JhengHei" pitchFamily="34" charset="-122"/>
                 <a:cs typeface="Microsoft JhengHei" pitchFamily="34" charset="-120"/>
               </a:rPr>
-              <a:t>14</a:t>
+              <a:t>15</a:t>
             </a:r>
             <a:endParaRPr lang="en-US" sz="900" dirty="0"/>
           </a:p>
@@ -8742,9 +9502,9 @@
 </p:sld>
 </file>
 
-<file path=ppt/slides/slide16.xml><?xml version="1.0" encoding="utf-8"?>
+<file path=ppt/slides/slide17.xml><?xml version="1.0" encoding="utf-8"?>
 <p:sld xmlns:a="http://schemas.openxmlformats.org/drawingml/2006/main" xmlns:r="http://schemas.openxmlformats.org/officeDocument/2006/relationships" xmlns:p="http://schemas.openxmlformats.org/presentationml/2006/main">
-  <p:cSld name="Slide 16">
+  <p:cSld name="Slide 17">
     <p:bg>
       <p:bgPr>
         <a:solidFill>
@@ -9411,7 +10171,7 @@
                 <a:ea typeface="Microsoft JhengHei" pitchFamily="34" charset="-122"/>
                 <a:cs typeface="Microsoft JhengHei" pitchFamily="34" charset="-120"/>
               </a:rPr>
-              <a:t>第一步是把兩份文件一起交出去，讓它自己讀 PDF、自己套規則、自己算天數。</a:t>
+              <a:t>把 RET5_供應商合約清單.pdf 與 RET5_續約評估原則.md 一起上傳，送出下面的提示詞。</a:t>
             </a:r>
             <a:endParaRPr lang="en-US" sz="1300" dirty="0"/>
           </a:p>
@@ -9558,7 +10318,7 @@
                 <a:ea typeface="Microsoft JhengHei" pitchFamily="34" charset="-122"/>
                 <a:cs typeface="Microsoft JhengHei" pitchFamily="34" charset="-120"/>
               </a:rPr>
-              <a:t>確認盤點結果後，換技能。</a:t>
+              <a:t>確認盤點表無誤後，送出下面的提示詞，請 Cowork 依規則安排續約評估會議。</a:t>
             </a:r>
             <a:endParaRPr lang="en-US" sz="1300" dirty="0"/>
           </a:p>
@@ -9705,7 +10465,7 @@
                 <a:ea typeface="Microsoft JhengHei" pitchFamily="34" charset="-122"/>
                 <a:cs typeface="Microsoft JhengHei" pitchFamily="34" charset="-120"/>
               </a:rPr>
-              <a:t>這一步是整個情境的核心體驗。</a:t>
+              <a:t>確認所有會議邀請排程正確後，送出下面的提示詞，請 Cowork 為三位採購各寄一封提醒信。</a:t>
             </a:r>
             <a:endParaRPr lang="en-US" sz="1300" dirty="0"/>
           </a:p>
@@ -9852,7 +10612,7 @@
                 <a:ea typeface="Microsoft JhengHei" pitchFamily="34" charset="-122"/>
                 <a:cs typeface="Microsoft JhengHei" pitchFamily="34" charset="-120"/>
               </a:rPr>
-              <a:t>最後一步請學員親自回 Outlook 行事曆與寄件備份確認。</a:t>
+              <a:t>打開 Outlook 行事曆與寄件備份，親自確認會議邀請與提醒信是否真的落地。</a:t>
             </a:r>
             <a:endParaRPr lang="en-US" sz="1300" dirty="0"/>
           </a:p>
@@ -9930,7 +10690,7 @@
                 <a:ea typeface="Microsoft JhengHei" pitchFamily="34" charset="-122"/>
                 <a:cs typeface="Microsoft JhengHei" pitchFamily="34" charset="-120"/>
               </a:rPr>
-              <a:t>15</a:t>
+              <a:t>16</a:t>
             </a:r>
             <a:endParaRPr lang="en-US" sz="900" dirty="0"/>
           </a:p>
@@ -9944,9 +10704,9 @@
 </p:sld>
 </file>
 
-<file path=ppt/slides/slide17.xml><?xml version="1.0" encoding="utf-8"?>
+<file path=ppt/slides/slide18.xml><?xml version="1.0" encoding="utf-8"?>
 <p:sld xmlns:a="http://schemas.openxmlformats.org/drawingml/2006/main" xmlns:r="http://schemas.openxmlformats.org/officeDocument/2006/relationships" xmlns:p="http://schemas.openxmlformats.org/presentationml/2006/main">
-  <p:cSld name="Slide 17">
+  <p:cSld name="Slide 18">
     <p:bg>
       <p:bgPr>
         <a:solidFill>
@@ -10397,7 +11157,7 @@
                 <a:ea typeface="Microsoft JhengHei" pitchFamily="34" charset="-122"/>
                 <a:cs typeface="Microsoft JhengHei" pitchFamily="34" charset="-120"/>
               </a:rPr>
-              <a:t>香語生活（9/18）與綿境紡織（9/30）被正確標示為「應啟動日已過期」</a:t>
+              <a:t>〔盤點〕香語生活（9/18）與綿境紡織（9/30）被正確標示為「應啟動日已過期」</a:t>
             </a:r>
             <a:endParaRPr lang="en-US" sz="1300" dirty="0"/>
           </a:p>
@@ -10460,7 +11220,7 @@
                 <a:ea typeface="Microsoft JhengHei" pitchFamily="34" charset="-122"/>
                 <a:cs typeface="Microsoft JhengHei" pitchFamily="34" charset="-120"/>
               </a:rPr>
-              <a:t>提前啟動天數依年度採購額正確分級（90／60／30 天），未一律套用同一個天數</a:t>
+              <a:t>〔分級〕提前啟動天數依年度採購額正確分級（90／60／30 天），未一律套用同一個天數</a:t>
             </a:r>
             <a:endParaRPr lang="en-US" sz="1300" dirty="0"/>
           </a:p>
@@ -10523,7 +11283,7 @@
                 <a:ea typeface="Microsoft JhengHei" pitchFamily="34" charset="-122"/>
                 <a:cs typeface="Microsoft JhengHei" pitchFamily="34" charset="-120"/>
               </a:rPr>
-              <a:t>黃柏翰的兩份到期日相近合約被合併為一場會議，符合合併規則</a:t>
+              <a:t>〔合併〕黃柏翰的兩份到期日相近合約被合併為一場會議，符合合併規則</a:t>
             </a:r>
             <a:endParaRPr lang="en-US" sz="1300" dirty="0"/>
           </a:p>
@@ -10601,7 +11361,7 @@
                 <a:ea typeface="Microsoft JhengHei" pitchFamily="34" charset="-122"/>
                 <a:cs typeface="Microsoft JhengHei" pitchFamily="34" charset="-120"/>
               </a:rPr>
-              <a:t>16</a:t>
+              <a:t>17</a:t>
             </a:r>
             <a:endParaRPr lang="en-US" sz="900" dirty="0"/>
           </a:p>
@@ -10615,9 +11375,9 @@
 </p:sld>
 </file>
 
-<file path=ppt/slides/slide18.xml><?xml version="1.0" encoding="utf-8"?>
+<file path=ppt/slides/slide19.xml><?xml version="1.0" encoding="utf-8"?>
 <p:sld xmlns:a="http://schemas.openxmlformats.org/drawingml/2006/main" xmlns:r="http://schemas.openxmlformats.org/officeDocument/2006/relationships" xmlns:p="http://schemas.openxmlformats.org/presentationml/2006/main">
-  <p:cSld name="Slide 18">
+  <p:cSld name="Slide 19">
     <p:bg>
       <p:bgPr>
         <a:solidFill>
@@ -11162,7 +11922,7 @@
                 <a:ea typeface="Microsoft JhengHei" pitchFamily="34" charset="-122"/>
                 <a:cs typeface="Microsoft JhengHei" pitchFamily="34" charset="-120"/>
               </a:rPr>
-              <a:t>建立技能有三種方式：從左側「自訂」頁的引導式流程、直接在對話中請它幫你做一個…</a:t>
+              <a:t>在對話中送出下面的提示詞，描述你每週在做的事，請 Cowork 幫你草擬技能的名稱與描述。</a:t>
             </a:r>
             <a:endParaRPr lang="en-US" sz="1300" dirty="0"/>
           </a:p>
@@ -11309,7 +12069,7 @@
                 <a:ea typeface="Microsoft JhengHei" pitchFamily="34" charset="-122"/>
                 <a:cs typeface="Microsoft JhengHei" pitchFamily="34" charset="-120"/>
               </a:rPr>
-              <a:t>技能的價值不在名字，而在規則的密度。</a:t>
+              <a:t>把 RET6_SKILL.md 上傳，送出下面的提示詞，請 Cowork 把規則寫進技能。</a:t>
             </a:r>
             <a:endParaRPr lang="en-US" sz="1300" dirty="0"/>
           </a:p>
@@ -11456,7 +12216,7 @@
                 <a:ea typeface="Microsoft JhengHei" pitchFamily="34" charset="-122"/>
                 <a:cs typeface="Microsoft JhengHei" pitchFamily="34" charset="-120"/>
               </a:rPr>
-              <a:t>技能建立、更新或驗證時，Cowork 會自動評估並回傳一份「技能報告」，你不需要主動要求。</a:t>
+              <a:t>技能發布後，Cowork 會自動回傳一份技能報告，不需要主動要求。</a:t>
             </a:r>
             <a:endParaRPr lang="en-US" sz="1300" dirty="0"/>
           </a:p>
@@ -11603,7 +12363,7 @@
                 <a:ea typeface="Microsoft JhengHei" pitchFamily="34" charset="-122"/>
                 <a:cs typeface="Microsoft JhengHei" pitchFamily="34" charset="-120"/>
               </a:rPr>
-              <a:t>這一步一定要**開新的工作階段**，因為技能是在每次工作階段開始時被自動探索載入的。</a:t>
+              <a:t>開一個全新的工作階段，上傳 RET6_週營運原始數據.xlsx，只送出下面一句提示詞，不要重述任何規則。</a:t>
             </a:r>
             <a:endParaRPr lang="en-US" sz="1300" dirty="0"/>
           </a:p>
@@ -11823,677 +12583,6 @@
               <a:rPr lang="en-US" sz="900" dirty="0">
                 <a:solidFill>
                   <a:srgbClr val="8A8FB5"/>
-                </a:solidFill>
-                <a:latin typeface="Microsoft JhengHei" pitchFamily="34" charset="0"/>
-                <a:ea typeface="Microsoft JhengHei" pitchFamily="34" charset="-122"/>
-                <a:cs typeface="Microsoft JhengHei" pitchFamily="34" charset="-120"/>
-              </a:rPr>
-              <a:t>17</a:t>
-            </a:r>
-            <a:endParaRPr lang="en-US" sz="900" dirty="0"/>
-          </a:p>
-        </p:txBody>
-      </p:sp>
-    </p:spTree>
-  </p:cSld>
-  <p:clrMapOvr>
-    <a:masterClrMapping/>
-  </p:clrMapOvr>
-</p:sld>
-</file>
-
-<file path=ppt/slides/slide19.xml><?xml version="1.0" encoding="utf-8"?>
-<p:sld xmlns:a="http://schemas.openxmlformats.org/drawingml/2006/main" xmlns:r="http://schemas.openxmlformats.org/officeDocument/2006/relationships" xmlns:p="http://schemas.openxmlformats.org/presentationml/2006/main">
-  <p:cSld name="Slide 19">
-    <p:bg>
-      <p:bgPr>
-        <a:solidFill>
-          <a:srgbClr val="F7F8FC"/>
-        </a:solidFill>
-      </p:bgPr>
-    </p:bg>
-    <p:spTree>
-      <p:nvGrpSpPr>
-        <p:cNvPr id="1" name=""/>
-        <p:cNvGrpSpPr/>
-        <p:nvPr/>
-      </p:nvGrpSpPr>
-      <p:grpSpPr>
-        <a:xfrm>
-          <a:off x="0" y="0"/>
-          <a:ext cx="0" cy="0"/>
-          <a:chOff x="0" y="0"/>
-          <a:chExt cx="0" cy="0"/>
-        </a:xfrm>
-      </p:grpSpPr>
-      <p:sp>
-        <p:nvSpPr>
-          <p:cNvPr id="2" name="Shape 0"/>
-          <p:cNvSpPr/>
-          <p:nvPr/>
-        </p:nvSpPr>
-        <p:spPr>
-          <a:xfrm>
-            <a:off x="640080" y="566928"/>
-            <a:ext cx="384048" cy="128016"/>
-          </a:xfrm>
-          <a:prstGeom prst="rect">
-            <a:avLst/>
-          </a:prstGeom>
-          <a:solidFill>
-            <a:srgbClr val="A4373A"/>
-          </a:solidFill>
-          <a:ln/>
-        </p:spPr>
-      </p:sp>
-      <p:sp>
-        <p:nvSpPr>
-          <p:cNvPr id="3" name="Text 1"/>
-          <p:cNvSpPr/>
-          <p:nvPr/>
-        </p:nvSpPr>
-        <p:spPr>
-          <a:xfrm>
-            <a:off x="1143000" y="457200"/>
-            <a:ext cx="8229600" cy="310896"/>
-          </a:xfrm>
-          <a:prstGeom prst="rect">
-            <a:avLst/>
-          </a:prstGeom>
-          <a:noFill/>
-          <a:ln/>
-        </p:spPr>
-        <p:txBody>
-          <a:bodyPr wrap="square" rtlCol="0" anchor="ctr"/>
-          <a:lstStyle/>
-          <a:p>
-            <a:pPr indent="0" marL="0">
-              <a:buNone/>
-            </a:pPr>
-            <a:r>
-              <a:rPr lang="en-US" sz="1200" b="1" spc="200" kern="0" dirty="0">
-                <a:solidFill>
-                  <a:srgbClr val="A4373A"/>
-                </a:solidFill>
-                <a:latin typeface="Microsoft JhengHei" pitchFamily="34" charset="0"/>
-                <a:ea typeface="Microsoft JhengHei" pitchFamily="34" charset="-122"/>
-                <a:cs typeface="Microsoft JhengHei" pitchFamily="34" charset="-120"/>
-              </a:rPr>
-              <a:t>情境 06 · 實機示範</a:t>
-            </a:r>
-            <a:endParaRPr lang="en-US" sz="1200" dirty="0"/>
-          </a:p>
-        </p:txBody>
-      </p:sp>
-      <p:sp>
-        <p:nvSpPr>
-          <p:cNvPr id="4" name="Text 2"/>
-          <p:cNvSpPr/>
-          <p:nvPr/>
-        </p:nvSpPr>
-        <p:spPr>
-          <a:xfrm>
-            <a:off x="640080" y="786384"/>
-            <a:ext cx="10972800" cy="640080"/>
-          </a:xfrm>
-          <a:prstGeom prst="rect">
-            <a:avLst/>
-          </a:prstGeom>
-          <a:noFill/>
-          <a:ln/>
-        </p:spPr>
-        <p:txBody>
-          <a:bodyPr wrap="square" rtlCol="0" anchor="ctr"/>
-          <a:lstStyle/>
-          <a:p>
-            <a:pPr indent="0" marL="0">
-              <a:buNone/>
-            </a:pPr>
-            <a:r>
-              <a:rPr lang="en-US" sz="3000" b="1" dirty="0">
-                <a:solidFill>
-                  <a:srgbClr val="1E2235"/>
-                </a:solidFill>
-                <a:latin typeface="Microsoft JhengHei" pitchFamily="34" charset="0"/>
-                <a:ea typeface="Microsoft JhengHei" pitchFamily="34" charset="-122"/>
-                <a:cs typeface="Microsoft JhengHei" pitchFamily="34" charset="-120"/>
-              </a:rPr>
-              <a:t>看 Cowork 怎麼做、產出什麼</a:t>
-            </a:r>
-            <a:endParaRPr lang="en-US" sz="3000" dirty="0"/>
-          </a:p>
-        </p:txBody>
-      </p:sp>
-      <p:sp>
-        <p:nvSpPr>
-          <p:cNvPr id="5" name="Shape 3"/>
-          <p:cNvSpPr/>
-          <p:nvPr/>
-        </p:nvSpPr>
-        <p:spPr>
-          <a:xfrm>
-            <a:off x="585216" y="1773936"/>
-            <a:ext cx="5184648" cy="3433186"/>
-          </a:xfrm>
-          <a:prstGeom prst="rect">
-            <a:avLst/>
-          </a:prstGeom>
-          <a:solidFill>
-            <a:srgbClr val="FFFFFF"/>
-          </a:solidFill>
-          <a:ln w="12700">
-            <a:solidFill>
-              <a:srgbClr val="E4E7F2"/>
-            </a:solidFill>
-            <a:prstDash val="solid"/>
-          </a:ln>
-          <a:effectLst>
-            <a:outerShdw sx="100000" sy="100000" kx="0" ky="0" algn="bl" rotWithShape="0" blurRad="114300" dist="38100" dir="5400000">
-              <a:srgbClr val="8A90B5">
-                <a:alpha val="22000"/>
-              </a:srgbClr>
-            </a:outerShdw>
-          </a:effectLst>
-        </p:spPr>
-      </p:sp>
-      <p:pic>
-        <p:nvPicPr>
-          <p:cNvPr id="6" name="Image 0" descr="C:\temp\CoworkLab\v2\_working\screenshots\ret6_01_create.png">    </p:cNvPr>
-          <p:cNvPicPr>
-            <a:picLocks noChangeAspect="1"/>
-          </p:cNvPicPr>
-          <p:nvPr/>
-        </p:nvPicPr>
-        <p:blipFill>
-          <a:blip r:embed="rId1"/>
-          <a:stretch>
-            <a:fillRect/>
-          </a:stretch>
-        </p:blipFill>
-        <p:spPr>
-          <a:xfrm>
-            <a:off x="640080" y="1828800"/>
-            <a:ext cx="5074920" cy="3323458"/>
-          </a:xfrm>
-          <a:prstGeom prst="rect">
-            <a:avLst/>
-          </a:prstGeom>
-        </p:spPr>
-      </p:pic>
-      <p:sp>
-        <p:nvSpPr>
-          <p:cNvPr id="7" name="Text 4"/>
-          <p:cNvSpPr/>
-          <p:nvPr/>
-        </p:nvSpPr>
-        <p:spPr>
-          <a:xfrm>
-            <a:off x="640080" y="5261986"/>
-            <a:ext cx="5074920" cy="320040"/>
-          </a:xfrm>
-          <a:prstGeom prst="rect">
-            <a:avLst/>
-          </a:prstGeom>
-          <a:noFill/>
-          <a:ln/>
-        </p:spPr>
-        <p:txBody>
-          <a:bodyPr wrap="square" rtlCol="0" anchor="ctr"/>
-          <a:lstStyle/>
-          <a:p>
-            <a:pPr algn="ctr" indent="0" marL="0">
-              <a:buNone/>
-            </a:pPr>
-            <a:r>
-              <a:rPr lang="en-US" sz="1350" b="1" dirty="0">
-                <a:solidFill>
-                  <a:srgbClr val="A4373A"/>
-                </a:solidFill>
-                <a:latin typeface="Microsoft JhengHei" pitchFamily="34" charset="0"/>
-                <a:ea typeface="Microsoft JhengHei" pitchFamily="34" charset="-122"/>
-                <a:cs typeface="Microsoft JhengHei" pitchFamily="34" charset="-120"/>
-              </a:rPr>
-              <a:t>① 你的輸入與指令</a:t>
-            </a:r>
-            <a:endParaRPr lang="en-US" sz="1350" dirty="0"/>
-          </a:p>
-        </p:txBody>
-      </p:sp>
-      <p:sp>
-        <p:nvSpPr>
-          <p:cNvPr id="8" name="Shape 5"/>
-          <p:cNvSpPr/>
-          <p:nvPr/>
-        </p:nvSpPr>
-        <p:spPr>
-          <a:xfrm>
-            <a:off x="6163056" y="1773936"/>
-            <a:ext cx="5184648" cy="3433186"/>
-          </a:xfrm>
-          <a:prstGeom prst="rect">
-            <a:avLst/>
-          </a:prstGeom>
-          <a:solidFill>
-            <a:srgbClr val="FFFFFF"/>
-          </a:solidFill>
-          <a:ln w="12700">
-            <a:solidFill>
-              <a:srgbClr val="E4E7F2"/>
-            </a:solidFill>
-            <a:prstDash val="solid"/>
-          </a:ln>
-          <a:effectLst>
-            <a:outerShdw sx="100000" sy="100000" kx="0" ky="0" algn="bl" rotWithShape="0" blurRad="114300" dist="38100" dir="5400000">
-              <a:srgbClr val="8A90B5">
-                <a:alpha val="22000"/>
-              </a:srgbClr>
-            </a:outerShdw>
-          </a:effectLst>
-        </p:spPr>
-      </p:sp>
-      <p:pic>
-        <p:nvPicPr>
-          <p:cNvPr id="9" name="Image 1" descr="C:\temp\CoworkLab\v2\_working\screenshots\ret6_05_share.png">    </p:cNvPr>
-          <p:cNvPicPr>
-            <a:picLocks noChangeAspect="1"/>
-          </p:cNvPicPr>
-          <p:nvPr/>
-        </p:nvPicPr>
-        <p:blipFill>
-          <a:blip r:embed="rId2"/>
-          <a:stretch>
-            <a:fillRect/>
-          </a:stretch>
-        </p:blipFill>
-        <p:spPr>
-          <a:xfrm>
-            <a:off x="6217920" y="1828800"/>
-            <a:ext cx="5074920" cy="3323458"/>
-          </a:xfrm>
-          <a:prstGeom prst="rect">
-            <a:avLst/>
-          </a:prstGeom>
-        </p:spPr>
-      </p:pic>
-      <p:sp>
-        <p:nvSpPr>
-          <p:cNvPr id="10" name="Text 6"/>
-          <p:cNvSpPr/>
-          <p:nvPr/>
-        </p:nvSpPr>
-        <p:spPr>
-          <a:xfrm>
-            <a:off x="6217920" y="5261986"/>
-            <a:ext cx="5074920" cy="320040"/>
-          </a:xfrm>
-          <a:prstGeom prst="rect">
-            <a:avLst/>
-          </a:prstGeom>
-          <a:noFill/>
-          <a:ln/>
-        </p:spPr>
-        <p:txBody>
-          <a:bodyPr wrap="square" rtlCol="0" anchor="ctr"/>
-          <a:lstStyle/>
-          <a:p>
-            <a:pPr algn="ctr" indent="0" marL="0">
-              <a:buNone/>
-            </a:pPr>
-            <a:r>
-              <a:rPr lang="en-US" sz="1350" b="1" dirty="0">
-                <a:solidFill>
-                  <a:srgbClr val="A4373A"/>
-                </a:solidFill>
-                <a:latin typeface="Microsoft JhengHei" pitchFamily="34" charset="0"/>
-                <a:ea typeface="Microsoft JhengHei" pitchFamily="34" charset="-122"/>
-                <a:cs typeface="Microsoft JhengHei" pitchFamily="34" charset="-120"/>
-              </a:rPr>
-              <a:t>② 產出成果</a:t>
-            </a:r>
-            <a:endParaRPr lang="en-US" sz="1350" dirty="0"/>
-          </a:p>
-        </p:txBody>
-      </p:sp>
-      <p:sp>
-        <p:nvSpPr>
-          <p:cNvPr id="11" name="Shape 7"/>
-          <p:cNvSpPr/>
-          <p:nvPr/>
-        </p:nvSpPr>
-        <p:spPr>
-          <a:xfrm>
-            <a:off x="640080" y="5074920"/>
-            <a:ext cx="10911535" cy="1143000"/>
-          </a:xfrm>
-          <a:prstGeom prst="rect">
-            <a:avLst/>
-          </a:prstGeom>
-          <a:solidFill>
-            <a:srgbClr val="FFFFFF"/>
-          </a:solidFill>
-          <a:ln w="12700">
-            <a:solidFill>
-              <a:srgbClr val="E4E7F2"/>
-            </a:solidFill>
-            <a:prstDash val="solid"/>
-          </a:ln>
-        </p:spPr>
-      </p:sp>
-      <p:sp>
-        <p:nvSpPr>
-          <p:cNvPr id="12" name="Shape 8"/>
-          <p:cNvSpPr/>
-          <p:nvPr/>
-        </p:nvSpPr>
-        <p:spPr>
-          <a:xfrm>
-            <a:off x="640080" y="5074920"/>
-            <a:ext cx="91440" cy="1143000"/>
-          </a:xfrm>
-          <a:prstGeom prst="rect">
-            <a:avLst/>
-          </a:prstGeom>
-          <a:solidFill>
-            <a:srgbClr val="A4373A"/>
-          </a:solidFill>
-          <a:ln/>
-        </p:spPr>
-      </p:sp>
-      <p:sp>
-        <p:nvSpPr>
-          <p:cNvPr id="13" name="Text 9"/>
-          <p:cNvSpPr/>
-          <p:nvPr/>
-        </p:nvSpPr>
-        <p:spPr>
-          <a:xfrm>
-            <a:off x="914400" y="5184648"/>
-            <a:ext cx="1828800" cy="320040"/>
-          </a:xfrm>
-          <a:prstGeom prst="rect">
-            <a:avLst/>
-          </a:prstGeom>
-          <a:noFill/>
-          <a:ln/>
-        </p:spPr>
-        <p:txBody>
-          <a:bodyPr wrap="square" rtlCol="0" anchor="ctr"/>
-          <a:lstStyle/>
-          <a:p>
-            <a:pPr indent="0" marL="0">
-              <a:buNone/>
-            </a:pPr>
-            <a:r>
-              <a:rPr lang="en-US" sz="1400" b="1" dirty="0">
-                <a:solidFill>
-                  <a:srgbClr val="1E2235"/>
-                </a:solidFill>
-                <a:latin typeface="Microsoft JhengHei" pitchFamily="34" charset="0"/>
-                <a:ea typeface="Microsoft JhengHei" pitchFamily="34" charset="-122"/>
-                <a:cs typeface="Microsoft JhengHei" pitchFamily="34" charset="-120"/>
-              </a:rPr>
-              <a:t>產出驗收</a:t>
-            </a:r>
-            <a:endParaRPr lang="en-US" sz="1400" dirty="0"/>
-          </a:p>
-        </p:txBody>
-      </p:sp>
-      <p:pic>
-        <p:nvPicPr>
-          <p:cNvPr id="14" name="Image 2" descr="preencoded.png">    </p:cNvPr>
-          <p:cNvPicPr>
-            <a:picLocks noChangeAspect="1"/>
-          </p:cNvPicPr>
-          <p:nvPr/>
-        </p:nvPicPr>
-        <p:blipFill>
-          <a:blip r:embed="rId3"/>
-          <a:stretch>
-            <a:fillRect/>
-          </a:stretch>
-        </p:blipFill>
-        <p:spPr>
-          <a:xfrm>
-            <a:off x="2834640" y="5221224"/>
-            <a:ext cx="182880" cy="182880"/>
-          </a:xfrm>
-          <a:prstGeom prst="rect">
-            <a:avLst/>
-          </a:prstGeom>
-        </p:spPr>
-      </p:pic>
-      <p:sp>
-        <p:nvSpPr>
-          <p:cNvPr id="15" name="Text 10"/>
-          <p:cNvSpPr/>
-          <p:nvPr/>
-        </p:nvSpPr>
-        <p:spPr>
-          <a:xfrm>
-            <a:off x="3108960" y="5166360"/>
-            <a:ext cx="8168335" cy="310896"/>
-          </a:xfrm>
-          <a:prstGeom prst="rect">
-            <a:avLst/>
-          </a:prstGeom>
-          <a:noFill/>
-          <a:ln/>
-        </p:spPr>
-        <p:txBody>
-          <a:bodyPr wrap="square" rtlCol="0" anchor="ctr"/>
-          <a:lstStyle/>
-          <a:p>
-            <a:pPr indent="0" marL="0">
-              <a:buNone/>
-            </a:pPr>
-            <a:r>
-              <a:rPr lang="en-US" sz="1300" dirty="0">
-                <a:solidFill>
-                  <a:srgbClr val="1E2235"/>
-                </a:solidFill>
-                <a:latin typeface="Microsoft JhengHei" pitchFamily="34" charset="0"/>
-                <a:ea typeface="Microsoft JhengHei" pitchFamily="34" charset="-122"/>
-                <a:cs typeface="Microsoft JhengHei" pitchFamily="34" charset="-120"/>
-              </a:rPr>
-              <a:t>技能描述包含明確觸發語句，且有「Do NOT use for」排除條款避免與既有技能搶觸發</a:t>
-            </a:r>
-            <a:endParaRPr lang="en-US" sz="1300" dirty="0"/>
-          </a:p>
-        </p:txBody>
-      </p:sp>
-      <p:pic>
-        <p:nvPicPr>
-          <p:cNvPr id="16" name="Image 3" descr="preencoded.png">    </p:cNvPr>
-          <p:cNvPicPr>
-            <a:picLocks noChangeAspect="1"/>
-          </p:cNvPicPr>
-          <p:nvPr/>
-        </p:nvPicPr>
-        <p:blipFill>
-          <a:blip r:embed="rId4"/>
-          <a:stretch>
-            <a:fillRect/>
-          </a:stretch>
-        </p:blipFill>
-        <p:spPr>
-          <a:xfrm>
-            <a:off x="2834640" y="5559552"/>
-            <a:ext cx="182880" cy="182880"/>
-          </a:xfrm>
-          <a:prstGeom prst="rect">
-            <a:avLst/>
-          </a:prstGeom>
-        </p:spPr>
-      </p:pic>
-      <p:sp>
-        <p:nvSpPr>
-          <p:cNvPr id="17" name="Text 11"/>
-          <p:cNvSpPr/>
-          <p:nvPr/>
-        </p:nvSpPr>
-        <p:spPr>
-          <a:xfrm>
-            <a:off x="3108960" y="5504688"/>
-            <a:ext cx="8168335" cy="310896"/>
-          </a:xfrm>
-          <a:prstGeom prst="rect">
-            <a:avLst/>
-          </a:prstGeom>
-          <a:noFill/>
-          <a:ln/>
-        </p:spPr>
-        <p:txBody>
-          <a:bodyPr wrap="square" rtlCol="0" anchor="ctr"/>
-          <a:lstStyle/>
-          <a:p>
-            <a:pPr indent="0" marL="0">
-              <a:buNone/>
-            </a:pPr>
-            <a:r>
-              <a:rPr lang="en-US" sz="1300" dirty="0">
-                <a:solidFill>
-                  <a:srgbClr val="1E2235"/>
-                </a:solidFill>
-                <a:latin typeface="Microsoft JhengHei" pitchFamily="34" charset="0"/>
-                <a:ea typeface="Microsoft JhengHei" pitchFamily="34" charset="-122"/>
-                <a:cs typeface="Microsoft JhengHei" pitchFamily="34" charset="-120"/>
-              </a:rPr>
-              <a:t>「複製檔案」核准卡已按下核准，技能確實發布到 OneDrive 的 skills 資料夾</a:t>
-            </a:r>
-            <a:endParaRPr lang="en-US" sz="1300" dirty="0"/>
-          </a:p>
-        </p:txBody>
-      </p:sp>
-      <p:pic>
-        <p:nvPicPr>
-          <p:cNvPr id="18" name="Image 4" descr="preencoded.png">    </p:cNvPr>
-          <p:cNvPicPr>
-            <a:picLocks noChangeAspect="1"/>
-          </p:cNvPicPr>
-          <p:nvPr/>
-        </p:nvPicPr>
-        <p:blipFill>
-          <a:blip r:embed="rId5"/>
-          <a:stretch>
-            <a:fillRect/>
-          </a:stretch>
-        </p:blipFill>
-        <p:spPr>
-          <a:xfrm>
-            <a:off x="2834640" y="5897880"/>
-            <a:ext cx="182880" cy="182880"/>
-          </a:xfrm>
-          <a:prstGeom prst="rect">
-            <a:avLst/>
-          </a:prstGeom>
-        </p:spPr>
-      </p:pic>
-      <p:sp>
-        <p:nvSpPr>
-          <p:cNvPr id="19" name="Text 12"/>
-          <p:cNvSpPr/>
-          <p:nvPr/>
-        </p:nvSpPr>
-        <p:spPr>
-          <a:xfrm>
-            <a:off x="3108960" y="5843016"/>
-            <a:ext cx="8168335" cy="310896"/>
-          </a:xfrm>
-          <a:prstGeom prst="rect">
-            <a:avLst/>
-          </a:prstGeom>
-          <a:noFill/>
-          <a:ln/>
-        </p:spPr>
-        <p:txBody>
-          <a:bodyPr wrap="square" rtlCol="0" anchor="ctr"/>
-          <a:lstStyle/>
-          <a:p>
-            <a:pPr indent="0" marL="0">
-              <a:buNone/>
-            </a:pPr>
-            <a:r>
-              <a:rPr lang="en-US" sz="1300" dirty="0">
-                <a:solidFill>
-                  <a:srgbClr val="1E2235"/>
-                </a:solidFill>
-                <a:latin typeface="Microsoft JhengHei" pitchFamily="34" charset="0"/>
-                <a:ea typeface="Microsoft JhengHei" pitchFamily="34" charset="-122"/>
-                <a:cs typeface="Microsoft JhengHei" pitchFamily="34" charset="-120"/>
-              </a:rPr>
-              <a:t>新工作階段中只給數據、不重述規則，仍能正確套用四級分級門檻</a:t>
-            </a:r>
-            <a:endParaRPr lang="en-US" sz="1300" dirty="0"/>
-          </a:p>
-        </p:txBody>
-      </p:sp>
-      <p:sp>
-        <p:nvSpPr>
-          <p:cNvPr id="20" name="Text 13"/>
-          <p:cNvSpPr/>
-          <p:nvPr/>
-        </p:nvSpPr>
-        <p:spPr>
-          <a:xfrm>
-            <a:off x="640080" y="6473952"/>
-            <a:ext cx="5486400" cy="274320"/>
-          </a:xfrm>
-          <a:prstGeom prst="rect">
-            <a:avLst/>
-          </a:prstGeom>
-          <a:noFill/>
-          <a:ln/>
-        </p:spPr>
-        <p:txBody>
-          <a:bodyPr wrap="square" rtlCol="0" anchor="ctr"/>
-          <a:lstStyle/>
-          <a:p>
-            <a:pPr algn="l" indent="0" marL="0">
-              <a:buNone/>
-            </a:pPr>
-            <a:r>
-              <a:rPr lang="en-US" sz="900" dirty="0">
-                <a:solidFill>
-                  <a:srgbClr val="5B6079"/>
-                </a:solidFill>
-                <a:latin typeface="Microsoft JhengHei" pitchFamily="34" charset="0"/>
-                <a:ea typeface="Microsoft JhengHei" pitchFamily="34" charset="-122"/>
-                <a:cs typeface="Microsoft JhengHei" pitchFamily="34" charset="-120"/>
-              </a:rPr>
-              <a:t>Microsoft 365 Copilot Cowork</a:t>
-            </a:r>
-            <a:endParaRPr lang="en-US" sz="900" dirty="0"/>
-          </a:p>
-        </p:txBody>
-      </p:sp>
-      <p:sp>
-        <p:nvSpPr>
-          <p:cNvPr id="21" name="Text 14"/>
-          <p:cNvSpPr/>
-          <p:nvPr/>
-        </p:nvSpPr>
-        <p:spPr>
-          <a:xfrm>
-            <a:off x="11002975" y="6473952"/>
-            <a:ext cx="548640" cy="274320"/>
-          </a:xfrm>
-          <a:prstGeom prst="rect">
-            <a:avLst/>
-          </a:prstGeom>
-          <a:noFill/>
-          <a:ln/>
-        </p:spPr>
-        <p:txBody>
-          <a:bodyPr wrap="square" rtlCol="0" anchor="ctr"/>
-          <a:lstStyle/>
-          <a:p>
-            <a:pPr algn="r" indent="0" marL="0">
-              <a:buNone/>
-            </a:pPr>
-            <a:r>
-              <a:rPr lang="en-US" sz="900" dirty="0">
-                <a:solidFill>
-                  <a:srgbClr val="5B6079"/>
                 </a:solidFill>
                 <a:latin typeface="Microsoft JhengHei" pitchFamily="34" charset="0"/>
                 <a:ea typeface="Microsoft JhengHei" pitchFamily="34" charset="-122"/>
@@ -12643,7 +12732,7 @@
         </p:nvSpPr>
         <p:spPr>
           <a:xfrm>
-            <a:off x="640080" y="1737360"/>
+            <a:off x="640080" y="1664208"/>
             <a:ext cx="1005840" cy="822960"/>
           </a:xfrm>
           <a:prstGeom prst="rect">
@@ -12660,7 +12749,7 @@
               <a:buNone/>
             </a:pPr>
             <a:r>
-              <a:rPr lang="en-US" sz="3800" b="1" dirty="0">
+              <a:rPr lang="en-US" sz="3400" b="1" dirty="0">
                 <a:solidFill>
                   <a:srgbClr val="6366F1"/>
                 </a:solidFill>
@@ -12670,7 +12759,7 @@
               </a:rPr>
               <a:t>01</a:t>
             </a:r>
-            <a:endParaRPr lang="en-US" sz="3800" dirty="0"/>
+            <a:endParaRPr lang="en-US" sz="3400" dirty="0"/>
           </a:p>
         </p:txBody>
       </p:sp>
@@ -12682,7 +12771,7 @@
         </p:nvSpPr>
         <p:spPr>
           <a:xfrm>
-            <a:off x="1737360" y="1773936"/>
+            <a:off x="1737360" y="1700784"/>
             <a:ext cx="3657600" cy="457200"/>
           </a:xfrm>
           <a:prstGeom prst="rect">
@@ -12699,7 +12788,7 @@
               <a:buNone/>
             </a:pPr>
             <a:r>
-              <a:rPr lang="en-US" sz="2000" b="1" dirty="0">
+              <a:rPr lang="en-US" sz="1900" b="1" dirty="0">
                 <a:solidFill>
                   <a:srgbClr val="1E2235"/>
                 </a:solidFill>
@@ -12709,7 +12798,7 @@
               </a:rPr>
               <a:t>認識 Cowork</a:t>
             </a:r>
-            <a:endParaRPr lang="en-US" sz="2000" dirty="0"/>
+            <a:endParaRPr lang="en-US" sz="1900" dirty="0"/>
           </a:p>
         </p:txBody>
       </p:sp>
@@ -12721,7 +12810,7 @@
         </p:nvSpPr>
         <p:spPr>
           <a:xfrm>
-            <a:off x="1737360" y="2212848"/>
+            <a:off x="1737360" y="2121408"/>
             <a:ext cx="9601200" cy="365760"/>
           </a:xfrm>
           <a:prstGeom prst="rect">
@@ -12738,7 +12827,7 @@
               <a:buNone/>
             </a:pPr>
             <a:r>
-              <a:rPr lang="en-US" sz="1400" dirty="0">
+              <a:rPr lang="en-US" sz="1350" dirty="0">
                 <a:solidFill>
                   <a:srgbClr val="5B6079"/>
                 </a:solidFill>
@@ -12748,7 +12837,7 @@
               </a:rPr>
               <a:t>什麼是代理式 AI，和一般 Copilot Chat 有何不同</a:t>
             </a:r>
-            <a:endParaRPr lang="en-US" sz="1400" dirty="0"/>
+            <a:endParaRPr lang="en-US" sz="1350" dirty="0"/>
           </a:p>
         </p:txBody>
       </p:sp>
@@ -12760,7 +12849,7 @@
         </p:nvSpPr>
         <p:spPr>
           <a:xfrm>
-            <a:off x="640080" y="2816352"/>
+            <a:off x="640080" y="2578608"/>
             <a:ext cx="1005840" cy="822960"/>
           </a:xfrm>
           <a:prstGeom prst="rect">
@@ -12777,7 +12866,7 @@
               <a:buNone/>
             </a:pPr>
             <a:r>
-              <a:rPr lang="en-US" sz="3800" b="1" dirty="0">
+              <a:rPr lang="en-US" sz="3400" b="1" dirty="0">
                 <a:solidFill>
                   <a:srgbClr val="6366F1"/>
                 </a:solidFill>
@@ -12787,7 +12876,7 @@
               </a:rPr>
               <a:t>02</a:t>
             </a:r>
-            <a:endParaRPr lang="en-US" sz="3800" dirty="0"/>
+            <a:endParaRPr lang="en-US" sz="3400" dirty="0"/>
           </a:p>
         </p:txBody>
       </p:sp>
@@ -12799,7 +12888,7 @@
         </p:nvSpPr>
         <p:spPr>
           <a:xfrm>
-            <a:off x="1737360" y="2852928"/>
+            <a:off x="1737360" y="2615184"/>
             <a:ext cx="3657600" cy="457200"/>
           </a:xfrm>
           <a:prstGeom prst="rect">
@@ -12816,7 +12905,7 @@
               <a:buNone/>
             </a:pPr>
             <a:r>
-              <a:rPr lang="en-US" sz="2000" b="1" dirty="0">
+              <a:rPr lang="en-US" sz="1900" b="1" dirty="0">
                 <a:solidFill>
                   <a:srgbClr val="1E2235"/>
                 </a:solidFill>
@@ -12826,7 +12915,7 @@
               </a:rPr>
               <a:t>核心能力與運作</a:t>
             </a:r>
-            <a:endParaRPr lang="en-US" sz="2000" dirty="0"/>
+            <a:endParaRPr lang="en-US" sz="1900" dirty="0"/>
           </a:p>
         </p:txBody>
       </p:sp>
@@ -12838,7 +12927,7 @@
         </p:nvSpPr>
         <p:spPr>
           <a:xfrm>
-            <a:off x="1737360" y="3291840"/>
+            <a:off x="1737360" y="3035808"/>
             <a:ext cx="9601200" cy="365760"/>
           </a:xfrm>
           <a:prstGeom prst="rect">
@@ -12855,7 +12944,7 @@
               <a:buNone/>
             </a:pPr>
             <a:r>
-              <a:rPr lang="en-US" sz="1400" dirty="0">
+              <a:rPr lang="en-US" sz="1350" dirty="0">
                 <a:solidFill>
                   <a:srgbClr val="5B6079"/>
                 </a:solidFill>
@@ -12865,7 +12954,7 @@
               </a:rPr>
               <a:t>技能、工作區、行動前審核、自我驗證</a:t>
             </a:r>
-            <a:endParaRPr lang="en-US" sz="1400" dirty="0"/>
+            <a:endParaRPr lang="en-US" sz="1350" dirty="0"/>
           </a:p>
         </p:txBody>
       </p:sp>
@@ -12877,7 +12966,7 @@
         </p:nvSpPr>
         <p:spPr>
           <a:xfrm>
-            <a:off x="640080" y="3895344"/>
+            <a:off x="640080" y="3493008"/>
             <a:ext cx="1005840" cy="822960"/>
           </a:xfrm>
           <a:prstGeom prst="rect">
@@ -12894,7 +12983,7 @@
               <a:buNone/>
             </a:pPr>
             <a:r>
-              <a:rPr lang="en-US" sz="3800" b="1" dirty="0">
+              <a:rPr lang="en-US" sz="3400" b="1" dirty="0">
                 <a:solidFill>
                   <a:srgbClr val="6366F1"/>
                 </a:solidFill>
@@ -12904,7 +12993,7 @@
               </a:rPr>
               <a:t>03</a:t>
             </a:r>
-            <a:endParaRPr lang="en-US" sz="3800" dirty="0"/>
+            <a:endParaRPr lang="en-US" sz="3400" dirty="0"/>
           </a:p>
         </p:txBody>
       </p:sp>
@@ -12916,7 +13005,7 @@
         </p:nvSpPr>
         <p:spPr>
           <a:xfrm>
-            <a:off x="1737360" y="3931920"/>
+            <a:off x="1737360" y="3529584"/>
             <a:ext cx="3657600" cy="457200"/>
           </a:xfrm>
           <a:prstGeom prst="rect">
@@ -12933,7 +13022,7 @@
               <a:buNone/>
             </a:pPr>
             <a:r>
-              <a:rPr lang="en-US" sz="2000" b="1" dirty="0">
+              <a:rPr lang="en-US" sz="1900" b="1" dirty="0">
                 <a:solidFill>
                   <a:srgbClr val="1E2235"/>
                 </a:solidFill>
@@ -12941,21 +13030,138 @@
                 <a:ea typeface="Microsoft JhengHei" pitchFamily="34" charset="-122"/>
                 <a:cs typeface="Microsoft JhengHei" pitchFamily="34" charset="-120"/>
               </a:rPr>
+              <a:t>練習環境準備</a:t>
+            </a:r>
+            <a:endParaRPr lang="en-US" sz="1900" dirty="0"/>
+          </a:p>
+        </p:txBody>
+      </p:sp>
+      <p:sp>
+        <p:nvSpPr>
+          <p:cNvPr id="13" name="Text 11"/>
+          <p:cNvSpPr/>
+          <p:nvPr/>
+        </p:nvSpPr>
+        <p:spPr>
+          <a:xfrm>
+            <a:off x="1737360" y="3950208"/>
+            <a:ext cx="9601200" cy="365760"/>
+          </a:xfrm>
+          <a:prstGeom prst="rect">
+            <a:avLst/>
+          </a:prstGeom>
+          <a:noFill/>
+          <a:ln/>
+        </p:spPr>
+        <p:txBody>
+          <a:bodyPr wrap="square" rtlCol="0" anchor="ctr"/>
+          <a:lstStyle/>
+          <a:p>
+            <a:pPr indent="0" marL="0">
+              <a:buNone/>
+            </a:pPr>
+            <a:r>
+              <a:rPr lang="en-US" sz="1350" dirty="0">
+                <a:solidFill>
+                  <a:srgbClr val="5B6079"/>
+                </a:solidFill>
+                <a:latin typeface="Microsoft JhengHei" pitchFamily="34" charset="0"/>
+                <a:ea typeface="Microsoft JhengHei" pitchFamily="34" charset="-122"/>
+                <a:cs typeface="Microsoft JhengHei" pitchFamily="34" charset="-120"/>
+              </a:rPr>
+              <a:t>範例檔下載後拖進對話，以及哪些情境會動到信箱與行事曆</a:t>
+            </a:r>
+            <a:endParaRPr lang="en-US" sz="1350" dirty="0"/>
+          </a:p>
+        </p:txBody>
+      </p:sp>
+      <p:sp>
+        <p:nvSpPr>
+          <p:cNvPr id="14" name="Text 12"/>
+          <p:cNvSpPr/>
+          <p:nvPr/>
+        </p:nvSpPr>
+        <p:spPr>
+          <a:xfrm>
+            <a:off x="640080" y="4407408"/>
+            <a:ext cx="1005840" cy="822960"/>
+          </a:xfrm>
+          <a:prstGeom prst="rect">
+            <a:avLst/>
+          </a:prstGeom>
+          <a:noFill/>
+          <a:ln/>
+        </p:spPr>
+        <p:txBody>
+          <a:bodyPr wrap="square" rtlCol="0" anchor="ctr"/>
+          <a:lstStyle/>
+          <a:p>
+            <a:pPr algn="l" indent="0" marL="0">
+              <a:buNone/>
+            </a:pPr>
+            <a:r>
+              <a:rPr lang="en-US" sz="3400" b="1" dirty="0">
+                <a:solidFill>
+                  <a:srgbClr val="6366F1"/>
+                </a:solidFill>
+                <a:latin typeface="Microsoft JhengHei" pitchFamily="34" charset="0"/>
+                <a:ea typeface="Microsoft JhengHei" pitchFamily="34" charset="-122"/>
+                <a:cs typeface="Microsoft JhengHei" pitchFamily="34" charset="-120"/>
+              </a:rPr>
+              <a:t>04</a:t>
+            </a:r>
+            <a:endParaRPr lang="en-US" sz="3400" dirty="0"/>
+          </a:p>
+        </p:txBody>
+      </p:sp>
+      <p:sp>
+        <p:nvSpPr>
+          <p:cNvPr id="15" name="Text 13"/>
+          <p:cNvSpPr/>
+          <p:nvPr/>
+        </p:nvSpPr>
+        <p:spPr>
+          <a:xfrm>
+            <a:off x="1737360" y="4443984"/>
+            <a:ext cx="3657600" cy="457200"/>
+          </a:xfrm>
+          <a:prstGeom prst="rect">
+            <a:avLst/>
+          </a:prstGeom>
+          <a:noFill/>
+          <a:ln/>
+        </p:spPr>
+        <p:txBody>
+          <a:bodyPr wrap="square" rtlCol="0" anchor="ctr"/>
+          <a:lstStyle/>
+          <a:p>
+            <a:pPr indent="0" marL="0">
+              <a:buNone/>
+            </a:pPr>
+            <a:r>
+              <a:rPr lang="en-US" sz="1900" b="1" dirty="0">
+                <a:solidFill>
+                  <a:srgbClr val="1E2235"/>
+                </a:solidFill>
+                <a:latin typeface="Microsoft JhengHei" pitchFamily="34" charset="0"/>
+                <a:ea typeface="Microsoft JhengHei" pitchFamily="34" charset="-122"/>
+                <a:cs typeface="Microsoft JhengHei" pitchFamily="34" charset="-120"/>
+              </a:rPr>
               <a:t>6 個實戰情境</a:t>
             </a:r>
-            <a:endParaRPr lang="en-US" sz="2000" dirty="0"/>
-          </a:p>
-        </p:txBody>
-      </p:sp>
-      <p:sp>
-        <p:nvSpPr>
-          <p:cNvPr id="13" name="Text 11"/>
-          <p:cNvSpPr/>
-          <p:nvPr/>
-        </p:nvSpPr>
-        <p:spPr>
-          <a:xfrm>
-            <a:off x="1737360" y="4370832"/>
+            <a:endParaRPr lang="en-US" sz="1900" dirty="0"/>
+          </a:p>
+        </p:txBody>
+      </p:sp>
+      <p:sp>
+        <p:nvSpPr>
+          <p:cNvPr id="16" name="Text 14"/>
+          <p:cNvSpPr/>
+          <p:nvPr/>
+        </p:nvSpPr>
+        <p:spPr>
+          <a:xfrm>
+            <a:off x="1737360" y="4864608"/>
             <a:ext cx="9601200" cy="365760"/>
           </a:xfrm>
           <a:prstGeom prst="rect">
@@ -12972,7 +13178,7 @@
               <a:buNone/>
             </a:pPr>
             <a:r>
-              <a:rPr lang="en-US" sz="1400" dirty="0">
+              <a:rPr lang="en-US" sz="1350" dirty="0">
                 <a:solidFill>
                   <a:srgbClr val="5B6079"/>
                 </a:solidFill>
@@ -12982,19 +13188,19 @@
               </a:rPr>
               <a:t>戰情日報排程、檔期啟動包、客訴事件觸發、競品調價建議、合約到期盤點、門市週報技能，逐一拆解工作流</a:t>
             </a:r>
-            <a:endParaRPr lang="en-US" sz="1400" dirty="0"/>
-          </a:p>
-        </p:txBody>
-      </p:sp>
-      <p:sp>
-        <p:nvSpPr>
-          <p:cNvPr id="14" name="Text 12"/>
-          <p:cNvSpPr/>
-          <p:nvPr/>
-        </p:nvSpPr>
-        <p:spPr>
-          <a:xfrm>
-            <a:off x="640080" y="4974336"/>
+            <a:endParaRPr lang="en-US" sz="1350" dirty="0"/>
+          </a:p>
+        </p:txBody>
+      </p:sp>
+      <p:sp>
+        <p:nvSpPr>
+          <p:cNvPr id="17" name="Text 15"/>
+          <p:cNvSpPr/>
+          <p:nvPr/>
+        </p:nvSpPr>
+        <p:spPr>
+          <a:xfrm>
+            <a:off x="640080" y="5321808"/>
             <a:ext cx="1005840" cy="822960"/>
           </a:xfrm>
           <a:prstGeom prst="rect">
@@ -13011,7 +13217,7 @@
               <a:buNone/>
             </a:pPr>
             <a:r>
-              <a:rPr lang="en-US" sz="3800" b="1" dirty="0">
+              <a:rPr lang="en-US" sz="3400" b="1" dirty="0">
                 <a:solidFill>
                   <a:srgbClr val="6366F1"/>
                 </a:solidFill>
@@ -13019,21 +13225,21 @@
                 <a:ea typeface="Microsoft JhengHei" pitchFamily="34" charset="-122"/>
                 <a:cs typeface="Microsoft JhengHei" pitchFamily="34" charset="-120"/>
               </a:rPr>
-              <a:t>04</a:t>
-            </a:r>
-            <a:endParaRPr lang="en-US" sz="3800" dirty="0"/>
-          </a:p>
-        </p:txBody>
-      </p:sp>
-      <p:sp>
-        <p:nvSpPr>
-          <p:cNvPr id="15" name="Text 13"/>
-          <p:cNvSpPr/>
-          <p:nvPr/>
-        </p:nvSpPr>
-        <p:spPr>
-          <a:xfrm>
-            <a:off x="1737360" y="5010912"/>
+              <a:t>05</a:t>
+            </a:r>
+            <a:endParaRPr lang="en-US" sz="3400" dirty="0"/>
+          </a:p>
+        </p:txBody>
+      </p:sp>
+      <p:sp>
+        <p:nvSpPr>
+          <p:cNvPr id="18" name="Text 16"/>
+          <p:cNvSpPr/>
+          <p:nvPr/>
+        </p:nvSpPr>
+        <p:spPr>
+          <a:xfrm>
+            <a:off x="1737360" y="5358384"/>
             <a:ext cx="3657600" cy="457200"/>
           </a:xfrm>
           <a:prstGeom prst="rect">
@@ -13050,7 +13256,7 @@
               <a:buNone/>
             </a:pPr>
             <a:r>
-              <a:rPr lang="en-US" sz="2000" b="1" dirty="0">
+              <a:rPr lang="en-US" sz="1900" b="1" dirty="0">
                 <a:solidFill>
                   <a:srgbClr val="1E2235"/>
                 </a:solidFill>
@@ -13060,19 +13266,19 @@
               </a:rPr>
               <a:t>套用到你的日常</a:t>
             </a:r>
-            <a:endParaRPr lang="en-US" sz="2000" dirty="0"/>
-          </a:p>
-        </p:txBody>
-      </p:sp>
-      <p:sp>
-        <p:nvSpPr>
-          <p:cNvPr id="16" name="Text 14"/>
-          <p:cNvSpPr/>
-          <p:nvPr/>
-        </p:nvSpPr>
-        <p:spPr>
-          <a:xfrm>
-            <a:off x="1737360" y="5449824"/>
+            <a:endParaRPr lang="en-US" sz="1900" dirty="0"/>
+          </a:p>
+        </p:txBody>
+      </p:sp>
+      <p:sp>
+        <p:nvSpPr>
+          <p:cNvPr id="19" name="Text 17"/>
+          <p:cNvSpPr/>
+          <p:nvPr/>
+        </p:nvSpPr>
+        <p:spPr>
+          <a:xfrm>
+            <a:off x="1737360" y="5779008"/>
             <a:ext cx="9601200" cy="365760"/>
           </a:xfrm>
           <a:prstGeom prst="rect">
@@ -13089,7 +13295,7 @@
               <a:buNone/>
             </a:pPr>
             <a:r>
-              <a:rPr lang="en-US" sz="1400" dirty="0">
+              <a:rPr lang="en-US" sz="1350" dirty="0">
                 <a:solidFill>
                   <a:srgbClr val="5B6079"/>
                 </a:solidFill>
@@ -13099,13 +13305,13 @@
               </a:rPr>
               <a:t>如何把這些情境延伸到自己的工作</a:t>
             </a:r>
-            <a:endParaRPr lang="en-US" sz="1400" dirty="0"/>
-          </a:p>
-        </p:txBody>
-      </p:sp>
-      <p:sp>
-        <p:nvSpPr>
-          <p:cNvPr id="17" name="Text 15"/>
+            <a:endParaRPr lang="en-US" sz="1350" dirty="0"/>
+          </a:p>
+        </p:txBody>
+      </p:sp>
+      <p:sp>
+        <p:nvSpPr>
+          <p:cNvPr id="20" name="Text 18"/>
           <p:cNvSpPr/>
           <p:nvPr/>
         </p:nvSpPr>
@@ -13144,7 +13350,7 @@
       </p:sp>
       <p:sp>
         <p:nvSpPr>
-          <p:cNvPr id="18" name="Text 16"/>
+          <p:cNvPr id="21" name="Text 19"/>
           <p:cNvSpPr/>
           <p:nvPr/>
         </p:nvSpPr>
@@ -13228,7 +13434,7 @@
             <a:avLst/>
           </a:prstGeom>
           <a:solidFill>
-            <a:srgbClr val="6366F1"/>
+            <a:srgbClr val="A4373A"/>
           </a:solidFill>
           <a:ln/>
         </p:spPr>
@@ -13260,13 +13466,13 @@
             <a:r>
               <a:rPr lang="en-US" sz="1200" b="1" spc="200" kern="0" dirty="0">
                 <a:solidFill>
-                  <a:srgbClr val="6366F1"/>
-                </a:solidFill>
-                <a:latin typeface="Microsoft JhengHei" pitchFamily="34" charset="0"/>
-                <a:ea typeface="Microsoft JhengHei" pitchFamily="34" charset="-122"/>
-                <a:cs typeface="Microsoft JhengHei" pitchFamily="34" charset="-120"/>
-              </a:rPr>
-              <a:t>MAKE IT YOURS</a:t>
+                  <a:srgbClr val="A4373A"/>
+                </a:solidFill>
+                <a:latin typeface="Microsoft JhengHei" pitchFamily="34" charset="0"/>
+                <a:ea typeface="Microsoft JhengHei" pitchFamily="34" charset="-122"/>
+                <a:cs typeface="Microsoft JhengHei" pitchFamily="34" charset="-120"/>
+              </a:rPr>
+              <a:t>情境 06 · 實機示範</a:t>
             </a:r>
             <a:endParaRPr lang="en-US" sz="1200" dirty="0"/>
           </a:p>
@@ -13305,7 +13511,7 @@
                 <a:ea typeface="Microsoft JhengHei" pitchFamily="34" charset="-122"/>
                 <a:cs typeface="Microsoft JhengHei" pitchFamily="34" charset="-120"/>
               </a:rPr>
-              <a:t>把情境延伸到你的日常</a:t>
+              <a:t>看 Cowork 怎麼做、產出什麼</a:t>
             </a:r>
             <a:endParaRPr lang="en-US" sz="3000" dirty="0"/>
           </a:p>
@@ -13319,8 +13525,8 @@
         </p:nvSpPr>
         <p:spPr>
           <a:xfrm>
-            <a:off x="640080" y="1783080"/>
-            <a:ext cx="5295748" cy="1124712"/>
+            <a:off x="585216" y="1773936"/>
+            <a:ext cx="5184648" cy="3433186"/>
           </a:xfrm>
           <a:prstGeom prst="rect">
             <a:avLst/>
@@ -13334,38 +13540,88 @@
             </a:solidFill>
             <a:prstDash val="solid"/>
           </a:ln>
-        </p:spPr>
-      </p:sp>
-      <p:sp>
-        <p:nvSpPr>
-          <p:cNvPr id="6" name="Shape 4"/>
-          <p:cNvSpPr/>
-          <p:nvPr/>
-        </p:nvSpPr>
-        <p:spPr>
-          <a:xfrm>
-            <a:off x="841248" y="2125980"/>
-            <a:ext cx="438912" cy="438912"/>
-          </a:xfrm>
-          <a:prstGeom prst="ellipse">
-            <a:avLst/>
-          </a:prstGeom>
-          <a:solidFill>
-            <a:srgbClr val="8A3A62"/>
-          </a:solidFill>
-          <a:ln/>
-        </p:spPr>
-      </p:sp>
-      <p:sp>
-        <p:nvSpPr>
-          <p:cNvPr id="7" name="Shape 5"/>
-          <p:cNvSpPr/>
-          <p:nvPr/>
-        </p:nvSpPr>
-        <p:spPr>
-          <a:xfrm>
-            <a:off x="640080" y="3017520"/>
-            <a:ext cx="5295748" cy="1124712"/>
+          <a:effectLst>
+            <a:outerShdw sx="100000" sy="100000" kx="0" ky="0" algn="bl" rotWithShape="0" blurRad="114300" dist="38100" dir="5400000">
+              <a:srgbClr val="8A90B5">
+                <a:alpha val="22000"/>
+              </a:srgbClr>
+            </a:outerShdw>
+          </a:effectLst>
+        </p:spPr>
+      </p:sp>
+      <p:pic>
+        <p:nvPicPr>
+          <p:cNvPr id="6" name="Image 0" descr="C:\temp\CoworkLab\v2\_working\screenshots\ret6_01_create.png">    </p:cNvPr>
+          <p:cNvPicPr>
+            <a:picLocks noChangeAspect="1"/>
+          </p:cNvPicPr>
+          <p:nvPr/>
+        </p:nvPicPr>
+        <p:blipFill>
+          <a:blip r:embed="rId1"/>
+          <a:stretch>
+            <a:fillRect/>
+          </a:stretch>
+        </p:blipFill>
+        <p:spPr>
+          <a:xfrm>
+            <a:off x="640080" y="1828800"/>
+            <a:ext cx="5074920" cy="3323458"/>
+          </a:xfrm>
+          <a:prstGeom prst="rect">
+            <a:avLst/>
+          </a:prstGeom>
+        </p:spPr>
+      </p:pic>
+      <p:sp>
+        <p:nvSpPr>
+          <p:cNvPr id="7" name="Text 4"/>
+          <p:cNvSpPr/>
+          <p:nvPr/>
+        </p:nvSpPr>
+        <p:spPr>
+          <a:xfrm>
+            <a:off x="640080" y="5261986"/>
+            <a:ext cx="5074920" cy="320040"/>
+          </a:xfrm>
+          <a:prstGeom prst="rect">
+            <a:avLst/>
+          </a:prstGeom>
+          <a:noFill/>
+          <a:ln/>
+        </p:spPr>
+        <p:txBody>
+          <a:bodyPr wrap="square" rtlCol="0" anchor="ctr"/>
+          <a:lstStyle/>
+          <a:p>
+            <a:pPr algn="ctr" indent="0" marL="0">
+              <a:buNone/>
+            </a:pPr>
+            <a:r>
+              <a:rPr lang="en-US" sz="1350" b="1" dirty="0">
+                <a:solidFill>
+                  <a:srgbClr val="A4373A"/>
+                </a:solidFill>
+                <a:latin typeface="Microsoft JhengHei" pitchFamily="34" charset="0"/>
+                <a:ea typeface="Microsoft JhengHei" pitchFamily="34" charset="-122"/>
+                <a:cs typeface="Microsoft JhengHei" pitchFamily="34" charset="-120"/>
+              </a:rPr>
+              <a:t>① 你的輸入與指令</a:t>
+            </a:r>
+            <a:endParaRPr lang="en-US" sz="1350" dirty="0"/>
+          </a:p>
+        </p:txBody>
+      </p:sp>
+      <p:sp>
+        <p:nvSpPr>
+          <p:cNvPr id="8" name="Shape 5"/>
+          <p:cNvSpPr/>
+          <p:nvPr/>
+        </p:nvSpPr>
+        <p:spPr>
+          <a:xfrm>
+            <a:off x="6163056" y="1773936"/>
+            <a:ext cx="5184648" cy="3433186"/>
           </a:xfrm>
           <a:prstGeom prst="rect">
             <a:avLst/>
@@ -13379,38 +13635,88 @@
             </a:solidFill>
             <a:prstDash val="solid"/>
           </a:ln>
-        </p:spPr>
-      </p:sp>
-      <p:sp>
-        <p:nvSpPr>
-          <p:cNvPr id="8" name="Shape 6"/>
-          <p:cNvSpPr/>
-          <p:nvPr/>
-        </p:nvSpPr>
-        <p:spPr>
-          <a:xfrm>
-            <a:off x="841248" y="3360420"/>
-            <a:ext cx="438912" cy="438912"/>
-          </a:xfrm>
-          <a:prstGeom prst="ellipse">
-            <a:avLst/>
-          </a:prstGeom>
-          <a:solidFill>
-            <a:srgbClr val="B4551B"/>
-          </a:solidFill>
-          <a:ln/>
-        </p:spPr>
-      </p:sp>
-      <p:sp>
-        <p:nvSpPr>
-          <p:cNvPr id="9" name="Shape 7"/>
-          <p:cNvSpPr/>
-          <p:nvPr/>
-        </p:nvSpPr>
-        <p:spPr>
-          <a:xfrm>
-            <a:off x="640080" y="4251960"/>
-            <a:ext cx="5295748" cy="1124712"/>
+          <a:effectLst>
+            <a:outerShdw sx="100000" sy="100000" kx="0" ky="0" algn="bl" rotWithShape="0" blurRad="114300" dist="38100" dir="5400000">
+              <a:srgbClr val="8A90B5">
+                <a:alpha val="22000"/>
+              </a:srgbClr>
+            </a:outerShdw>
+          </a:effectLst>
+        </p:spPr>
+      </p:sp>
+      <p:pic>
+        <p:nvPicPr>
+          <p:cNvPr id="9" name="Image 1" descr="C:\temp\CoworkLab\v2\_working\screenshots\ret6_05_share.png">    </p:cNvPr>
+          <p:cNvPicPr>
+            <a:picLocks noChangeAspect="1"/>
+          </p:cNvPicPr>
+          <p:nvPr/>
+        </p:nvPicPr>
+        <p:blipFill>
+          <a:blip r:embed="rId2"/>
+          <a:stretch>
+            <a:fillRect/>
+          </a:stretch>
+        </p:blipFill>
+        <p:spPr>
+          <a:xfrm>
+            <a:off x="6217920" y="1828800"/>
+            <a:ext cx="5074920" cy="3323458"/>
+          </a:xfrm>
+          <a:prstGeom prst="rect">
+            <a:avLst/>
+          </a:prstGeom>
+        </p:spPr>
+      </p:pic>
+      <p:sp>
+        <p:nvSpPr>
+          <p:cNvPr id="10" name="Text 6"/>
+          <p:cNvSpPr/>
+          <p:nvPr/>
+        </p:nvSpPr>
+        <p:spPr>
+          <a:xfrm>
+            <a:off x="6217920" y="5261986"/>
+            <a:ext cx="5074920" cy="320040"/>
+          </a:xfrm>
+          <a:prstGeom prst="rect">
+            <a:avLst/>
+          </a:prstGeom>
+          <a:noFill/>
+          <a:ln/>
+        </p:spPr>
+        <p:txBody>
+          <a:bodyPr wrap="square" rtlCol="0" anchor="ctr"/>
+          <a:lstStyle/>
+          <a:p>
+            <a:pPr algn="ctr" indent="0" marL="0">
+              <a:buNone/>
+            </a:pPr>
+            <a:r>
+              <a:rPr lang="en-US" sz="1350" b="1" dirty="0">
+                <a:solidFill>
+                  <a:srgbClr val="A4373A"/>
+                </a:solidFill>
+                <a:latin typeface="Microsoft JhengHei" pitchFamily="34" charset="0"/>
+                <a:ea typeface="Microsoft JhengHei" pitchFamily="34" charset="-122"/>
+                <a:cs typeface="Microsoft JhengHei" pitchFamily="34" charset="-120"/>
+              </a:rPr>
+              <a:t>② 產出成果</a:t>
+            </a:r>
+            <a:endParaRPr lang="en-US" sz="1350" dirty="0"/>
+          </a:p>
+        </p:txBody>
+      </p:sp>
+      <p:sp>
+        <p:nvSpPr>
+          <p:cNvPr id="11" name="Shape 7"/>
+          <p:cNvSpPr/>
+          <p:nvPr/>
+        </p:nvSpPr>
+        <p:spPr>
+          <a:xfrm>
+            <a:off x="640080" y="5074920"/>
+            <a:ext cx="10911535" cy="1143000"/>
           </a:xfrm>
           <a:prstGeom prst="rect">
             <a:avLst/>
@@ -13428,151 +13734,16 @@
       </p:sp>
       <p:sp>
         <p:nvSpPr>
-          <p:cNvPr id="10" name="Shape 8"/>
-          <p:cNvSpPr/>
-          <p:nvPr/>
-        </p:nvSpPr>
-        <p:spPr>
-          <a:xfrm>
-            <a:off x="841248" y="4594860"/>
-            <a:ext cx="438912" cy="438912"/>
-          </a:xfrm>
-          <a:prstGeom prst="ellipse">
-            <a:avLst/>
-          </a:prstGeom>
-          <a:solidFill>
-            <a:srgbClr val="2E7D5B"/>
-          </a:solidFill>
-          <a:ln/>
-        </p:spPr>
-      </p:sp>
-      <p:sp>
-        <p:nvSpPr>
-          <p:cNvPr id="11" name="Shape 9"/>
-          <p:cNvSpPr/>
-          <p:nvPr/>
-        </p:nvSpPr>
-        <p:spPr>
-          <a:xfrm>
-            <a:off x="6255868" y="1783080"/>
-            <a:ext cx="5295748" cy="1124712"/>
-          </a:xfrm>
-          <a:prstGeom prst="rect">
-            <a:avLst/>
-          </a:prstGeom>
-          <a:solidFill>
-            <a:srgbClr val="FFFFFF"/>
-          </a:solidFill>
-          <a:ln w="12700">
-            <a:solidFill>
-              <a:srgbClr val="E4E7F2"/>
-            </a:solidFill>
-            <a:prstDash val="solid"/>
-          </a:ln>
-        </p:spPr>
-      </p:sp>
-      <p:sp>
-        <p:nvSpPr>
-          <p:cNvPr id="12" name="Shape 10"/>
-          <p:cNvSpPr/>
-          <p:nvPr/>
-        </p:nvSpPr>
-        <p:spPr>
-          <a:xfrm>
-            <a:off x="6457036" y="2125980"/>
-            <a:ext cx="438912" cy="438912"/>
-          </a:xfrm>
-          <a:prstGeom prst="ellipse">
-            <a:avLst/>
-          </a:prstGeom>
-          <a:solidFill>
-            <a:srgbClr val="5C2E91"/>
-          </a:solidFill>
-          <a:ln/>
-        </p:spPr>
-      </p:sp>
-      <p:sp>
-        <p:nvSpPr>
-          <p:cNvPr id="13" name="Shape 11"/>
-          <p:cNvSpPr/>
-          <p:nvPr/>
-        </p:nvSpPr>
-        <p:spPr>
-          <a:xfrm>
-            <a:off x="6255868" y="3017520"/>
-            <a:ext cx="5295748" cy="1124712"/>
-          </a:xfrm>
-          <a:prstGeom prst="rect">
-            <a:avLst/>
-          </a:prstGeom>
-          <a:solidFill>
-            <a:srgbClr val="FFFFFF"/>
-          </a:solidFill>
-          <a:ln w="12700">
-            <a:solidFill>
-              <a:srgbClr val="E4E7F2"/>
-            </a:solidFill>
-            <a:prstDash val="solid"/>
-          </a:ln>
-        </p:spPr>
-      </p:sp>
-      <p:sp>
-        <p:nvSpPr>
-          <p:cNvPr id="14" name="Shape 12"/>
-          <p:cNvSpPr/>
-          <p:nvPr/>
-        </p:nvSpPr>
-        <p:spPr>
-          <a:xfrm>
-            <a:off x="6457036" y="3360420"/>
-            <a:ext cx="438912" cy="438912"/>
-          </a:xfrm>
-          <a:prstGeom prst="ellipse">
-            <a:avLst/>
-          </a:prstGeom>
-          <a:solidFill>
-            <a:srgbClr val="0F6CBD"/>
-          </a:solidFill>
-          <a:ln/>
-        </p:spPr>
-      </p:sp>
-      <p:sp>
-        <p:nvSpPr>
-          <p:cNvPr id="15" name="Shape 13"/>
-          <p:cNvSpPr/>
-          <p:nvPr/>
-        </p:nvSpPr>
-        <p:spPr>
-          <a:xfrm>
-            <a:off x="6255868" y="4251960"/>
-            <a:ext cx="5295748" cy="1124712"/>
-          </a:xfrm>
-          <a:prstGeom prst="rect">
-            <a:avLst/>
-          </a:prstGeom>
-          <a:solidFill>
-            <a:srgbClr val="FFFFFF"/>
-          </a:solidFill>
-          <a:ln w="12700">
-            <a:solidFill>
-              <a:srgbClr val="E4E7F2"/>
-            </a:solidFill>
-            <a:prstDash val="solid"/>
-          </a:ln>
-        </p:spPr>
-      </p:sp>
-      <p:sp>
-        <p:nvSpPr>
-          <p:cNvPr id="16" name="Shape 14"/>
-          <p:cNvSpPr/>
-          <p:nvPr/>
-        </p:nvSpPr>
-        <p:spPr>
-          <a:xfrm>
-            <a:off x="6457036" y="4594860"/>
-            <a:ext cx="438912" cy="438912"/>
-          </a:xfrm>
-          <a:prstGeom prst="ellipse">
+          <p:cNvPr id="12" name="Shape 8"/>
+          <p:cNvSpPr/>
+          <p:nvPr/>
+        </p:nvSpPr>
+        <p:spPr>
+          <a:xfrm>
+            <a:off x="640080" y="5074920"/>
+            <a:ext cx="91440" cy="1143000"/>
+          </a:xfrm>
+          <a:prstGeom prst="rect">
             <a:avLst/>
           </a:prstGeom>
           <a:solidFill>
@@ -13581,219 +13752,48 @@
           <a:ln/>
         </p:spPr>
       </p:sp>
+      <p:sp>
+        <p:nvSpPr>
+          <p:cNvPr id="13" name="Text 9"/>
+          <p:cNvSpPr/>
+          <p:nvPr/>
+        </p:nvSpPr>
+        <p:spPr>
+          <a:xfrm>
+            <a:off x="914400" y="5184648"/>
+            <a:ext cx="1828800" cy="320040"/>
+          </a:xfrm>
+          <a:prstGeom prst="rect">
+            <a:avLst/>
+          </a:prstGeom>
+          <a:noFill/>
+          <a:ln/>
+        </p:spPr>
+        <p:txBody>
+          <a:bodyPr wrap="square" rtlCol="0" anchor="ctr"/>
+          <a:lstStyle/>
+          <a:p>
+            <a:pPr indent="0" marL="0">
+              <a:buNone/>
+            </a:pPr>
+            <a:r>
+              <a:rPr lang="en-US" sz="1400" b="1" dirty="0">
+                <a:solidFill>
+                  <a:srgbClr val="1E2235"/>
+                </a:solidFill>
+                <a:latin typeface="Microsoft JhengHei" pitchFamily="34" charset="0"/>
+                <a:ea typeface="Microsoft JhengHei" pitchFamily="34" charset="-122"/>
+                <a:cs typeface="Microsoft JhengHei" pitchFamily="34" charset="-120"/>
+              </a:rPr>
+              <a:t>產出驗收</a:t>
+            </a:r>
+            <a:endParaRPr lang="en-US" sz="1400" dirty="0"/>
+          </a:p>
+        </p:txBody>
+      </p:sp>
       <p:pic>
         <p:nvPicPr>
-          <p:cNvPr id="17" name="Image 0" descr="preencoded.png">    </p:cNvPr>
-          <p:cNvPicPr>
-            <a:picLocks noChangeAspect="1"/>
-          </p:cNvPicPr>
-          <p:nvPr/>
-        </p:nvPicPr>
-        <p:blipFill>
-          <a:blip r:embed="rId1"/>
-          <a:stretch>
-            <a:fillRect/>
-          </a:stretch>
-        </p:blipFill>
-        <p:spPr>
-          <a:xfrm>
-            <a:off x="950976" y="2235708"/>
-            <a:ext cx="219456" cy="219456"/>
-          </a:xfrm>
-          <a:prstGeom prst="rect">
-            <a:avLst/>
-          </a:prstGeom>
-        </p:spPr>
-      </p:pic>
-      <p:sp>
-        <p:nvSpPr>
-          <p:cNvPr id="18" name="Text 15"/>
-          <p:cNvSpPr/>
-          <p:nvPr/>
-        </p:nvSpPr>
-        <p:spPr>
-          <a:xfrm>
-            <a:off x="1417320" y="1819656"/>
-            <a:ext cx="2224214" cy="1051560"/>
-          </a:xfrm>
-          <a:prstGeom prst="rect">
-            <a:avLst/>
-          </a:prstGeom>
-          <a:noFill/>
-          <a:ln/>
-        </p:spPr>
-        <p:txBody>
-          <a:bodyPr wrap="square" rtlCol="0" anchor="ctr"/>
-          <a:lstStyle/>
-          <a:p>
-            <a:pPr indent="0" marL="0">
-              <a:buNone/>
-            </a:pPr>
-            <a:r>
-              <a:rPr lang="en-US" sz="1300" b="1" dirty="0">
-                <a:solidFill>
-                  <a:srgbClr val="8A3A62"/>
-                </a:solidFill>
-                <a:latin typeface="Microsoft JhengHei" pitchFamily="34" charset="0"/>
-                <a:ea typeface="Microsoft JhengHei" pitchFamily="34" charset="-122"/>
-                <a:cs typeface="Microsoft JhengHei" pitchFamily="34" charset="-120"/>
-              </a:rPr>
-              <a:t>零售通路 · 營運督導</a:t>
-            </a:r>
-            <a:endParaRPr lang="en-US" sz="1300" dirty="0"/>
-          </a:p>
-        </p:txBody>
-      </p:sp>
-      <p:sp>
-        <p:nvSpPr>
-          <p:cNvPr id="19" name="Text 16"/>
-          <p:cNvSpPr/>
-          <p:nvPr/>
-        </p:nvSpPr>
-        <p:spPr>
-          <a:xfrm>
-            <a:off x="3076124" y="1819656"/>
-            <a:ext cx="2753789" cy="1051560"/>
-          </a:xfrm>
-          <a:prstGeom prst="rect">
-            <a:avLst/>
-          </a:prstGeom>
-          <a:noFill/>
-          <a:ln/>
-        </p:spPr>
-        <p:txBody>
-          <a:bodyPr wrap="square" rtlCol="0" anchor="ctr"/>
-          <a:lstStyle/>
-          <a:p>
-            <a:pPr indent="0" marL="0">
-              <a:lnSpc>
-                <a:spcPct val="108000"/>
-              </a:lnSpc>
-              <a:buNone/>
-            </a:pPr>
-            <a:r>
-              <a:rPr lang="en-US" sz="1150" dirty="0">
-                <a:solidFill>
-                  <a:srgbClr val="1E2235"/>
-                </a:solidFill>
-                <a:latin typeface="Microsoft JhengHei" pitchFamily="34" charset="0"/>
-                <a:ea typeface="Microsoft JhengHei" pitchFamily="34" charset="-122"/>
-                <a:cs typeface="Microsoft JhengHei" pitchFamily="34" charset="-120"/>
-              </a:rPr>
-              <a:t>💡 把排程改成一週一次的週報，或改成只在達成率低於 90% 時才通知你。</a:t>
-            </a:r>
-            <a:endParaRPr lang="en-US" sz="1150" dirty="0"/>
-          </a:p>
-        </p:txBody>
-      </p:sp>
-      <p:pic>
-        <p:nvPicPr>
-          <p:cNvPr id="20" name="Image 1" descr="preencoded.png">    </p:cNvPr>
-          <p:cNvPicPr>
-            <a:picLocks noChangeAspect="1"/>
-          </p:cNvPicPr>
-          <p:nvPr/>
-        </p:nvPicPr>
-        <p:blipFill>
-          <a:blip r:embed="rId2"/>
-          <a:stretch>
-            <a:fillRect/>
-          </a:stretch>
-        </p:blipFill>
-        <p:spPr>
-          <a:xfrm>
-            <a:off x="950976" y="3470148"/>
-            <a:ext cx="219456" cy="219456"/>
-          </a:xfrm>
-          <a:prstGeom prst="rect">
-            <a:avLst/>
-          </a:prstGeom>
-        </p:spPr>
-      </p:pic>
-      <p:sp>
-        <p:nvSpPr>
-          <p:cNvPr id="21" name="Text 17"/>
-          <p:cNvSpPr/>
-          <p:nvPr/>
-        </p:nvSpPr>
-        <p:spPr>
-          <a:xfrm>
-            <a:off x="1417320" y="3054096"/>
-            <a:ext cx="2224214" cy="1051560"/>
-          </a:xfrm>
-          <a:prstGeom prst="rect">
-            <a:avLst/>
-          </a:prstGeom>
-          <a:noFill/>
-          <a:ln/>
-        </p:spPr>
-        <p:txBody>
-          <a:bodyPr wrap="square" rtlCol="0" anchor="ctr"/>
-          <a:lstStyle/>
-          <a:p>
-            <a:pPr indent="0" marL="0">
-              <a:buNone/>
-            </a:pPr>
-            <a:r>
-              <a:rPr lang="en-US" sz="1300" b="1" dirty="0">
-                <a:solidFill>
-                  <a:srgbClr val="B4551B"/>
-                </a:solidFill>
-                <a:latin typeface="Microsoft JhengHei" pitchFamily="34" charset="0"/>
-                <a:ea typeface="Microsoft JhengHei" pitchFamily="34" charset="-122"/>
-                <a:cs typeface="Microsoft JhengHei" pitchFamily="34" charset="-120"/>
-              </a:rPr>
-              <a:t>零售通路 · 商品企劃</a:t>
-            </a:r>
-            <a:endParaRPr lang="en-US" sz="1300" dirty="0"/>
-          </a:p>
-        </p:txBody>
-      </p:sp>
-      <p:sp>
-        <p:nvSpPr>
-          <p:cNvPr id="22" name="Text 18"/>
-          <p:cNvSpPr/>
-          <p:nvPr/>
-        </p:nvSpPr>
-        <p:spPr>
-          <a:xfrm>
-            <a:off x="3076124" y="3054096"/>
-            <a:ext cx="2753789" cy="1051560"/>
-          </a:xfrm>
-          <a:prstGeom prst="rect">
-            <a:avLst/>
-          </a:prstGeom>
-          <a:noFill/>
-          <a:ln/>
-        </p:spPr>
-        <p:txBody>
-          <a:bodyPr wrap="square" rtlCol="0" anchor="ctr"/>
-          <a:lstStyle/>
-          <a:p>
-            <a:pPr indent="0" marL="0">
-              <a:lnSpc>
-                <a:spcPct val="108000"/>
-              </a:lnSpc>
-              <a:buNone/>
-            </a:pPr>
-            <a:r>
-              <a:rPr lang="en-US" sz="1150" dirty="0">
-                <a:solidFill>
-                  <a:srgbClr val="1E2235"/>
-                </a:solidFill>
-                <a:latin typeface="Microsoft JhengHei" pitchFamily="34" charset="0"/>
-                <a:ea typeface="Microsoft JhengHei" pitchFamily="34" charset="-122"/>
-                <a:cs typeface="Microsoft JhengHei" pitchFamily="34" charset="-120"/>
-              </a:rPr>
-              <a:t>💡 改一個條件（例如毛利率紅線改成 35%），請它整組四份文件重出，體驗「一次改、四份同步」。</a:t>
-            </a:r>
-            <a:endParaRPr lang="en-US" sz="1150" dirty="0"/>
-          </a:p>
-        </p:txBody>
-      </p:sp>
-      <p:pic>
-        <p:nvPicPr>
-          <p:cNvPr id="23" name="Image 2" descr="preencoded.png">    </p:cNvPr>
+          <p:cNvPr id="14" name="Image 2" descr="preencoded.png">    </p:cNvPr>
           <p:cNvPicPr>
             <a:picLocks noChangeAspect="1"/>
           </p:cNvPicPr>
@@ -13807,8 +13807,8 @@
         </p:blipFill>
         <p:spPr>
           <a:xfrm>
-            <a:off x="950976" y="4704588"/>
-            <a:ext cx="219456" cy="219456"/>
+            <a:off x="2834640" y="5221224"/>
+            <a:ext cx="182880" cy="182880"/>
           </a:xfrm>
           <a:prstGeom prst="rect">
             <a:avLst/>
@@ -13817,14 +13817,14 @@
       </p:pic>
       <p:sp>
         <p:nvSpPr>
-          <p:cNvPr id="24" name="Text 19"/>
-          <p:cNvSpPr/>
-          <p:nvPr/>
-        </p:nvSpPr>
-        <p:spPr>
-          <a:xfrm>
-            <a:off x="1417320" y="4288536"/>
-            <a:ext cx="2224214" cy="1051560"/>
+          <p:cNvPr id="15" name="Text 10"/>
+          <p:cNvSpPr/>
+          <p:nvPr/>
+        </p:nvSpPr>
+        <p:spPr>
+          <a:xfrm>
+            <a:off x="3108960" y="5166360"/>
+            <a:ext cx="8168335" cy="310896"/>
           </a:xfrm>
           <a:prstGeom prst="rect">
             <a:avLst/>
@@ -13840,65 +13840,23 @@
               <a:buNone/>
             </a:pPr>
             <a:r>
-              <a:rPr lang="en-US" sz="1300" b="1" dirty="0">
-                <a:solidFill>
-                  <a:srgbClr val="2E7D5B"/>
-                </a:solidFill>
-                <a:latin typeface="Microsoft JhengHei" pitchFamily="34" charset="0"/>
-                <a:ea typeface="Microsoft JhengHei" pitchFamily="34" charset="-122"/>
-                <a:cs typeface="Microsoft JhengHei" pitchFamily="34" charset="-120"/>
-              </a:rPr>
-              <a:t>零售通路 · 客服中心</a:t>
+              <a:rPr lang="en-US" sz="1300" dirty="0">
+                <a:solidFill>
+                  <a:srgbClr val="1E2235"/>
+                </a:solidFill>
+                <a:latin typeface="Microsoft JhengHei" pitchFamily="34" charset="0"/>
+                <a:ea typeface="Microsoft JhengHei" pitchFamily="34" charset="-122"/>
+                <a:cs typeface="Microsoft JhengHei" pitchFamily="34" charset="-120"/>
+              </a:rPr>
+              <a:t>〔技能〕技能描述包含明確觸發語句，且有「Do NOT use for」排除條款避免與既有技能搶觸發</a:t>
             </a:r>
             <a:endParaRPr lang="en-US" sz="1300" dirty="0"/>
-          </a:p>
-        </p:txBody>
-      </p:sp>
-      <p:sp>
-        <p:nvSpPr>
-          <p:cNvPr id="25" name="Text 20"/>
-          <p:cNvSpPr/>
-          <p:nvPr/>
-        </p:nvSpPr>
-        <p:spPr>
-          <a:xfrm>
-            <a:off x="3076124" y="4288536"/>
-            <a:ext cx="2753789" cy="1051560"/>
-          </a:xfrm>
-          <a:prstGeom prst="rect">
-            <a:avLst/>
-          </a:prstGeom>
-          <a:noFill/>
-          <a:ln/>
-        </p:spPr>
-        <p:txBody>
-          <a:bodyPr wrap="square" rtlCol="0" anchor="ctr"/>
-          <a:lstStyle/>
-          <a:p>
-            <a:pPr indent="0" marL="0">
-              <a:lnSpc>
-                <a:spcPct val="108000"/>
-              </a:lnSpc>
-              <a:buNone/>
-            </a:pPr>
-            <a:r>
-              <a:rPr lang="en-US" sz="1150" dirty="0">
-                <a:solidFill>
-                  <a:srgbClr val="1E2235"/>
-                </a:solidFill>
-                <a:latin typeface="Microsoft JhengHei" pitchFamily="34" charset="0"/>
-                <a:ea typeface="Microsoft JhengHei" pitchFamily="34" charset="-122"/>
-                <a:cs typeface="Microsoft JhengHei" pitchFamily="34" charset="-120"/>
-              </a:rPr>
-              <a:t>💡 把觸發條件縮小到特定寄件網域或特定通路的客服信箱，降低誤觸發。</a:t>
-            </a:r>
-            <a:endParaRPr lang="en-US" sz="1150" dirty="0"/>
           </a:p>
         </p:txBody>
       </p:sp>
       <p:pic>
         <p:nvPicPr>
-          <p:cNvPr id="26" name="Image 3" descr="preencoded.png">    </p:cNvPr>
+          <p:cNvPr id="16" name="Image 3" descr="preencoded.png">    </p:cNvPr>
           <p:cNvPicPr>
             <a:picLocks noChangeAspect="1"/>
           </p:cNvPicPr>
@@ -13912,8 +13870,8 @@
         </p:blipFill>
         <p:spPr>
           <a:xfrm>
-            <a:off x="6566764" y="2235708"/>
-            <a:ext cx="219456" cy="219456"/>
+            <a:off x="2834640" y="5559552"/>
+            <a:ext cx="182880" cy="182880"/>
           </a:xfrm>
           <a:prstGeom prst="rect">
             <a:avLst/>
@@ -13922,14 +13880,14 @@
       </p:pic>
       <p:sp>
         <p:nvSpPr>
-          <p:cNvPr id="27" name="Text 21"/>
-          <p:cNvSpPr/>
-          <p:nvPr/>
-        </p:nvSpPr>
-        <p:spPr>
-          <a:xfrm>
-            <a:off x="7033108" y="1819656"/>
-            <a:ext cx="2224214" cy="1051560"/>
+          <p:cNvPr id="17" name="Text 11"/>
+          <p:cNvSpPr/>
+          <p:nvPr/>
+        </p:nvSpPr>
+        <p:spPr>
+          <a:xfrm>
+            <a:off x="3108960" y="5504688"/>
+            <a:ext cx="8168335" cy="310896"/>
           </a:xfrm>
           <a:prstGeom prst="rect">
             <a:avLst/>
@@ -13945,65 +13903,23 @@
               <a:buNone/>
             </a:pPr>
             <a:r>
-              <a:rPr lang="en-US" sz="1300" b="1" dirty="0">
-                <a:solidFill>
-                  <a:srgbClr val="5C2E91"/>
-                </a:solidFill>
-                <a:latin typeface="Microsoft JhengHei" pitchFamily="34" charset="0"/>
-                <a:ea typeface="Microsoft JhengHei" pitchFamily="34" charset="-122"/>
-                <a:cs typeface="Microsoft JhengHei" pitchFamily="34" charset="-120"/>
-              </a:rPr>
-              <a:t>零售通路 · 商品定價</a:t>
+              <a:rPr lang="en-US" sz="1300" dirty="0">
+                <a:solidFill>
+                  <a:srgbClr val="1E2235"/>
+                </a:solidFill>
+                <a:latin typeface="Microsoft JhengHei" pitchFamily="34" charset="0"/>
+                <a:ea typeface="Microsoft JhengHei" pitchFamily="34" charset="-122"/>
+                <a:cs typeface="Microsoft JhengHei" pitchFamily="34" charset="-120"/>
+              </a:rPr>
+              <a:t>〔發布〕「複製檔案」核准卡已按下核准，技能確實發布到 OneDrive 的 skills 資料夾</a:t>
             </a:r>
             <a:endParaRPr lang="en-US" sz="1300" dirty="0"/>
-          </a:p>
-        </p:txBody>
-      </p:sp>
-      <p:sp>
-        <p:nvSpPr>
-          <p:cNvPr id="28" name="Text 22"/>
-          <p:cNvSpPr/>
-          <p:nvPr/>
-        </p:nvSpPr>
-        <p:spPr>
-          <a:xfrm>
-            <a:off x="8691911" y="1819656"/>
-            <a:ext cx="2753789" cy="1051560"/>
-          </a:xfrm>
-          <a:prstGeom prst="rect">
-            <a:avLst/>
-          </a:prstGeom>
-          <a:noFill/>
-          <a:ln/>
-        </p:spPr>
-        <p:txBody>
-          <a:bodyPr wrap="square" rtlCol="0" anchor="ctr"/>
-          <a:lstStyle/>
-          <a:p>
-            <a:pPr indent="0" marL="0">
-              <a:lnSpc>
-                <a:spcPct val="108000"/>
-              </a:lnSpc>
-              <a:buNone/>
-            </a:pPr>
-            <a:r>
-              <a:rPr lang="en-US" sz="1150" dirty="0">
-                <a:solidFill>
-                  <a:srgbClr val="1E2235"/>
-                </a:solidFill>
-                <a:latin typeface="Microsoft JhengHei" pitchFamily="34" charset="0"/>
-                <a:ea typeface="Microsoft JhengHei" pitchFamily="34" charset="-122"/>
-                <a:cs typeface="Microsoft JhengHei" pitchFamily="34" charset="-120"/>
-              </a:rPr>
-              <a:t>💡 把調價紅線換成你們自己的毛利政策，其他步驟完全沿用。</a:t>
-            </a:r>
-            <a:endParaRPr lang="en-US" sz="1150" dirty="0"/>
           </a:p>
         </p:txBody>
       </p:sp>
       <p:pic>
         <p:nvPicPr>
-          <p:cNvPr id="29" name="Image 4" descr="preencoded.png">    </p:cNvPr>
+          <p:cNvPr id="18" name="Image 4" descr="preencoded.png">    </p:cNvPr>
           <p:cNvPicPr>
             <a:picLocks noChangeAspect="1"/>
           </p:cNvPicPr>
@@ -14017,8 +13933,8 @@
         </p:blipFill>
         <p:spPr>
           <a:xfrm>
-            <a:off x="6566764" y="3470148"/>
-            <a:ext cx="219456" cy="219456"/>
+            <a:off x="2834640" y="5897880"/>
+            <a:ext cx="182880" cy="182880"/>
           </a:xfrm>
           <a:prstGeom prst="rect">
             <a:avLst/>
@@ -14027,14 +13943,14 @@
       </p:pic>
       <p:sp>
         <p:nvSpPr>
-          <p:cNvPr id="30" name="Text 23"/>
-          <p:cNvSpPr/>
-          <p:nvPr/>
-        </p:nvSpPr>
-        <p:spPr>
-          <a:xfrm>
-            <a:off x="7033108" y="3054096"/>
-            <a:ext cx="2224214" cy="1051560"/>
+          <p:cNvPr id="19" name="Text 12"/>
+          <p:cNvSpPr/>
+          <p:nvPr/>
+        </p:nvSpPr>
+        <p:spPr>
+          <a:xfrm>
+            <a:off x="3108960" y="5843016"/>
+            <a:ext cx="8168335" cy="310896"/>
           </a:xfrm>
           <a:prstGeom prst="rect">
             <a:avLst/>
@@ -14050,15 +13966,15 @@
               <a:buNone/>
             </a:pPr>
             <a:r>
-              <a:rPr lang="en-US" sz="1300" b="1" dirty="0">
-                <a:solidFill>
-                  <a:srgbClr val="0F6CBD"/>
-                </a:solidFill>
-                <a:latin typeface="Microsoft JhengHei" pitchFamily="34" charset="0"/>
-                <a:ea typeface="Microsoft JhengHei" pitchFamily="34" charset="-122"/>
-                <a:cs typeface="Microsoft JhengHei" pitchFamily="34" charset="-120"/>
-              </a:rPr>
-              <a:t>零售通路 · 商品採購</a:t>
+              <a:rPr lang="en-US" sz="1300" dirty="0">
+                <a:solidFill>
+                  <a:srgbClr val="1E2235"/>
+                </a:solidFill>
+                <a:latin typeface="Microsoft JhengHei" pitchFamily="34" charset="0"/>
+                <a:ea typeface="Microsoft JhengHei" pitchFamily="34" charset="-122"/>
+                <a:cs typeface="Microsoft JhengHei" pitchFamily="34" charset="-120"/>
+              </a:rPr>
+              <a:t>〔測試〕新工作階段中只給數據、不重述規則，仍能正確套用四級分級門檻</a:t>
             </a:r>
             <a:endParaRPr lang="en-US" sz="1300" dirty="0"/>
           </a:p>
@@ -14066,154 +13982,7 @@
       </p:sp>
       <p:sp>
         <p:nvSpPr>
-          <p:cNvPr id="31" name="Text 24"/>
-          <p:cNvSpPr/>
-          <p:nvPr/>
-        </p:nvSpPr>
-        <p:spPr>
-          <a:xfrm>
-            <a:off x="8691911" y="3054096"/>
-            <a:ext cx="2753789" cy="1051560"/>
-          </a:xfrm>
-          <a:prstGeom prst="rect">
-            <a:avLst/>
-          </a:prstGeom>
-          <a:noFill/>
-          <a:ln/>
-        </p:spPr>
-        <p:txBody>
-          <a:bodyPr wrap="square" rtlCol="0" anchor="ctr"/>
-          <a:lstStyle/>
-          <a:p>
-            <a:pPr indent="0" marL="0">
-              <a:lnSpc>
-                <a:spcPct val="108000"/>
-              </a:lnSpc>
-              <a:buNone/>
-            </a:pPr>
-            <a:r>
-              <a:rPr lang="en-US" sz="1150" dirty="0">
-                <a:solidFill>
-                  <a:srgbClr val="1E2235"/>
-                </a:solidFill>
-                <a:latin typeface="Microsoft JhengHei" pitchFamily="34" charset="0"/>
-                <a:ea typeface="Microsoft JhengHei" pitchFamily="34" charset="-122"/>
-                <a:cs typeface="Microsoft JhengHei" pitchFamily="34" charset="-120"/>
-              </a:rPr>
-              <a:t>💡 把它設成每月 1 號的排程任務，讓合約盤點變成不需要人記得的例行工作。</a:t>
-            </a:r>
-            <a:endParaRPr lang="en-US" sz="1150" dirty="0"/>
-          </a:p>
-        </p:txBody>
-      </p:sp>
-      <p:pic>
-        <p:nvPicPr>
-          <p:cNvPr id="32" name="Image 5" descr="preencoded.png">    </p:cNvPr>
-          <p:cNvPicPr>
-            <a:picLocks noChangeAspect="1"/>
-          </p:cNvPicPr>
-          <p:nvPr/>
-        </p:nvPicPr>
-        <p:blipFill>
-          <a:blip r:embed="rId6"/>
-          <a:stretch>
-            <a:fillRect/>
-          </a:stretch>
-        </p:blipFill>
-        <p:spPr>
-          <a:xfrm>
-            <a:off x="6566764" y="4704588"/>
-            <a:ext cx="219456" cy="219456"/>
-          </a:xfrm>
-          <a:prstGeom prst="rect">
-            <a:avLst/>
-          </a:prstGeom>
-        </p:spPr>
-      </p:pic>
-      <p:sp>
-        <p:nvSpPr>
-          <p:cNvPr id="33" name="Text 25"/>
-          <p:cNvSpPr/>
-          <p:nvPr/>
-        </p:nvSpPr>
-        <p:spPr>
-          <a:xfrm>
-            <a:off x="7033108" y="4288536"/>
-            <a:ext cx="2224214" cy="1051560"/>
-          </a:xfrm>
-          <a:prstGeom prst="rect">
-            <a:avLst/>
-          </a:prstGeom>
-          <a:noFill/>
-          <a:ln/>
-        </p:spPr>
-        <p:txBody>
-          <a:bodyPr wrap="square" rtlCol="0" anchor="ctr"/>
-          <a:lstStyle/>
-          <a:p>
-            <a:pPr indent="0" marL="0">
-              <a:buNone/>
-            </a:pPr>
-            <a:r>
-              <a:rPr lang="en-US" sz="1300" b="1" dirty="0">
-                <a:solidFill>
-                  <a:srgbClr val="A4373A"/>
-                </a:solidFill>
-                <a:latin typeface="Microsoft JhengHei" pitchFamily="34" charset="0"/>
-                <a:ea typeface="Microsoft JhengHei" pitchFamily="34" charset="-122"/>
-                <a:cs typeface="Microsoft JhengHei" pitchFamily="34" charset="-120"/>
-              </a:rPr>
-              <a:t>零售通路 · 自動化</a:t>
-            </a:r>
-            <a:endParaRPr lang="en-US" sz="1300" dirty="0"/>
-          </a:p>
-        </p:txBody>
-      </p:sp>
-      <p:sp>
-        <p:nvSpPr>
-          <p:cNvPr id="34" name="Text 26"/>
-          <p:cNvSpPr/>
-          <p:nvPr/>
-        </p:nvSpPr>
-        <p:spPr>
-          <a:xfrm>
-            <a:off x="8691911" y="4288536"/>
-            <a:ext cx="2753789" cy="1051560"/>
-          </a:xfrm>
-          <a:prstGeom prst="rect">
-            <a:avLst/>
-          </a:prstGeom>
-          <a:noFill/>
-          <a:ln/>
-        </p:spPr>
-        <p:txBody>
-          <a:bodyPr wrap="square" rtlCol="0" anchor="ctr"/>
-          <a:lstStyle/>
-          <a:p>
-            <a:pPr indent="0" marL="0">
-              <a:lnSpc>
-                <a:spcPct val="108000"/>
-              </a:lnSpc>
-              <a:buNone/>
-            </a:pPr>
-            <a:r>
-              <a:rPr lang="en-US" sz="1150" dirty="0">
-                <a:solidFill>
-                  <a:srgbClr val="1E2235"/>
-                </a:solidFill>
-                <a:latin typeface="Microsoft JhengHei" pitchFamily="34" charset="0"/>
-                <a:ea typeface="Microsoft JhengHei" pitchFamily="34" charset="-122"/>
-                <a:cs typeface="Microsoft JhengHei" pitchFamily="34" charset="-120"/>
-              </a:rPr>
-              <a:t>💡 做一個變體技能，專門產生月報或季報，重複使用同一套分級規則。</a:t>
-            </a:r>
-            <a:endParaRPr lang="en-US" sz="1150" dirty="0"/>
-          </a:p>
-        </p:txBody>
-      </p:sp>
-      <p:sp>
-        <p:nvSpPr>
-          <p:cNvPr id="35" name="Text 27"/>
+          <p:cNvPr id="20" name="Text 13"/>
           <p:cNvSpPr/>
           <p:nvPr/>
         </p:nvSpPr>
@@ -14252,7 +14021,7 @@
       </p:sp>
       <p:sp>
         <p:nvSpPr>
-          <p:cNvPr id="36" name="Text 28"/>
+          <p:cNvPr id="21" name="Text 14"/>
           <p:cNvSpPr/>
           <p:nvPr/>
         </p:nvSpPr>
@@ -14302,16 +14071,9 @@
   <p:cSld name="Slide 21">
     <p:bg>
       <p:bgPr>
-        <a:blipFill dpi="0" rotWithShape="1">
-          <a:blip r:embed="rId1">
-            <a:lum/>
-          </a:blip>
-          <a:srcRect/>
-          <a:stretch>
-            <a:fillRect/>
-          </a:stretch>
-        </a:blipFill>
-        <a:effectLst/>
+        <a:solidFill>
+          <a:srgbClr val="F7F8FC"/>
+        </a:solidFill>
       </p:bgPr>
     </p:bg>
     <p:spTree>
@@ -14343,7 +14105,7 @@
             <a:avLst/>
           </a:prstGeom>
           <a:solidFill>
-            <a:srgbClr val="22D3EE"/>
+            <a:srgbClr val="6366F1"/>
           </a:solidFill>
           <a:ln/>
         </p:spPr>
@@ -14375,13 +14137,13 @@
             <a:r>
               <a:rPr lang="en-US" sz="1200" b="1" spc="200" kern="0" dirty="0">
                 <a:solidFill>
-                  <a:srgbClr val="22D3EE"/>
-                </a:solidFill>
-                <a:latin typeface="Microsoft JhengHei" pitchFamily="34" charset="0"/>
-                <a:ea typeface="Microsoft JhengHei" pitchFamily="34" charset="-122"/>
-                <a:cs typeface="Microsoft JhengHei" pitchFamily="34" charset="-120"/>
-              </a:rPr>
-              <a:t>TRUST &amp; CONTROL</a:t>
+                  <a:srgbClr val="6366F1"/>
+                </a:solidFill>
+                <a:latin typeface="Microsoft JhengHei" pitchFamily="34" charset="0"/>
+                <a:ea typeface="Microsoft JhengHei" pitchFamily="34" charset="-122"/>
+                <a:cs typeface="Microsoft JhengHei" pitchFamily="34" charset="-120"/>
+              </a:rPr>
+              <a:t>MAKE IT YOURS</a:t>
             </a:r>
             <a:endParaRPr lang="en-US" sz="1200" dirty="0"/>
           </a:p>
@@ -14414,13 +14176,13 @@
             <a:r>
               <a:rPr lang="en-US" sz="3000" b="1" dirty="0">
                 <a:solidFill>
-                  <a:srgbClr val="FFFFFF"/>
-                </a:solidFill>
-                <a:latin typeface="Microsoft JhengHei" pitchFamily="34" charset="0"/>
-                <a:ea typeface="Microsoft JhengHei" pitchFamily="34" charset="-122"/>
-                <a:cs typeface="Microsoft JhengHei" pitchFamily="34" charset="-120"/>
-              </a:rPr>
-              <a:t>自動化，但你始終是決策者</a:t>
+                  <a:srgbClr val="1E2235"/>
+                </a:solidFill>
+                <a:latin typeface="Microsoft JhengHei" pitchFamily="34" charset="0"/>
+                <a:ea typeface="Microsoft JhengHei" pitchFamily="34" charset="-122"/>
+                <a:cs typeface="Microsoft JhengHei" pitchFamily="34" charset="-120"/>
+              </a:rPr>
+              <a:t>把情境延伸到你的日常</a:t>
             </a:r>
             <a:endParaRPr lang="en-US" sz="3000" dirty="0"/>
           </a:p>
@@ -14434,32 +14196,376 @@
         </p:nvSpPr>
         <p:spPr>
           <a:xfrm>
-            <a:off x="640080" y="1874520"/>
-            <a:ext cx="777240" cy="777240"/>
-          </a:xfrm>
-          <a:prstGeom prst="roundRect">
-            <a:avLst>
-              <a:gd name="adj" fmla="val 18824"/>
-            </a:avLst>
+            <a:off x="640080" y="1783080"/>
+            <a:ext cx="5295748" cy="1124712"/>
+          </a:xfrm>
+          <a:prstGeom prst="rect">
+            <a:avLst/>
           </a:prstGeom>
           <a:solidFill>
-            <a:srgbClr val="FFFFFF">
-              <a:alpha val="14000"/>
-            </a:srgbClr>
+            <a:srgbClr val="FFFFFF"/>
           </a:solidFill>
           <a:ln w="12700">
             <a:solidFill>
-              <a:srgbClr val="22D3EE">
-                <a:alpha val="60000"/>
-              </a:srgbClr>
+              <a:srgbClr val="E4E7F2"/>
             </a:solidFill>
             <a:prstDash val="solid"/>
           </a:ln>
         </p:spPr>
       </p:sp>
+      <p:sp>
+        <p:nvSpPr>
+          <p:cNvPr id="6" name="Shape 4"/>
+          <p:cNvSpPr/>
+          <p:nvPr/>
+        </p:nvSpPr>
+        <p:spPr>
+          <a:xfrm>
+            <a:off x="841248" y="2125980"/>
+            <a:ext cx="438912" cy="438912"/>
+          </a:xfrm>
+          <a:prstGeom prst="ellipse">
+            <a:avLst/>
+          </a:prstGeom>
+          <a:solidFill>
+            <a:srgbClr val="8A3A62"/>
+          </a:solidFill>
+          <a:ln/>
+        </p:spPr>
+      </p:sp>
+      <p:sp>
+        <p:nvSpPr>
+          <p:cNvPr id="7" name="Shape 5"/>
+          <p:cNvSpPr/>
+          <p:nvPr/>
+        </p:nvSpPr>
+        <p:spPr>
+          <a:xfrm>
+            <a:off x="640080" y="3017520"/>
+            <a:ext cx="5295748" cy="1124712"/>
+          </a:xfrm>
+          <a:prstGeom prst="rect">
+            <a:avLst/>
+          </a:prstGeom>
+          <a:solidFill>
+            <a:srgbClr val="FFFFFF"/>
+          </a:solidFill>
+          <a:ln w="12700">
+            <a:solidFill>
+              <a:srgbClr val="E4E7F2"/>
+            </a:solidFill>
+            <a:prstDash val="solid"/>
+          </a:ln>
+        </p:spPr>
+      </p:sp>
+      <p:sp>
+        <p:nvSpPr>
+          <p:cNvPr id="8" name="Shape 6"/>
+          <p:cNvSpPr/>
+          <p:nvPr/>
+        </p:nvSpPr>
+        <p:spPr>
+          <a:xfrm>
+            <a:off x="841248" y="3360420"/>
+            <a:ext cx="438912" cy="438912"/>
+          </a:xfrm>
+          <a:prstGeom prst="ellipse">
+            <a:avLst/>
+          </a:prstGeom>
+          <a:solidFill>
+            <a:srgbClr val="B4551B"/>
+          </a:solidFill>
+          <a:ln/>
+        </p:spPr>
+      </p:sp>
+      <p:sp>
+        <p:nvSpPr>
+          <p:cNvPr id="9" name="Shape 7"/>
+          <p:cNvSpPr/>
+          <p:nvPr/>
+        </p:nvSpPr>
+        <p:spPr>
+          <a:xfrm>
+            <a:off x="640080" y="4251960"/>
+            <a:ext cx="5295748" cy="1124712"/>
+          </a:xfrm>
+          <a:prstGeom prst="rect">
+            <a:avLst/>
+          </a:prstGeom>
+          <a:solidFill>
+            <a:srgbClr val="FFFFFF"/>
+          </a:solidFill>
+          <a:ln w="12700">
+            <a:solidFill>
+              <a:srgbClr val="E4E7F2"/>
+            </a:solidFill>
+            <a:prstDash val="solid"/>
+          </a:ln>
+        </p:spPr>
+      </p:sp>
+      <p:sp>
+        <p:nvSpPr>
+          <p:cNvPr id="10" name="Shape 8"/>
+          <p:cNvSpPr/>
+          <p:nvPr/>
+        </p:nvSpPr>
+        <p:spPr>
+          <a:xfrm>
+            <a:off x="841248" y="4594860"/>
+            <a:ext cx="438912" cy="438912"/>
+          </a:xfrm>
+          <a:prstGeom prst="ellipse">
+            <a:avLst/>
+          </a:prstGeom>
+          <a:solidFill>
+            <a:srgbClr val="2E7D5B"/>
+          </a:solidFill>
+          <a:ln/>
+        </p:spPr>
+      </p:sp>
+      <p:sp>
+        <p:nvSpPr>
+          <p:cNvPr id="11" name="Shape 9"/>
+          <p:cNvSpPr/>
+          <p:nvPr/>
+        </p:nvSpPr>
+        <p:spPr>
+          <a:xfrm>
+            <a:off x="6255868" y="1783080"/>
+            <a:ext cx="5295748" cy="1124712"/>
+          </a:xfrm>
+          <a:prstGeom prst="rect">
+            <a:avLst/>
+          </a:prstGeom>
+          <a:solidFill>
+            <a:srgbClr val="FFFFFF"/>
+          </a:solidFill>
+          <a:ln w="12700">
+            <a:solidFill>
+              <a:srgbClr val="E4E7F2"/>
+            </a:solidFill>
+            <a:prstDash val="solid"/>
+          </a:ln>
+        </p:spPr>
+      </p:sp>
+      <p:sp>
+        <p:nvSpPr>
+          <p:cNvPr id="12" name="Shape 10"/>
+          <p:cNvSpPr/>
+          <p:nvPr/>
+        </p:nvSpPr>
+        <p:spPr>
+          <a:xfrm>
+            <a:off x="6457036" y="2125980"/>
+            <a:ext cx="438912" cy="438912"/>
+          </a:xfrm>
+          <a:prstGeom prst="ellipse">
+            <a:avLst/>
+          </a:prstGeom>
+          <a:solidFill>
+            <a:srgbClr val="5C2E91"/>
+          </a:solidFill>
+          <a:ln/>
+        </p:spPr>
+      </p:sp>
+      <p:sp>
+        <p:nvSpPr>
+          <p:cNvPr id="13" name="Shape 11"/>
+          <p:cNvSpPr/>
+          <p:nvPr/>
+        </p:nvSpPr>
+        <p:spPr>
+          <a:xfrm>
+            <a:off x="6255868" y="3017520"/>
+            <a:ext cx="5295748" cy="1124712"/>
+          </a:xfrm>
+          <a:prstGeom prst="rect">
+            <a:avLst/>
+          </a:prstGeom>
+          <a:solidFill>
+            <a:srgbClr val="FFFFFF"/>
+          </a:solidFill>
+          <a:ln w="12700">
+            <a:solidFill>
+              <a:srgbClr val="E4E7F2"/>
+            </a:solidFill>
+            <a:prstDash val="solid"/>
+          </a:ln>
+        </p:spPr>
+      </p:sp>
+      <p:sp>
+        <p:nvSpPr>
+          <p:cNvPr id="14" name="Shape 12"/>
+          <p:cNvSpPr/>
+          <p:nvPr/>
+        </p:nvSpPr>
+        <p:spPr>
+          <a:xfrm>
+            <a:off x="6457036" y="3360420"/>
+            <a:ext cx="438912" cy="438912"/>
+          </a:xfrm>
+          <a:prstGeom prst="ellipse">
+            <a:avLst/>
+          </a:prstGeom>
+          <a:solidFill>
+            <a:srgbClr val="0F6CBD"/>
+          </a:solidFill>
+          <a:ln/>
+        </p:spPr>
+      </p:sp>
+      <p:sp>
+        <p:nvSpPr>
+          <p:cNvPr id="15" name="Shape 13"/>
+          <p:cNvSpPr/>
+          <p:nvPr/>
+        </p:nvSpPr>
+        <p:spPr>
+          <a:xfrm>
+            <a:off x="6255868" y="4251960"/>
+            <a:ext cx="5295748" cy="1124712"/>
+          </a:xfrm>
+          <a:prstGeom prst="rect">
+            <a:avLst/>
+          </a:prstGeom>
+          <a:solidFill>
+            <a:srgbClr val="FFFFFF"/>
+          </a:solidFill>
+          <a:ln w="12700">
+            <a:solidFill>
+              <a:srgbClr val="E4E7F2"/>
+            </a:solidFill>
+            <a:prstDash val="solid"/>
+          </a:ln>
+        </p:spPr>
+      </p:sp>
+      <p:sp>
+        <p:nvSpPr>
+          <p:cNvPr id="16" name="Shape 14"/>
+          <p:cNvSpPr/>
+          <p:nvPr/>
+        </p:nvSpPr>
+        <p:spPr>
+          <a:xfrm>
+            <a:off x="6457036" y="4594860"/>
+            <a:ext cx="438912" cy="438912"/>
+          </a:xfrm>
+          <a:prstGeom prst="ellipse">
+            <a:avLst/>
+          </a:prstGeom>
+          <a:solidFill>
+            <a:srgbClr val="A4373A"/>
+          </a:solidFill>
+          <a:ln/>
+        </p:spPr>
+      </p:sp>
       <p:pic>
         <p:nvPicPr>
-          <p:cNvPr id="6" name="Image 0" descr="preencoded.png">    </p:cNvPr>
+          <p:cNvPr id="17" name="Image 0" descr="preencoded.png">    </p:cNvPr>
+          <p:cNvPicPr>
+            <a:picLocks noChangeAspect="1"/>
+          </p:cNvPicPr>
+          <p:nvPr/>
+        </p:nvPicPr>
+        <p:blipFill>
+          <a:blip r:embed="rId1"/>
+          <a:stretch>
+            <a:fillRect/>
+          </a:stretch>
+        </p:blipFill>
+        <p:spPr>
+          <a:xfrm>
+            <a:off x="950976" y="2235708"/>
+            <a:ext cx="219456" cy="219456"/>
+          </a:xfrm>
+          <a:prstGeom prst="rect">
+            <a:avLst/>
+          </a:prstGeom>
+        </p:spPr>
+      </p:pic>
+      <p:sp>
+        <p:nvSpPr>
+          <p:cNvPr id="18" name="Text 15"/>
+          <p:cNvSpPr/>
+          <p:nvPr/>
+        </p:nvSpPr>
+        <p:spPr>
+          <a:xfrm>
+            <a:off x="1417320" y="1819656"/>
+            <a:ext cx="2224214" cy="1051560"/>
+          </a:xfrm>
+          <a:prstGeom prst="rect">
+            <a:avLst/>
+          </a:prstGeom>
+          <a:noFill/>
+          <a:ln/>
+        </p:spPr>
+        <p:txBody>
+          <a:bodyPr wrap="square" rtlCol="0" anchor="ctr"/>
+          <a:lstStyle/>
+          <a:p>
+            <a:pPr indent="0" marL="0">
+              <a:buNone/>
+            </a:pPr>
+            <a:r>
+              <a:rPr lang="en-US" sz="1300" b="1" dirty="0">
+                <a:solidFill>
+                  <a:srgbClr val="8A3A62"/>
+                </a:solidFill>
+                <a:latin typeface="Microsoft JhengHei" pitchFamily="34" charset="0"/>
+                <a:ea typeface="Microsoft JhengHei" pitchFamily="34" charset="-122"/>
+                <a:cs typeface="Microsoft JhengHei" pitchFamily="34" charset="-120"/>
+              </a:rPr>
+              <a:t>零售通路 · 營運督導</a:t>
+            </a:r>
+            <a:endParaRPr lang="en-US" sz="1300" dirty="0"/>
+          </a:p>
+        </p:txBody>
+      </p:sp>
+      <p:sp>
+        <p:nvSpPr>
+          <p:cNvPr id="19" name="Text 16"/>
+          <p:cNvSpPr/>
+          <p:nvPr/>
+        </p:nvSpPr>
+        <p:spPr>
+          <a:xfrm>
+            <a:off x="3076124" y="1819656"/>
+            <a:ext cx="2753789" cy="1051560"/>
+          </a:xfrm>
+          <a:prstGeom prst="rect">
+            <a:avLst/>
+          </a:prstGeom>
+          <a:noFill/>
+          <a:ln/>
+        </p:spPr>
+        <p:txBody>
+          <a:bodyPr wrap="square" rtlCol="0" anchor="ctr"/>
+          <a:lstStyle/>
+          <a:p>
+            <a:pPr indent="0" marL="0">
+              <a:lnSpc>
+                <a:spcPct val="108000"/>
+              </a:lnSpc>
+              <a:buNone/>
+            </a:pPr>
+            <a:r>
+              <a:rPr lang="en-US" sz="1150" dirty="0">
+                <a:solidFill>
+                  <a:srgbClr val="1E2235"/>
+                </a:solidFill>
+                <a:latin typeface="Microsoft JhengHei" pitchFamily="34" charset="0"/>
+                <a:ea typeface="Microsoft JhengHei" pitchFamily="34" charset="-122"/>
+                <a:cs typeface="Microsoft JhengHei" pitchFamily="34" charset="-120"/>
+              </a:rPr>
+              <a:t>💡 把排程改成一週一次的週報，或改成只在達成率低於 90% 時才通知你。</a:t>
+            </a:r>
+            <a:endParaRPr lang="en-US" sz="1150" dirty="0"/>
+          </a:p>
+        </p:txBody>
+      </p:sp>
+      <p:pic>
+        <p:nvPicPr>
+          <p:cNvPr id="20" name="Image 1" descr="preencoded.png">    </p:cNvPr>
           <p:cNvPicPr>
             <a:picLocks noChangeAspect="1"/>
           </p:cNvPicPr>
@@ -14473,8 +14579,8 @@
         </p:blipFill>
         <p:spPr>
           <a:xfrm>
-            <a:off x="804672" y="2039112"/>
-            <a:ext cx="448056" cy="448056"/>
+            <a:off x="950976" y="3470148"/>
+            <a:ext cx="219456" cy="219456"/>
           </a:xfrm>
           <a:prstGeom prst="rect">
             <a:avLst/>
@@ -14483,14 +14589,14 @@
       </p:pic>
       <p:sp>
         <p:nvSpPr>
-          <p:cNvPr id="7" name="Text 4"/>
-          <p:cNvSpPr/>
-          <p:nvPr/>
-        </p:nvSpPr>
-        <p:spPr>
-          <a:xfrm>
-            <a:off x="1691640" y="1856232"/>
-            <a:ext cx="6858000" cy="347472"/>
+          <p:cNvPr id="21" name="Text 17"/>
+          <p:cNvSpPr/>
+          <p:nvPr/>
+        </p:nvSpPr>
+        <p:spPr>
+          <a:xfrm>
+            <a:off x="1417320" y="3054096"/>
+            <a:ext cx="2224214" cy="1051560"/>
           </a:xfrm>
           <a:prstGeom prst="rect">
             <a:avLst/>
@@ -14506,30 +14612,30 @@
               <a:buNone/>
             </a:pPr>
             <a:r>
-              <a:rPr lang="en-US" sz="1700" b="1" dirty="0">
-                <a:solidFill>
-                  <a:srgbClr val="FFFFFF"/>
-                </a:solidFill>
-                <a:latin typeface="Microsoft JhengHei" pitchFamily="34" charset="0"/>
-                <a:ea typeface="Microsoft JhengHei" pitchFamily="34" charset="-122"/>
-                <a:cs typeface="Microsoft JhengHei" pitchFamily="34" charset="-120"/>
-              </a:rPr>
-              <a:t>行動前審核</a:t>
-            </a:r>
-            <a:endParaRPr lang="en-US" sz="1700" dirty="0"/>
-          </a:p>
-        </p:txBody>
-      </p:sp>
-      <p:sp>
-        <p:nvSpPr>
-          <p:cNvPr id="8" name="Text 5"/>
-          <p:cNvSpPr/>
-          <p:nvPr/>
-        </p:nvSpPr>
-        <p:spPr>
-          <a:xfrm>
-            <a:off x="1691640" y="2203704"/>
-            <a:ext cx="9966960" cy="658368"/>
+              <a:rPr lang="en-US" sz="1300" b="1" dirty="0">
+                <a:solidFill>
+                  <a:srgbClr val="B4551B"/>
+                </a:solidFill>
+                <a:latin typeface="Microsoft JhengHei" pitchFamily="34" charset="0"/>
+                <a:ea typeface="Microsoft JhengHei" pitchFamily="34" charset="-122"/>
+                <a:cs typeface="Microsoft JhengHei" pitchFamily="34" charset="-120"/>
+              </a:rPr>
+              <a:t>零售通路 · 商品企劃</a:t>
+            </a:r>
+            <a:endParaRPr lang="en-US" sz="1300" dirty="0"/>
+          </a:p>
+        </p:txBody>
+      </p:sp>
+      <p:sp>
+        <p:nvSpPr>
+          <p:cNvPr id="22" name="Text 18"/>
+          <p:cNvSpPr/>
+          <p:nvPr/>
+        </p:nvSpPr>
+        <p:spPr>
+          <a:xfrm>
+            <a:off x="3076124" y="3054096"/>
+            <a:ext cx="2753789" cy="1051560"/>
           </a:xfrm>
           <a:prstGeom prst="rect">
             <a:avLst/>
@@ -14543,59 +14649,28 @@
           <a:p>
             <a:pPr indent="0" marL="0">
               <a:lnSpc>
-                <a:spcPct val="118000"/>
+                <a:spcPct val="108000"/>
               </a:lnSpc>
               <a:buNone/>
             </a:pPr>
             <a:r>
-              <a:rPr lang="en-US" sz="1300" dirty="0">
-                <a:solidFill>
-                  <a:srgbClr val="C7CAEC"/>
-                </a:solidFill>
-                <a:latin typeface="Microsoft JhengHei" pitchFamily="34" charset="0"/>
-                <a:ea typeface="Microsoft JhengHei" pitchFamily="34" charset="-122"/>
-                <a:cs typeface="Microsoft JhengHei" pitchFamily="34" charset="-120"/>
-              </a:rPr>
-              <a:t>中高風險動作會顯示 RISK-LEVEL；寄信、發 Teams、建立會議等動作先攤開可編輯預覽，核准後才送出。</a:t>
-            </a:r>
-            <a:endParaRPr lang="en-US" sz="1300" dirty="0"/>
-          </a:p>
-        </p:txBody>
-      </p:sp>
-      <p:sp>
-        <p:nvSpPr>
-          <p:cNvPr id="9" name="Shape 6"/>
-          <p:cNvSpPr/>
-          <p:nvPr/>
-        </p:nvSpPr>
-        <p:spPr>
-          <a:xfrm>
-            <a:off x="640080" y="3044952"/>
-            <a:ext cx="777240" cy="777240"/>
-          </a:xfrm>
-          <a:prstGeom prst="roundRect">
-            <a:avLst>
-              <a:gd name="adj" fmla="val 18824"/>
-            </a:avLst>
-          </a:prstGeom>
-          <a:solidFill>
-            <a:srgbClr val="FFFFFF">
-              <a:alpha val="14000"/>
-            </a:srgbClr>
-          </a:solidFill>
-          <a:ln w="12700">
-            <a:solidFill>
-              <a:srgbClr val="22D3EE">
-                <a:alpha val="60000"/>
-              </a:srgbClr>
-            </a:solidFill>
-            <a:prstDash val="solid"/>
-          </a:ln>
-        </p:spPr>
+              <a:rPr lang="en-US" sz="1150" dirty="0">
+                <a:solidFill>
+                  <a:srgbClr val="1E2235"/>
+                </a:solidFill>
+                <a:latin typeface="Microsoft JhengHei" pitchFamily="34" charset="0"/>
+                <a:ea typeface="Microsoft JhengHei" pitchFamily="34" charset="-122"/>
+                <a:cs typeface="Microsoft JhengHei" pitchFamily="34" charset="-120"/>
+              </a:rPr>
+              <a:t>💡 改一個條件（例如毛利率紅線改成 35%），請它整組四份文件重出，體驗「一次改、四份同步」。</a:t>
+            </a:r>
+            <a:endParaRPr lang="en-US" sz="1150" dirty="0"/>
+          </a:p>
+        </p:txBody>
       </p:sp>
       <p:pic>
         <p:nvPicPr>
-          <p:cNvPr id="10" name="Image 1" descr="preencoded.png">    </p:cNvPr>
+          <p:cNvPr id="23" name="Image 2" descr="preencoded.png">    </p:cNvPr>
           <p:cNvPicPr>
             <a:picLocks noChangeAspect="1"/>
           </p:cNvPicPr>
@@ -14609,8 +14684,8 @@
         </p:blipFill>
         <p:spPr>
           <a:xfrm>
-            <a:off x="804672" y="3209544"/>
-            <a:ext cx="448056" cy="448056"/>
+            <a:off x="950976" y="4704588"/>
+            <a:ext cx="219456" cy="219456"/>
           </a:xfrm>
           <a:prstGeom prst="rect">
             <a:avLst/>
@@ -14619,14 +14694,14 @@
       </p:pic>
       <p:sp>
         <p:nvSpPr>
-          <p:cNvPr id="11" name="Text 7"/>
-          <p:cNvSpPr/>
-          <p:nvPr/>
-        </p:nvSpPr>
-        <p:spPr>
-          <a:xfrm>
-            <a:off x="1691640" y="3026664"/>
-            <a:ext cx="6858000" cy="347472"/>
+          <p:cNvPr id="24" name="Text 19"/>
+          <p:cNvSpPr/>
+          <p:nvPr/>
+        </p:nvSpPr>
+        <p:spPr>
+          <a:xfrm>
+            <a:off x="1417320" y="4288536"/>
+            <a:ext cx="2224214" cy="1051560"/>
           </a:xfrm>
           <a:prstGeom prst="rect">
             <a:avLst/>
@@ -14642,30 +14717,30 @@
               <a:buNone/>
             </a:pPr>
             <a:r>
-              <a:rPr lang="en-US" sz="1700" b="1" dirty="0">
-                <a:solidFill>
-                  <a:srgbClr val="FFFFFF"/>
-                </a:solidFill>
-                <a:latin typeface="Microsoft JhengHei" pitchFamily="34" charset="0"/>
-                <a:ea typeface="Microsoft JhengHei" pitchFamily="34" charset="-122"/>
-                <a:cs typeface="Microsoft JhengHei" pitchFamily="34" charset="-120"/>
-              </a:rPr>
-              <a:t>控制範圍清楚</a:t>
-            </a:r>
-            <a:endParaRPr lang="en-US" sz="1700" dirty="0"/>
-          </a:p>
-        </p:txBody>
-      </p:sp>
-      <p:sp>
-        <p:nvSpPr>
-          <p:cNvPr id="12" name="Text 8"/>
-          <p:cNvSpPr/>
-          <p:nvPr/>
-        </p:nvSpPr>
-        <p:spPr>
-          <a:xfrm>
-            <a:off x="1691640" y="3374136"/>
-            <a:ext cx="9966960" cy="658368"/>
+              <a:rPr lang="en-US" sz="1300" b="1" dirty="0">
+                <a:solidFill>
+                  <a:srgbClr val="2E7D5B"/>
+                </a:solidFill>
+                <a:latin typeface="Microsoft JhengHei" pitchFamily="34" charset="0"/>
+                <a:ea typeface="Microsoft JhengHei" pitchFamily="34" charset="-122"/>
+                <a:cs typeface="Microsoft JhengHei" pitchFamily="34" charset="-120"/>
+              </a:rPr>
+              <a:t>零售通路 · 客服中心</a:t>
+            </a:r>
+            <a:endParaRPr lang="en-US" sz="1300" dirty="0"/>
+          </a:p>
+        </p:txBody>
+      </p:sp>
+      <p:sp>
+        <p:nvSpPr>
+          <p:cNvPr id="25" name="Text 20"/>
+          <p:cNvSpPr/>
+          <p:nvPr/>
+        </p:nvSpPr>
+        <p:spPr>
+          <a:xfrm>
+            <a:off x="3076124" y="4288536"/>
+            <a:ext cx="2753789" cy="1051560"/>
           </a:xfrm>
           <a:prstGeom prst="rect">
             <a:avLst/>
@@ -14679,59 +14754,28 @@
           <a:p>
             <a:pPr indent="0" marL="0">
               <a:lnSpc>
-                <a:spcPct val="118000"/>
+                <a:spcPct val="108000"/>
               </a:lnSpc>
               <a:buNone/>
             </a:pPr>
             <a:r>
-              <a:rPr lang="en-US" sz="1300" dirty="0">
-                <a:solidFill>
-                  <a:srgbClr val="C7CAEC"/>
-                </a:solidFill>
-                <a:latin typeface="Microsoft JhengHei" pitchFamily="34" charset="0"/>
-                <a:ea typeface="Microsoft JhengHei" pitchFamily="34" charset="-122"/>
-                <a:cs typeface="Microsoft JhengHei" pitchFamily="34" charset="-120"/>
-              </a:rPr>
-              <a:t>don’t ask again 可限定 per-recipient、per-domain 或 always；任務可軟／硬暫停、恢復或取消。</a:t>
-            </a:r>
-            <a:endParaRPr lang="en-US" sz="1300" dirty="0"/>
-          </a:p>
-        </p:txBody>
-      </p:sp>
-      <p:sp>
-        <p:nvSpPr>
-          <p:cNvPr id="13" name="Shape 9"/>
-          <p:cNvSpPr/>
-          <p:nvPr/>
-        </p:nvSpPr>
-        <p:spPr>
-          <a:xfrm>
-            <a:off x="640080" y="4215384"/>
-            <a:ext cx="777240" cy="777240"/>
-          </a:xfrm>
-          <a:prstGeom prst="roundRect">
-            <a:avLst>
-              <a:gd name="adj" fmla="val 18824"/>
-            </a:avLst>
-          </a:prstGeom>
-          <a:solidFill>
-            <a:srgbClr val="FFFFFF">
-              <a:alpha val="14000"/>
-            </a:srgbClr>
-          </a:solidFill>
-          <a:ln w="12700">
-            <a:solidFill>
-              <a:srgbClr val="22D3EE">
-                <a:alpha val="60000"/>
-              </a:srgbClr>
-            </a:solidFill>
-            <a:prstDash val="solid"/>
-          </a:ln>
-        </p:spPr>
+              <a:rPr lang="en-US" sz="1150" dirty="0">
+                <a:solidFill>
+                  <a:srgbClr val="1E2235"/>
+                </a:solidFill>
+                <a:latin typeface="Microsoft JhengHei" pitchFamily="34" charset="0"/>
+                <a:ea typeface="Microsoft JhengHei" pitchFamily="34" charset="-122"/>
+                <a:cs typeface="Microsoft JhengHei" pitchFamily="34" charset="-120"/>
+              </a:rPr>
+              <a:t>💡 把觸發條件縮小到特定寄件網域或特定通路的客服信箱，降低誤觸發。</a:t>
+            </a:r>
+            <a:endParaRPr lang="en-US" sz="1150" dirty="0"/>
+          </a:p>
+        </p:txBody>
       </p:sp>
       <p:pic>
         <p:nvPicPr>
-          <p:cNvPr id="14" name="Image 2" descr="preencoded.png">    </p:cNvPr>
+          <p:cNvPr id="26" name="Image 3" descr="preencoded.png">    </p:cNvPr>
           <p:cNvPicPr>
             <a:picLocks noChangeAspect="1"/>
           </p:cNvPicPr>
@@ -14745,8 +14789,8 @@
         </p:blipFill>
         <p:spPr>
           <a:xfrm>
-            <a:off x="804672" y="4379976"/>
-            <a:ext cx="448056" cy="448056"/>
+            <a:off x="6566764" y="2235708"/>
+            <a:ext cx="219456" cy="219456"/>
           </a:xfrm>
           <a:prstGeom prst="rect">
             <a:avLst/>
@@ -14755,14 +14799,14 @@
       </p:pic>
       <p:sp>
         <p:nvSpPr>
-          <p:cNvPr id="15" name="Text 10"/>
-          <p:cNvSpPr/>
-          <p:nvPr/>
-        </p:nvSpPr>
-        <p:spPr>
-          <a:xfrm>
-            <a:off x="1691640" y="4197096"/>
-            <a:ext cx="6858000" cy="347472"/>
+          <p:cNvPr id="27" name="Text 21"/>
+          <p:cNvSpPr/>
+          <p:nvPr/>
+        </p:nvSpPr>
+        <p:spPr>
+          <a:xfrm>
+            <a:off x="7033108" y="1819656"/>
+            <a:ext cx="2224214" cy="1051560"/>
           </a:xfrm>
           <a:prstGeom prst="rect">
             <a:avLst/>
@@ -14778,30 +14822,30 @@
               <a:buNone/>
             </a:pPr>
             <a:r>
-              <a:rPr lang="en-US" sz="1700" b="1" dirty="0">
-                <a:solidFill>
-                  <a:srgbClr val="FFFFFF"/>
-                </a:solidFill>
-                <a:latin typeface="Microsoft JhengHei" pitchFamily="34" charset="0"/>
-                <a:ea typeface="Microsoft JhengHei" pitchFamily="34" charset="-122"/>
-                <a:cs typeface="Microsoft JhengHei" pitchFamily="34" charset="-120"/>
-              </a:rPr>
-              <a:t>自動化任務也有把關</a:t>
-            </a:r>
-            <a:endParaRPr lang="en-US" sz="1700" dirty="0"/>
-          </a:p>
-        </p:txBody>
-      </p:sp>
-      <p:sp>
-        <p:nvSpPr>
-          <p:cNvPr id="16" name="Text 11"/>
-          <p:cNvSpPr/>
-          <p:nvPr/>
-        </p:nvSpPr>
-        <p:spPr>
-          <a:xfrm>
-            <a:off x="1691640" y="4544568"/>
-            <a:ext cx="9966960" cy="658368"/>
+              <a:rPr lang="en-US" sz="1300" b="1" dirty="0">
+                <a:solidFill>
+                  <a:srgbClr val="5C2E91"/>
+                </a:solidFill>
+                <a:latin typeface="Microsoft JhengHei" pitchFamily="34" charset="0"/>
+                <a:ea typeface="Microsoft JhengHei" pitchFamily="34" charset="-122"/>
+                <a:cs typeface="Microsoft JhengHei" pitchFamily="34" charset="-120"/>
+              </a:rPr>
+              <a:t>零售通路 · 商品定價</a:t>
+            </a:r>
+            <a:endParaRPr lang="en-US" sz="1300" dirty="0"/>
+          </a:p>
+        </p:txBody>
+      </p:sp>
+      <p:sp>
+        <p:nvSpPr>
+          <p:cNvPr id="28" name="Text 22"/>
+          <p:cNvSpPr/>
+          <p:nvPr/>
+        </p:nvSpPr>
+        <p:spPr>
+          <a:xfrm>
+            <a:off x="8691911" y="1819656"/>
+            <a:ext cx="2753789" cy="1051560"/>
           </a:xfrm>
           <a:prstGeom prst="rect">
             <a:avLst/>
@@ -14815,59 +14859,28 @@
           <a:p>
             <a:pPr indent="0" marL="0">
               <a:lnSpc>
-                <a:spcPct val="118000"/>
+                <a:spcPct val="108000"/>
               </a:lnSpc>
               <a:buNone/>
             </a:pPr>
             <a:r>
-              <a:rPr lang="en-US" sz="1300" dirty="0">
-                <a:solidFill>
-                  <a:srgbClr val="C7CAEC"/>
-                </a:solidFill>
-                <a:latin typeface="Microsoft JhengHei" pitchFamily="34" charset="0"/>
-                <a:ea typeface="Microsoft JhengHei" pitchFamily="34" charset="-122"/>
-                <a:cs typeface="Microsoft JhengHei" pitchFamily="34" charset="-120"/>
-              </a:rPr>
-              <a:t>排程提示與事件驅動任務有執行頻率限制與防迴圈保護；一律以建立者權限執行，且與其他 Cowork 活動一同記錄在統一稽核日誌，套用 Microsoft Purview 政策。</a:t>
-            </a:r>
-            <a:endParaRPr lang="en-US" sz="1300" dirty="0"/>
-          </a:p>
-        </p:txBody>
-      </p:sp>
-      <p:sp>
-        <p:nvSpPr>
-          <p:cNvPr id="17" name="Shape 12"/>
-          <p:cNvSpPr/>
-          <p:nvPr/>
-        </p:nvSpPr>
-        <p:spPr>
-          <a:xfrm>
-            <a:off x="640080" y="5385816"/>
-            <a:ext cx="777240" cy="777240"/>
-          </a:xfrm>
-          <a:prstGeom prst="roundRect">
-            <a:avLst>
-              <a:gd name="adj" fmla="val 18824"/>
-            </a:avLst>
-          </a:prstGeom>
-          <a:solidFill>
-            <a:srgbClr val="FFFFFF">
-              <a:alpha val="14000"/>
-            </a:srgbClr>
-          </a:solidFill>
-          <a:ln w="12700">
-            <a:solidFill>
-              <a:srgbClr val="22D3EE">
-                <a:alpha val="60000"/>
-              </a:srgbClr>
-            </a:solidFill>
-            <a:prstDash val="solid"/>
-          </a:ln>
-        </p:spPr>
+              <a:rPr lang="en-US" sz="1150" dirty="0">
+                <a:solidFill>
+                  <a:srgbClr val="1E2235"/>
+                </a:solidFill>
+                <a:latin typeface="Microsoft JhengHei" pitchFamily="34" charset="0"/>
+                <a:ea typeface="Microsoft JhengHei" pitchFamily="34" charset="-122"/>
+                <a:cs typeface="Microsoft JhengHei" pitchFamily="34" charset="-120"/>
+              </a:rPr>
+              <a:t>💡 把調價紅線換成你們自己的毛利政策，其他步驟完全沿用。</a:t>
+            </a:r>
+            <a:endParaRPr lang="en-US" sz="1150" dirty="0"/>
+          </a:p>
+        </p:txBody>
       </p:sp>
       <p:pic>
         <p:nvPicPr>
-          <p:cNvPr id="18" name="Image 3" descr="preencoded.png">    </p:cNvPr>
+          <p:cNvPr id="29" name="Image 4" descr="preencoded.png">    </p:cNvPr>
           <p:cNvPicPr>
             <a:picLocks noChangeAspect="1"/>
           </p:cNvPicPr>
@@ -14881,8 +14894,8 @@
         </p:blipFill>
         <p:spPr>
           <a:xfrm>
-            <a:off x="804672" y="5550408"/>
-            <a:ext cx="448056" cy="448056"/>
+            <a:off x="6566764" y="3470148"/>
+            <a:ext cx="219456" cy="219456"/>
           </a:xfrm>
           <a:prstGeom prst="rect">
             <a:avLst/>
@@ -14891,14 +14904,14 @@
       </p:pic>
       <p:sp>
         <p:nvSpPr>
-          <p:cNvPr id="19" name="Text 13"/>
-          <p:cNvSpPr/>
-          <p:nvPr/>
-        </p:nvSpPr>
-        <p:spPr>
-          <a:xfrm>
-            <a:off x="1691640" y="5367528"/>
-            <a:ext cx="6858000" cy="347472"/>
+          <p:cNvPr id="30" name="Text 23"/>
+          <p:cNvSpPr/>
+          <p:nvPr/>
+        </p:nvSpPr>
+        <p:spPr>
+          <a:xfrm>
+            <a:off x="7033108" y="3054096"/>
+            <a:ext cx="2224214" cy="1051560"/>
           </a:xfrm>
           <a:prstGeom prst="rect">
             <a:avLst/>
@@ -14914,30 +14927,30 @@
               <a:buNone/>
             </a:pPr>
             <a:r>
-              <a:rPr lang="en-US" sz="1700" b="1" dirty="0">
-                <a:solidFill>
-                  <a:srgbClr val="FFFFFF"/>
-                </a:solidFill>
-                <a:latin typeface="Microsoft JhengHei" pitchFamily="34" charset="0"/>
-                <a:ea typeface="Microsoft JhengHei" pitchFamily="34" charset="-122"/>
-                <a:cs typeface="Microsoft JhengHei" pitchFamily="34" charset="-120"/>
-              </a:rPr>
-              <a:t>限制也要知道</a:t>
-            </a:r>
-            <a:endParaRPr lang="en-US" sz="1700" dirty="0"/>
-          </a:p>
-        </p:txBody>
-      </p:sp>
-      <p:sp>
-        <p:nvSpPr>
-          <p:cNvPr id="20" name="Text 14"/>
-          <p:cNvSpPr/>
-          <p:nvPr/>
-        </p:nvSpPr>
-        <p:spPr>
-          <a:xfrm>
-            <a:off x="1691640" y="5715000"/>
-            <a:ext cx="9966960" cy="658368"/>
+              <a:rPr lang="en-US" sz="1300" b="1" dirty="0">
+                <a:solidFill>
+                  <a:srgbClr val="0F6CBD"/>
+                </a:solidFill>
+                <a:latin typeface="Microsoft JhengHei" pitchFamily="34" charset="0"/>
+                <a:ea typeface="Microsoft JhengHei" pitchFamily="34" charset="-122"/>
+                <a:cs typeface="Microsoft JhengHei" pitchFamily="34" charset="-120"/>
+              </a:rPr>
+              <a:t>零售通路 · 商品採購</a:t>
+            </a:r>
+            <a:endParaRPr lang="en-US" sz="1300" dirty="0"/>
+          </a:p>
+        </p:txBody>
+      </p:sp>
+      <p:sp>
+        <p:nvSpPr>
+          <p:cNvPr id="31" name="Text 24"/>
+          <p:cNvSpPr/>
+          <p:nvPr/>
+        </p:nvSpPr>
+        <p:spPr>
+          <a:xfrm>
+            <a:off x="8691911" y="3054096"/>
+            <a:ext cx="2753789" cy="1051560"/>
           </a:xfrm>
           <a:prstGeom prst="rect">
             <a:avLst/>
@@ -14951,20 +14964,83 @@
           <a:p>
             <a:pPr indent="0" marL="0">
               <a:lnSpc>
-                <a:spcPct val="118000"/>
+                <a:spcPct val="108000"/>
               </a:lnSpc>
               <a:buNone/>
             </a:pPr>
             <a:r>
-              <a:rPr lang="en-US" sz="1300" dirty="0">
-                <a:solidFill>
-                  <a:srgbClr val="C7CAEC"/>
-                </a:solidFill>
-                <a:latin typeface="Microsoft JhengHei" pitchFamily="34" charset="0"/>
-                <a:ea typeface="Microsoft JhengHei" pitchFamily="34" charset="-122"/>
-                <a:cs typeface="Microsoft JhengHei" pitchFamily="34" charset="-120"/>
-              </a:rPr>
-              <a:t>不能存取本機檔案、刪除 OneDrive/SharePoint 檔案或讀取加密檔；附件 &lt;200MB；自訂技能與第三方 plugin 未經 Microsoft 驗證，需自行審閱。官方明列不適用於「免人工審查即需保證正確」的用途。</a:t>
+              <a:rPr lang="en-US" sz="1150" dirty="0">
+                <a:solidFill>
+                  <a:srgbClr val="1E2235"/>
+                </a:solidFill>
+                <a:latin typeface="Microsoft JhengHei" pitchFamily="34" charset="0"/>
+                <a:ea typeface="Microsoft JhengHei" pitchFamily="34" charset="-122"/>
+                <a:cs typeface="Microsoft JhengHei" pitchFamily="34" charset="-120"/>
+              </a:rPr>
+              <a:t>💡 把它設成每月 1 號的排程任務，讓合約盤點變成不需要人記得的例行工作。</a:t>
+            </a:r>
+            <a:endParaRPr lang="en-US" sz="1150" dirty="0"/>
+          </a:p>
+        </p:txBody>
+      </p:sp>
+      <p:pic>
+        <p:nvPicPr>
+          <p:cNvPr id="32" name="Image 5" descr="preencoded.png">    </p:cNvPr>
+          <p:cNvPicPr>
+            <a:picLocks noChangeAspect="1"/>
+          </p:cNvPicPr>
+          <p:nvPr/>
+        </p:nvPicPr>
+        <p:blipFill>
+          <a:blip r:embed="rId6"/>
+          <a:stretch>
+            <a:fillRect/>
+          </a:stretch>
+        </p:blipFill>
+        <p:spPr>
+          <a:xfrm>
+            <a:off x="6566764" y="4704588"/>
+            <a:ext cx="219456" cy="219456"/>
+          </a:xfrm>
+          <a:prstGeom prst="rect">
+            <a:avLst/>
+          </a:prstGeom>
+        </p:spPr>
+      </p:pic>
+      <p:sp>
+        <p:nvSpPr>
+          <p:cNvPr id="33" name="Text 25"/>
+          <p:cNvSpPr/>
+          <p:nvPr/>
+        </p:nvSpPr>
+        <p:spPr>
+          <a:xfrm>
+            <a:off x="7033108" y="4288536"/>
+            <a:ext cx="2224214" cy="1051560"/>
+          </a:xfrm>
+          <a:prstGeom prst="rect">
+            <a:avLst/>
+          </a:prstGeom>
+          <a:noFill/>
+          <a:ln/>
+        </p:spPr>
+        <p:txBody>
+          <a:bodyPr wrap="square" rtlCol="0" anchor="ctr"/>
+          <a:lstStyle/>
+          <a:p>
+            <a:pPr indent="0" marL="0">
+              <a:buNone/>
+            </a:pPr>
+            <a:r>
+              <a:rPr lang="en-US" sz="1300" b="1" dirty="0">
+                <a:solidFill>
+                  <a:srgbClr val="A4373A"/>
+                </a:solidFill>
+                <a:latin typeface="Microsoft JhengHei" pitchFamily="34" charset="0"/>
+                <a:ea typeface="Microsoft JhengHei" pitchFamily="34" charset="-122"/>
+                <a:cs typeface="Microsoft JhengHei" pitchFamily="34" charset="-120"/>
+              </a:rPr>
+              <a:t>零售通路 · 自動化</a:t>
             </a:r>
             <a:endParaRPr lang="en-US" sz="1300" dirty="0"/>
           </a:p>
@@ -14972,7 +15048,49 @@
       </p:sp>
       <p:sp>
         <p:nvSpPr>
-          <p:cNvPr id="21" name="Text 15"/>
+          <p:cNvPr id="34" name="Text 26"/>
+          <p:cNvSpPr/>
+          <p:nvPr/>
+        </p:nvSpPr>
+        <p:spPr>
+          <a:xfrm>
+            <a:off x="8691911" y="4288536"/>
+            <a:ext cx="2753789" cy="1051560"/>
+          </a:xfrm>
+          <a:prstGeom prst="rect">
+            <a:avLst/>
+          </a:prstGeom>
+          <a:noFill/>
+          <a:ln/>
+        </p:spPr>
+        <p:txBody>
+          <a:bodyPr wrap="square" rtlCol="0" anchor="ctr"/>
+          <a:lstStyle/>
+          <a:p>
+            <a:pPr indent="0" marL="0">
+              <a:lnSpc>
+                <a:spcPct val="108000"/>
+              </a:lnSpc>
+              <a:buNone/>
+            </a:pPr>
+            <a:r>
+              <a:rPr lang="en-US" sz="1150" dirty="0">
+                <a:solidFill>
+                  <a:srgbClr val="1E2235"/>
+                </a:solidFill>
+                <a:latin typeface="Microsoft JhengHei" pitchFamily="34" charset="0"/>
+                <a:ea typeface="Microsoft JhengHei" pitchFamily="34" charset="-122"/>
+                <a:cs typeface="Microsoft JhengHei" pitchFamily="34" charset="-120"/>
+              </a:rPr>
+              <a:t>💡 做一個變體技能，專門產生月報或季報，重複使用同一套分級規則。</a:t>
+            </a:r>
+            <a:endParaRPr lang="en-US" sz="1150" dirty="0"/>
+          </a:p>
+        </p:txBody>
+      </p:sp>
+      <p:sp>
+        <p:nvSpPr>
+          <p:cNvPr id="35" name="Text 27"/>
           <p:cNvSpPr/>
           <p:nvPr/>
         </p:nvSpPr>
@@ -14997,7 +15115,7 @@
             <a:r>
               <a:rPr lang="en-US" sz="900" dirty="0">
                 <a:solidFill>
-                  <a:srgbClr val="8A8FB5"/>
+                  <a:srgbClr val="5B6079"/>
                 </a:solidFill>
                 <a:latin typeface="Microsoft JhengHei" pitchFamily="34" charset="0"/>
                 <a:ea typeface="Microsoft JhengHei" pitchFamily="34" charset="-122"/>
@@ -15011,7 +15129,7 @@
       </p:sp>
       <p:sp>
         <p:nvSpPr>
-          <p:cNvPr id="22" name="Text 16"/>
+          <p:cNvPr id="36" name="Text 28"/>
           <p:cNvSpPr/>
           <p:nvPr/>
         </p:nvSpPr>
@@ -15036,7 +15154,7 @@
             <a:r>
               <a:rPr lang="en-US" sz="900" dirty="0">
                 <a:solidFill>
-                  <a:srgbClr val="8A8FB5"/>
+                  <a:srgbClr val="5B6079"/>
                 </a:solidFill>
                 <a:latin typeface="Microsoft JhengHei" pitchFamily="34" charset="0"/>
                 <a:ea typeface="Microsoft JhengHei" pitchFamily="34" charset="-122"/>
@@ -15089,14 +15207,34 @@
       </p:grpSpPr>
       <p:sp>
         <p:nvSpPr>
-          <p:cNvPr id="2" name="Text 0"/>
-          <p:cNvSpPr/>
-          <p:nvPr/>
-        </p:nvSpPr>
-        <p:spPr>
-          <a:xfrm>
-            <a:off x="640080" y="1371600"/>
-            <a:ext cx="10058400" cy="822960"/>
+          <p:cNvPr id="2" name="Shape 0"/>
+          <p:cNvSpPr/>
+          <p:nvPr/>
+        </p:nvSpPr>
+        <p:spPr>
+          <a:xfrm>
+            <a:off x="640080" y="566928"/>
+            <a:ext cx="384048" cy="128016"/>
+          </a:xfrm>
+          <a:prstGeom prst="rect">
+            <a:avLst/>
+          </a:prstGeom>
+          <a:solidFill>
+            <a:srgbClr val="22D3EE"/>
+          </a:solidFill>
+          <a:ln/>
+        </p:spPr>
+      </p:sp>
+      <p:sp>
+        <p:nvSpPr>
+          <p:cNvPr id="3" name="Text 1"/>
+          <p:cNvSpPr/>
+          <p:nvPr/>
+        </p:nvSpPr>
+        <p:spPr>
+          <a:xfrm>
+            <a:off x="1143000" y="457200"/>
+            <a:ext cx="8229600" cy="310896"/>
           </a:xfrm>
           <a:prstGeom prst="rect">
             <a:avLst/>
@@ -15112,7 +15250,46 @@
               <a:buNone/>
             </a:pPr>
             <a:r>
-              <a:rPr lang="en-US" sz="4000" b="1" dirty="0">
+              <a:rPr lang="en-US" sz="1200" b="1" spc="200" kern="0" dirty="0">
+                <a:solidFill>
+                  <a:srgbClr val="22D3EE"/>
+                </a:solidFill>
+                <a:latin typeface="Microsoft JhengHei" pitchFamily="34" charset="0"/>
+                <a:ea typeface="Microsoft JhengHei" pitchFamily="34" charset="-122"/>
+                <a:cs typeface="Microsoft JhengHei" pitchFamily="34" charset="-120"/>
+              </a:rPr>
+              <a:t>TRUST &amp; CONTROL</a:t>
+            </a:r>
+            <a:endParaRPr lang="en-US" sz="1200" dirty="0"/>
+          </a:p>
+        </p:txBody>
+      </p:sp>
+      <p:sp>
+        <p:nvSpPr>
+          <p:cNvPr id="4" name="Text 2"/>
+          <p:cNvSpPr/>
+          <p:nvPr/>
+        </p:nvSpPr>
+        <p:spPr>
+          <a:xfrm>
+            <a:off x="640080" y="786384"/>
+            <a:ext cx="10972800" cy="640080"/>
+          </a:xfrm>
+          <a:prstGeom prst="rect">
+            <a:avLst/>
+          </a:prstGeom>
+          <a:noFill/>
+          <a:ln/>
+        </p:spPr>
+        <p:txBody>
+          <a:bodyPr wrap="square" rtlCol="0" anchor="ctr"/>
+          <a:lstStyle/>
+          <a:p>
+            <a:pPr indent="0" marL="0">
+              <a:buNone/>
+            </a:pPr>
+            <a:r>
+              <a:rPr lang="en-US" sz="3000" b="1" dirty="0">
                 <a:solidFill>
                   <a:srgbClr val="FFFFFF"/>
                 </a:solidFill>
@@ -15120,76 +15297,37 @@
                 <a:ea typeface="Microsoft JhengHei" pitchFamily="34" charset="-122"/>
                 <a:cs typeface="Microsoft JhengHei" pitchFamily="34" charset="-120"/>
               </a:rPr>
-              <a:t>現在就開始練習</a:t>
-            </a:r>
-            <a:endParaRPr lang="en-US" sz="4000" dirty="0"/>
-          </a:p>
-        </p:txBody>
-      </p:sp>
-      <p:sp>
-        <p:nvSpPr>
-          <p:cNvPr id="3" name="Text 1"/>
-          <p:cNvSpPr/>
-          <p:nvPr/>
-        </p:nvSpPr>
-        <p:spPr>
-          <a:xfrm>
-            <a:off x="640080" y="2377440"/>
-            <a:ext cx="10058400" cy="548640"/>
-          </a:xfrm>
-          <a:prstGeom prst="rect">
-            <a:avLst/>
-          </a:prstGeom>
-          <a:noFill/>
-          <a:ln/>
-        </p:spPr>
-        <p:txBody>
-          <a:bodyPr wrap="square" rtlCol="0" anchor="ctr"/>
-          <a:lstStyle/>
-          <a:p>
-            <a:pPr indent="0" marL="0">
-              <a:buNone/>
-            </a:pPr>
-            <a:r>
-              <a:rPr lang="en-US" sz="1500" dirty="0">
-                <a:solidFill>
-                  <a:srgbClr val="C7CAEC"/>
-                </a:solidFill>
-                <a:latin typeface="Microsoft JhengHei" pitchFamily="34" charset="0"/>
-                <a:ea typeface="Microsoft JhengHei" pitchFamily="34" charset="-122"/>
-                <a:cs typeface="Microsoft JhengHei" pitchFamily="34" charset="-120"/>
-              </a:rPr>
-              <a:t>開始前請確認：每位使用者一張 M365 Copilot 授權、管理員已啟用用量計費（Copilot Credits，未啟用則無法存取）、租戶位於 Anthropic 支援地區；可在 Web/桌面/行動/Outlook/Teams 使用（本機瀏覽器工作僅限網頁版＋Edge 150 以上，且預設停用需管理員開啟）。</a:t>
-            </a:r>
-            <a:endParaRPr lang="en-US" sz="1500" dirty="0"/>
-          </a:p>
-        </p:txBody>
-      </p:sp>
-      <p:sp>
-        <p:nvSpPr>
-          <p:cNvPr id="4" name="Shape 2"/>
-          <p:cNvSpPr/>
-          <p:nvPr/>
-        </p:nvSpPr>
-        <p:spPr>
-          <a:xfrm>
-            <a:off x="640080" y="3017520"/>
-            <a:ext cx="8686800" cy="868680"/>
+              <a:t>自動化，但你始終是決策者</a:t>
+            </a:r>
+            <a:endParaRPr lang="en-US" sz="3000" dirty="0"/>
+          </a:p>
+        </p:txBody>
+      </p:sp>
+      <p:sp>
+        <p:nvSpPr>
+          <p:cNvPr id="5" name="Shape 3"/>
+          <p:cNvSpPr/>
+          <p:nvPr/>
+        </p:nvSpPr>
+        <p:spPr>
+          <a:xfrm>
+            <a:off x="640080" y="1874520"/>
+            <a:ext cx="777240" cy="777240"/>
           </a:xfrm>
           <a:prstGeom prst="roundRect">
             <a:avLst>
-              <a:gd name="adj" fmla="val 12632"/>
+              <a:gd name="adj" fmla="val 18824"/>
             </a:avLst>
           </a:prstGeom>
           <a:solidFill>
             <a:srgbClr val="FFFFFF">
-              <a:alpha val="10000"/>
+              <a:alpha val="14000"/>
             </a:srgbClr>
           </a:solidFill>
           <a:ln w="12700">
             <a:solidFill>
-              <a:srgbClr val="FFFFFF">
-                <a:alpha val="35000"/>
+              <a:srgbClr val="22D3EE">
+                <a:alpha val="60000"/>
               </a:srgbClr>
             </a:solidFill>
             <a:prstDash val="solid"/>
@@ -15198,7 +15336,7 @@
       </p:sp>
       <p:pic>
         <p:nvPicPr>
-          <p:cNvPr id="5" name="Image 0" descr="preencoded.png">    </p:cNvPr>
+          <p:cNvPr id="6" name="Image 0" descr="preencoded.png">    </p:cNvPr>
           <p:cNvPicPr>
             <a:picLocks noChangeAspect="1"/>
           </p:cNvPicPr>
@@ -15212,8 +15350,8 @@
         </p:blipFill>
         <p:spPr>
           <a:xfrm>
-            <a:off x="914400" y="3291840"/>
-            <a:ext cx="329184" cy="329184"/>
+            <a:off x="804672" y="2039112"/>
+            <a:ext cx="448056" cy="448056"/>
           </a:xfrm>
           <a:prstGeom prst="rect">
             <a:avLst/>
@@ -15222,14 +15360,14 @@
       </p:pic>
       <p:sp>
         <p:nvSpPr>
-          <p:cNvPr id="6" name="Text 3"/>
-          <p:cNvSpPr/>
-          <p:nvPr/>
-        </p:nvSpPr>
-        <p:spPr>
-          <a:xfrm>
-            <a:off x="1417320" y="3127248"/>
-            <a:ext cx="7315200" cy="320040"/>
+          <p:cNvPr id="7" name="Text 4"/>
+          <p:cNvSpPr/>
+          <p:nvPr/>
+        </p:nvSpPr>
+        <p:spPr>
+          <a:xfrm>
+            <a:off x="1691640" y="1856232"/>
+            <a:ext cx="6858000" cy="347472"/>
           </a:xfrm>
           <a:prstGeom prst="rect">
             <a:avLst/>
@@ -15245,7 +15383,7 @@
               <a:buNone/>
             </a:pPr>
             <a:r>
-              <a:rPr lang="en-US" sz="1400" b="1" dirty="0">
+              <a:rPr lang="en-US" sz="1700" b="1" dirty="0">
                 <a:solidFill>
                   <a:srgbClr val="FFFFFF"/>
                 </a:solidFill>
@@ -15253,24 +15391,22 @@
                 <a:ea typeface="Microsoft JhengHei" pitchFamily="34" charset="-122"/>
                 <a:cs typeface="Microsoft JhengHei" pitchFamily="34" charset="-120"/>
               </a:rPr>
-              <a:t>Cowork 練習手冊</a:t>
-            </a:r>
-            <a:endParaRPr lang="en-US" sz="1400" dirty="0"/>
-          </a:p>
-        </p:txBody>
-      </p:sp>
-      <p:sp>
-        <p:nvSpPr>
-          <p:cNvPr id="7" name="Text 4">
-            <a:hlinkClick r:id="rId3" tooltip=""/>
-          </p:cNvPr>
-          <p:cNvSpPr/>
-          <p:nvPr/>
-        </p:nvSpPr>
-        <p:spPr>
-          <a:xfrm>
-            <a:off x="1417320" y="3419856"/>
-            <a:ext cx="7772400" cy="320040"/>
+              <a:t>行動前審核</a:t>
+            </a:r>
+            <a:endParaRPr lang="en-US" sz="1700" dirty="0"/>
+          </a:p>
+        </p:txBody>
+      </p:sp>
+      <p:sp>
+        <p:nvSpPr>
+          <p:cNvPr id="8" name="Text 5"/>
+          <p:cNvSpPr/>
+          <p:nvPr/>
+        </p:nvSpPr>
+        <p:spPr>
+          <a:xfrm>
+            <a:off x="1691640" y="2203704"/>
+            <a:ext cx="9966960" cy="658368"/>
           </a:xfrm>
           <a:prstGeom prst="rect">
             <a:avLst/>
@@ -15283,33 +15419,196 @@
           <a:lstStyle/>
           <a:p>
             <a:pPr indent="0" marL="0">
-              <a:buNone/>
-            </a:pPr>
-            <a:r>
-              <a:rPr lang="en-US" sz="1300" u="sng" dirty="0">
-                <a:solidFill>
-                  <a:srgbClr val="9FE9FF"/>
-                </a:solidFill>
-                <a:latin typeface="Microsoft JhengHei" pitchFamily="34" charset="0"/>
-                <a:ea typeface="Microsoft JhengHei" pitchFamily="34" charset="-122"/>
-                <a:cs typeface="Microsoft JhengHei" pitchFamily="34" charset="-120"/>
-                <a:hlinkClick r:id="rId3" invalidUrl="" action="" tgtFrame="" tooltip="" history="1" highlightClick="0" endSnd="0">
-                  <a:extLst>
-                    <a:ext uri="{A12FA001-AC4F-418D-AE19-62706E023703}">
-                      <ahyp:hlinkClr xmlns:ahyp="http://schemas.microsoft.com/office/drawing/2018/hyperlinkcolor" val="tx"/>
-                    </a:ext>
-                  </a:extLst>
-                </a:hlinkClick>
-              </a:rPr>
-              <a:t>andyhung11.github.io/Copilot-in-1mins/CoworkPlaybook/</a:t>
+              <a:lnSpc>
+                <a:spcPct val="118000"/>
+              </a:lnSpc>
+              <a:buNone/>
+            </a:pPr>
+            <a:r>
+              <a:rPr lang="en-US" sz="1300" dirty="0">
+                <a:solidFill>
+                  <a:srgbClr val="C7CAEC"/>
+                </a:solidFill>
+                <a:latin typeface="Microsoft JhengHei" pitchFamily="34" charset="0"/>
+                <a:ea typeface="Microsoft JhengHei" pitchFamily="34" charset="-122"/>
+                <a:cs typeface="Microsoft JhengHei" pitchFamily="34" charset="-120"/>
+              </a:rPr>
+              <a:t>中高風險動作會顯示 RISK-LEVEL；寄信、發 Teams、建立會議等動作先攤開可編輯預覽，核准後才送出。</a:t>
             </a:r>
             <a:endParaRPr lang="en-US" sz="1300" dirty="0"/>
           </a:p>
         </p:txBody>
+      </p:sp>
+      <p:sp>
+        <p:nvSpPr>
+          <p:cNvPr id="9" name="Shape 6"/>
+          <p:cNvSpPr/>
+          <p:nvPr/>
+        </p:nvSpPr>
+        <p:spPr>
+          <a:xfrm>
+            <a:off x="640080" y="3044952"/>
+            <a:ext cx="777240" cy="777240"/>
+          </a:xfrm>
+          <a:prstGeom prst="roundRect">
+            <a:avLst>
+              <a:gd name="adj" fmla="val 18824"/>
+            </a:avLst>
+          </a:prstGeom>
+          <a:solidFill>
+            <a:srgbClr val="FFFFFF">
+              <a:alpha val="14000"/>
+            </a:srgbClr>
+          </a:solidFill>
+          <a:ln w="12700">
+            <a:solidFill>
+              <a:srgbClr val="22D3EE">
+                <a:alpha val="60000"/>
+              </a:srgbClr>
+            </a:solidFill>
+            <a:prstDash val="solid"/>
+          </a:ln>
+        </p:spPr>
       </p:sp>
       <p:pic>
         <p:nvPicPr>
-          <p:cNvPr id="8" name="Image 1" descr="preencoded.png">    </p:cNvPr>
+          <p:cNvPr id="10" name="Image 1" descr="preencoded.png">    </p:cNvPr>
+          <p:cNvPicPr>
+            <a:picLocks noChangeAspect="1"/>
+          </p:cNvPicPr>
+          <p:nvPr/>
+        </p:nvPicPr>
+        <p:blipFill>
+          <a:blip r:embed="rId3"/>
+          <a:stretch>
+            <a:fillRect/>
+          </a:stretch>
+        </p:blipFill>
+        <p:spPr>
+          <a:xfrm>
+            <a:off x="804672" y="3209544"/>
+            <a:ext cx="448056" cy="448056"/>
+          </a:xfrm>
+          <a:prstGeom prst="rect">
+            <a:avLst/>
+          </a:prstGeom>
+        </p:spPr>
+      </p:pic>
+      <p:sp>
+        <p:nvSpPr>
+          <p:cNvPr id="11" name="Text 7"/>
+          <p:cNvSpPr/>
+          <p:nvPr/>
+        </p:nvSpPr>
+        <p:spPr>
+          <a:xfrm>
+            <a:off x="1691640" y="3026664"/>
+            <a:ext cx="6858000" cy="347472"/>
+          </a:xfrm>
+          <a:prstGeom prst="rect">
+            <a:avLst/>
+          </a:prstGeom>
+          <a:noFill/>
+          <a:ln/>
+        </p:spPr>
+        <p:txBody>
+          <a:bodyPr wrap="square" rtlCol="0" anchor="ctr"/>
+          <a:lstStyle/>
+          <a:p>
+            <a:pPr indent="0" marL="0">
+              <a:buNone/>
+            </a:pPr>
+            <a:r>
+              <a:rPr lang="en-US" sz="1700" b="1" dirty="0">
+                <a:solidFill>
+                  <a:srgbClr val="FFFFFF"/>
+                </a:solidFill>
+                <a:latin typeface="Microsoft JhengHei" pitchFamily="34" charset="0"/>
+                <a:ea typeface="Microsoft JhengHei" pitchFamily="34" charset="-122"/>
+                <a:cs typeface="Microsoft JhengHei" pitchFamily="34" charset="-120"/>
+              </a:rPr>
+              <a:t>控制範圍清楚</a:t>
+            </a:r>
+            <a:endParaRPr lang="en-US" sz="1700" dirty="0"/>
+          </a:p>
+        </p:txBody>
+      </p:sp>
+      <p:sp>
+        <p:nvSpPr>
+          <p:cNvPr id="12" name="Text 8"/>
+          <p:cNvSpPr/>
+          <p:nvPr/>
+        </p:nvSpPr>
+        <p:spPr>
+          <a:xfrm>
+            <a:off x="1691640" y="3374136"/>
+            <a:ext cx="9966960" cy="658368"/>
+          </a:xfrm>
+          <a:prstGeom prst="rect">
+            <a:avLst/>
+          </a:prstGeom>
+          <a:noFill/>
+          <a:ln/>
+        </p:spPr>
+        <p:txBody>
+          <a:bodyPr wrap="square" rtlCol="0" anchor="ctr"/>
+          <a:lstStyle/>
+          <a:p>
+            <a:pPr indent="0" marL="0">
+              <a:lnSpc>
+                <a:spcPct val="118000"/>
+              </a:lnSpc>
+              <a:buNone/>
+            </a:pPr>
+            <a:r>
+              <a:rPr lang="en-US" sz="1300" dirty="0">
+                <a:solidFill>
+                  <a:srgbClr val="C7CAEC"/>
+                </a:solidFill>
+                <a:latin typeface="Microsoft JhengHei" pitchFamily="34" charset="0"/>
+                <a:ea typeface="Microsoft JhengHei" pitchFamily="34" charset="-122"/>
+                <a:cs typeface="Microsoft JhengHei" pitchFamily="34" charset="-120"/>
+              </a:rPr>
+              <a:t>don’t ask again 可限定 per-recipient、per-domain 或 always；任務可軟／硬暫停、恢復或取消。</a:t>
+            </a:r>
+            <a:endParaRPr lang="en-US" sz="1300" dirty="0"/>
+          </a:p>
+        </p:txBody>
+      </p:sp>
+      <p:sp>
+        <p:nvSpPr>
+          <p:cNvPr id="13" name="Shape 9"/>
+          <p:cNvSpPr/>
+          <p:nvPr/>
+        </p:nvSpPr>
+        <p:spPr>
+          <a:xfrm>
+            <a:off x="640080" y="4215384"/>
+            <a:ext cx="777240" cy="777240"/>
+          </a:xfrm>
+          <a:prstGeom prst="roundRect">
+            <a:avLst>
+              <a:gd name="adj" fmla="val 18824"/>
+            </a:avLst>
+          </a:prstGeom>
+          <a:solidFill>
+            <a:srgbClr val="FFFFFF">
+              <a:alpha val="14000"/>
+            </a:srgbClr>
+          </a:solidFill>
+          <a:ln w="12700">
+            <a:solidFill>
+              <a:srgbClr val="22D3EE">
+                <a:alpha val="60000"/>
+              </a:srgbClr>
+            </a:solidFill>
+            <a:prstDash val="solid"/>
+          </a:ln>
+        </p:spPr>
+      </p:sp>
+      <p:pic>
+        <p:nvPicPr>
+          <p:cNvPr id="14" name="Image 2" descr="preencoded.png">    </p:cNvPr>
           <p:cNvPicPr>
             <a:picLocks noChangeAspect="1"/>
           </p:cNvPicPr>
@@ -15323,8 +15622,8 @@
         </p:blipFill>
         <p:spPr>
           <a:xfrm>
-            <a:off x="640080" y="4315968"/>
-            <a:ext cx="237744" cy="237744"/>
+            <a:off x="804672" y="4379976"/>
+            <a:ext cx="448056" cy="448056"/>
           </a:xfrm>
           <a:prstGeom prst="rect">
             <a:avLst/>
@@ -15333,14 +15632,14 @@
       </p:pic>
       <p:sp>
         <p:nvSpPr>
-          <p:cNvPr id="9" name="Text 5"/>
-          <p:cNvSpPr/>
-          <p:nvPr/>
-        </p:nvSpPr>
-        <p:spPr>
-          <a:xfrm>
-            <a:off x="1005840" y="4261104"/>
-            <a:ext cx="9144000" cy="365760"/>
+          <p:cNvPr id="15" name="Text 10"/>
+          <p:cNvSpPr/>
+          <p:nvPr/>
+        </p:nvSpPr>
+        <p:spPr>
+          <a:xfrm>
+            <a:off x="1691640" y="4197096"/>
+            <a:ext cx="6858000" cy="347472"/>
           </a:xfrm>
           <a:prstGeom prst="rect">
             <a:avLst/>
@@ -15356,23 +15655,96 @@
               <a:buNone/>
             </a:pPr>
             <a:r>
-              <a:rPr lang="en-US" sz="1400" dirty="0">
-                <a:solidFill>
-                  <a:srgbClr val="E3E5F7"/>
-                </a:solidFill>
-                <a:latin typeface="Microsoft JhengHei" pitchFamily="34" charset="0"/>
-                <a:ea typeface="Microsoft JhengHei" pitchFamily="34" charset="-122"/>
-                <a:cs typeface="Microsoft JhengHei" pitchFamily="34" charset="-120"/>
-              </a:rPr>
-              <a:t>挑一個最貼近你工作的情境開始</a:t>
-            </a:r>
-            <a:endParaRPr lang="en-US" sz="1400" dirty="0"/>
-          </a:p>
-        </p:txBody>
+              <a:rPr lang="en-US" sz="1700" b="1" dirty="0">
+                <a:solidFill>
+                  <a:srgbClr val="FFFFFF"/>
+                </a:solidFill>
+                <a:latin typeface="Microsoft JhengHei" pitchFamily="34" charset="0"/>
+                <a:ea typeface="Microsoft JhengHei" pitchFamily="34" charset="-122"/>
+                <a:cs typeface="Microsoft JhengHei" pitchFamily="34" charset="-120"/>
+              </a:rPr>
+              <a:t>自動化任務也有把關</a:t>
+            </a:r>
+            <a:endParaRPr lang="en-US" sz="1700" dirty="0"/>
+          </a:p>
+        </p:txBody>
+      </p:sp>
+      <p:sp>
+        <p:nvSpPr>
+          <p:cNvPr id="16" name="Text 11"/>
+          <p:cNvSpPr/>
+          <p:nvPr/>
+        </p:nvSpPr>
+        <p:spPr>
+          <a:xfrm>
+            <a:off x="1691640" y="4544568"/>
+            <a:ext cx="9966960" cy="658368"/>
+          </a:xfrm>
+          <a:prstGeom prst="rect">
+            <a:avLst/>
+          </a:prstGeom>
+          <a:noFill/>
+          <a:ln/>
+        </p:spPr>
+        <p:txBody>
+          <a:bodyPr wrap="square" rtlCol="0" anchor="ctr"/>
+          <a:lstStyle/>
+          <a:p>
+            <a:pPr indent="0" marL="0">
+              <a:lnSpc>
+                <a:spcPct val="118000"/>
+              </a:lnSpc>
+              <a:buNone/>
+            </a:pPr>
+            <a:r>
+              <a:rPr lang="en-US" sz="1300" dirty="0">
+                <a:solidFill>
+                  <a:srgbClr val="C7CAEC"/>
+                </a:solidFill>
+                <a:latin typeface="Microsoft JhengHei" pitchFamily="34" charset="0"/>
+                <a:ea typeface="Microsoft JhengHei" pitchFamily="34" charset="-122"/>
+                <a:cs typeface="Microsoft JhengHei" pitchFamily="34" charset="-120"/>
+              </a:rPr>
+              <a:t>排程提示與事件驅動任務有執行頻率限制與防迴圈保護；一律以建立者權限執行，且與其他 Cowork 活動一同記錄在統一稽核日誌，套用 Microsoft Purview 政策。</a:t>
+            </a:r>
+            <a:endParaRPr lang="en-US" sz="1300" dirty="0"/>
+          </a:p>
+        </p:txBody>
+      </p:sp>
+      <p:sp>
+        <p:nvSpPr>
+          <p:cNvPr id="17" name="Shape 12"/>
+          <p:cNvSpPr/>
+          <p:nvPr/>
+        </p:nvSpPr>
+        <p:spPr>
+          <a:xfrm>
+            <a:off x="640080" y="5385816"/>
+            <a:ext cx="777240" cy="777240"/>
+          </a:xfrm>
+          <a:prstGeom prst="roundRect">
+            <a:avLst>
+              <a:gd name="adj" fmla="val 18824"/>
+            </a:avLst>
+          </a:prstGeom>
+          <a:solidFill>
+            <a:srgbClr val="FFFFFF">
+              <a:alpha val="14000"/>
+            </a:srgbClr>
+          </a:solidFill>
+          <a:ln w="12700">
+            <a:solidFill>
+              <a:srgbClr val="22D3EE">
+                <a:alpha val="60000"/>
+              </a:srgbClr>
+            </a:solidFill>
+            <a:prstDash val="solid"/>
+          </a:ln>
+        </p:spPr>
       </p:sp>
       <p:pic>
         <p:nvPicPr>
-          <p:cNvPr id="10" name="Image 2" descr="preencoded.png">    </p:cNvPr>
+          <p:cNvPr id="18" name="Image 3" descr="preencoded.png">    </p:cNvPr>
           <p:cNvPicPr>
             <a:picLocks noChangeAspect="1"/>
           </p:cNvPicPr>
@@ -15386,8 +15758,8 @@
         </p:blipFill>
         <p:spPr>
           <a:xfrm>
-            <a:off x="640080" y="4791456"/>
-            <a:ext cx="237744" cy="237744"/>
+            <a:off x="804672" y="5550408"/>
+            <a:ext cx="448056" cy="448056"/>
           </a:xfrm>
           <a:prstGeom prst="rect">
             <a:avLst/>
@@ -15396,14 +15768,14 @@
       </p:pic>
       <p:sp>
         <p:nvSpPr>
-          <p:cNvPr id="11" name="Text 6"/>
-          <p:cNvSpPr/>
-          <p:nvPr/>
-        </p:nvSpPr>
-        <p:spPr>
-          <a:xfrm>
-            <a:off x="1005840" y="4736592"/>
-            <a:ext cx="9144000" cy="365760"/>
+          <p:cNvPr id="19" name="Text 13"/>
+          <p:cNvSpPr/>
+          <p:nvPr/>
+        </p:nvSpPr>
+        <p:spPr>
+          <a:xfrm>
+            <a:off x="1691640" y="5367528"/>
+            <a:ext cx="6858000" cy="347472"/>
           </a:xfrm>
           <a:prstGeom prst="rect">
             <a:avLst/>
@@ -15419,54 +15791,30 @@
               <a:buNone/>
             </a:pPr>
             <a:r>
-              <a:rPr lang="en-US" sz="1400" dirty="0">
-                <a:solidFill>
-                  <a:srgbClr val="E3E5F7"/>
-                </a:solidFill>
-                <a:latin typeface="Microsoft JhengHei" pitchFamily="34" charset="0"/>
-                <a:ea typeface="Microsoft JhengHei" pitchFamily="34" charset="-122"/>
-                <a:cs typeface="Microsoft JhengHei" pitchFamily="34" charset="-120"/>
-              </a:rPr>
-              <a:t>自訂技能放 OneDrive /Documents/Cowork/skills/ 的 SKILL.md（最多 50 個、每個 1MB）</a:t>
-            </a:r>
-            <a:endParaRPr lang="en-US" sz="1400" dirty="0"/>
-          </a:p>
-        </p:txBody>
-      </p:sp>
-      <p:pic>
-        <p:nvPicPr>
-          <p:cNvPr id="12" name="Image 3" descr="preencoded.png">    </p:cNvPr>
-          <p:cNvPicPr>
-            <a:picLocks noChangeAspect="1"/>
-          </p:cNvPicPr>
-          <p:nvPr/>
-        </p:nvPicPr>
-        <p:blipFill>
-          <a:blip r:embed="rId6"/>
-          <a:stretch>
-            <a:fillRect/>
-          </a:stretch>
-        </p:blipFill>
-        <p:spPr>
-          <a:xfrm>
-            <a:off x="640080" y="5266944"/>
-            <a:ext cx="237744" cy="237744"/>
-          </a:xfrm>
-          <a:prstGeom prst="rect">
-            <a:avLst/>
-          </a:prstGeom>
-        </p:spPr>
-      </p:pic>
-      <p:sp>
-        <p:nvSpPr>
-          <p:cNvPr id="13" name="Text 7"/>
-          <p:cNvSpPr/>
-          <p:nvPr/>
-        </p:nvSpPr>
-        <p:spPr>
-          <a:xfrm>
-            <a:off x="1005840" y="5212080"/>
-            <a:ext cx="9144000" cy="365760"/>
+              <a:rPr lang="en-US" sz="1700" b="1" dirty="0">
+                <a:solidFill>
+                  <a:srgbClr val="FFFFFF"/>
+                </a:solidFill>
+                <a:latin typeface="Microsoft JhengHei" pitchFamily="34" charset="0"/>
+                <a:ea typeface="Microsoft JhengHei" pitchFamily="34" charset="-122"/>
+                <a:cs typeface="Microsoft JhengHei" pitchFamily="34" charset="-120"/>
+              </a:rPr>
+              <a:t>限制也要知道</a:t>
+            </a:r>
+            <a:endParaRPr lang="en-US" sz="1700" dirty="0"/>
+          </a:p>
+        </p:txBody>
+      </p:sp>
+      <p:sp>
+        <p:nvSpPr>
+          <p:cNvPr id="20" name="Text 14"/>
+          <p:cNvSpPr/>
+          <p:nvPr/>
+        </p:nvSpPr>
+        <p:spPr>
+          <a:xfrm>
+            <a:off x="1691640" y="5715000"/>
+            <a:ext cx="9966960" cy="658368"/>
           </a:xfrm>
           <a:prstGeom prst="rect">
             <a:avLst/>
@@ -15479,83 +15827,101 @@
           <a:lstStyle/>
           <a:p>
             <a:pPr indent="0" marL="0">
-              <a:buNone/>
-            </a:pPr>
-            <a:r>
-              <a:rPr lang="en-US" sz="1400" dirty="0">
-                <a:solidFill>
-                  <a:srgbClr val="E3E5F7"/>
-                </a:solidFill>
-                <a:latin typeface="Microsoft JhengHei" pitchFamily="34" charset="0"/>
-                <a:ea typeface="Microsoft JhengHei" pitchFamily="34" charset="-122"/>
-                <a:cs typeface="Microsoft JhengHei" pitchFamily="34" charset="-120"/>
-              </a:rPr>
-              <a:t>模型選擇器：Auto（預設）、GPT 5.5 Frontier、GPT 5.6 Sol／Terra、Opus 5、Sonnet 5、Fable 5（預覽・預設關閉）</a:t>
-            </a:r>
-            <a:endParaRPr lang="en-US" sz="1400" dirty="0"/>
-          </a:p>
-        </p:txBody>
-      </p:sp>
-      <p:pic>
-        <p:nvPicPr>
-          <p:cNvPr id="14" name="Image 4" descr="preencoded.png">    </p:cNvPr>
-          <p:cNvPicPr>
-            <a:picLocks noChangeAspect="1"/>
-          </p:cNvPicPr>
-          <p:nvPr/>
-        </p:nvPicPr>
-        <p:blipFill>
-          <a:blip r:embed="rId7"/>
-          <a:stretch>
-            <a:fillRect/>
-          </a:stretch>
-        </p:blipFill>
-        <p:spPr>
-          <a:xfrm>
-            <a:off x="640080" y="5742432"/>
-            <a:ext cx="237744" cy="237744"/>
-          </a:xfrm>
-          <a:prstGeom prst="rect">
-            <a:avLst/>
-          </a:prstGeom>
-        </p:spPr>
-      </p:pic>
-      <p:sp>
-        <p:nvSpPr>
-          <p:cNvPr id="15" name="Text 8"/>
-          <p:cNvSpPr/>
-          <p:nvPr/>
-        </p:nvSpPr>
-        <p:spPr>
-          <a:xfrm>
-            <a:off x="1005840" y="5687568"/>
-            <a:ext cx="9144000" cy="365760"/>
-          </a:xfrm>
-          <a:prstGeom prst="rect">
-            <a:avLst/>
-          </a:prstGeom>
-          <a:noFill/>
-          <a:ln/>
-        </p:spPr>
-        <p:txBody>
-          <a:bodyPr wrap="square" rtlCol="0" anchor="ctr"/>
-          <a:lstStyle/>
-          <a:p>
-            <a:pPr indent="0" marL="0">
-              <a:buNone/>
-            </a:pPr>
-            <a:r>
-              <a:rPr lang="en-US" sz="1400" dirty="0">
-                <a:solidFill>
-                  <a:srgbClr val="E3E5F7"/>
-                </a:solidFill>
-                <a:latin typeface="Microsoft JhengHei" pitchFamily="34" charset="0"/>
-                <a:ea typeface="Microsoft JhengHei" pitchFamily="34" charset="-122"/>
-                <a:cs typeface="Microsoft JhengHei" pitchFamily="34" charset="-120"/>
-              </a:rPr>
-              <a:t>想要自動觸發？到「Automations」頁設定排程提示（上限 5 個）或事件觸發任務（收信／被 @提及）</a:t>
-            </a:r>
-            <a:endParaRPr lang="en-US" sz="1400" dirty="0"/>
+              <a:lnSpc>
+                <a:spcPct val="118000"/>
+              </a:lnSpc>
+              <a:buNone/>
+            </a:pPr>
+            <a:r>
+              <a:rPr lang="en-US" sz="1300" dirty="0">
+                <a:solidFill>
+                  <a:srgbClr val="C7CAEC"/>
+                </a:solidFill>
+                <a:latin typeface="Microsoft JhengHei" pitchFamily="34" charset="0"/>
+                <a:ea typeface="Microsoft JhengHei" pitchFamily="34" charset="-122"/>
+                <a:cs typeface="Microsoft JhengHei" pitchFamily="34" charset="-120"/>
+              </a:rPr>
+              <a:t>不能存取本機檔案、刪除 OneDrive/SharePoint 檔案或讀取加密檔；附件 &lt;200MB；自訂技能與第三方 plugin 未經 Microsoft 驗證，需自行審閱。官方明列不適用於「免人工審查即需保證正確」的用途。</a:t>
+            </a:r>
+            <a:endParaRPr lang="en-US" sz="1300" dirty="0"/>
+          </a:p>
+        </p:txBody>
+      </p:sp>
+      <p:sp>
+        <p:nvSpPr>
+          <p:cNvPr id="21" name="Text 15"/>
+          <p:cNvSpPr/>
+          <p:nvPr/>
+        </p:nvSpPr>
+        <p:spPr>
+          <a:xfrm>
+            <a:off x="640080" y="6473952"/>
+            <a:ext cx="5486400" cy="274320"/>
+          </a:xfrm>
+          <a:prstGeom prst="rect">
+            <a:avLst/>
+          </a:prstGeom>
+          <a:noFill/>
+          <a:ln/>
+        </p:spPr>
+        <p:txBody>
+          <a:bodyPr wrap="square" rtlCol="0" anchor="ctr"/>
+          <a:lstStyle/>
+          <a:p>
+            <a:pPr algn="l" indent="0" marL="0">
+              <a:buNone/>
+            </a:pPr>
+            <a:r>
+              <a:rPr lang="en-US" sz="900" dirty="0">
+                <a:solidFill>
+                  <a:srgbClr val="8A8FB5"/>
+                </a:solidFill>
+                <a:latin typeface="Microsoft JhengHei" pitchFamily="34" charset="0"/>
+                <a:ea typeface="Microsoft JhengHei" pitchFamily="34" charset="-122"/>
+                <a:cs typeface="Microsoft JhengHei" pitchFamily="34" charset="-120"/>
+              </a:rPr>
+              <a:t>Microsoft 365 Copilot Cowork</a:t>
+            </a:r>
+            <a:endParaRPr lang="en-US" sz="900" dirty="0"/>
+          </a:p>
+        </p:txBody>
+      </p:sp>
+      <p:sp>
+        <p:nvSpPr>
+          <p:cNvPr id="22" name="Text 16"/>
+          <p:cNvSpPr/>
+          <p:nvPr/>
+        </p:nvSpPr>
+        <p:spPr>
+          <a:xfrm>
+            <a:off x="11002975" y="6473952"/>
+            <a:ext cx="548640" cy="274320"/>
+          </a:xfrm>
+          <a:prstGeom prst="rect">
+            <a:avLst/>
+          </a:prstGeom>
+          <a:noFill/>
+          <a:ln/>
+        </p:spPr>
+        <p:txBody>
+          <a:bodyPr wrap="square" rtlCol="0" anchor="ctr"/>
+          <a:lstStyle/>
+          <a:p>
+            <a:pPr algn="r" indent="0" marL="0">
+              <a:buNone/>
+            </a:pPr>
+            <a:r>
+              <a:rPr lang="en-US" sz="900" dirty="0">
+                <a:solidFill>
+                  <a:srgbClr val="8A8FB5"/>
+                </a:solidFill>
+                <a:latin typeface="Microsoft JhengHei" pitchFamily="34" charset="0"/>
+                <a:ea typeface="Microsoft JhengHei" pitchFamily="34" charset="-122"/>
+                <a:cs typeface="Microsoft JhengHei" pitchFamily="34" charset="-120"/>
+              </a:rPr>
+              <a:t>21</a:t>
+            </a:r>
+            <a:endParaRPr lang="en-US" sz="900" dirty="0"/>
           </a:p>
         </p:txBody>
       </p:sp>
@@ -15606,6 +15972,517 @@
         </p:nvSpPr>
         <p:spPr>
           <a:xfrm>
+            <a:off x="640080" y="1371600"/>
+            <a:ext cx="10058400" cy="822960"/>
+          </a:xfrm>
+          <a:prstGeom prst="rect">
+            <a:avLst/>
+          </a:prstGeom>
+          <a:noFill/>
+          <a:ln/>
+        </p:spPr>
+        <p:txBody>
+          <a:bodyPr wrap="square" rtlCol="0" anchor="ctr"/>
+          <a:lstStyle/>
+          <a:p>
+            <a:pPr indent="0" marL="0">
+              <a:buNone/>
+            </a:pPr>
+            <a:r>
+              <a:rPr lang="en-US" sz="4000" b="1" dirty="0">
+                <a:solidFill>
+                  <a:srgbClr val="FFFFFF"/>
+                </a:solidFill>
+                <a:latin typeface="Microsoft JhengHei" pitchFamily="34" charset="0"/>
+                <a:ea typeface="Microsoft JhengHei" pitchFamily="34" charset="-122"/>
+                <a:cs typeface="Microsoft JhengHei" pitchFamily="34" charset="-120"/>
+              </a:rPr>
+              <a:t>現在就開始練習</a:t>
+            </a:r>
+            <a:endParaRPr lang="en-US" sz="4000" dirty="0"/>
+          </a:p>
+        </p:txBody>
+      </p:sp>
+      <p:sp>
+        <p:nvSpPr>
+          <p:cNvPr id="3" name="Text 1"/>
+          <p:cNvSpPr/>
+          <p:nvPr/>
+        </p:nvSpPr>
+        <p:spPr>
+          <a:xfrm>
+            <a:off x="640080" y="2377440"/>
+            <a:ext cx="10058400" cy="548640"/>
+          </a:xfrm>
+          <a:prstGeom prst="rect">
+            <a:avLst/>
+          </a:prstGeom>
+          <a:noFill/>
+          <a:ln/>
+        </p:spPr>
+        <p:txBody>
+          <a:bodyPr wrap="square" rtlCol="0" anchor="ctr"/>
+          <a:lstStyle/>
+          <a:p>
+            <a:pPr indent="0" marL="0">
+              <a:buNone/>
+            </a:pPr>
+            <a:r>
+              <a:rPr lang="en-US" sz="1500" dirty="0">
+                <a:solidFill>
+                  <a:srgbClr val="C7CAEC"/>
+                </a:solidFill>
+                <a:latin typeface="Microsoft JhengHei" pitchFamily="34" charset="0"/>
+                <a:ea typeface="Microsoft JhengHei" pitchFamily="34" charset="-122"/>
+                <a:cs typeface="Microsoft JhengHei" pitchFamily="34" charset="-120"/>
+              </a:rPr>
+              <a:t>開始前請確認：每位使用者一張 M365 Copilot 授權、管理員已啟用用量計費（Copilot Credits，未啟用則無法存取）、租戶位於 Anthropic 支援地區；可在 Web/桌面/行動/Outlook/Teams 使用（本機瀏覽器工作僅限網頁版＋Edge 150 以上，且預設停用需管理員開啟）。</a:t>
+            </a:r>
+            <a:endParaRPr lang="en-US" sz="1500" dirty="0"/>
+          </a:p>
+        </p:txBody>
+      </p:sp>
+      <p:sp>
+        <p:nvSpPr>
+          <p:cNvPr id="4" name="Shape 2"/>
+          <p:cNvSpPr/>
+          <p:nvPr/>
+        </p:nvSpPr>
+        <p:spPr>
+          <a:xfrm>
+            <a:off x="640080" y="3017520"/>
+            <a:ext cx="8686800" cy="868680"/>
+          </a:xfrm>
+          <a:prstGeom prst="roundRect">
+            <a:avLst>
+              <a:gd name="adj" fmla="val 12632"/>
+            </a:avLst>
+          </a:prstGeom>
+          <a:solidFill>
+            <a:srgbClr val="FFFFFF">
+              <a:alpha val="10000"/>
+            </a:srgbClr>
+          </a:solidFill>
+          <a:ln w="12700">
+            <a:solidFill>
+              <a:srgbClr val="FFFFFF">
+                <a:alpha val="35000"/>
+              </a:srgbClr>
+            </a:solidFill>
+            <a:prstDash val="solid"/>
+          </a:ln>
+        </p:spPr>
+      </p:sp>
+      <p:pic>
+        <p:nvPicPr>
+          <p:cNvPr id="5" name="Image 0" descr="preencoded.png">    </p:cNvPr>
+          <p:cNvPicPr>
+            <a:picLocks noChangeAspect="1"/>
+          </p:cNvPicPr>
+          <p:nvPr/>
+        </p:nvPicPr>
+        <p:blipFill>
+          <a:blip r:embed="rId2"/>
+          <a:stretch>
+            <a:fillRect/>
+          </a:stretch>
+        </p:blipFill>
+        <p:spPr>
+          <a:xfrm>
+            <a:off x="914400" y="3291840"/>
+            <a:ext cx="329184" cy="329184"/>
+          </a:xfrm>
+          <a:prstGeom prst="rect">
+            <a:avLst/>
+          </a:prstGeom>
+        </p:spPr>
+      </p:pic>
+      <p:sp>
+        <p:nvSpPr>
+          <p:cNvPr id="6" name="Text 3"/>
+          <p:cNvSpPr/>
+          <p:nvPr/>
+        </p:nvSpPr>
+        <p:spPr>
+          <a:xfrm>
+            <a:off x="1417320" y="3127248"/>
+            <a:ext cx="7315200" cy="320040"/>
+          </a:xfrm>
+          <a:prstGeom prst="rect">
+            <a:avLst/>
+          </a:prstGeom>
+          <a:noFill/>
+          <a:ln/>
+        </p:spPr>
+        <p:txBody>
+          <a:bodyPr wrap="square" rtlCol="0" anchor="ctr"/>
+          <a:lstStyle/>
+          <a:p>
+            <a:pPr indent="0" marL="0">
+              <a:buNone/>
+            </a:pPr>
+            <a:r>
+              <a:rPr lang="en-US" sz="1400" b="1" dirty="0">
+                <a:solidFill>
+                  <a:srgbClr val="FFFFFF"/>
+                </a:solidFill>
+                <a:latin typeface="Microsoft JhengHei" pitchFamily="34" charset="0"/>
+                <a:ea typeface="Microsoft JhengHei" pitchFamily="34" charset="-122"/>
+                <a:cs typeface="Microsoft JhengHei" pitchFamily="34" charset="-120"/>
+              </a:rPr>
+              <a:t>Cowork 練習手冊</a:t>
+            </a:r>
+            <a:endParaRPr lang="en-US" sz="1400" dirty="0"/>
+          </a:p>
+        </p:txBody>
+      </p:sp>
+      <p:sp>
+        <p:nvSpPr>
+          <p:cNvPr id="7" name="Text 4">
+            <a:hlinkClick r:id="rId3" tooltip=""/>
+          </p:cNvPr>
+          <p:cNvSpPr/>
+          <p:nvPr/>
+        </p:nvSpPr>
+        <p:spPr>
+          <a:xfrm>
+            <a:off x="1417320" y="3419856"/>
+            <a:ext cx="7772400" cy="320040"/>
+          </a:xfrm>
+          <a:prstGeom prst="rect">
+            <a:avLst/>
+          </a:prstGeom>
+          <a:noFill/>
+          <a:ln/>
+        </p:spPr>
+        <p:txBody>
+          <a:bodyPr wrap="square" rtlCol="0" anchor="ctr"/>
+          <a:lstStyle/>
+          <a:p>
+            <a:pPr indent="0" marL="0">
+              <a:buNone/>
+            </a:pPr>
+            <a:r>
+              <a:rPr lang="en-US" sz="1300" u="sng" dirty="0">
+                <a:solidFill>
+                  <a:srgbClr val="9FE9FF"/>
+                </a:solidFill>
+                <a:latin typeface="Microsoft JhengHei" pitchFamily="34" charset="0"/>
+                <a:ea typeface="Microsoft JhengHei" pitchFamily="34" charset="-122"/>
+                <a:cs typeface="Microsoft JhengHei" pitchFamily="34" charset="-120"/>
+                <a:hlinkClick r:id="rId3" invalidUrl="" action="" tgtFrame="" tooltip="" history="1" highlightClick="0" endSnd="0">
+                  <a:extLst>
+                    <a:ext uri="{A12FA001-AC4F-418D-AE19-62706E023703}">
+                      <ahyp:hlinkClr xmlns:ahyp="http://schemas.microsoft.com/office/drawing/2018/hyperlinkcolor" val="tx"/>
+                    </a:ext>
+                  </a:extLst>
+                </a:hlinkClick>
+              </a:rPr>
+              <a:t>andyhung11.github.io/Copilot-in-1mins/CoworkPlaybook/</a:t>
+            </a:r>
+            <a:endParaRPr lang="en-US" sz="1300" dirty="0"/>
+          </a:p>
+        </p:txBody>
+      </p:sp>
+      <p:pic>
+        <p:nvPicPr>
+          <p:cNvPr id="8" name="Image 1" descr="preencoded.png">    </p:cNvPr>
+          <p:cNvPicPr>
+            <a:picLocks noChangeAspect="1"/>
+          </p:cNvPicPr>
+          <p:nvPr/>
+        </p:nvPicPr>
+        <p:blipFill>
+          <a:blip r:embed="rId4"/>
+          <a:stretch>
+            <a:fillRect/>
+          </a:stretch>
+        </p:blipFill>
+        <p:spPr>
+          <a:xfrm>
+            <a:off x="640080" y="4315968"/>
+            <a:ext cx="237744" cy="237744"/>
+          </a:xfrm>
+          <a:prstGeom prst="rect">
+            <a:avLst/>
+          </a:prstGeom>
+        </p:spPr>
+      </p:pic>
+      <p:sp>
+        <p:nvSpPr>
+          <p:cNvPr id="9" name="Text 5"/>
+          <p:cNvSpPr/>
+          <p:nvPr/>
+        </p:nvSpPr>
+        <p:spPr>
+          <a:xfrm>
+            <a:off x="1005840" y="4261104"/>
+            <a:ext cx="9144000" cy="365760"/>
+          </a:xfrm>
+          <a:prstGeom prst="rect">
+            <a:avLst/>
+          </a:prstGeom>
+          <a:noFill/>
+          <a:ln/>
+        </p:spPr>
+        <p:txBody>
+          <a:bodyPr wrap="square" rtlCol="0" anchor="ctr"/>
+          <a:lstStyle/>
+          <a:p>
+            <a:pPr indent="0" marL="0">
+              <a:buNone/>
+            </a:pPr>
+            <a:r>
+              <a:rPr lang="en-US" sz="1400" dirty="0">
+                <a:solidFill>
+                  <a:srgbClr val="E3E5F7"/>
+                </a:solidFill>
+                <a:latin typeface="Microsoft JhengHei" pitchFamily="34" charset="0"/>
+                <a:ea typeface="Microsoft JhengHei" pitchFamily="34" charset="-122"/>
+                <a:cs typeface="Microsoft JhengHei" pitchFamily="34" charset="-120"/>
+              </a:rPr>
+              <a:t>挑一個最貼近你工作的情境開始</a:t>
+            </a:r>
+            <a:endParaRPr lang="en-US" sz="1400" dirty="0"/>
+          </a:p>
+        </p:txBody>
+      </p:sp>
+      <p:pic>
+        <p:nvPicPr>
+          <p:cNvPr id="10" name="Image 2" descr="preencoded.png">    </p:cNvPr>
+          <p:cNvPicPr>
+            <a:picLocks noChangeAspect="1"/>
+          </p:cNvPicPr>
+          <p:nvPr/>
+        </p:nvPicPr>
+        <p:blipFill>
+          <a:blip r:embed="rId5"/>
+          <a:stretch>
+            <a:fillRect/>
+          </a:stretch>
+        </p:blipFill>
+        <p:spPr>
+          <a:xfrm>
+            <a:off x="640080" y="4791456"/>
+            <a:ext cx="237744" cy="237744"/>
+          </a:xfrm>
+          <a:prstGeom prst="rect">
+            <a:avLst/>
+          </a:prstGeom>
+        </p:spPr>
+      </p:pic>
+      <p:sp>
+        <p:nvSpPr>
+          <p:cNvPr id="11" name="Text 6"/>
+          <p:cNvSpPr/>
+          <p:nvPr/>
+        </p:nvSpPr>
+        <p:spPr>
+          <a:xfrm>
+            <a:off x="1005840" y="4736592"/>
+            <a:ext cx="9144000" cy="365760"/>
+          </a:xfrm>
+          <a:prstGeom prst="rect">
+            <a:avLst/>
+          </a:prstGeom>
+          <a:noFill/>
+          <a:ln/>
+        </p:spPr>
+        <p:txBody>
+          <a:bodyPr wrap="square" rtlCol="0" anchor="ctr"/>
+          <a:lstStyle/>
+          <a:p>
+            <a:pPr indent="0" marL="0">
+              <a:buNone/>
+            </a:pPr>
+            <a:r>
+              <a:rPr lang="en-US" sz="1400" dirty="0">
+                <a:solidFill>
+                  <a:srgbClr val="E3E5F7"/>
+                </a:solidFill>
+                <a:latin typeface="Microsoft JhengHei" pitchFamily="34" charset="0"/>
+                <a:ea typeface="Microsoft JhengHei" pitchFamily="34" charset="-122"/>
+                <a:cs typeface="Microsoft JhengHei" pitchFamily="34" charset="-120"/>
+              </a:rPr>
+              <a:t>自訂技能放 OneDrive /Documents/Cowork/skills/ 的 SKILL.md（最多 50 個、每個 1MB）</a:t>
+            </a:r>
+            <a:endParaRPr lang="en-US" sz="1400" dirty="0"/>
+          </a:p>
+        </p:txBody>
+      </p:sp>
+      <p:pic>
+        <p:nvPicPr>
+          <p:cNvPr id="12" name="Image 3" descr="preencoded.png">    </p:cNvPr>
+          <p:cNvPicPr>
+            <a:picLocks noChangeAspect="1"/>
+          </p:cNvPicPr>
+          <p:nvPr/>
+        </p:nvPicPr>
+        <p:blipFill>
+          <a:blip r:embed="rId6"/>
+          <a:stretch>
+            <a:fillRect/>
+          </a:stretch>
+        </p:blipFill>
+        <p:spPr>
+          <a:xfrm>
+            <a:off x="640080" y="5266944"/>
+            <a:ext cx="237744" cy="237744"/>
+          </a:xfrm>
+          <a:prstGeom prst="rect">
+            <a:avLst/>
+          </a:prstGeom>
+        </p:spPr>
+      </p:pic>
+      <p:sp>
+        <p:nvSpPr>
+          <p:cNvPr id="13" name="Text 7"/>
+          <p:cNvSpPr/>
+          <p:nvPr/>
+        </p:nvSpPr>
+        <p:spPr>
+          <a:xfrm>
+            <a:off x="1005840" y="5212080"/>
+            <a:ext cx="9144000" cy="365760"/>
+          </a:xfrm>
+          <a:prstGeom prst="rect">
+            <a:avLst/>
+          </a:prstGeom>
+          <a:noFill/>
+          <a:ln/>
+        </p:spPr>
+        <p:txBody>
+          <a:bodyPr wrap="square" rtlCol="0" anchor="ctr"/>
+          <a:lstStyle/>
+          <a:p>
+            <a:pPr indent="0" marL="0">
+              <a:buNone/>
+            </a:pPr>
+            <a:r>
+              <a:rPr lang="en-US" sz="1400" dirty="0">
+                <a:solidFill>
+                  <a:srgbClr val="E3E5F7"/>
+                </a:solidFill>
+                <a:latin typeface="Microsoft JhengHei" pitchFamily="34" charset="0"/>
+                <a:ea typeface="Microsoft JhengHei" pitchFamily="34" charset="-122"/>
+                <a:cs typeface="Microsoft JhengHei" pitchFamily="34" charset="-120"/>
+              </a:rPr>
+              <a:t>模型選擇器：Auto（預設）、GPT 5.5 Frontier、GPT 5.6 Sol／Terra、Opus 5、Sonnet 5、Fable 5（預覽・預設關閉）</a:t>
+            </a:r>
+            <a:endParaRPr lang="en-US" sz="1400" dirty="0"/>
+          </a:p>
+        </p:txBody>
+      </p:sp>
+      <p:pic>
+        <p:nvPicPr>
+          <p:cNvPr id="14" name="Image 4" descr="preencoded.png">    </p:cNvPr>
+          <p:cNvPicPr>
+            <a:picLocks noChangeAspect="1"/>
+          </p:cNvPicPr>
+          <p:nvPr/>
+        </p:nvPicPr>
+        <p:blipFill>
+          <a:blip r:embed="rId7"/>
+          <a:stretch>
+            <a:fillRect/>
+          </a:stretch>
+        </p:blipFill>
+        <p:spPr>
+          <a:xfrm>
+            <a:off x="640080" y="5742432"/>
+            <a:ext cx="237744" cy="237744"/>
+          </a:xfrm>
+          <a:prstGeom prst="rect">
+            <a:avLst/>
+          </a:prstGeom>
+        </p:spPr>
+      </p:pic>
+      <p:sp>
+        <p:nvSpPr>
+          <p:cNvPr id="15" name="Text 8"/>
+          <p:cNvSpPr/>
+          <p:nvPr/>
+        </p:nvSpPr>
+        <p:spPr>
+          <a:xfrm>
+            <a:off x="1005840" y="5687568"/>
+            <a:ext cx="9144000" cy="365760"/>
+          </a:xfrm>
+          <a:prstGeom prst="rect">
+            <a:avLst/>
+          </a:prstGeom>
+          <a:noFill/>
+          <a:ln/>
+        </p:spPr>
+        <p:txBody>
+          <a:bodyPr wrap="square" rtlCol="0" anchor="ctr"/>
+          <a:lstStyle/>
+          <a:p>
+            <a:pPr indent="0" marL="0">
+              <a:buNone/>
+            </a:pPr>
+            <a:r>
+              <a:rPr lang="en-US" sz="1400" dirty="0">
+                <a:solidFill>
+                  <a:srgbClr val="E3E5F7"/>
+                </a:solidFill>
+                <a:latin typeface="Microsoft JhengHei" pitchFamily="34" charset="0"/>
+                <a:ea typeface="Microsoft JhengHei" pitchFamily="34" charset="-122"/>
+                <a:cs typeface="Microsoft JhengHei" pitchFamily="34" charset="-120"/>
+              </a:rPr>
+              <a:t>想要自動觸發？到「Automations」頁設定排程提示（上限 5 個）或事件觸發任務（收信／被 @提及）</a:t>
+            </a:r>
+            <a:endParaRPr lang="en-US" sz="1400" dirty="0"/>
+          </a:p>
+        </p:txBody>
+      </p:sp>
+    </p:spTree>
+  </p:cSld>
+  <p:clrMapOvr>
+    <a:masterClrMapping/>
+  </p:clrMapOvr>
+</p:sld>
+</file>
+
+<file path=ppt/slides/slide24.xml><?xml version="1.0" encoding="utf-8"?>
+<p:sld xmlns:a="http://schemas.openxmlformats.org/drawingml/2006/main" xmlns:r="http://schemas.openxmlformats.org/officeDocument/2006/relationships" xmlns:p="http://schemas.openxmlformats.org/presentationml/2006/main">
+  <p:cSld name="Slide 24">
+    <p:bg>
+      <p:bgPr>
+        <a:blipFill dpi="0" rotWithShape="1">
+          <a:blip r:embed="rId1">
+            <a:lum/>
+          </a:blip>
+          <a:srcRect/>
+          <a:stretch>
+            <a:fillRect/>
+          </a:stretch>
+        </a:blipFill>
+        <a:effectLst/>
+      </p:bgPr>
+    </p:bg>
+    <p:spTree>
+      <p:nvGrpSpPr>
+        <p:cNvPr id="1" name=""/>
+        <p:cNvGrpSpPr/>
+        <p:nvPr/>
+      </p:nvGrpSpPr>
+      <p:grpSpPr>
+        <a:xfrm>
+          <a:off x="0" y="0"/>
+          <a:ext cx="0" cy="0"/>
+          <a:chOff x="0" y="0"/>
+          <a:chExt cx="0" cy="0"/>
+        </a:xfrm>
+      </p:grpSpPr>
+      <p:sp>
+        <p:nvSpPr>
+          <p:cNvPr id="2" name="Text 0"/>
+          <p:cNvSpPr/>
+          <p:nvPr/>
+        </p:nvSpPr>
+        <p:spPr>
+          <a:xfrm>
             <a:off x="640080" y="2377440"/>
             <a:ext cx="10058400" cy="1097280"/>
           </a:xfrm>
@@ -20532,6 +21409,1681 @@
                 <a:ea typeface="Microsoft JhengHei" pitchFamily="34" charset="-122"/>
                 <a:cs typeface="Microsoft JhengHei" pitchFamily="34" charset="-120"/>
               </a:rPr>
+              <a:t>BEFORE YOU START</a:t>
+            </a:r>
+            <a:endParaRPr lang="en-US" sz="1200" dirty="0"/>
+          </a:p>
+        </p:txBody>
+      </p:sp>
+      <p:sp>
+        <p:nvSpPr>
+          <p:cNvPr id="4" name="Text 2"/>
+          <p:cNvSpPr/>
+          <p:nvPr/>
+        </p:nvSpPr>
+        <p:spPr>
+          <a:xfrm>
+            <a:off x="640080" y="786384"/>
+            <a:ext cx="10972800" cy="640080"/>
+          </a:xfrm>
+          <a:prstGeom prst="rect">
+            <a:avLst/>
+          </a:prstGeom>
+          <a:noFill/>
+          <a:ln/>
+        </p:spPr>
+        <p:txBody>
+          <a:bodyPr wrap="square" rtlCol="0" anchor="ctr"/>
+          <a:lstStyle/>
+          <a:p>
+            <a:pPr indent="0" marL="0">
+              <a:buNone/>
+            </a:pPr>
+            <a:r>
+              <a:rPr lang="en-US" sz="3000" b="1" dirty="0">
+                <a:solidFill>
+                  <a:srgbClr val="1E2235"/>
+                </a:solidFill>
+                <a:latin typeface="Microsoft JhengHei" pitchFamily="34" charset="0"/>
+                <a:ea typeface="Microsoft JhengHei" pitchFamily="34" charset="-122"/>
+                <a:cs typeface="Microsoft JhengHei" pitchFamily="34" charset="-120"/>
+              </a:rPr>
+              <a:t>練習環境準備</a:t>
+            </a:r>
+            <a:endParaRPr lang="en-US" sz="3000" dirty="0"/>
+          </a:p>
+        </p:txBody>
+      </p:sp>
+      <p:sp>
+        <p:nvSpPr>
+          <p:cNvPr id="5" name="Text 3"/>
+          <p:cNvSpPr/>
+          <p:nvPr/>
+        </p:nvSpPr>
+        <p:spPr>
+          <a:xfrm>
+            <a:off x="640080" y="1481328"/>
+            <a:ext cx="10972800" cy="329184"/>
+          </a:xfrm>
+          <a:prstGeom prst="rect">
+            <a:avLst/>
+          </a:prstGeom>
+          <a:noFill/>
+          <a:ln/>
+        </p:spPr>
+        <p:txBody>
+          <a:bodyPr wrap="square" rtlCol="0" anchor="ctr"/>
+          <a:lstStyle/>
+          <a:p>
+            <a:pPr indent="0" marL="0">
+              <a:buNone/>
+            </a:pPr>
+            <a:r>
+              <a:rPr lang="en-US" sz="1300" dirty="0">
+                <a:solidFill>
+                  <a:srgbClr val="5B6079"/>
+                </a:solidFill>
+                <a:latin typeface="Microsoft JhengHei" pitchFamily="34" charset="0"/>
+                <a:ea typeface="Microsoft JhengHei" pitchFamily="34" charset="-122"/>
+                <a:cs typeface="Microsoft JhengHei" pitchFamily="34" charset="-120"/>
+              </a:rPr>
+              <a:t>素材下載後拖進對話即可，不需事先放進 OneDrive · 準備時間 約 8 分鐘</a:t>
+            </a:r>
+            <a:endParaRPr lang="en-US" sz="1300" dirty="0"/>
+          </a:p>
+        </p:txBody>
+      </p:sp>
+      <p:sp>
+        <p:nvSpPr>
+          <p:cNvPr id="6" name="Shape 4"/>
+          <p:cNvSpPr/>
+          <p:nvPr/>
+        </p:nvSpPr>
+        <p:spPr>
+          <a:xfrm>
+            <a:off x="640080" y="1874520"/>
+            <a:ext cx="5272888" cy="777240"/>
+          </a:xfrm>
+          <a:prstGeom prst="rect">
+            <a:avLst/>
+          </a:prstGeom>
+          <a:solidFill>
+            <a:srgbClr val="FFFFFF"/>
+          </a:solidFill>
+          <a:ln w="12700">
+            <a:solidFill>
+              <a:srgbClr val="E4E7F2"/>
+            </a:solidFill>
+            <a:prstDash val="solid"/>
+          </a:ln>
+        </p:spPr>
+      </p:sp>
+      <p:sp>
+        <p:nvSpPr>
+          <p:cNvPr id="7" name="Shape 5"/>
+          <p:cNvSpPr/>
+          <p:nvPr/>
+        </p:nvSpPr>
+        <p:spPr>
+          <a:xfrm>
+            <a:off x="640080" y="1874520"/>
+            <a:ext cx="68580" cy="777240"/>
+          </a:xfrm>
+          <a:prstGeom prst="rect">
+            <a:avLst/>
+          </a:prstGeom>
+          <a:solidFill>
+            <a:srgbClr val="6366F1"/>
+          </a:solidFill>
+          <a:ln/>
+        </p:spPr>
+      </p:sp>
+      <p:sp>
+        <p:nvSpPr>
+          <p:cNvPr id="8" name="Text 6"/>
+          <p:cNvSpPr/>
+          <p:nvPr/>
+        </p:nvSpPr>
+        <p:spPr>
+          <a:xfrm>
+            <a:off x="804672" y="1929384"/>
+            <a:ext cx="411480" cy="329184"/>
+          </a:xfrm>
+          <a:prstGeom prst="rect">
+            <a:avLst/>
+          </a:prstGeom>
+          <a:noFill/>
+          <a:ln/>
+        </p:spPr>
+        <p:txBody>
+          <a:bodyPr wrap="square" rtlCol="0" anchor="ctr"/>
+          <a:lstStyle/>
+          <a:p>
+            <a:pPr algn="ctr" indent="0" marL="0">
+              <a:buNone/>
+            </a:pPr>
+            <a:r>
+              <a:rPr lang="en-US" sz="1500" dirty="0">
+                <a:solidFill>
+                  <a:srgbClr val="000000"/>
+                </a:solidFill>
+                <a:latin typeface="Microsoft JhengHei" pitchFamily="34" charset="0"/>
+                <a:ea typeface="Microsoft JhengHei" pitchFamily="34" charset="-122"/>
+                <a:cs typeface="Microsoft JhengHei" pitchFamily="34" charset="-120"/>
+              </a:rPr>
+              <a:t>📥</a:t>
+            </a:r>
+            <a:endParaRPr lang="en-US" sz="1500" dirty="0"/>
+          </a:p>
+        </p:txBody>
+      </p:sp>
+      <p:sp>
+        <p:nvSpPr>
+          <p:cNvPr id="9" name="Text 7"/>
+          <p:cNvSpPr/>
+          <p:nvPr/>
+        </p:nvSpPr>
+        <p:spPr>
+          <a:xfrm>
+            <a:off x="1243584" y="1920240"/>
+            <a:ext cx="4495648" cy="292608"/>
+          </a:xfrm>
+          <a:prstGeom prst="rect">
+            <a:avLst/>
+          </a:prstGeom>
+          <a:noFill/>
+          <a:ln/>
+        </p:spPr>
+        <p:txBody>
+          <a:bodyPr wrap="square" rtlCol="0" anchor="ctr"/>
+          <a:lstStyle/>
+          <a:p>
+            <a:pPr indent="0" marL="0">
+              <a:buNone/>
+            </a:pPr>
+            <a:r>
+              <a:rPr lang="en-US" sz="1250" b="1" dirty="0">
+                <a:solidFill>
+                  <a:srgbClr val="1E2235"/>
+                </a:solidFill>
+                <a:latin typeface="Microsoft JhengHei" pitchFamily="34" charset="0"/>
+                <a:ea typeface="Microsoft JhengHei" pitchFamily="34" charset="-122"/>
+                <a:cs typeface="Microsoft JhengHei" pitchFamily="34" charset="-120"/>
+              </a:rPr>
+              <a:t>下載範例檔</a:t>
+            </a:r>
+            <a:endParaRPr lang="en-US" sz="1250" dirty="0"/>
+          </a:p>
+        </p:txBody>
+      </p:sp>
+      <p:sp>
+        <p:nvSpPr>
+          <p:cNvPr id="10" name="Text 8"/>
+          <p:cNvSpPr/>
+          <p:nvPr/>
+        </p:nvSpPr>
+        <p:spPr>
+          <a:xfrm>
+            <a:off x="1243584" y="2194560"/>
+            <a:ext cx="4495648" cy="411480"/>
+          </a:xfrm>
+          <a:prstGeom prst="rect">
+            <a:avLst/>
+          </a:prstGeom>
+          <a:noFill/>
+          <a:ln/>
+        </p:spPr>
+        <p:txBody>
+          <a:bodyPr wrap="square" rtlCol="0" anchor="ctr"/>
+          <a:lstStyle/>
+          <a:p>
+            <a:pPr indent="0" marL="0">
+              <a:lnSpc>
+                <a:spcPct val="112000"/>
+              </a:lnSpc>
+              <a:buNone/>
+            </a:pPr>
+            <a:r>
+              <a:rPr lang="en-US" sz="1050" dirty="0">
+                <a:solidFill>
+                  <a:srgbClr val="5B6079"/>
+                </a:solidFill>
+                <a:latin typeface="Microsoft JhengHei" pitchFamily="34" charset="0"/>
+                <a:ea typeface="Microsoft JhengHei" pitchFamily="34" charset="-122"/>
+                <a:cs typeface="Microsoft JhengHei" pitchFamily="34" charset="-120"/>
+              </a:rPr>
+              <a:t>每個情境的〈參考檔案〉區都有下載連結，點了就存到你的電腦。</a:t>
+            </a:r>
+            <a:endParaRPr lang="en-US" sz="1050" dirty="0"/>
+          </a:p>
+        </p:txBody>
+      </p:sp>
+      <p:sp>
+        <p:nvSpPr>
+          <p:cNvPr id="11" name="Shape 9"/>
+          <p:cNvSpPr/>
+          <p:nvPr/>
+        </p:nvSpPr>
+        <p:spPr>
+          <a:xfrm>
+            <a:off x="6278728" y="1874520"/>
+            <a:ext cx="5272888" cy="777240"/>
+          </a:xfrm>
+          <a:prstGeom prst="rect">
+            <a:avLst/>
+          </a:prstGeom>
+          <a:solidFill>
+            <a:srgbClr val="FFFFFF"/>
+          </a:solidFill>
+          <a:ln w="12700">
+            <a:solidFill>
+              <a:srgbClr val="E4E7F2"/>
+            </a:solidFill>
+            <a:prstDash val="solid"/>
+          </a:ln>
+        </p:spPr>
+      </p:sp>
+      <p:sp>
+        <p:nvSpPr>
+          <p:cNvPr id="12" name="Shape 10"/>
+          <p:cNvSpPr/>
+          <p:nvPr/>
+        </p:nvSpPr>
+        <p:spPr>
+          <a:xfrm>
+            <a:off x="6278728" y="1874520"/>
+            <a:ext cx="68580" cy="777240"/>
+          </a:xfrm>
+          <a:prstGeom prst="rect">
+            <a:avLst/>
+          </a:prstGeom>
+          <a:solidFill>
+            <a:srgbClr val="6366F1"/>
+          </a:solidFill>
+          <a:ln/>
+        </p:spPr>
+      </p:sp>
+      <p:sp>
+        <p:nvSpPr>
+          <p:cNvPr id="13" name="Text 11"/>
+          <p:cNvSpPr/>
+          <p:nvPr/>
+        </p:nvSpPr>
+        <p:spPr>
+          <a:xfrm>
+            <a:off x="6443320" y="1929384"/>
+            <a:ext cx="411480" cy="329184"/>
+          </a:xfrm>
+          <a:prstGeom prst="rect">
+            <a:avLst/>
+          </a:prstGeom>
+          <a:noFill/>
+          <a:ln/>
+        </p:spPr>
+        <p:txBody>
+          <a:bodyPr wrap="square" rtlCol="0" anchor="ctr"/>
+          <a:lstStyle/>
+          <a:p>
+            <a:pPr algn="ctr" indent="0" marL="0">
+              <a:buNone/>
+            </a:pPr>
+            <a:r>
+              <a:rPr lang="en-US" sz="1500" dirty="0">
+                <a:solidFill>
+                  <a:srgbClr val="000000"/>
+                </a:solidFill>
+                <a:latin typeface="Microsoft JhengHei" pitchFamily="34" charset="0"/>
+                <a:ea typeface="Microsoft JhengHei" pitchFamily="34" charset="-122"/>
+                <a:cs typeface="Microsoft JhengHei" pitchFamily="34" charset="-120"/>
+              </a:rPr>
+              <a:t>📧</a:t>
+            </a:r>
+            <a:endParaRPr lang="en-US" sz="1500" dirty="0"/>
+          </a:p>
+        </p:txBody>
+      </p:sp>
+      <p:sp>
+        <p:nvSpPr>
+          <p:cNvPr id="14" name="Text 12"/>
+          <p:cNvSpPr/>
+          <p:nvPr/>
+        </p:nvSpPr>
+        <p:spPr>
+          <a:xfrm>
+            <a:off x="6882232" y="1920240"/>
+            <a:ext cx="4495648" cy="292608"/>
+          </a:xfrm>
+          <a:prstGeom prst="rect">
+            <a:avLst/>
+          </a:prstGeom>
+          <a:noFill/>
+          <a:ln/>
+        </p:spPr>
+        <p:txBody>
+          <a:bodyPr wrap="square" rtlCol="0" anchor="ctr"/>
+          <a:lstStyle/>
+          <a:p>
+            <a:pPr indent="0" marL="0">
+              <a:buNone/>
+            </a:pPr>
+            <a:r>
+              <a:rPr lang="en-US" sz="1250" b="1" dirty="0">
+                <a:solidFill>
+                  <a:srgbClr val="1E2235"/>
+                </a:solidFill>
+                <a:latin typeface="Microsoft JhengHei" pitchFamily="34" charset="0"/>
+                <a:ea typeface="Microsoft JhengHei" pitchFamily="34" charset="-122"/>
+                <a:cs typeface="Microsoft JhengHei" pitchFamily="34" charset="-120"/>
+              </a:rPr>
+              <a:t>信箱：它會建立草稿，不會擅自寄出</a:t>
+            </a:r>
+            <a:endParaRPr lang="en-US" sz="1250" dirty="0"/>
+          </a:p>
+        </p:txBody>
+      </p:sp>
+      <p:sp>
+        <p:nvSpPr>
+          <p:cNvPr id="15" name="Text 13"/>
+          <p:cNvSpPr/>
+          <p:nvPr/>
+        </p:nvSpPr>
+        <p:spPr>
+          <a:xfrm>
+            <a:off x="6882232" y="2194560"/>
+            <a:ext cx="4495648" cy="411480"/>
+          </a:xfrm>
+          <a:prstGeom prst="rect">
+            <a:avLst/>
+          </a:prstGeom>
+          <a:noFill/>
+          <a:ln/>
+        </p:spPr>
+        <p:txBody>
+          <a:bodyPr wrap="square" rtlCol="0" anchor="ctr"/>
+          <a:lstStyle/>
+          <a:p>
+            <a:pPr indent="0" marL="0">
+              <a:lnSpc>
+                <a:spcPct val="112000"/>
+              </a:lnSpc>
+              <a:buNone/>
+            </a:pPr>
+            <a:r>
+              <a:rPr lang="en-US" sz="1050" dirty="0">
+                <a:solidFill>
+                  <a:srgbClr val="5B6079"/>
+                </a:solidFill>
+                <a:latin typeface="Microsoft JhengHei" pitchFamily="34" charset="0"/>
+                <a:ea typeface="Microsoft JhengHei" pitchFamily="34" charset="-122"/>
+                <a:cs typeface="Microsoft JhengHei" pitchFamily="34" charset="-120"/>
+              </a:rPr>
+              <a:t>有幾個情境會請 Cowork 草擬信件。</a:t>
+            </a:r>
+            <a:endParaRPr lang="en-US" sz="1050" dirty="0"/>
+          </a:p>
+        </p:txBody>
+      </p:sp>
+      <p:sp>
+        <p:nvSpPr>
+          <p:cNvPr id="16" name="Shape 14"/>
+          <p:cNvSpPr/>
+          <p:nvPr/>
+        </p:nvSpPr>
+        <p:spPr>
+          <a:xfrm>
+            <a:off x="640080" y="2779776"/>
+            <a:ext cx="5272888" cy="777240"/>
+          </a:xfrm>
+          <a:prstGeom prst="rect">
+            <a:avLst/>
+          </a:prstGeom>
+          <a:solidFill>
+            <a:srgbClr val="FFFFFF"/>
+          </a:solidFill>
+          <a:ln w="12700">
+            <a:solidFill>
+              <a:srgbClr val="E4E7F2"/>
+            </a:solidFill>
+            <a:prstDash val="solid"/>
+          </a:ln>
+        </p:spPr>
+      </p:sp>
+      <p:sp>
+        <p:nvSpPr>
+          <p:cNvPr id="17" name="Shape 15"/>
+          <p:cNvSpPr/>
+          <p:nvPr/>
+        </p:nvSpPr>
+        <p:spPr>
+          <a:xfrm>
+            <a:off x="640080" y="2779776"/>
+            <a:ext cx="68580" cy="777240"/>
+          </a:xfrm>
+          <a:prstGeom prst="rect">
+            <a:avLst/>
+          </a:prstGeom>
+          <a:solidFill>
+            <a:srgbClr val="6366F1"/>
+          </a:solidFill>
+          <a:ln/>
+        </p:spPr>
+      </p:sp>
+      <p:sp>
+        <p:nvSpPr>
+          <p:cNvPr id="18" name="Text 16"/>
+          <p:cNvSpPr/>
+          <p:nvPr/>
+        </p:nvSpPr>
+        <p:spPr>
+          <a:xfrm>
+            <a:off x="804672" y="2834640"/>
+            <a:ext cx="411480" cy="329184"/>
+          </a:xfrm>
+          <a:prstGeom prst="rect">
+            <a:avLst/>
+          </a:prstGeom>
+          <a:noFill/>
+          <a:ln/>
+        </p:spPr>
+        <p:txBody>
+          <a:bodyPr wrap="square" rtlCol="0" anchor="ctr"/>
+          <a:lstStyle/>
+          <a:p>
+            <a:pPr algn="ctr" indent="0" marL="0">
+              <a:buNone/>
+            </a:pPr>
+            <a:r>
+              <a:rPr lang="en-US" sz="1500" dirty="0">
+                <a:solidFill>
+                  <a:srgbClr val="000000"/>
+                </a:solidFill>
+                <a:latin typeface="Microsoft JhengHei" pitchFamily="34" charset="0"/>
+                <a:ea typeface="Microsoft JhengHei" pitchFamily="34" charset="-122"/>
+                <a:cs typeface="Microsoft JhengHei" pitchFamily="34" charset="-120"/>
+              </a:rPr>
+              <a:t>📅</a:t>
+            </a:r>
+            <a:endParaRPr lang="en-US" sz="1500" dirty="0"/>
+          </a:p>
+        </p:txBody>
+      </p:sp>
+      <p:sp>
+        <p:nvSpPr>
+          <p:cNvPr id="19" name="Text 17"/>
+          <p:cNvSpPr/>
+          <p:nvPr/>
+        </p:nvSpPr>
+        <p:spPr>
+          <a:xfrm>
+            <a:off x="1243584" y="2825496"/>
+            <a:ext cx="4495648" cy="292608"/>
+          </a:xfrm>
+          <a:prstGeom prst="rect">
+            <a:avLst/>
+          </a:prstGeom>
+          <a:noFill/>
+          <a:ln/>
+        </p:spPr>
+        <p:txBody>
+          <a:bodyPr wrap="square" rtlCol="0" anchor="ctr"/>
+          <a:lstStyle/>
+          <a:p>
+            <a:pPr indent="0" marL="0">
+              <a:buNone/>
+            </a:pPr>
+            <a:r>
+              <a:rPr lang="en-US" sz="1250" b="1" dirty="0">
+                <a:solidFill>
+                  <a:srgbClr val="1E2235"/>
+                </a:solidFill>
+                <a:latin typeface="Microsoft JhengHei" pitchFamily="34" charset="0"/>
+                <a:ea typeface="Microsoft JhengHei" pitchFamily="34" charset="-122"/>
+                <a:cs typeface="Microsoft JhengHei" pitchFamily="34" charset="-120"/>
+              </a:rPr>
+              <a:t>行事曆：本週留一些空檔</a:t>
+            </a:r>
+            <a:endParaRPr lang="en-US" sz="1250" dirty="0"/>
+          </a:p>
+        </p:txBody>
+      </p:sp>
+      <p:sp>
+        <p:nvSpPr>
+          <p:cNvPr id="20" name="Text 18"/>
+          <p:cNvSpPr/>
+          <p:nvPr/>
+        </p:nvSpPr>
+        <p:spPr>
+          <a:xfrm>
+            <a:off x="1243584" y="3099816"/>
+            <a:ext cx="4495648" cy="411480"/>
+          </a:xfrm>
+          <a:prstGeom prst="rect">
+            <a:avLst/>
+          </a:prstGeom>
+          <a:noFill/>
+          <a:ln/>
+        </p:spPr>
+        <p:txBody>
+          <a:bodyPr wrap="square" rtlCol="0" anchor="ctr"/>
+          <a:lstStyle/>
+          <a:p>
+            <a:pPr indent="0" marL="0">
+              <a:lnSpc>
+                <a:spcPct val="112000"/>
+              </a:lnSpc>
+              <a:buNone/>
+            </a:pPr>
+            <a:r>
+              <a:rPr lang="en-US" sz="1050" dirty="0">
+                <a:solidFill>
+                  <a:srgbClr val="5B6079"/>
+                </a:solidFill>
+                <a:latin typeface="Microsoft JhengHei" pitchFamily="34" charset="0"/>
+                <a:ea typeface="Microsoft JhengHei" pitchFamily="34" charset="-122"/>
+                <a:cs typeface="Microsoft JhengHei" pitchFamily="34" charset="-120"/>
+              </a:rPr>
+              <a:t>有幾個情境會請 Cowork 排會議或建立提醒，寫進的是你自己的行事曆。</a:t>
+            </a:r>
+            <a:endParaRPr lang="en-US" sz="1050" dirty="0"/>
+          </a:p>
+        </p:txBody>
+      </p:sp>
+      <p:sp>
+        <p:nvSpPr>
+          <p:cNvPr id="21" name="Shape 19"/>
+          <p:cNvSpPr/>
+          <p:nvPr/>
+        </p:nvSpPr>
+        <p:spPr>
+          <a:xfrm>
+            <a:off x="6278728" y="2779776"/>
+            <a:ext cx="5272888" cy="777240"/>
+          </a:xfrm>
+          <a:prstGeom prst="rect">
+            <a:avLst/>
+          </a:prstGeom>
+          <a:solidFill>
+            <a:srgbClr val="FFFFFF"/>
+          </a:solidFill>
+          <a:ln w="12700">
+            <a:solidFill>
+              <a:srgbClr val="E4E7F2"/>
+            </a:solidFill>
+            <a:prstDash val="solid"/>
+          </a:ln>
+        </p:spPr>
+      </p:sp>
+      <p:sp>
+        <p:nvSpPr>
+          <p:cNvPr id="22" name="Shape 20"/>
+          <p:cNvSpPr/>
+          <p:nvPr/>
+        </p:nvSpPr>
+        <p:spPr>
+          <a:xfrm>
+            <a:off x="6278728" y="2779776"/>
+            <a:ext cx="68580" cy="777240"/>
+          </a:xfrm>
+          <a:prstGeom prst="rect">
+            <a:avLst/>
+          </a:prstGeom>
+          <a:solidFill>
+            <a:srgbClr val="6366F1"/>
+          </a:solidFill>
+          <a:ln/>
+        </p:spPr>
+      </p:sp>
+      <p:sp>
+        <p:nvSpPr>
+          <p:cNvPr id="23" name="Text 21"/>
+          <p:cNvSpPr/>
+          <p:nvPr/>
+        </p:nvSpPr>
+        <p:spPr>
+          <a:xfrm>
+            <a:off x="6443320" y="2834640"/>
+            <a:ext cx="411480" cy="329184"/>
+          </a:xfrm>
+          <a:prstGeom prst="rect">
+            <a:avLst/>
+          </a:prstGeom>
+          <a:noFill/>
+          <a:ln/>
+        </p:spPr>
+        <p:txBody>
+          <a:bodyPr wrap="square" rtlCol="0" anchor="ctr"/>
+          <a:lstStyle/>
+          <a:p>
+            <a:pPr algn="ctr" indent="0" marL="0">
+              <a:buNone/>
+            </a:pPr>
+            <a:r>
+              <a:rPr lang="en-US" sz="1500" dirty="0">
+                <a:solidFill>
+                  <a:srgbClr val="000000"/>
+                </a:solidFill>
+                <a:latin typeface="Microsoft JhengHei" pitchFamily="34" charset="0"/>
+                <a:ea typeface="Microsoft JhengHei" pitchFamily="34" charset="-122"/>
+                <a:cs typeface="Microsoft JhengHei" pitchFamily="34" charset="-120"/>
+              </a:rPr>
+              <a:t>💬</a:t>
+            </a:r>
+            <a:endParaRPr lang="en-US" sz="1500" dirty="0"/>
+          </a:p>
+        </p:txBody>
+      </p:sp>
+      <p:sp>
+        <p:nvSpPr>
+          <p:cNvPr id="24" name="Text 22"/>
+          <p:cNvSpPr/>
+          <p:nvPr/>
+        </p:nvSpPr>
+        <p:spPr>
+          <a:xfrm>
+            <a:off x="6882232" y="2825496"/>
+            <a:ext cx="4495648" cy="292608"/>
+          </a:xfrm>
+          <a:prstGeom prst="rect">
+            <a:avLst/>
+          </a:prstGeom>
+          <a:noFill/>
+          <a:ln/>
+        </p:spPr>
+        <p:txBody>
+          <a:bodyPr wrap="square" rtlCol="0" anchor="ctr"/>
+          <a:lstStyle/>
+          <a:p>
+            <a:pPr indent="0" marL="0">
+              <a:buNone/>
+            </a:pPr>
+            <a:r>
+              <a:rPr lang="en-US" sz="1250" b="1" dirty="0">
+                <a:solidFill>
+                  <a:srgbClr val="1E2235"/>
+                </a:solidFill>
+                <a:latin typeface="Microsoft JhengHei" pitchFamily="34" charset="0"/>
+                <a:ea typeface="Microsoft JhengHei" pitchFamily="34" charset="-122"/>
+                <a:cs typeface="Microsoft JhengHei" pitchFamily="34" charset="-120"/>
+              </a:rPr>
+              <a:t>Teams：先想好要貼到哪裡</a:t>
+            </a:r>
+            <a:endParaRPr lang="en-US" sz="1250" dirty="0"/>
+          </a:p>
+        </p:txBody>
+      </p:sp>
+      <p:sp>
+        <p:nvSpPr>
+          <p:cNvPr id="25" name="Text 23"/>
+          <p:cNvSpPr/>
+          <p:nvPr/>
+        </p:nvSpPr>
+        <p:spPr>
+          <a:xfrm>
+            <a:off x="6882232" y="3099816"/>
+            <a:ext cx="4495648" cy="411480"/>
+          </a:xfrm>
+          <a:prstGeom prst="rect">
+            <a:avLst/>
+          </a:prstGeom>
+          <a:noFill/>
+          <a:ln/>
+        </p:spPr>
+        <p:txBody>
+          <a:bodyPr wrap="square" rtlCol="0" anchor="ctr"/>
+          <a:lstStyle/>
+          <a:p>
+            <a:pPr indent="0" marL="0">
+              <a:lnSpc>
+                <a:spcPct val="112000"/>
+              </a:lnSpc>
+              <a:buNone/>
+            </a:pPr>
+            <a:r>
+              <a:rPr lang="en-US" sz="1050" dirty="0">
+                <a:solidFill>
+                  <a:srgbClr val="5B6079"/>
+                </a:solidFill>
+                <a:latin typeface="Microsoft JhengHei" pitchFamily="34" charset="0"/>
+                <a:ea typeface="Microsoft JhengHei" pitchFamily="34" charset="-122"/>
+                <a:cs typeface="Microsoft JhengHei" pitchFamily="34" charset="-120"/>
+              </a:rPr>
+              <a:t>有情境會請 Cowork 張貼 Teams 訊息。</a:t>
+            </a:r>
+            <a:endParaRPr lang="en-US" sz="1050" dirty="0"/>
+          </a:p>
+        </p:txBody>
+      </p:sp>
+      <p:sp>
+        <p:nvSpPr>
+          <p:cNvPr id="26" name="Shape 24"/>
+          <p:cNvSpPr/>
+          <p:nvPr/>
+        </p:nvSpPr>
+        <p:spPr>
+          <a:xfrm>
+            <a:off x="640080" y="3685032"/>
+            <a:ext cx="5272888" cy="777240"/>
+          </a:xfrm>
+          <a:prstGeom prst="rect">
+            <a:avLst/>
+          </a:prstGeom>
+          <a:solidFill>
+            <a:srgbClr val="FFFFFF"/>
+          </a:solidFill>
+          <a:ln w="12700">
+            <a:solidFill>
+              <a:srgbClr val="E4E7F2"/>
+            </a:solidFill>
+            <a:prstDash val="solid"/>
+          </a:ln>
+        </p:spPr>
+      </p:sp>
+      <p:sp>
+        <p:nvSpPr>
+          <p:cNvPr id="27" name="Shape 25"/>
+          <p:cNvSpPr/>
+          <p:nvPr/>
+        </p:nvSpPr>
+        <p:spPr>
+          <a:xfrm>
+            <a:off x="640080" y="3685032"/>
+            <a:ext cx="68580" cy="777240"/>
+          </a:xfrm>
+          <a:prstGeom prst="rect">
+            <a:avLst/>
+          </a:prstGeom>
+          <a:solidFill>
+            <a:srgbClr val="6366F1"/>
+          </a:solidFill>
+          <a:ln/>
+        </p:spPr>
+      </p:sp>
+      <p:sp>
+        <p:nvSpPr>
+          <p:cNvPr id="28" name="Text 26"/>
+          <p:cNvSpPr/>
+          <p:nvPr/>
+        </p:nvSpPr>
+        <p:spPr>
+          <a:xfrm>
+            <a:off x="804672" y="3739896"/>
+            <a:ext cx="411480" cy="329184"/>
+          </a:xfrm>
+          <a:prstGeom prst="rect">
+            <a:avLst/>
+          </a:prstGeom>
+          <a:noFill/>
+          <a:ln/>
+        </p:spPr>
+        <p:txBody>
+          <a:bodyPr wrap="square" rtlCol="0" anchor="ctr"/>
+          <a:lstStyle/>
+          <a:p>
+            <a:pPr algn="ctr" indent="0" marL="0">
+              <a:buNone/>
+            </a:pPr>
+            <a:r>
+              <a:rPr lang="en-US" sz="1500" dirty="0">
+                <a:solidFill>
+                  <a:srgbClr val="000000"/>
+                </a:solidFill>
+                <a:latin typeface="Microsoft JhengHei" pitchFamily="34" charset="0"/>
+                <a:ea typeface="Microsoft JhengHei" pitchFamily="34" charset="-122"/>
+                <a:cs typeface="Microsoft JhengHei" pitchFamily="34" charset="-120"/>
+              </a:rPr>
+              <a:t>📁</a:t>
+            </a:r>
+            <a:endParaRPr lang="en-US" sz="1500" dirty="0"/>
+          </a:p>
+        </p:txBody>
+      </p:sp>
+      <p:sp>
+        <p:nvSpPr>
+          <p:cNvPr id="29" name="Text 27"/>
+          <p:cNvSpPr/>
+          <p:nvPr/>
+        </p:nvSpPr>
+        <p:spPr>
+          <a:xfrm>
+            <a:off x="1243584" y="3730752"/>
+            <a:ext cx="4495648" cy="292608"/>
+          </a:xfrm>
+          <a:prstGeom prst="rect">
+            <a:avLst/>
+          </a:prstGeom>
+          <a:noFill/>
+          <a:ln/>
+        </p:spPr>
+        <p:txBody>
+          <a:bodyPr wrap="square" rtlCol="0" anchor="ctr"/>
+          <a:lstStyle/>
+          <a:p>
+            <a:pPr indent="0" marL="0">
+              <a:buNone/>
+            </a:pPr>
+            <a:r>
+              <a:rPr lang="en-US" sz="1250" b="1" dirty="0">
+                <a:solidFill>
+                  <a:srgbClr val="1E2235"/>
+                </a:solidFill>
+                <a:latin typeface="Microsoft JhengHei" pitchFamily="34" charset="0"/>
+                <a:ea typeface="Microsoft JhengHei" pitchFamily="34" charset="-122"/>
+                <a:cs typeface="Microsoft JhengHei" pitchFamily="34" charset="-120"/>
+              </a:rPr>
+              <a:t>產出會存到你的 OneDrive</a:t>
+            </a:r>
+            <a:endParaRPr lang="en-US" sz="1250" dirty="0"/>
+          </a:p>
+        </p:txBody>
+      </p:sp>
+      <p:sp>
+        <p:nvSpPr>
+          <p:cNvPr id="30" name="Text 28"/>
+          <p:cNvSpPr/>
+          <p:nvPr/>
+        </p:nvSpPr>
+        <p:spPr>
+          <a:xfrm>
+            <a:off x="1243584" y="4005072"/>
+            <a:ext cx="4495648" cy="411480"/>
+          </a:xfrm>
+          <a:prstGeom prst="rect">
+            <a:avLst/>
+          </a:prstGeom>
+          <a:noFill/>
+          <a:ln/>
+        </p:spPr>
+        <p:txBody>
+          <a:bodyPr wrap="square" rtlCol="0" anchor="ctr"/>
+          <a:lstStyle/>
+          <a:p>
+            <a:pPr indent="0" marL="0">
+              <a:lnSpc>
+                <a:spcPct val="112000"/>
+              </a:lnSpc>
+              <a:buNone/>
+            </a:pPr>
+            <a:r>
+              <a:rPr lang="en-US" sz="1050" dirty="0">
+                <a:solidFill>
+                  <a:srgbClr val="5B6079"/>
+                </a:solidFill>
+                <a:latin typeface="Microsoft JhengHei" pitchFamily="34" charset="0"/>
+                <a:ea typeface="Microsoft JhengHei" pitchFamily="34" charset="-122"/>
+                <a:cs typeface="Microsoft JhengHei" pitchFamily="34" charset="-120"/>
+              </a:rPr>
+              <a:t>Cowork 產生的檔案會存進你自己的 OneDrive，也可以在對話右側的側邊欄直接預覽或下載。</a:t>
+            </a:r>
+            <a:endParaRPr lang="en-US" sz="1050" dirty="0"/>
+          </a:p>
+        </p:txBody>
+      </p:sp>
+      <p:sp>
+        <p:nvSpPr>
+          <p:cNvPr id="31" name="Shape 29"/>
+          <p:cNvSpPr/>
+          <p:nvPr/>
+        </p:nvSpPr>
+        <p:spPr>
+          <a:xfrm>
+            <a:off x="6278728" y="3685032"/>
+            <a:ext cx="5272888" cy="777240"/>
+          </a:xfrm>
+          <a:prstGeom prst="rect">
+            <a:avLst/>
+          </a:prstGeom>
+          <a:solidFill>
+            <a:srgbClr val="FFFFFF"/>
+          </a:solidFill>
+          <a:ln w="12700">
+            <a:solidFill>
+              <a:srgbClr val="E4E7F2"/>
+            </a:solidFill>
+            <a:prstDash val="solid"/>
+          </a:ln>
+        </p:spPr>
+      </p:sp>
+      <p:sp>
+        <p:nvSpPr>
+          <p:cNvPr id="32" name="Shape 30"/>
+          <p:cNvSpPr/>
+          <p:nvPr/>
+        </p:nvSpPr>
+        <p:spPr>
+          <a:xfrm>
+            <a:off x="6278728" y="3685032"/>
+            <a:ext cx="68580" cy="777240"/>
+          </a:xfrm>
+          <a:prstGeom prst="rect">
+            <a:avLst/>
+          </a:prstGeom>
+          <a:solidFill>
+            <a:srgbClr val="6366F1"/>
+          </a:solidFill>
+          <a:ln/>
+        </p:spPr>
+      </p:sp>
+      <p:sp>
+        <p:nvSpPr>
+          <p:cNvPr id="33" name="Text 31"/>
+          <p:cNvSpPr/>
+          <p:nvPr/>
+        </p:nvSpPr>
+        <p:spPr>
+          <a:xfrm>
+            <a:off x="6443320" y="3739896"/>
+            <a:ext cx="411480" cy="329184"/>
+          </a:xfrm>
+          <a:prstGeom prst="rect">
+            <a:avLst/>
+          </a:prstGeom>
+          <a:noFill/>
+          <a:ln/>
+        </p:spPr>
+        <p:txBody>
+          <a:bodyPr wrap="square" rtlCol="0" anchor="ctr"/>
+          <a:lstStyle/>
+          <a:p>
+            <a:pPr algn="ctr" indent="0" marL="0">
+              <a:buNone/>
+            </a:pPr>
+            <a:r>
+              <a:rPr lang="en-US" sz="1500" dirty="0">
+                <a:solidFill>
+                  <a:srgbClr val="000000"/>
+                </a:solidFill>
+                <a:latin typeface="Microsoft JhengHei" pitchFamily="34" charset="0"/>
+                <a:ea typeface="Microsoft JhengHei" pitchFamily="34" charset="-122"/>
+                <a:cs typeface="Microsoft JhengHei" pitchFamily="34" charset="-120"/>
+              </a:rPr>
+              <a:t>⏰</a:t>
+            </a:r>
+            <a:endParaRPr lang="en-US" sz="1500" dirty="0"/>
+          </a:p>
+        </p:txBody>
+      </p:sp>
+      <p:sp>
+        <p:nvSpPr>
+          <p:cNvPr id="34" name="Text 32"/>
+          <p:cNvSpPr/>
+          <p:nvPr/>
+        </p:nvSpPr>
+        <p:spPr>
+          <a:xfrm>
+            <a:off x="6882232" y="3730752"/>
+            <a:ext cx="4495648" cy="292608"/>
+          </a:xfrm>
+          <a:prstGeom prst="rect">
+            <a:avLst/>
+          </a:prstGeom>
+          <a:noFill/>
+          <a:ln/>
+        </p:spPr>
+        <p:txBody>
+          <a:bodyPr wrap="square" rtlCol="0" anchor="ctr"/>
+          <a:lstStyle/>
+          <a:p>
+            <a:pPr indent="0" marL="0">
+              <a:buNone/>
+            </a:pPr>
+            <a:r>
+              <a:rPr lang="en-US" sz="1250" b="1" dirty="0">
+                <a:solidFill>
+                  <a:srgbClr val="1E2235"/>
+                </a:solidFill>
+                <a:latin typeface="Microsoft JhengHei" pitchFamily="34" charset="0"/>
+                <a:ea typeface="Microsoft JhengHei" pitchFamily="34" charset="-122"/>
+                <a:cs typeface="Microsoft JhengHei" pitchFamily="34" charset="-120"/>
+              </a:rPr>
+              <a:t>自動化頁面：先清掉殘留的任務</a:t>
+            </a:r>
+            <a:endParaRPr lang="en-US" sz="1250" dirty="0"/>
+          </a:p>
+        </p:txBody>
+      </p:sp>
+      <p:sp>
+        <p:nvSpPr>
+          <p:cNvPr id="35" name="Text 33"/>
+          <p:cNvSpPr/>
+          <p:nvPr/>
+        </p:nvSpPr>
+        <p:spPr>
+          <a:xfrm>
+            <a:off x="6882232" y="4005072"/>
+            <a:ext cx="4495648" cy="411480"/>
+          </a:xfrm>
+          <a:prstGeom prst="rect">
+            <a:avLst/>
+          </a:prstGeom>
+          <a:noFill/>
+          <a:ln/>
+        </p:spPr>
+        <p:txBody>
+          <a:bodyPr wrap="square" rtlCol="0" anchor="ctr"/>
+          <a:lstStyle/>
+          <a:p>
+            <a:pPr indent="0" marL="0">
+              <a:lnSpc>
+                <a:spcPct val="112000"/>
+              </a:lnSpc>
+              <a:buNone/>
+            </a:pPr>
+            <a:r>
+              <a:rPr lang="en-US" sz="1050" dirty="0">
+                <a:solidFill>
+                  <a:srgbClr val="5B6079"/>
+                </a:solidFill>
+                <a:latin typeface="Microsoft JhengHei" pitchFamily="34" charset="0"/>
+                <a:ea typeface="Microsoft JhengHei" pitchFamily="34" charset="-122"/>
+                <a:cs typeface="Microsoft JhengHei" pitchFamily="34" charset="-120"/>
+              </a:rPr>
+              <a:t>有情境會建立排程提示或事件觸發任務。</a:t>
+            </a:r>
+            <a:endParaRPr lang="en-US" sz="1050" dirty="0"/>
+          </a:p>
+        </p:txBody>
+      </p:sp>
+      <p:sp>
+        <p:nvSpPr>
+          <p:cNvPr id="36" name="Shape 34"/>
+          <p:cNvSpPr/>
+          <p:nvPr/>
+        </p:nvSpPr>
+        <p:spPr>
+          <a:xfrm>
+            <a:off x="640080" y="4590288"/>
+            <a:ext cx="5272888" cy="777240"/>
+          </a:xfrm>
+          <a:prstGeom prst="rect">
+            <a:avLst/>
+          </a:prstGeom>
+          <a:solidFill>
+            <a:srgbClr val="FFFFFF"/>
+          </a:solidFill>
+          <a:ln w="12700">
+            <a:solidFill>
+              <a:srgbClr val="E4E7F2"/>
+            </a:solidFill>
+            <a:prstDash val="solid"/>
+          </a:ln>
+        </p:spPr>
+      </p:sp>
+      <p:sp>
+        <p:nvSpPr>
+          <p:cNvPr id="37" name="Shape 35"/>
+          <p:cNvSpPr/>
+          <p:nvPr/>
+        </p:nvSpPr>
+        <p:spPr>
+          <a:xfrm>
+            <a:off x="640080" y="4590288"/>
+            <a:ext cx="68580" cy="777240"/>
+          </a:xfrm>
+          <a:prstGeom prst="rect">
+            <a:avLst/>
+          </a:prstGeom>
+          <a:solidFill>
+            <a:srgbClr val="6366F1"/>
+          </a:solidFill>
+          <a:ln/>
+        </p:spPr>
+      </p:sp>
+      <p:sp>
+        <p:nvSpPr>
+          <p:cNvPr id="38" name="Text 36"/>
+          <p:cNvSpPr/>
+          <p:nvPr/>
+        </p:nvSpPr>
+        <p:spPr>
+          <a:xfrm>
+            <a:off x="804672" y="4645152"/>
+            <a:ext cx="411480" cy="329184"/>
+          </a:xfrm>
+          <a:prstGeom prst="rect">
+            <a:avLst/>
+          </a:prstGeom>
+          <a:noFill/>
+          <a:ln/>
+        </p:spPr>
+        <p:txBody>
+          <a:bodyPr wrap="square" rtlCol="0" anchor="ctr"/>
+          <a:lstStyle/>
+          <a:p>
+            <a:pPr algn="ctr" indent="0" marL="0">
+              <a:buNone/>
+            </a:pPr>
+            <a:r>
+              <a:rPr lang="en-US" sz="1500" dirty="0">
+                <a:solidFill>
+                  <a:srgbClr val="000000"/>
+                </a:solidFill>
+                <a:latin typeface="Microsoft JhengHei" pitchFamily="34" charset="0"/>
+                <a:ea typeface="Microsoft JhengHei" pitchFamily="34" charset="-122"/>
+                <a:cs typeface="Microsoft JhengHei" pitchFamily="34" charset="-120"/>
+              </a:rPr>
+              <a:t>🧩</a:t>
+            </a:r>
+            <a:endParaRPr lang="en-US" sz="1500" dirty="0"/>
+          </a:p>
+        </p:txBody>
+      </p:sp>
+      <p:sp>
+        <p:nvSpPr>
+          <p:cNvPr id="39" name="Text 37"/>
+          <p:cNvSpPr/>
+          <p:nvPr/>
+        </p:nvSpPr>
+        <p:spPr>
+          <a:xfrm>
+            <a:off x="1243584" y="4636008"/>
+            <a:ext cx="4495648" cy="292608"/>
+          </a:xfrm>
+          <a:prstGeom prst="rect">
+            <a:avLst/>
+          </a:prstGeom>
+          <a:noFill/>
+          <a:ln/>
+        </p:spPr>
+        <p:txBody>
+          <a:bodyPr wrap="square" rtlCol="0" anchor="ctr"/>
+          <a:lstStyle/>
+          <a:p>
+            <a:pPr indent="0" marL="0">
+              <a:buNone/>
+            </a:pPr>
+            <a:r>
+              <a:rPr lang="en-US" sz="1250" b="1" dirty="0">
+                <a:solidFill>
+                  <a:srgbClr val="1E2235"/>
+                </a:solidFill>
+                <a:latin typeface="Microsoft JhengHei" pitchFamily="34" charset="0"/>
+                <a:ea typeface="Microsoft JhengHei" pitchFamily="34" charset="-122"/>
+                <a:cs typeface="Microsoft JhengHei" pitchFamily="34" charset="-120"/>
+              </a:rPr>
+              <a:t>技能資料夾：現場建立，不要先放進去</a:t>
+            </a:r>
+            <a:endParaRPr lang="en-US" sz="1250" dirty="0"/>
+          </a:p>
+        </p:txBody>
+      </p:sp>
+      <p:sp>
+        <p:nvSpPr>
+          <p:cNvPr id="40" name="Text 38"/>
+          <p:cNvSpPr/>
+          <p:nvPr/>
+        </p:nvSpPr>
+        <p:spPr>
+          <a:xfrm>
+            <a:off x="1243584" y="4910328"/>
+            <a:ext cx="4495648" cy="411480"/>
+          </a:xfrm>
+          <a:prstGeom prst="rect">
+            <a:avLst/>
+          </a:prstGeom>
+          <a:noFill/>
+          <a:ln/>
+        </p:spPr>
+        <p:txBody>
+          <a:bodyPr wrap="square" rtlCol="0" anchor="ctr"/>
+          <a:lstStyle/>
+          <a:p>
+            <a:pPr indent="0" marL="0">
+              <a:lnSpc>
+                <a:spcPct val="112000"/>
+              </a:lnSpc>
+              <a:buNone/>
+            </a:pPr>
+            <a:r>
+              <a:rPr lang="en-US" sz="1050" dirty="0">
+                <a:solidFill>
+                  <a:srgbClr val="5B6079"/>
+                </a:solidFill>
+                <a:latin typeface="Microsoft JhengHei" pitchFamily="34" charset="0"/>
+                <a:ea typeface="Microsoft JhengHei" pitchFamily="34" charset="-122"/>
+                <a:cs typeface="Microsoft JhengHei" pitchFamily="34" charset="-120"/>
+              </a:rPr>
+              <a:t>有情境會示範現場建立自訂技能。</a:t>
+            </a:r>
+            <a:endParaRPr lang="en-US" sz="1050" dirty="0"/>
+          </a:p>
+        </p:txBody>
+      </p:sp>
+      <p:sp>
+        <p:nvSpPr>
+          <p:cNvPr id="41" name="Shape 39"/>
+          <p:cNvSpPr/>
+          <p:nvPr/>
+        </p:nvSpPr>
+        <p:spPr>
+          <a:xfrm>
+            <a:off x="640080" y="5532120"/>
+            <a:ext cx="10911535" cy="749808"/>
+          </a:xfrm>
+          <a:prstGeom prst="rect">
+            <a:avLst/>
+          </a:prstGeom>
+          <a:solidFill>
+            <a:srgbClr val="FFFFFF"/>
+          </a:solidFill>
+          <a:ln w="12700">
+            <a:solidFill>
+              <a:srgbClr val="E4E7F2"/>
+            </a:solidFill>
+            <a:prstDash val="solid"/>
+          </a:ln>
+        </p:spPr>
+      </p:sp>
+      <p:sp>
+        <p:nvSpPr>
+          <p:cNvPr id="42" name="Shape 40"/>
+          <p:cNvSpPr/>
+          <p:nvPr/>
+        </p:nvSpPr>
+        <p:spPr>
+          <a:xfrm>
+            <a:off x="640080" y="5532120"/>
+            <a:ext cx="91440" cy="749808"/>
+          </a:xfrm>
+          <a:prstGeom prst="rect">
+            <a:avLst/>
+          </a:prstGeom>
+          <a:solidFill>
+            <a:srgbClr val="6366F1"/>
+          </a:solidFill>
+          <a:ln/>
+        </p:spPr>
+      </p:sp>
+      <p:sp>
+        <p:nvSpPr>
+          <p:cNvPr id="43" name="Text 41"/>
+          <p:cNvSpPr/>
+          <p:nvPr/>
+        </p:nvSpPr>
+        <p:spPr>
+          <a:xfrm>
+            <a:off x="914400" y="5614416"/>
+            <a:ext cx="1828800" cy="274320"/>
+          </a:xfrm>
+          <a:prstGeom prst="rect">
+            <a:avLst/>
+          </a:prstGeom>
+          <a:noFill/>
+          <a:ln/>
+        </p:spPr>
+        <p:txBody>
+          <a:bodyPr wrap="square" rtlCol="0" anchor="ctr"/>
+          <a:lstStyle/>
+          <a:p>
+            <a:pPr indent="0" marL="0">
+              <a:buNone/>
+            </a:pPr>
+            <a:r>
+              <a:rPr lang="en-US" sz="1200" b="1" dirty="0">
+                <a:solidFill>
+                  <a:srgbClr val="1E2235"/>
+                </a:solidFill>
+                <a:latin typeface="Microsoft JhengHei" pitchFamily="34" charset="0"/>
+                <a:ea typeface="Microsoft JhengHei" pitchFamily="34" charset="-122"/>
+                <a:cs typeface="Microsoft JhengHei" pitchFamily="34" charset="-120"/>
+              </a:rPr>
+              <a:t>開課前最後檢查</a:t>
+            </a:r>
+            <a:endParaRPr lang="en-US" sz="1200" dirty="0"/>
+          </a:p>
+        </p:txBody>
+      </p:sp>
+      <p:pic>
+        <p:nvPicPr>
+          <p:cNvPr id="44" name="Image 0" descr="preencoded.png">    </p:cNvPr>
+          <p:cNvPicPr>
+            <a:picLocks noChangeAspect="1"/>
+          </p:cNvPicPr>
+          <p:nvPr/>
+        </p:nvPicPr>
+        <p:blipFill>
+          <a:blip r:embed="rId1"/>
+          <a:stretch>
+            <a:fillRect/>
+          </a:stretch>
+        </p:blipFill>
+        <p:spPr>
+          <a:xfrm>
+            <a:off x="2743200" y="5641848"/>
+            <a:ext cx="155448" cy="155448"/>
+          </a:xfrm>
+          <a:prstGeom prst="rect">
+            <a:avLst/>
+          </a:prstGeom>
+        </p:spPr>
+      </p:pic>
+      <p:sp>
+        <p:nvSpPr>
+          <p:cNvPr id="45" name="Text 42"/>
+          <p:cNvSpPr/>
+          <p:nvPr/>
+        </p:nvSpPr>
+        <p:spPr>
+          <a:xfrm>
+            <a:off x="2999232" y="5586984"/>
+            <a:ext cx="8259775" cy="237744"/>
+          </a:xfrm>
+          <a:prstGeom prst="rect">
+            <a:avLst/>
+          </a:prstGeom>
+          <a:noFill/>
+          <a:ln/>
+        </p:spPr>
+        <p:txBody>
+          <a:bodyPr wrap="square" rtlCol="0" anchor="ctr"/>
+          <a:lstStyle/>
+          <a:p>
+            <a:pPr indent="0" marL="0">
+              <a:buNone/>
+            </a:pPr>
+            <a:r>
+              <a:rPr lang="en-US" sz="1050" dirty="0">
+                <a:solidFill>
+                  <a:srgbClr val="1E2235"/>
+                </a:solidFill>
+                <a:latin typeface="Microsoft JhengHei" pitchFamily="34" charset="0"/>
+                <a:ea typeface="Microsoft JhengHei" pitchFamily="34" charset="-122"/>
+                <a:cs typeface="Microsoft JhengHei" pitchFamily="34" charset="-120"/>
+              </a:rPr>
+              <a:t>要練的情境，它的參考檔案都已下載到你的電腦</a:t>
+            </a:r>
+            <a:endParaRPr lang="en-US" sz="1050" dirty="0"/>
+          </a:p>
+        </p:txBody>
+      </p:sp>
+      <p:pic>
+        <p:nvPicPr>
+          <p:cNvPr id="46" name="Image 1" descr="preencoded.png">    </p:cNvPr>
+          <p:cNvPicPr>
+            <a:picLocks noChangeAspect="1"/>
+          </p:cNvPicPr>
+          <p:nvPr/>
+        </p:nvPicPr>
+        <p:blipFill>
+          <a:blip r:embed="rId2"/>
+          <a:stretch>
+            <a:fillRect/>
+          </a:stretch>
+        </p:blipFill>
+        <p:spPr>
+          <a:xfrm>
+            <a:off x="2743200" y="5852160"/>
+            <a:ext cx="155448" cy="155448"/>
+          </a:xfrm>
+          <a:prstGeom prst="rect">
+            <a:avLst/>
+          </a:prstGeom>
+        </p:spPr>
+      </p:pic>
+      <p:sp>
+        <p:nvSpPr>
+          <p:cNvPr id="47" name="Text 43"/>
+          <p:cNvSpPr/>
+          <p:nvPr/>
+        </p:nvSpPr>
+        <p:spPr>
+          <a:xfrm>
+            <a:off x="2999232" y="5797296"/>
+            <a:ext cx="8259775" cy="237744"/>
+          </a:xfrm>
+          <a:prstGeom prst="rect">
+            <a:avLst/>
+          </a:prstGeom>
+          <a:noFill/>
+          <a:ln/>
+        </p:spPr>
+        <p:txBody>
+          <a:bodyPr wrap="square" rtlCol="0" anchor="ctr"/>
+          <a:lstStyle/>
+          <a:p>
+            <a:pPr indent="0" marL="0">
+              <a:buNone/>
+            </a:pPr>
+            <a:r>
+              <a:rPr lang="en-US" sz="1050" dirty="0">
+                <a:solidFill>
+                  <a:srgbClr val="1E2235"/>
+                </a:solidFill>
+                <a:latin typeface="Microsoft JhengHei" pitchFamily="34" charset="0"/>
+                <a:ea typeface="Microsoft JhengHei" pitchFamily="34" charset="-122"/>
+                <a:cs typeface="Microsoft JhengHei" pitchFamily="34" charset="-120"/>
+              </a:rPr>
+              <a:t>清楚核准卡出現時要逐格檢查收件者，練習信不會寄給真實對象</a:t>
+            </a:r>
+            <a:endParaRPr lang="en-US" sz="1050" dirty="0"/>
+          </a:p>
+        </p:txBody>
+      </p:sp>
+      <p:pic>
+        <p:nvPicPr>
+          <p:cNvPr id="48" name="Image 2" descr="preencoded.png">    </p:cNvPr>
+          <p:cNvPicPr>
+            <a:picLocks noChangeAspect="1"/>
+          </p:cNvPicPr>
+          <p:nvPr/>
+        </p:nvPicPr>
+        <p:blipFill>
+          <a:blip r:embed="rId3"/>
+          <a:stretch>
+            <a:fillRect/>
+          </a:stretch>
+        </p:blipFill>
+        <p:spPr>
+          <a:xfrm>
+            <a:off x="2743200" y="6062472"/>
+            <a:ext cx="155448" cy="155448"/>
+          </a:xfrm>
+          <a:prstGeom prst="rect">
+            <a:avLst/>
+          </a:prstGeom>
+        </p:spPr>
+      </p:pic>
+      <p:sp>
+        <p:nvSpPr>
+          <p:cNvPr id="49" name="Text 44"/>
+          <p:cNvSpPr/>
+          <p:nvPr/>
+        </p:nvSpPr>
+        <p:spPr>
+          <a:xfrm>
+            <a:off x="2999232" y="6007608"/>
+            <a:ext cx="8259775" cy="237744"/>
+          </a:xfrm>
+          <a:prstGeom prst="rect">
+            <a:avLst/>
+          </a:prstGeom>
+          <a:noFill/>
+          <a:ln/>
+        </p:spPr>
+        <p:txBody>
+          <a:bodyPr wrap="square" rtlCol="0" anchor="ctr"/>
+          <a:lstStyle/>
+          <a:p>
+            <a:pPr indent="0" marL="0">
+              <a:buNone/>
+            </a:pPr>
+            <a:r>
+              <a:rPr lang="en-US" sz="1050" dirty="0">
+                <a:solidFill>
+                  <a:srgbClr val="1E2235"/>
+                </a:solidFill>
+                <a:latin typeface="Microsoft JhengHei" pitchFamily="34" charset="0"/>
+                <a:ea typeface="Microsoft JhengHei" pitchFamily="34" charset="-122"/>
+                <a:cs typeface="Microsoft JhengHei" pitchFamily="34" charset="-120"/>
+              </a:rPr>
+              <a:t>行事曆本週有空檔，可以讓它排入測試會議</a:t>
+            </a:r>
+            <a:endParaRPr lang="en-US" sz="1050" dirty="0"/>
+          </a:p>
+        </p:txBody>
+      </p:sp>
+      <p:sp>
+        <p:nvSpPr>
+          <p:cNvPr id="50" name="Text 45"/>
+          <p:cNvSpPr/>
+          <p:nvPr/>
+        </p:nvSpPr>
+        <p:spPr>
+          <a:xfrm>
+            <a:off x="640080" y="6473952"/>
+            <a:ext cx="5486400" cy="274320"/>
+          </a:xfrm>
+          <a:prstGeom prst="rect">
+            <a:avLst/>
+          </a:prstGeom>
+          <a:noFill/>
+          <a:ln/>
+        </p:spPr>
+        <p:txBody>
+          <a:bodyPr wrap="square" rtlCol="0" anchor="ctr"/>
+          <a:lstStyle/>
+          <a:p>
+            <a:pPr algn="l" indent="0" marL="0">
+              <a:buNone/>
+            </a:pPr>
+            <a:r>
+              <a:rPr lang="en-US" sz="900" dirty="0">
+                <a:solidFill>
+                  <a:srgbClr val="5B6079"/>
+                </a:solidFill>
+                <a:latin typeface="Microsoft JhengHei" pitchFamily="34" charset="0"/>
+                <a:ea typeface="Microsoft JhengHei" pitchFamily="34" charset="-122"/>
+                <a:cs typeface="Microsoft JhengHei" pitchFamily="34" charset="-120"/>
+              </a:rPr>
+              <a:t>Microsoft 365 Copilot Cowork</a:t>
+            </a:r>
+            <a:endParaRPr lang="en-US" sz="900" dirty="0"/>
+          </a:p>
+        </p:txBody>
+      </p:sp>
+      <p:sp>
+        <p:nvSpPr>
+          <p:cNvPr id="51" name="Text 46"/>
+          <p:cNvSpPr/>
+          <p:nvPr/>
+        </p:nvSpPr>
+        <p:spPr>
+          <a:xfrm>
+            <a:off x="11002975" y="6473952"/>
+            <a:ext cx="548640" cy="274320"/>
+          </a:xfrm>
+          <a:prstGeom prst="rect">
+            <a:avLst/>
+          </a:prstGeom>
+          <a:noFill/>
+          <a:ln/>
+        </p:spPr>
+        <p:txBody>
+          <a:bodyPr wrap="square" rtlCol="0" anchor="ctr"/>
+          <a:lstStyle/>
+          <a:p>
+            <a:pPr algn="r" indent="0" marL="0">
+              <a:buNone/>
+            </a:pPr>
+            <a:r>
+              <a:rPr lang="en-US" sz="900" dirty="0">
+                <a:solidFill>
+                  <a:srgbClr val="5B6079"/>
+                </a:solidFill>
+                <a:latin typeface="Microsoft JhengHei" pitchFamily="34" charset="0"/>
+                <a:ea typeface="Microsoft JhengHei" pitchFamily="34" charset="-122"/>
+                <a:cs typeface="Microsoft JhengHei" pitchFamily="34" charset="-120"/>
+              </a:rPr>
+              <a:t>6</a:t>
+            </a:r>
+            <a:endParaRPr lang="en-US" sz="900" dirty="0"/>
+          </a:p>
+        </p:txBody>
+      </p:sp>
+    </p:spTree>
+  </p:cSld>
+  <p:clrMapOvr>
+    <a:masterClrMapping/>
+  </p:clrMapOvr>
+</p:sld>
+</file>
+
+<file path=ppt/slides/slide8.xml><?xml version="1.0" encoding="utf-8"?>
+<p:sld xmlns:a="http://schemas.openxmlformats.org/drawingml/2006/main" xmlns:r="http://schemas.openxmlformats.org/officeDocument/2006/relationships" xmlns:p="http://schemas.openxmlformats.org/presentationml/2006/main">
+  <p:cSld name="Slide 8">
+    <p:bg>
+      <p:bgPr>
+        <a:solidFill>
+          <a:srgbClr val="F7F8FC"/>
+        </a:solidFill>
+      </p:bgPr>
+    </p:bg>
+    <p:spTree>
+      <p:nvGrpSpPr>
+        <p:cNvPr id="1" name=""/>
+        <p:cNvGrpSpPr/>
+        <p:nvPr/>
+      </p:nvGrpSpPr>
+      <p:grpSpPr>
+        <a:xfrm>
+          <a:off x="0" y="0"/>
+          <a:ext cx="0" cy="0"/>
+          <a:chOff x="0" y="0"/>
+          <a:chExt cx="0" cy="0"/>
+        </a:xfrm>
+      </p:grpSpPr>
+      <p:sp>
+        <p:nvSpPr>
+          <p:cNvPr id="2" name="Shape 0"/>
+          <p:cNvSpPr/>
+          <p:nvPr/>
+        </p:nvSpPr>
+        <p:spPr>
+          <a:xfrm>
+            <a:off x="640080" y="566928"/>
+            <a:ext cx="384048" cy="128016"/>
+          </a:xfrm>
+          <a:prstGeom prst="rect">
+            <a:avLst/>
+          </a:prstGeom>
+          <a:solidFill>
+            <a:srgbClr val="6366F1"/>
+          </a:solidFill>
+          <a:ln/>
+        </p:spPr>
+      </p:sp>
+      <p:sp>
+        <p:nvSpPr>
+          <p:cNvPr id="3" name="Text 1"/>
+          <p:cNvSpPr/>
+          <p:nvPr/>
+        </p:nvSpPr>
+        <p:spPr>
+          <a:xfrm>
+            <a:off x="1143000" y="457200"/>
+            <a:ext cx="8229600" cy="310896"/>
+          </a:xfrm>
+          <a:prstGeom prst="rect">
+            <a:avLst/>
+          </a:prstGeom>
+          <a:noFill/>
+          <a:ln/>
+        </p:spPr>
+        <p:txBody>
+          <a:bodyPr wrap="square" rtlCol="0" anchor="ctr"/>
+          <a:lstStyle/>
+          <a:p>
+            <a:pPr indent="0" marL="0">
+              <a:buNone/>
+            </a:pPr>
+            <a:r>
+              <a:rPr lang="en-US" sz="1200" b="1" spc="200" kern="0" dirty="0">
+                <a:solidFill>
+                  <a:srgbClr val="6366F1"/>
+                </a:solidFill>
+                <a:latin typeface="Microsoft JhengHei" pitchFamily="34" charset="0"/>
+                <a:ea typeface="Microsoft JhengHei" pitchFamily="34" charset="-122"/>
+                <a:cs typeface="Microsoft JhengHei" pitchFamily="34" charset="-120"/>
+              </a:rPr>
               <a:t>6 SCENARIOS</a:t>
             </a:r>
             <a:endParaRPr lang="en-US" sz="1200" dirty="0"/>
@@ -22281,7 +24833,7 @@
                 <a:ea typeface="Microsoft JhengHei" pitchFamily="34" charset="-122"/>
                 <a:cs typeface="Microsoft JhengHei" pitchFamily="34" charset="-120"/>
               </a:rPr>
-              <a:t>6</a:t>
+              <a:t>7</a:t>
             </a:r>
             <a:endParaRPr lang="en-US" sz="900" dirty="0"/>
           </a:p>
@@ -22295,9 +24847,9 @@
 </p:sld>
 </file>
 
-<file path=ppt/slides/slide8.xml><?xml version="1.0" encoding="utf-8"?>
+<file path=ppt/slides/slide9.xml><?xml version="1.0" encoding="utf-8"?>
 <p:sld xmlns:a="http://schemas.openxmlformats.org/drawingml/2006/main" xmlns:r="http://schemas.openxmlformats.org/officeDocument/2006/relationships" xmlns:p="http://schemas.openxmlformats.org/presentationml/2006/main">
-  <p:cSld name="Slide 8">
+  <p:cSld name="Slide 9">
     <p:bg>
       <p:bgPr>
         <a:solidFill>
@@ -22964,7 +25516,7 @@
                 <a:ea typeface="Microsoft JhengHei" pitchFamily="34" charset="-122"/>
                 <a:cs typeface="Microsoft JhengHei" pitchFamily="34" charset="-120"/>
               </a:rPr>
-              <a:t>先不要急著設排程。</a:t>
+              <a:t>把 RET1_全通路日銷售數據.xlsx 與 RET1_門市回報與日報格式.md 上傳到聊天框，送出下面的提示詞。</a:t>
             </a:r>
             <a:endParaRPr lang="en-US" sz="1300" dirty="0"/>
           </a:p>
@@ -23111,7 +25663,7 @@
                 <a:ea typeface="Microsoft JhengHei" pitchFamily="34" charset="-122"/>
                 <a:cs typeface="Microsoft JhengHei" pitchFamily="34" charset="-120"/>
               </a:rPr>
-              <a:t>重點抽查三件事：桃園中壢店（達成率 62.8%）有沒有被標成「嚴重落後」；高雄左營店來客暴增但客單價偏低…</a:t>
+              <a:t>收到快報後，對照原始數據與判讀規則，逐一確認下方三件事，再送出提示詞詢問左營店的判讀理由。</a:t>
             </a:r>
             <a:endParaRPr lang="en-US" sz="1300" dirty="0"/>
           </a:p>
@@ -23258,7 +25810,7 @@
                 <a:ea typeface="Microsoft JhengHei" pitchFamily="34" charset="-122"/>
                 <a:cs typeface="Microsoft JhengHei" pitchFamily="34" charset="-120"/>
               </a:rPr>
-              <a:t>確認品質之後，直接用一句話把它變成排程。</a:t>
+              <a:t>確認對話中的快報品質之後，送出下面的提示詞，把同一段指令轉成排程任務。</a:t>
             </a:r>
             <a:endParaRPr lang="en-US" sz="1300" dirty="0"/>
           </a:p>
@@ -23405,7 +25957,7 @@
                 <a:ea typeface="Microsoft JhengHei" pitchFamily="34" charset="-122"/>
                 <a:cs typeface="Microsoft JhengHei" pitchFamily="34" charset="-120"/>
               </a:rPr>
-              <a:t>排程任務跑起來之後，貼到 Teams 這一步仍然屬於對外動作，Cowork 會停在核准卡…</a:t>
+              <a:t>收到核准卡後，請刻意停留、逐項確認卡片中要貼的內容，再送出下面的提示詞，詢問第 3 條規則的欄位來源。</a:t>
             </a:r>
             <a:endParaRPr lang="en-US" sz="1300" dirty="0"/>
           </a:p>
@@ -23478,677 +26030,6 @@
               <a:rPr lang="en-US" sz="900" dirty="0">
                 <a:solidFill>
                   <a:srgbClr val="8A8FB5"/>
-                </a:solidFill>
-                <a:latin typeface="Microsoft JhengHei" pitchFamily="34" charset="0"/>
-                <a:ea typeface="Microsoft JhengHei" pitchFamily="34" charset="-122"/>
-                <a:cs typeface="Microsoft JhengHei" pitchFamily="34" charset="-120"/>
-              </a:rPr>
-              <a:t>7</a:t>
-            </a:r>
-            <a:endParaRPr lang="en-US" sz="900" dirty="0"/>
-          </a:p>
-        </p:txBody>
-      </p:sp>
-    </p:spTree>
-  </p:cSld>
-  <p:clrMapOvr>
-    <a:masterClrMapping/>
-  </p:clrMapOvr>
-</p:sld>
-</file>
-
-<file path=ppt/slides/slide9.xml><?xml version="1.0" encoding="utf-8"?>
-<p:sld xmlns:a="http://schemas.openxmlformats.org/drawingml/2006/main" xmlns:r="http://schemas.openxmlformats.org/officeDocument/2006/relationships" xmlns:p="http://schemas.openxmlformats.org/presentationml/2006/main">
-  <p:cSld name="Slide 9">
-    <p:bg>
-      <p:bgPr>
-        <a:solidFill>
-          <a:srgbClr val="F7F8FC"/>
-        </a:solidFill>
-      </p:bgPr>
-    </p:bg>
-    <p:spTree>
-      <p:nvGrpSpPr>
-        <p:cNvPr id="1" name=""/>
-        <p:cNvGrpSpPr/>
-        <p:nvPr/>
-      </p:nvGrpSpPr>
-      <p:grpSpPr>
-        <a:xfrm>
-          <a:off x="0" y="0"/>
-          <a:ext cx="0" cy="0"/>
-          <a:chOff x="0" y="0"/>
-          <a:chExt cx="0" cy="0"/>
-        </a:xfrm>
-      </p:grpSpPr>
-      <p:sp>
-        <p:nvSpPr>
-          <p:cNvPr id="2" name="Shape 0"/>
-          <p:cNvSpPr/>
-          <p:nvPr/>
-        </p:nvSpPr>
-        <p:spPr>
-          <a:xfrm>
-            <a:off x="640080" y="566928"/>
-            <a:ext cx="384048" cy="128016"/>
-          </a:xfrm>
-          <a:prstGeom prst="rect">
-            <a:avLst/>
-          </a:prstGeom>
-          <a:solidFill>
-            <a:srgbClr val="8A3A62"/>
-          </a:solidFill>
-          <a:ln/>
-        </p:spPr>
-      </p:sp>
-      <p:sp>
-        <p:nvSpPr>
-          <p:cNvPr id="3" name="Text 1"/>
-          <p:cNvSpPr/>
-          <p:nvPr/>
-        </p:nvSpPr>
-        <p:spPr>
-          <a:xfrm>
-            <a:off x="1143000" y="457200"/>
-            <a:ext cx="8229600" cy="310896"/>
-          </a:xfrm>
-          <a:prstGeom prst="rect">
-            <a:avLst/>
-          </a:prstGeom>
-          <a:noFill/>
-          <a:ln/>
-        </p:spPr>
-        <p:txBody>
-          <a:bodyPr wrap="square" rtlCol="0" anchor="ctr"/>
-          <a:lstStyle/>
-          <a:p>
-            <a:pPr indent="0" marL="0">
-              <a:buNone/>
-            </a:pPr>
-            <a:r>
-              <a:rPr lang="en-US" sz="1200" b="1" spc="200" kern="0" dirty="0">
-                <a:solidFill>
-                  <a:srgbClr val="8A3A62"/>
-                </a:solidFill>
-                <a:latin typeface="Microsoft JhengHei" pitchFamily="34" charset="0"/>
-                <a:ea typeface="Microsoft JhengHei" pitchFamily="34" charset="-122"/>
-                <a:cs typeface="Microsoft JhengHei" pitchFamily="34" charset="-120"/>
-              </a:rPr>
-              <a:t>情境 01 · 實機示範</a:t>
-            </a:r>
-            <a:endParaRPr lang="en-US" sz="1200" dirty="0"/>
-          </a:p>
-        </p:txBody>
-      </p:sp>
-      <p:sp>
-        <p:nvSpPr>
-          <p:cNvPr id="4" name="Text 2"/>
-          <p:cNvSpPr/>
-          <p:nvPr/>
-        </p:nvSpPr>
-        <p:spPr>
-          <a:xfrm>
-            <a:off x="640080" y="786384"/>
-            <a:ext cx="10972800" cy="640080"/>
-          </a:xfrm>
-          <a:prstGeom prst="rect">
-            <a:avLst/>
-          </a:prstGeom>
-          <a:noFill/>
-          <a:ln/>
-        </p:spPr>
-        <p:txBody>
-          <a:bodyPr wrap="square" rtlCol="0" anchor="ctr"/>
-          <a:lstStyle/>
-          <a:p>
-            <a:pPr indent="0" marL="0">
-              <a:buNone/>
-            </a:pPr>
-            <a:r>
-              <a:rPr lang="en-US" sz="3000" b="1" dirty="0">
-                <a:solidFill>
-                  <a:srgbClr val="1E2235"/>
-                </a:solidFill>
-                <a:latin typeface="Microsoft JhengHei" pitchFamily="34" charset="0"/>
-                <a:ea typeface="Microsoft JhengHei" pitchFamily="34" charset="-122"/>
-                <a:cs typeface="Microsoft JhengHei" pitchFamily="34" charset="-120"/>
-              </a:rPr>
-              <a:t>看 Cowork 怎麼做、產出什麼</a:t>
-            </a:r>
-            <a:endParaRPr lang="en-US" sz="3000" dirty="0"/>
-          </a:p>
-        </p:txBody>
-      </p:sp>
-      <p:sp>
-        <p:nvSpPr>
-          <p:cNvPr id="5" name="Shape 3"/>
-          <p:cNvSpPr/>
-          <p:nvPr/>
-        </p:nvSpPr>
-        <p:spPr>
-          <a:xfrm>
-            <a:off x="585216" y="1773936"/>
-            <a:ext cx="5184648" cy="3433186"/>
-          </a:xfrm>
-          <a:prstGeom prst="rect">
-            <a:avLst/>
-          </a:prstGeom>
-          <a:solidFill>
-            <a:srgbClr val="FFFFFF"/>
-          </a:solidFill>
-          <a:ln w="12700">
-            <a:solidFill>
-              <a:srgbClr val="E4E7F2"/>
-            </a:solidFill>
-            <a:prstDash val="solid"/>
-          </a:ln>
-          <a:effectLst>
-            <a:outerShdw sx="100000" sy="100000" kx="0" ky="0" algn="bl" rotWithShape="0" blurRad="114300" dist="38100" dir="5400000">
-              <a:srgbClr val="8A90B5">
-                <a:alpha val="22000"/>
-              </a:srgbClr>
-            </a:outerShdw>
-          </a:effectLst>
-        </p:spPr>
-      </p:sp>
-      <p:pic>
-        <p:nvPicPr>
-          <p:cNvPr id="6" name="Image 0" descr="C:\temp\CoworkLab\v2\_working\screenshots\ret1_01_input.png">    </p:cNvPr>
-          <p:cNvPicPr>
-            <a:picLocks noChangeAspect="1"/>
-          </p:cNvPicPr>
-          <p:nvPr/>
-        </p:nvPicPr>
-        <p:blipFill>
-          <a:blip r:embed="rId1"/>
-          <a:stretch>
-            <a:fillRect/>
-          </a:stretch>
-        </p:blipFill>
-        <p:spPr>
-          <a:xfrm>
-            <a:off x="640080" y="1828800"/>
-            <a:ext cx="5074920" cy="3323458"/>
-          </a:xfrm>
-          <a:prstGeom prst="rect">
-            <a:avLst/>
-          </a:prstGeom>
-        </p:spPr>
-      </p:pic>
-      <p:sp>
-        <p:nvSpPr>
-          <p:cNvPr id="7" name="Text 4"/>
-          <p:cNvSpPr/>
-          <p:nvPr/>
-        </p:nvSpPr>
-        <p:spPr>
-          <a:xfrm>
-            <a:off x="640080" y="5261986"/>
-            <a:ext cx="5074920" cy="320040"/>
-          </a:xfrm>
-          <a:prstGeom prst="rect">
-            <a:avLst/>
-          </a:prstGeom>
-          <a:noFill/>
-          <a:ln/>
-        </p:spPr>
-        <p:txBody>
-          <a:bodyPr wrap="square" rtlCol="0" anchor="ctr"/>
-          <a:lstStyle/>
-          <a:p>
-            <a:pPr algn="ctr" indent="0" marL="0">
-              <a:buNone/>
-            </a:pPr>
-            <a:r>
-              <a:rPr lang="en-US" sz="1350" b="1" dirty="0">
-                <a:solidFill>
-                  <a:srgbClr val="8A3A62"/>
-                </a:solidFill>
-                <a:latin typeface="Microsoft JhengHei" pitchFamily="34" charset="0"/>
-                <a:ea typeface="Microsoft JhengHei" pitchFamily="34" charset="-122"/>
-                <a:cs typeface="Microsoft JhengHei" pitchFamily="34" charset="-120"/>
-              </a:rPr>
-              <a:t>① 你的輸入與指令</a:t>
-            </a:r>
-            <a:endParaRPr lang="en-US" sz="1350" dirty="0"/>
-          </a:p>
-        </p:txBody>
-      </p:sp>
-      <p:sp>
-        <p:nvSpPr>
-          <p:cNvPr id="8" name="Shape 5"/>
-          <p:cNvSpPr/>
-          <p:nvPr/>
-        </p:nvSpPr>
-        <p:spPr>
-          <a:xfrm>
-            <a:off x="6163056" y="1773936"/>
-            <a:ext cx="5184648" cy="3433186"/>
-          </a:xfrm>
-          <a:prstGeom prst="rect">
-            <a:avLst/>
-          </a:prstGeom>
-          <a:solidFill>
-            <a:srgbClr val="FFFFFF"/>
-          </a:solidFill>
-          <a:ln w="12700">
-            <a:solidFill>
-              <a:srgbClr val="E4E7F2"/>
-            </a:solidFill>
-            <a:prstDash val="solid"/>
-          </a:ln>
-          <a:effectLst>
-            <a:outerShdw sx="100000" sy="100000" kx="0" ky="0" algn="bl" rotWithShape="0" blurRad="114300" dist="38100" dir="5400000">
-              <a:srgbClr val="8A90B5">
-                <a:alpha val="22000"/>
-              </a:srgbClr>
-            </a:outerShdw>
-          </a:effectLst>
-        </p:spPr>
-      </p:sp>
-      <p:pic>
-        <p:nvPicPr>
-          <p:cNvPr id="9" name="Image 1" descr="C:\temp\CoworkLab\v2\_working\screenshots\ret1_04_approval.png">    </p:cNvPr>
-          <p:cNvPicPr>
-            <a:picLocks noChangeAspect="1"/>
-          </p:cNvPicPr>
-          <p:nvPr/>
-        </p:nvPicPr>
-        <p:blipFill>
-          <a:blip r:embed="rId2"/>
-          <a:stretch>
-            <a:fillRect/>
-          </a:stretch>
-        </p:blipFill>
-        <p:spPr>
-          <a:xfrm>
-            <a:off x="6217920" y="1828800"/>
-            <a:ext cx="5074920" cy="3323458"/>
-          </a:xfrm>
-          <a:prstGeom prst="rect">
-            <a:avLst/>
-          </a:prstGeom>
-        </p:spPr>
-      </p:pic>
-      <p:sp>
-        <p:nvSpPr>
-          <p:cNvPr id="10" name="Text 6"/>
-          <p:cNvSpPr/>
-          <p:nvPr/>
-        </p:nvSpPr>
-        <p:spPr>
-          <a:xfrm>
-            <a:off x="6217920" y="5261986"/>
-            <a:ext cx="5074920" cy="320040"/>
-          </a:xfrm>
-          <a:prstGeom prst="rect">
-            <a:avLst/>
-          </a:prstGeom>
-          <a:noFill/>
-          <a:ln/>
-        </p:spPr>
-        <p:txBody>
-          <a:bodyPr wrap="square" rtlCol="0" anchor="ctr"/>
-          <a:lstStyle/>
-          <a:p>
-            <a:pPr algn="ctr" indent="0" marL="0">
-              <a:buNone/>
-            </a:pPr>
-            <a:r>
-              <a:rPr lang="en-US" sz="1350" b="1" dirty="0">
-                <a:solidFill>
-                  <a:srgbClr val="8A3A62"/>
-                </a:solidFill>
-                <a:latin typeface="Microsoft JhengHei" pitchFamily="34" charset="0"/>
-                <a:ea typeface="Microsoft JhengHei" pitchFamily="34" charset="-122"/>
-                <a:cs typeface="Microsoft JhengHei" pitchFamily="34" charset="-120"/>
-              </a:rPr>
-              <a:t>② 產出成果</a:t>
-            </a:r>
-            <a:endParaRPr lang="en-US" sz="1350" dirty="0"/>
-          </a:p>
-        </p:txBody>
-      </p:sp>
-      <p:sp>
-        <p:nvSpPr>
-          <p:cNvPr id="11" name="Shape 7"/>
-          <p:cNvSpPr/>
-          <p:nvPr/>
-        </p:nvSpPr>
-        <p:spPr>
-          <a:xfrm>
-            <a:off x="640080" y="5074920"/>
-            <a:ext cx="10911535" cy="1143000"/>
-          </a:xfrm>
-          <a:prstGeom prst="rect">
-            <a:avLst/>
-          </a:prstGeom>
-          <a:solidFill>
-            <a:srgbClr val="FFFFFF"/>
-          </a:solidFill>
-          <a:ln w="12700">
-            <a:solidFill>
-              <a:srgbClr val="E4E7F2"/>
-            </a:solidFill>
-            <a:prstDash val="solid"/>
-          </a:ln>
-        </p:spPr>
-      </p:sp>
-      <p:sp>
-        <p:nvSpPr>
-          <p:cNvPr id="12" name="Shape 8"/>
-          <p:cNvSpPr/>
-          <p:nvPr/>
-        </p:nvSpPr>
-        <p:spPr>
-          <a:xfrm>
-            <a:off x="640080" y="5074920"/>
-            <a:ext cx="91440" cy="1143000"/>
-          </a:xfrm>
-          <a:prstGeom prst="rect">
-            <a:avLst/>
-          </a:prstGeom>
-          <a:solidFill>
-            <a:srgbClr val="8A3A62"/>
-          </a:solidFill>
-          <a:ln/>
-        </p:spPr>
-      </p:sp>
-      <p:sp>
-        <p:nvSpPr>
-          <p:cNvPr id="13" name="Text 9"/>
-          <p:cNvSpPr/>
-          <p:nvPr/>
-        </p:nvSpPr>
-        <p:spPr>
-          <a:xfrm>
-            <a:off x="914400" y="5184648"/>
-            <a:ext cx="1828800" cy="320040"/>
-          </a:xfrm>
-          <a:prstGeom prst="rect">
-            <a:avLst/>
-          </a:prstGeom>
-          <a:noFill/>
-          <a:ln/>
-        </p:spPr>
-        <p:txBody>
-          <a:bodyPr wrap="square" rtlCol="0" anchor="ctr"/>
-          <a:lstStyle/>
-          <a:p>
-            <a:pPr indent="0" marL="0">
-              <a:buNone/>
-            </a:pPr>
-            <a:r>
-              <a:rPr lang="en-US" sz="1400" b="1" dirty="0">
-                <a:solidFill>
-                  <a:srgbClr val="1E2235"/>
-                </a:solidFill>
-                <a:latin typeface="Microsoft JhengHei" pitchFamily="34" charset="0"/>
-                <a:ea typeface="Microsoft JhengHei" pitchFamily="34" charset="-122"/>
-                <a:cs typeface="Microsoft JhengHei" pitchFamily="34" charset="-120"/>
-              </a:rPr>
-              <a:t>產出驗收</a:t>
-            </a:r>
-            <a:endParaRPr lang="en-US" sz="1400" dirty="0"/>
-          </a:p>
-        </p:txBody>
-      </p:sp>
-      <p:pic>
-        <p:nvPicPr>
-          <p:cNvPr id="14" name="Image 2" descr="preencoded.png">    </p:cNvPr>
-          <p:cNvPicPr>
-            <a:picLocks noChangeAspect="1"/>
-          </p:cNvPicPr>
-          <p:nvPr/>
-        </p:nvPicPr>
-        <p:blipFill>
-          <a:blip r:embed="rId3"/>
-          <a:stretch>
-            <a:fillRect/>
-          </a:stretch>
-        </p:blipFill>
-        <p:spPr>
-          <a:xfrm>
-            <a:off x="2834640" y="5221224"/>
-            <a:ext cx="182880" cy="182880"/>
-          </a:xfrm>
-          <a:prstGeom prst="rect">
-            <a:avLst/>
-          </a:prstGeom>
-        </p:spPr>
-      </p:pic>
-      <p:sp>
-        <p:nvSpPr>
-          <p:cNvPr id="15" name="Text 10"/>
-          <p:cNvSpPr/>
-          <p:nvPr/>
-        </p:nvSpPr>
-        <p:spPr>
-          <a:xfrm>
-            <a:off x="3108960" y="5166360"/>
-            <a:ext cx="8168335" cy="310896"/>
-          </a:xfrm>
-          <a:prstGeom prst="rect">
-            <a:avLst/>
-          </a:prstGeom>
-          <a:noFill/>
-          <a:ln/>
-        </p:spPr>
-        <p:txBody>
-          <a:bodyPr wrap="square" rtlCol="0" anchor="ctr"/>
-          <a:lstStyle/>
-          <a:p>
-            <a:pPr indent="0" marL="0">
-              <a:buNone/>
-            </a:pPr>
-            <a:r>
-              <a:rPr lang="en-US" sz="1300" dirty="0">
-                <a:solidFill>
-                  <a:srgbClr val="1E2235"/>
-                </a:solidFill>
-                <a:latin typeface="Microsoft JhengHei" pitchFamily="34" charset="0"/>
-                <a:ea typeface="Microsoft JhengHei" pitchFamily="34" charset="-122"/>
-                <a:cs typeface="Microsoft JhengHei" pitchFamily="34" charset="-120"/>
-              </a:rPr>
-              <a:t>達成率、客單價、退貨率的計算與原始數據一致，桃園中壢店被正確標為嚴重落後</a:t>
-            </a:r>
-            <a:endParaRPr lang="en-US" sz="1300" dirty="0"/>
-          </a:p>
-        </p:txBody>
-      </p:sp>
-      <p:pic>
-        <p:nvPicPr>
-          <p:cNvPr id="16" name="Image 3" descr="preencoded.png">    </p:cNvPr>
-          <p:cNvPicPr>
-            <a:picLocks noChangeAspect="1"/>
-          </p:cNvPicPr>
-          <p:nvPr/>
-        </p:nvPicPr>
-        <p:blipFill>
-          <a:blip r:embed="rId4"/>
-          <a:stretch>
-            <a:fillRect/>
-          </a:stretch>
-        </p:blipFill>
-        <p:spPr>
-          <a:xfrm>
-            <a:off x="2834640" y="5559552"/>
-            <a:ext cx="182880" cy="182880"/>
-          </a:xfrm>
-          <a:prstGeom prst="rect">
-            <a:avLst/>
-          </a:prstGeom>
-        </p:spPr>
-      </p:pic>
-      <p:sp>
-        <p:nvSpPr>
-          <p:cNvPr id="17" name="Text 11"/>
-          <p:cNvSpPr/>
-          <p:nvPr/>
-        </p:nvSpPr>
-        <p:spPr>
-          <a:xfrm>
-            <a:off x="3108960" y="5504688"/>
-            <a:ext cx="8168335" cy="310896"/>
-          </a:xfrm>
-          <a:prstGeom prst="rect">
-            <a:avLst/>
-          </a:prstGeom>
-          <a:noFill/>
-          <a:ln/>
-        </p:spPr>
-        <p:txBody>
-          <a:bodyPr wrap="square" rtlCol="0" anchor="ctr"/>
-          <a:lstStyle/>
-          <a:p>
-            <a:pPr indent="0" marL="0">
-              <a:buNone/>
-            </a:pPr>
-            <a:r>
-              <a:rPr lang="en-US" sz="1300" dirty="0">
-                <a:solidFill>
-                  <a:srgbClr val="1E2235"/>
-                </a:solidFill>
-                <a:latin typeface="Microsoft JhengHei" pitchFamily="34" charset="0"/>
-                <a:ea typeface="Microsoft JhengHei" pitchFamily="34" charset="-122"/>
-                <a:cs typeface="Microsoft JhengHei" pitchFamily="34" charset="-120"/>
-              </a:rPr>
-              <a:t>高雄左營店未被含糊帶過：不論標為臨界觀察或客流結構異動，都要說明來客成長與客單價偏離的具體數字</a:t>
-            </a:r>
-            <a:endParaRPr lang="en-US" sz="1300" dirty="0"/>
-          </a:p>
-        </p:txBody>
-      </p:sp>
-      <p:pic>
-        <p:nvPicPr>
-          <p:cNvPr id="18" name="Image 4" descr="preencoded.png">    </p:cNvPr>
-          <p:cNvPicPr>
-            <a:picLocks noChangeAspect="1"/>
-          </p:cNvPicPr>
-          <p:nvPr/>
-        </p:nvPicPr>
-        <p:blipFill>
-          <a:blip r:embed="rId5"/>
-          <a:stretch>
-            <a:fillRect/>
-          </a:stretch>
-        </p:blipFill>
-        <p:spPr>
-          <a:xfrm>
-            <a:off x="2834640" y="5897880"/>
-            <a:ext cx="182880" cy="182880"/>
-          </a:xfrm>
-          <a:prstGeom prst="rect">
-            <a:avLst/>
-          </a:prstGeom>
-        </p:spPr>
-      </p:pic>
-      <p:sp>
-        <p:nvSpPr>
-          <p:cNvPr id="19" name="Text 12"/>
-          <p:cNvSpPr/>
-          <p:nvPr/>
-        </p:nvSpPr>
-        <p:spPr>
-          <a:xfrm>
-            <a:off x="3108960" y="5843016"/>
-            <a:ext cx="8168335" cy="310896"/>
-          </a:xfrm>
-          <a:prstGeom prst="rect">
-            <a:avLst/>
-          </a:prstGeom>
-          <a:noFill/>
-          <a:ln/>
-        </p:spPr>
-        <p:txBody>
-          <a:bodyPr wrap="square" rtlCol="0" anchor="ctr"/>
-          <a:lstStyle/>
-          <a:p>
-            <a:pPr indent="0" marL="0">
-              <a:buNone/>
-            </a:pPr>
-            <a:r>
-              <a:rPr lang="en-US" sz="1300" dirty="0">
-                <a:solidFill>
-                  <a:srgbClr val="1E2235"/>
-                </a:solidFill>
-                <a:latin typeface="Microsoft JhengHei" pitchFamily="34" charset="0"/>
-                <a:ea typeface="Microsoft JhengHei" pitchFamily="34" charset="-122"/>
-                <a:cs typeface="Microsoft JhengHei" pitchFamily="34" charset="-120"/>
-              </a:rPr>
-              <a:t>門市回報中的施工、設備、缺貨都被拉進當日追蹤事項並指定負責人</a:t>
-            </a:r>
-            <a:endParaRPr lang="en-US" sz="1300" dirty="0"/>
-          </a:p>
-        </p:txBody>
-      </p:sp>
-      <p:sp>
-        <p:nvSpPr>
-          <p:cNvPr id="20" name="Text 13"/>
-          <p:cNvSpPr/>
-          <p:nvPr/>
-        </p:nvSpPr>
-        <p:spPr>
-          <a:xfrm>
-            <a:off x="640080" y="6473952"/>
-            <a:ext cx="5486400" cy="274320"/>
-          </a:xfrm>
-          <a:prstGeom prst="rect">
-            <a:avLst/>
-          </a:prstGeom>
-          <a:noFill/>
-          <a:ln/>
-        </p:spPr>
-        <p:txBody>
-          <a:bodyPr wrap="square" rtlCol="0" anchor="ctr"/>
-          <a:lstStyle/>
-          <a:p>
-            <a:pPr algn="l" indent="0" marL="0">
-              <a:buNone/>
-            </a:pPr>
-            <a:r>
-              <a:rPr lang="en-US" sz="900" dirty="0">
-                <a:solidFill>
-                  <a:srgbClr val="5B6079"/>
-                </a:solidFill>
-                <a:latin typeface="Microsoft JhengHei" pitchFamily="34" charset="0"/>
-                <a:ea typeface="Microsoft JhengHei" pitchFamily="34" charset="-122"/>
-                <a:cs typeface="Microsoft JhengHei" pitchFamily="34" charset="-120"/>
-              </a:rPr>
-              <a:t>Microsoft 365 Copilot Cowork</a:t>
-            </a:r>
-            <a:endParaRPr lang="en-US" sz="900" dirty="0"/>
-          </a:p>
-        </p:txBody>
-      </p:sp>
-      <p:sp>
-        <p:nvSpPr>
-          <p:cNvPr id="21" name="Text 14"/>
-          <p:cNvSpPr/>
-          <p:nvPr/>
-        </p:nvSpPr>
-        <p:spPr>
-          <a:xfrm>
-            <a:off x="11002975" y="6473952"/>
-            <a:ext cx="548640" cy="274320"/>
-          </a:xfrm>
-          <a:prstGeom prst="rect">
-            <a:avLst/>
-          </a:prstGeom>
-          <a:noFill/>
-          <a:ln/>
-        </p:spPr>
-        <p:txBody>
-          <a:bodyPr wrap="square" rtlCol="0" anchor="ctr"/>
-          <a:lstStyle/>
-          <a:p>
-            <a:pPr algn="r" indent="0" marL="0">
-              <a:buNone/>
-            </a:pPr>
-            <a:r>
-              <a:rPr lang="en-US" sz="900" dirty="0">
-                <a:solidFill>
-                  <a:srgbClr val="5B6079"/>
                 </a:solidFill>
                 <a:latin typeface="Microsoft JhengHei" pitchFamily="34" charset="0"/>
                 <a:ea typeface="Microsoft JhengHei" pitchFamily="34" charset="-122"/>
